--- a/temp/files/T2-temp.pptx
+++ b/temp/files/T2-temp.pptx
@@ -18,6 +18,7 @@
     <p:sldId id="266" r:id="rId17"/>
     <p:sldId id="267" r:id="rId18"/>
     <p:sldId id="268" r:id="rId19"/>
+    <p:sldId id="269" r:id="rId20"/>
   </p:sldIdLst>
   <p:sldSz cx="12191695" cy="6858000" type="screen4x3"/>
   <p:notesSz cx="6858000" cy="9144000"/>
@@ -3338,138 +3339,66 @@
         </p:blipFill>
         <p:spPr>
           <a:xfrm>
-            <a:off x="426709" y="1341086"/>
-            <a:ext cx="6233004" cy="1203929"/>
+            <a:off x="10180065" y="4160415"/>
+            <a:ext cx="1584920" cy="2042108"/>
           </a:xfrm>
           <a:prstGeom prst="rect">
             <a:avLst/>
           </a:prstGeom>
         </p:spPr>
       </p:pic>
-      <p:pic>
-        <p:nvPicPr>
-          <p:cNvPr id="4" name="Picture 3" descr="c9_2_0.jpg"/>
-          <p:cNvPicPr>
-            <a:picLocks noChangeAspect="1"/>
-          </p:cNvPicPr>
+      <p:sp>
+        <p:nvSpPr>
+          <p:cNvPr id="4" name="Rectangle 3">
+            <a:hlinkClick r:id="rId4"/>
+          </p:cNvPr>
+          <p:cNvSpPr/>
           <p:nvPr/>
-        </p:nvPicPr>
-        <p:blipFill>
-          <a:blip r:embed="rId4"/>
-          <a:stretch>
-            <a:fillRect/>
-          </a:stretch>
-        </p:blipFill>
-        <p:spPr>
-          <a:xfrm>
-            <a:off x="426709" y="2255463"/>
-            <a:ext cx="6233004" cy="1203929"/>
+        </p:nvSpPr>
+        <p:spPr>
+          <a:xfrm>
+            <a:off x="655303" y="4724281"/>
+            <a:ext cx="2523109" cy="754361"/>
           </a:xfrm>
           <a:prstGeom prst="rect">
             <a:avLst/>
           </a:prstGeom>
-        </p:spPr>
-      </p:pic>
-      <p:pic>
-        <p:nvPicPr>
-          <p:cNvPr id="5" name="Picture 4" descr="c9_3_0.jpg"/>
-          <p:cNvPicPr>
-            <a:picLocks noChangeAspect="1"/>
-          </p:cNvPicPr>
-          <p:nvPr/>
-        </p:nvPicPr>
-        <p:blipFill>
-          <a:blip r:embed="rId5"/>
-          <a:stretch>
-            <a:fillRect/>
-          </a:stretch>
-        </p:blipFill>
-        <p:spPr>
-          <a:xfrm>
-            <a:off x="426709" y="3169840"/>
-            <a:ext cx="6233004" cy="1203929"/>
-          </a:xfrm>
-          <a:prstGeom prst="rect">
-            <a:avLst/>
-          </a:prstGeom>
-        </p:spPr>
-      </p:pic>
-      <p:pic>
-        <p:nvPicPr>
-          <p:cNvPr id="6" name="Picture 5" descr="c9_4_0.jpg"/>
-          <p:cNvPicPr>
-            <a:picLocks noChangeAspect="1"/>
-          </p:cNvPicPr>
-          <p:nvPr/>
-        </p:nvPicPr>
-        <p:blipFill>
-          <a:blip r:embed="rId6"/>
-          <a:stretch>
-            <a:fillRect/>
-          </a:stretch>
-        </p:blipFill>
-        <p:spPr>
-          <a:xfrm>
-            <a:off x="426709" y="4084217"/>
-            <a:ext cx="6233004" cy="1203929"/>
-          </a:xfrm>
-          <a:prstGeom prst="rect">
-            <a:avLst/>
-          </a:prstGeom>
-        </p:spPr>
-      </p:pic>
-      <p:pic>
-        <p:nvPicPr>
-          <p:cNvPr id="7" name="Picture 6" descr="c9_5_0.jpg"/>
-          <p:cNvPicPr>
-            <a:picLocks noChangeAspect="1"/>
-          </p:cNvPicPr>
-          <p:nvPr/>
-        </p:nvPicPr>
-        <p:blipFill>
-          <a:blip r:embed="rId7"/>
-          <a:stretch>
-            <a:fillRect/>
-          </a:stretch>
-        </p:blipFill>
-        <p:spPr>
-          <a:xfrm>
-            <a:off x="426709" y="4998594"/>
-            <a:ext cx="6233004" cy="1203929"/>
-          </a:xfrm>
-          <a:prstGeom prst="rect">
-            <a:avLst/>
-          </a:prstGeom>
-        </p:spPr>
-      </p:pic>
-      <p:pic>
-        <p:nvPicPr>
-          <p:cNvPr id="8" name="Picture 7" descr="c9_6_0.jpg"/>
-          <p:cNvPicPr>
-            <a:picLocks noChangeAspect="1"/>
-          </p:cNvPicPr>
-          <p:nvPr/>
-        </p:nvPicPr>
-        <p:blipFill>
-          <a:blip r:embed="rId8"/>
-          <a:stretch>
-            <a:fillRect/>
-          </a:stretch>
-        </p:blipFill>
-        <p:spPr>
-          <a:xfrm>
-            <a:off x="0" y="5836773"/>
-            <a:ext cx="12191695" cy="1021054"/>
-          </a:xfrm>
-          <a:prstGeom prst="rect">
-            <a:avLst/>
-          </a:prstGeom>
-        </p:spPr>
-      </p:pic>
+          <a:solidFill>
+            <a:srgbClr val="FFFFFF">
+              <a:alpha val="0"/>
+            </a:srgbClr>
+          </a:solidFill>
+          <a:ln>
+            <a:noFill/>
+          </a:ln>
+          <a:effectLst/>
+        </p:spPr>
+        <p:style>
+          <a:lnRef idx="1">
+            <a:schemeClr val="accent1"/>
+          </a:lnRef>
+          <a:fillRef idx="3">
+            <a:schemeClr val="accent1"/>
+          </a:fillRef>
+          <a:effectRef idx="2">
+            <a:schemeClr val="accent1"/>
+          </a:effectRef>
+          <a:fontRef idx="minor">
+            <a:schemeClr val="lt1"/>
+          </a:fontRef>
+        </p:style>
+        <p:txBody>
+          <a:bodyPr rtlCol="0" anchor="ctr"/>
+          <a:lstStyle/>
+          <a:p>
+            <a:pPr algn="ctr"/>
+          </a:p>
+        </p:txBody>
+      </p:sp>
       <p:sp>
         <p:nvSpPr>
-          <p:cNvPr id="9" name="TextBox 8">
-            <a:hlinkClick action="ppaction://hlinksldjump" r:id="rId9"/>
+          <p:cNvPr id="5" name="TextBox 4">
+            <a:hlinkClick action="ppaction://hlinksldjump" r:id="rId5"/>
           </p:cNvPr>
           <p:cNvSpPr txBox="1"/>
           <p:nvPr/>
@@ -3534,7 +3463,7 @@
                             </p:stCondLst>
                             <p:childTnLst>
                               <p:par>
-                                <p:cTn id="5" presetID="2" presetClass="entr" presetSubtype="8" fill="hold" decel="100000" grpId="0" nodeType="clickEffect">
+                                <p:cTn id="5" presetID="10" presetClass="entr" presetSubtype="0" fill="hold" grpId="0" nodeType="clickEffect">
                                   <p:stCondLst>
                                     <p:cond delay="0"/>
                                   </p:stCondLst>
@@ -3557,507 +3486,14 @@
                                         <p:strVal val="visible"/>
                                       </p:to>
                                     </p:set>
-                                    <p:anim calcmode="lin" valueType="num">
-                                      <p:cBhvr additive="base">
-                                        <p:cTn id="7" dur="550" fill="hold"/>
+                                    <p:animEffect transition="in" filter="fade">
+                                      <p:cBhvr>
+                                        <p:cTn id="7" dur="450"/>
                                         <p:tgtEl>
                                           <p:spTgt spid="3"/>
                                         </p:tgtEl>
-                                        <p:attrNameLst>
-                                          <p:attrName>ppt_x</p:attrName>
-                                        </p:attrNameLst>
-                                      </p:cBhvr>
-                                      <p:tavLst>
-                                        <p:tav tm="0">
-                                          <p:val>
-                                            <p:strVal val="0-#ppt_w/2"/>
-                                          </p:val>
-                                        </p:tav>
-                                        <p:tav tm="100000">
-                                          <p:val>
-                                            <p:strVal val="#ppt_x"/>
-                                          </p:val>
-                                        </p:tav>
-                                      </p:tavLst>
-                                    </p:anim>
-                                    <p:anim calcmode="lin" valueType="num">
-                                      <p:cBhvr additive="base">
-                                        <p:cTn id="8" dur="550" fill="hold"/>
-                                        <p:tgtEl>
-                                          <p:spTgt spid="3"/>
-                                        </p:tgtEl>
-                                        <p:attrNameLst>
-                                          <p:attrName>ppt_y</p:attrName>
-                                        </p:attrNameLst>
-                                      </p:cBhvr>
-                                      <p:tavLst>
-                                        <p:tav tm="0">
-                                          <p:val>
-                                            <p:strVal val="#ppt_y"/>
-                                          </p:val>
-                                        </p:tav>
-                                        <p:tav tm="100000">
-                                          <p:val>
-                                            <p:strVal val="#ppt_y"/>
-                                          </p:val>
-                                        </p:tav>
-                                      </p:tavLst>
-                                    </p:anim>
-                                  </p:childTnLst>
-                                </p:cTn>
-                              </p:par>
-                            </p:childTnLst>
-                          </p:cTn>
-                        </p:par>
-                      </p:childTnLst>
-                    </p:cTn>
-                  </p:par>
-                  <p:par>
-                    <p:cTn id="9" fill="hold">
-                      <p:stCondLst>
-                        <p:cond delay="indefinite"/>
-                      </p:stCondLst>
-                      <p:childTnLst>
-                        <p:par>
-                          <p:cTn id="10" fill="hold">
-                            <p:stCondLst>
-                              <p:cond delay="0"/>
-                            </p:stCondLst>
-                            <p:childTnLst>
-                              <p:par>
-                                <p:cTn id="11" presetID="2" presetClass="entr" presetSubtype="8" fill="hold" decel="100000" grpId="0" nodeType="clickEffect">
-                                  <p:stCondLst>
-                                    <p:cond delay="0"/>
-                                  </p:stCondLst>
-                                  <p:childTnLst>
-                                    <p:set>
-                                      <p:cBhvr>
-                                        <p:cTn id="12" dur="1" fill="hold">
-                                          <p:stCondLst>
-                                            <p:cond delay="0"/>
-                                          </p:stCondLst>
-                                        </p:cTn>
-                                        <p:tgtEl>
-                                          <p:spTgt spid="4"/>
-                                        </p:tgtEl>
-                                        <p:attrNameLst>
-                                          <p:attrName>style.visibility</p:attrName>
-                                        </p:attrNameLst>
-                                      </p:cBhvr>
-                                      <p:to>
-                                        <p:strVal val="visible"/>
-                                      </p:to>
-                                    </p:set>
-                                    <p:anim calcmode="lin" valueType="num">
-                                      <p:cBhvr additive="base">
-                                        <p:cTn id="13" dur="550" fill="hold"/>
-                                        <p:tgtEl>
-                                          <p:spTgt spid="4"/>
-                                        </p:tgtEl>
-                                        <p:attrNameLst>
-                                          <p:attrName>ppt_x</p:attrName>
-                                        </p:attrNameLst>
-                                      </p:cBhvr>
-                                      <p:tavLst>
-                                        <p:tav tm="0">
-                                          <p:val>
-                                            <p:strVal val="0-#ppt_w/2"/>
-                                          </p:val>
-                                        </p:tav>
-                                        <p:tav tm="100000">
-                                          <p:val>
-                                            <p:strVal val="#ppt_x"/>
-                                          </p:val>
-                                        </p:tav>
-                                      </p:tavLst>
-                                    </p:anim>
-                                    <p:anim calcmode="lin" valueType="num">
-                                      <p:cBhvr additive="base">
-                                        <p:cTn id="14" dur="550" fill="hold"/>
-                                        <p:tgtEl>
-                                          <p:spTgt spid="4"/>
-                                        </p:tgtEl>
-                                        <p:attrNameLst>
-                                          <p:attrName>ppt_y</p:attrName>
-                                        </p:attrNameLst>
-                                      </p:cBhvr>
-                                      <p:tavLst>
-                                        <p:tav tm="0">
-                                          <p:val>
-                                            <p:strVal val="#ppt_y"/>
-                                          </p:val>
-                                        </p:tav>
-                                        <p:tav tm="100000">
-                                          <p:val>
-                                            <p:strVal val="#ppt_y"/>
-                                          </p:val>
-                                        </p:tav>
-                                      </p:tavLst>
-                                    </p:anim>
-                                  </p:childTnLst>
-                                </p:cTn>
-                              </p:par>
-                            </p:childTnLst>
-                          </p:cTn>
-                        </p:par>
-                      </p:childTnLst>
-                    </p:cTn>
-                  </p:par>
-                  <p:par>
-                    <p:cTn id="15" fill="hold">
-                      <p:stCondLst>
-                        <p:cond delay="indefinite"/>
-                      </p:stCondLst>
-                      <p:childTnLst>
-                        <p:par>
-                          <p:cTn id="16" fill="hold">
-                            <p:stCondLst>
-                              <p:cond delay="0"/>
-                            </p:stCondLst>
-                            <p:childTnLst>
-                              <p:par>
-                                <p:cTn id="17" presetID="2" presetClass="entr" presetSubtype="8" fill="hold" decel="100000" grpId="0" nodeType="clickEffect">
-                                  <p:stCondLst>
-                                    <p:cond delay="0"/>
-                                  </p:stCondLst>
-                                  <p:childTnLst>
-                                    <p:set>
-                                      <p:cBhvr>
-                                        <p:cTn id="18" dur="1" fill="hold">
-                                          <p:stCondLst>
-                                            <p:cond delay="0"/>
-                                          </p:stCondLst>
-                                        </p:cTn>
-                                        <p:tgtEl>
-                                          <p:spTgt spid="5"/>
-                                        </p:tgtEl>
-                                        <p:attrNameLst>
-                                          <p:attrName>style.visibility</p:attrName>
-                                        </p:attrNameLst>
-                                      </p:cBhvr>
-                                      <p:to>
-                                        <p:strVal val="visible"/>
-                                      </p:to>
-                                    </p:set>
-                                    <p:anim calcmode="lin" valueType="num">
-                                      <p:cBhvr additive="base">
-                                        <p:cTn id="19" dur="550" fill="hold"/>
-                                        <p:tgtEl>
-                                          <p:spTgt spid="5"/>
-                                        </p:tgtEl>
-                                        <p:attrNameLst>
-                                          <p:attrName>ppt_x</p:attrName>
-                                        </p:attrNameLst>
-                                      </p:cBhvr>
-                                      <p:tavLst>
-                                        <p:tav tm="0">
-                                          <p:val>
-                                            <p:strVal val="0-#ppt_w/2"/>
-                                          </p:val>
-                                        </p:tav>
-                                        <p:tav tm="100000">
-                                          <p:val>
-                                            <p:strVal val="#ppt_x"/>
-                                          </p:val>
-                                        </p:tav>
-                                      </p:tavLst>
-                                    </p:anim>
-                                    <p:anim calcmode="lin" valueType="num">
-                                      <p:cBhvr additive="base">
-                                        <p:cTn id="20" dur="550" fill="hold"/>
-                                        <p:tgtEl>
-                                          <p:spTgt spid="5"/>
-                                        </p:tgtEl>
-                                        <p:attrNameLst>
-                                          <p:attrName>ppt_y</p:attrName>
-                                        </p:attrNameLst>
-                                      </p:cBhvr>
-                                      <p:tavLst>
-                                        <p:tav tm="0">
-                                          <p:val>
-                                            <p:strVal val="#ppt_y"/>
-                                          </p:val>
-                                        </p:tav>
-                                        <p:tav tm="100000">
-                                          <p:val>
-                                            <p:strVal val="#ppt_y"/>
-                                          </p:val>
-                                        </p:tav>
-                                      </p:tavLst>
-                                    </p:anim>
-                                  </p:childTnLst>
-                                </p:cTn>
-                              </p:par>
-                            </p:childTnLst>
-                          </p:cTn>
-                        </p:par>
-                      </p:childTnLst>
-                    </p:cTn>
-                  </p:par>
-                  <p:par>
-                    <p:cTn id="21" fill="hold">
-                      <p:stCondLst>
-                        <p:cond delay="indefinite"/>
-                      </p:stCondLst>
-                      <p:childTnLst>
-                        <p:par>
-                          <p:cTn id="22" fill="hold">
-                            <p:stCondLst>
-                              <p:cond delay="0"/>
-                            </p:stCondLst>
-                            <p:childTnLst>
-                              <p:par>
-                                <p:cTn id="23" presetID="2" presetClass="entr" presetSubtype="8" fill="hold" decel="100000" grpId="0" nodeType="clickEffect">
-                                  <p:stCondLst>
-                                    <p:cond delay="0"/>
-                                  </p:stCondLst>
-                                  <p:childTnLst>
-                                    <p:set>
-                                      <p:cBhvr>
-                                        <p:cTn id="24" dur="1" fill="hold">
-                                          <p:stCondLst>
-                                            <p:cond delay="0"/>
-                                          </p:stCondLst>
-                                        </p:cTn>
-                                        <p:tgtEl>
-                                          <p:spTgt spid="6"/>
-                                        </p:tgtEl>
-                                        <p:attrNameLst>
-                                          <p:attrName>style.visibility</p:attrName>
-                                        </p:attrNameLst>
-                                      </p:cBhvr>
-                                      <p:to>
-                                        <p:strVal val="visible"/>
-                                      </p:to>
-                                    </p:set>
-                                    <p:anim calcmode="lin" valueType="num">
-                                      <p:cBhvr additive="base">
-                                        <p:cTn id="25" dur="550" fill="hold"/>
-                                        <p:tgtEl>
-                                          <p:spTgt spid="6"/>
-                                        </p:tgtEl>
-                                        <p:attrNameLst>
-                                          <p:attrName>ppt_x</p:attrName>
-                                        </p:attrNameLst>
-                                      </p:cBhvr>
-                                      <p:tavLst>
-                                        <p:tav tm="0">
-                                          <p:val>
-                                            <p:strVal val="0-#ppt_w/2"/>
-                                          </p:val>
-                                        </p:tav>
-                                        <p:tav tm="100000">
-                                          <p:val>
-                                            <p:strVal val="#ppt_x"/>
-                                          </p:val>
-                                        </p:tav>
-                                      </p:tavLst>
-                                    </p:anim>
-                                    <p:anim calcmode="lin" valueType="num">
-                                      <p:cBhvr additive="base">
-                                        <p:cTn id="26" dur="550" fill="hold"/>
-                                        <p:tgtEl>
-                                          <p:spTgt spid="6"/>
-                                        </p:tgtEl>
-                                        <p:attrNameLst>
-                                          <p:attrName>ppt_y</p:attrName>
-                                        </p:attrNameLst>
-                                      </p:cBhvr>
-                                      <p:tavLst>
-                                        <p:tav tm="0">
-                                          <p:val>
-                                            <p:strVal val="#ppt_y"/>
-                                          </p:val>
-                                        </p:tav>
-                                        <p:tav tm="100000">
-                                          <p:val>
-                                            <p:strVal val="#ppt_y"/>
-                                          </p:val>
-                                        </p:tav>
-                                      </p:tavLst>
-                                    </p:anim>
-                                  </p:childTnLst>
-                                </p:cTn>
-                              </p:par>
-                            </p:childTnLst>
-                          </p:cTn>
-                        </p:par>
-                      </p:childTnLst>
-                    </p:cTn>
-                  </p:par>
-                  <p:par>
-                    <p:cTn id="27" fill="hold">
-                      <p:stCondLst>
-                        <p:cond delay="indefinite"/>
-                      </p:stCondLst>
-                      <p:childTnLst>
-                        <p:par>
-                          <p:cTn id="28" fill="hold">
-                            <p:stCondLst>
-                              <p:cond delay="0"/>
-                            </p:stCondLst>
-                            <p:childTnLst>
-                              <p:par>
-                                <p:cTn id="29" presetID="2" presetClass="entr" presetSubtype="8" fill="hold" decel="100000" grpId="0" nodeType="clickEffect">
-                                  <p:stCondLst>
-                                    <p:cond delay="0"/>
-                                  </p:stCondLst>
-                                  <p:childTnLst>
-                                    <p:set>
-                                      <p:cBhvr>
-                                        <p:cTn id="30" dur="1" fill="hold">
-                                          <p:stCondLst>
-                                            <p:cond delay="0"/>
-                                          </p:stCondLst>
-                                        </p:cTn>
-                                        <p:tgtEl>
-                                          <p:spTgt spid="7"/>
-                                        </p:tgtEl>
-                                        <p:attrNameLst>
-                                          <p:attrName>style.visibility</p:attrName>
-                                        </p:attrNameLst>
-                                      </p:cBhvr>
-                                      <p:to>
-                                        <p:strVal val="visible"/>
-                                      </p:to>
-                                    </p:set>
-                                    <p:anim calcmode="lin" valueType="num">
-                                      <p:cBhvr additive="base">
-                                        <p:cTn id="31" dur="550" fill="hold"/>
-                                        <p:tgtEl>
-                                          <p:spTgt spid="7"/>
-                                        </p:tgtEl>
-                                        <p:attrNameLst>
-                                          <p:attrName>ppt_x</p:attrName>
-                                        </p:attrNameLst>
-                                      </p:cBhvr>
-                                      <p:tavLst>
-                                        <p:tav tm="0">
-                                          <p:val>
-                                            <p:strVal val="0-#ppt_w/2"/>
-                                          </p:val>
-                                        </p:tav>
-                                        <p:tav tm="100000">
-                                          <p:val>
-                                            <p:strVal val="#ppt_x"/>
-                                          </p:val>
-                                        </p:tav>
-                                      </p:tavLst>
-                                    </p:anim>
-                                    <p:anim calcmode="lin" valueType="num">
-                                      <p:cBhvr additive="base">
-                                        <p:cTn id="32" dur="550" fill="hold"/>
-                                        <p:tgtEl>
-                                          <p:spTgt spid="7"/>
-                                        </p:tgtEl>
-                                        <p:attrNameLst>
-                                          <p:attrName>ppt_y</p:attrName>
-                                        </p:attrNameLst>
-                                      </p:cBhvr>
-                                      <p:tavLst>
-                                        <p:tav tm="0">
-                                          <p:val>
-                                            <p:strVal val="#ppt_y"/>
-                                          </p:val>
-                                        </p:tav>
-                                        <p:tav tm="100000">
-                                          <p:val>
-                                            <p:strVal val="#ppt_y"/>
-                                          </p:val>
-                                        </p:tav>
-                                      </p:tavLst>
-                                    </p:anim>
-                                  </p:childTnLst>
-                                </p:cTn>
-                              </p:par>
-                            </p:childTnLst>
-                          </p:cTn>
-                        </p:par>
-                      </p:childTnLst>
-                    </p:cTn>
-                  </p:par>
-                  <p:par>
-                    <p:cTn id="33" fill="hold">
-                      <p:stCondLst>
-                        <p:cond delay="indefinite"/>
-                      </p:stCondLst>
-                      <p:childTnLst>
-                        <p:par>
-                          <p:cTn id="34" fill="hold">
-                            <p:stCondLst>
-                              <p:cond delay="0"/>
-                            </p:stCondLst>
-                            <p:childTnLst>
-                              <p:par>
-                                <p:cTn id="35" presetID="2" presetClass="entr" presetSubtype="4" fill="hold" decel="100000" grpId="0" nodeType="clickEffect">
-                                  <p:stCondLst>
-                                    <p:cond delay="0"/>
-                                  </p:stCondLst>
-                                  <p:childTnLst>
-                                    <p:set>
-                                      <p:cBhvr>
-                                        <p:cTn id="36" dur="1" fill="hold">
-                                          <p:stCondLst>
-                                            <p:cond delay="0"/>
-                                          </p:stCondLst>
-                                        </p:cTn>
-                                        <p:tgtEl>
-                                          <p:spTgt spid="8"/>
-                                        </p:tgtEl>
-                                        <p:attrNameLst>
-                                          <p:attrName>style.visibility</p:attrName>
-                                        </p:attrNameLst>
-                                      </p:cBhvr>
-                                      <p:to>
-                                        <p:strVal val="visible"/>
-                                      </p:to>
-                                    </p:set>
-                                    <p:anim calcmode="lin" valueType="num">
-                                      <p:cBhvr additive="base">
-                                        <p:cTn id="37" dur="550" fill="hold"/>
-                                        <p:tgtEl>
-                                          <p:spTgt spid="8"/>
-                                        </p:tgtEl>
-                                        <p:attrNameLst>
-                                          <p:attrName>ppt_x</p:attrName>
-                                        </p:attrNameLst>
-                                      </p:cBhvr>
-                                      <p:tavLst>
-                                        <p:tav tm="0">
-                                          <p:val>
-                                            <p:strVal val="#ppt_x"/>
-                                          </p:val>
-                                        </p:tav>
-                                        <p:tav tm="100000">
-                                          <p:val>
-                                            <p:strVal val="#ppt_x"/>
-                                          </p:val>
-                                        </p:tav>
-                                      </p:tavLst>
-                                    </p:anim>
-                                    <p:anim calcmode="lin" valueType="num">
-                                      <p:cBhvr additive="base">
-                                        <p:cTn id="38" dur="550" fill="hold"/>
-                                        <p:tgtEl>
-                                          <p:spTgt spid="8"/>
-                                        </p:tgtEl>
-                                        <p:attrNameLst>
-                                          <p:attrName>ppt_y</p:attrName>
-                                        </p:attrNameLst>
-                                      </p:cBhvr>
-                                      <p:tavLst>
-                                        <p:tav tm="0">
-                                          <p:val>
-                                            <p:strVal val="1+#ppt_h/2"/>
-                                          </p:val>
-                                        </p:tav>
-                                        <p:tav tm="100000">
-                                          <p:val>
-                                            <p:strVal val="#ppt_y"/>
-                                          </p:val>
-                                        </p:tav>
-                                      </p:tavLst>
-                                    </p:anim>
+                                      </p:cBhvr>
+                                    </p:animEffect>
                                   </p:childTnLst>
                                 </p:cTn>
                               </p:par>
@@ -4143,7 +3579,7 @@
         <p:spPr>
           <a:xfrm>
             <a:off x="426709" y="1341086"/>
-            <a:ext cx="11338276" cy="1737316"/>
+            <a:ext cx="6233004" cy="1203929"/>
           </a:xfrm>
           <a:prstGeom prst="rect">
             <a:avLst/>
@@ -4166,8 +3602,8 @@
         </p:blipFill>
         <p:spPr>
           <a:xfrm>
-            <a:off x="10180065" y="1645878"/>
-            <a:ext cx="1356326" cy="1127731"/>
+            <a:off x="426709" y="1569680"/>
+            <a:ext cx="6233004" cy="1889712"/>
           </a:xfrm>
           <a:prstGeom prst="rect">
             <a:avLst/>
@@ -4190,8 +3626,8 @@
         </p:blipFill>
         <p:spPr>
           <a:xfrm>
-            <a:off x="426709" y="2865048"/>
-            <a:ext cx="11338276" cy="1737316"/>
+            <a:off x="426709" y="3169840"/>
+            <a:ext cx="6233004" cy="1203929"/>
           </a:xfrm>
           <a:prstGeom prst="rect">
             <a:avLst/>
@@ -4214,8 +3650,8 @@
         </p:blipFill>
         <p:spPr>
           <a:xfrm>
-            <a:off x="10180065" y="3169840"/>
-            <a:ext cx="1356326" cy="1127731"/>
+            <a:off x="426709" y="4084217"/>
+            <a:ext cx="6233004" cy="1203929"/>
           </a:xfrm>
           <a:prstGeom prst="rect">
             <a:avLst/>
@@ -4238,8 +3674,8 @@
         </p:blipFill>
         <p:spPr>
           <a:xfrm>
-            <a:off x="426709" y="4389010"/>
-            <a:ext cx="11338276" cy="1737316"/>
+            <a:off x="426709" y="4998594"/>
+            <a:ext cx="6233004" cy="1203929"/>
           </a:xfrm>
           <a:prstGeom prst="rect">
             <a:avLst/>
@@ -4262,8 +3698,8 @@
         </p:blipFill>
         <p:spPr>
           <a:xfrm>
-            <a:off x="10180065" y="4693802"/>
-            <a:ext cx="1356326" cy="1127731"/>
+            <a:off x="0" y="5836773"/>
+            <a:ext cx="12191695" cy="1021054"/>
           </a:xfrm>
           <a:prstGeom prst="rect">
             <a:avLst/>
@@ -4429,7 +3865,7 @@
                             </p:stCondLst>
                             <p:childTnLst>
                               <p:par>
-                                <p:cTn id="11" presetID="53" presetClass="entr" presetSubtype="16" fill="hold" grpId="0" nodeType="clickEffect">
+                                <p:cTn id="11" presetID="10" presetClass="entr" presetSubtype="0" fill="hold" grpId="0" nodeType="clickEffect">
                                   <p:stCondLst>
                                     <p:cond delay="0"/>
                                   </p:stCondLst>
@@ -4452,55 +3888,9 @@
                                         <p:strVal val="visible"/>
                                       </p:to>
                                     </p:set>
-                                    <p:anim calcmode="lin" valueType="num">
-                                      <p:cBhvr additive="base">
-                                        <p:cTn id="13" dur="420" fill="hold"/>
-                                        <p:tgtEl>
-                                          <p:spTgt spid="4"/>
-                                        </p:tgtEl>
-                                        <p:attrNameLst>
-                                          <p:attrName>ppt_w</p:attrName>
-                                        </p:attrNameLst>
-                                      </p:cBhvr>
-                                      <p:tavLst>
-                                        <p:tav tm="0">
-                                          <p:val>
-                                            <p:strVal val="0"/>
-                                          </p:val>
-                                        </p:tav>
-                                        <p:tav tm="100000">
-                                          <p:val>
-                                            <p:strVal val="#ppt_w"/>
-                                          </p:val>
-                                        </p:tav>
-                                      </p:tavLst>
-                                    </p:anim>
-                                    <p:anim calcmode="lin" valueType="num">
-                                      <p:cBhvr additive="base">
-                                        <p:cTn id="14" dur="420" fill="hold"/>
-                                        <p:tgtEl>
-                                          <p:spTgt spid="4"/>
-                                        </p:tgtEl>
-                                        <p:attrNameLst>
-                                          <p:attrName>ppt_h</p:attrName>
-                                        </p:attrNameLst>
-                                      </p:cBhvr>
-                                      <p:tavLst>
-                                        <p:tav tm="0">
-                                          <p:val>
-                                            <p:strVal val="0"/>
-                                          </p:val>
-                                        </p:tav>
-                                        <p:tav tm="100000">
-                                          <p:val>
-                                            <p:strVal val="#ppt_h"/>
-                                          </p:val>
-                                        </p:tav>
-                                      </p:tavLst>
-                                    </p:anim>
                                     <p:animEffect transition="in" filter="fade">
                                       <p:cBhvr>
-                                        <p:cTn id="15" dur="420"/>
+                                        <p:cTn id="13" dur="450"/>
                                         <p:tgtEl>
                                           <p:spTgt spid="4"/>
                                         </p:tgtEl>
@@ -4516,26 +3906,26 @@
                     </p:cTn>
                   </p:par>
                   <p:par>
-                    <p:cTn id="16" fill="hold">
+                    <p:cTn id="14" fill="hold">
                       <p:stCondLst>
                         <p:cond delay="indefinite"/>
                       </p:stCondLst>
                       <p:childTnLst>
                         <p:par>
-                          <p:cTn id="17" fill="hold">
+                          <p:cTn id="15" fill="hold">
                             <p:stCondLst>
                               <p:cond delay="0"/>
                             </p:stCondLst>
                             <p:childTnLst>
                               <p:par>
-                                <p:cTn id="18" presetID="2" presetClass="entr" presetSubtype="8" fill="hold" decel="100000" grpId="0" nodeType="clickEffect">
+                                <p:cTn id="16" presetID="2" presetClass="entr" presetSubtype="8" fill="hold" decel="100000" grpId="0" nodeType="clickEffect">
                                   <p:stCondLst>
                                     <p:cond delay="0"/>
                                   </p:stCondLst>
                                   <p:childTnLst>
                                     <p:set>
                                       <p:cBhvr>
-                                        <p:cTn id="19" dur="1" fill="hold">
+                                        <p:cTn id="17" dur="1" fill="hold">
                                           <p:stCondLst>
                                             <p:cond delay="0"/>
                                           </p:stCondLst>
@@ -4553,7 +3943,7 @@
                                     </p:set>
                                     <p:anim calcmode="lin" valueType="num">
                                       <p:cBhvr additive="base">
-                                        <p:cTn id="20" dur="550" fill="hold"/>
+                                        <p:cTn id="18" dur="550" fill="hold"/>
                                         <p:tgtEl>
                                           <p:spTgt spid="5"/>
                                         </p:tgtEl>
@@ -4576,7 +3966,7 @@
                                     </p:anim>
                                     <p:anim calcmode="lin" valueType="num">
                                       <p:cBhvr additive="base">
-                                        <p:cTn id="21" dur="550" fill="hold"/>
+                                        <p:cTn id="19" dur="550" fill="hold"/>
                                         <p:tgtEl>
                                           <p:spTgt spid="5"/>
                                         </p:tgtEl>
@@ -4607,26 +3997,26 @@
                     </p:cTn>
                   </p:par>
                   <p:par>
-                    <p:cTn id="22" fill="hold">
+                    <p:cTn id="20" fill="hold">
                       <p:stCondLst>
                         <p:cond delay="indefinite"/>
                       </p:stCondLst>
                       <p:childTnLst>
                         <p:par>
-                          <p:cTn id="23" fill="hold">
+                          <p:cTn id="21" fill="hold">
                             <p:stCondLst>
                               <p:cond delay="0"/>
                             </p:stCondLst>
                             <p:childTnLst>
                               <p:par>
-                                <p:cTn id="24" presetID="53" presetClass="entr" presetSubtype="16" fill="hold" grpId="0" nodeType="clickEffect">
+                                <p:cTn id="22" presetID="2" presetClass="entr" presetSubtype="8" fill="hold" decel="100000" grpId="0" nodeType="clickEffect">
                                   <p:stCondLst>
                                     <p:cond delay="0"/>
                                   </p:stCondLst>
                                   <p:childTnLst>
                                     <p:set>
                                       <p:cBhvr>
-                                        <p:cTn id="25" dur="1" fill="hold">
+                                        <p:cTn id="23" dur="1" fill="hold">
                                           <p:stCondLst>
                                             <p:cond delay="0"/>
                                           </p:stCondLst>
@@ -4644,131 +4034,32 @@
                                     </p:set>
                                     <p:anim calcmode="lin" valueType="num">
                                       <p:cBhvr additive="base">
-                                        <p:cTn id="26" dur="420" fill="hold"/>
+                                        <p:cTn id="24" dur="550" fill="hold"/>
                                         <p:tgtEl>
                                           <p:spTgt spid="6"/>
                                         </p:tgtEl>
                                         <p:attrNameLst>
-                                          <p:attrName>ppt_w</p:attrName>
+                                          <p:attrName>ppt_x</p:attrName>
                                         </p:attrNameLst>
                                       </p:cBhvr>
                                       <p:tavLst>
                                         <p:tav tm="0">
                                           <p:val>
-                                            <p:strVal val="0"/>
+                                            <p:strVal val="0-#ppt_w/2"/>
                                           </p:val>
                                         </p:tav>
                                         <p:tav tm="100000">
                                           <p:val>
-                                            <p:strVal val="#ppt_w"/>
+                                            <p:strVal val="#ppt_x"/>
                                           </p:val>
                                         </p:tav>
                                       </p:tavLst>
                                     </p:anim>
                                     <p:anim calcmode="lin" valueType="num">
                                       <p:cBhvr additive="base">
-                                        <p:cTn id="27" dur="420" fill="hold"/>
+                                        <p:cTn id="25" dur="550" fill="hold"/>
                                         <p:tgtEl>
                                           <p:spTgt spid="6"/>
-                                        </p:tgtEl>
-                                        <p:attrNameLst>
-                                          <p:attrName>ppt_h</p:attrName>
-                                        </p:attrNameLst>
-                                      </p:cBhvr>
-                                      <p:tavLst>
-                                        <p:tav tm="0">
-                                          <p:val>
-                                            <p:strVal val="0"/>
-                                          </p:val>
-                                        </p:tav>
-                                        <p:tav tm="100000">
-                                          <p:val>
-                                            <p:strVal val="#ppt_h"/>
-                                          </p:val>
-                                        </p:tav>
-                                      </p:tavLst>
-                                    </p:anim>
-                                    <p:animEffect transition="in" filter="fade">
-                                      <p:cBhvr>
-                                        <p:cTn id="28" dur="420"/>
-                                        <p:tgtEl>
-                                          <p:spTgt spid="6"/>
-                                        </p:tgtEl>
-                                      </p:cBhvr>
-                                    </p:animEffect>
-                                  </p:childTnLst>
-                                </p:cTn>
-                              </p:par>
-                            </p:childTnLst>
-                          </p:cTn>
-                        </p:par>
-                      </p:childTnLst>
-                    </p:cTn>
-                  </p:par>
-                  <p:par>
-                    <p:cTn id="29" fill="hold">
-                      <p:stCondLst>
-                        <p:cond delay="indefinite"/>
-                      </p:stCondLst>
-                      <p:childTnLst>
-                        <p:par>
-                          <p:cTn id="30" fill="hold">
-                            <p:stCondLst>
-                              <p:cond delay="0"/>
-                            </p:stCondLst>
-                            <p:childTnLst>
-                              <p:par>
-                                <p:cTn id="31" presetID="2" presetClass="entr" presetSubtype="8" fill="hold" decel="100000" grpId="0" nodeType="clickEffect">
-                                  <p:stCondLst>
-                                    <p:cond delay="0"/>
-                                  </p:stCondLst>
-                                  <p:childTnLst>
-                                    <p:set>
-                                      <p:cBhvr>
-                                        <p:cTn id="32" dur="1" fill="hold">
-                                          <p:stCondLst>
-                                            <p:cond delay="0"/>
-                                          </p:stCondLst>
-                                        </p:cTn>
-                                        <p:tgtEl>
-                                          <p:spTgt spid="7"/>
-                                        </p:tgtEl>
-                                        <p:attrNameLst>
-                                          <p:attrName>style.visibility</p:attrName>
-                                        </p:attrNameLst>
-                                      </p:cBhvr>
-                                      <p:to>
-                                        <p:strVal val="visible"/>
-                                      </p:to>
-                                    </p:set>
-                                    <p:anim calcmode="lin" valueType="num">
-                                      <p:cBhvr additive="base">
-                                        <p:cTn id="33" dur="550" fill="hold"/>
-                                        <p:tgtEl>
-                                          <p:spTgt spid="7"/>
-                                        </p:tgtEl>
-                                        <p:attrNameLst>
-                                          <p:attrName>ppt_x</p:attrName>
-                                        </p:attrNameLst>
-                                      </p:cBhvr>
-                                      <p:tavLst>
-                                        <p:tav tm="0">
-                                          <p:val>
-                                            <p:strVal val="0-#ppt_w/2"/>
-                                          </p:val>
-                                        </p:tav>
-                                        <p:tav tm="100000">
-                                          <p:val>
-                                            <p:strVal val="#ppt_x"/>
-                                          </p:val>
-                                        </p:tav>
-                                      </p:tavLst>
-                                    </p:anim>
-                                    <p:anim calcmode="lin" valueType="num">
-                                      <p:cBhvr additive="base">
-                                        <p:cTn id="34" dur="550" fill="hold"/>
-                                        <p:tgtEl>
-                                          <p:spTgt spid="7"/>
                                         </p:tgtEl>
                                         <p:attrNameLst>
                                           <p:attrName>ppt_y</p:attrName>
@@ -4797,32 +4088,32 @@
                     </p:cTn>
                   </p:par>
                   <p:par>
-                    <p:cTn id="35" fill="hold">
+                    <p:cTn id="26" fill="hold">
                       <p:stCondLst>
                         <p:cond delay="indefinite"/>
                       </p:stCondLst>
                       <p:childTnLst>
                         <p:par>
-                          <p:cTn id="36" fill="hold">
+                          <p:cTn id="27" fill="hold">
                             <p:stCondLst>
                               <p:cond delay="0"/>
                             </p:stCondLst>
                             <p:childTnLst>
                               <p:par>
-                                <p:cTn id="37" presetID="53" presetClass="entr" presetSubtype="16" fill="hold" grpId="0" nodeType="clickEffect">
+                                <p:cTn id="28" presetID="2" presetClass="entr" presetSubtype="8" fill="hold" decel="100000" grpId="0" nodeType="clickEffect">
                                   <p:stCondLst>
                                     <p:cond delay="0"/>
                                   </p:stCondLst>
                                   <p:childTnLst>
                                     <p:set>
                                       <p:cBhvr>
-                                        <p:cTn id="38" dur="1" fill="hold">
+                                        <p:cTn id="29" dur="1" fill="hold">
                                           <p:stCondLst>
                                             <p:cond delay="0"/>
                                           </p:stCondLst>
                                         </p:cTn>
                                         <p:tgtEl>
-                                          <p:spTgt spid="8"/>
+                                          <p:spTgt spid="7"/>
                                         </p:tgtEl>
                                         <p:attrNameLst>
                                           <p:attrName>style.visibility</p:attrName>
@@ -4834,58 +4125,141 @@
                                     </p:set>
                                     <p:anim calcmode="lin" valueType="num">
                                       <p:cBhvr additive="base">
-                                        <p:cTn id="39" dur="420" fill="hold"/>
-                                        <p:tgtEl>
-                                          <p:spTgt spid="8"/>
-                                        </p:tgtEl>
-                                        <p:attrNameLst>
-                                          <p:attrName>ppt_w</p:attrName>
+                                        <p:cTn id="30" dur="550" fill="hold"/>
+                                        <p:tgtEl>
+                                          <p:spTgt spid="7"/>
+                                        </p:tgtEl>
+                                        <p:attrNameLst>
+                                          <p:attrName>ppt_x</p:attrName>
                                         </p:attrNameLst>
                                       </p:cBhvr>
                                       <p:tavLst>
                                         <p:tav tm="0">
                                           <p:val>
-                                            <p:strVal val="0"/>
+                                            <p:strVal val="0-#ppt_w/2"/>
                                           </p:val>
                                         </p:tav>
                                         <p:tav tm="100000">
                                           <p:val>
-                                            <p:strVal val="#ppt_w"/>
+                                            <p:strVal val="#ppt_x"/>
                                           </p:val>
                                         </p:tav>
                                       </p:tavLst>
                                     </p:anim>
                                     <p:anim calcmode="lin" valueType="num">
                                       <p:cBhvr additive="base">
-                                        <p:cTn id="40" dur="420" fill="hold"/>
-                                        <p:tgtEl>
-                                          <p:spTgt spid="8"/>
-                                        </p:tgtEl>
-                                        <p:attrNameLst>
-                                          <p:attrName>ppt_h</p:attrName>
+                                        <p:cTn id="31" dur="550" fill="hold"/>
+                                        <p:tgtEl>
+                                          <p:spTgt spid="7"/>
+                                        </p:tgtEl>
+                                        <p:attrNameLst>
+                                          <p:attrName>ppt_y</p:attrName>
                                         </p:attrNameLst>
                                       </p:cBhvr>
                                       <p:tavLst>
                                         <p:tav tm="0">
                                           <p:val>
-                                            <p:strVal val="0"/>
+                                            <p:strVal val="#ppt_y"/>
                                           </p:val>
                                         </p:tav>
                                         <p:tav tm="100000">
                                           <p:val>
-                                            <p:strVal val="#ppt_h"/>
+                                            <p:strVal val="#ppt_y"/>
                                           </p:val>
                                         </p:tav>
                                       </p:tavLst>
                                     </p:anim>
-                                    <p:animEffect transition="in" filter="fade">
+                                  </p:childTnLst>
+                                </p:cTn>
+                              </p:par>
+                            </p:childTnLst>
+                          </p:cTn>
+                        </p:par>
+                      </p:childTnLst>
+                    </p:cTn>
+                  </p:par>
+                  <p:par>
+                    <p:cTn id="32" fill="hold">
+                      <p:stCondLst>
+                        <p:cond delay="indefinite"/>
+                      </p:stCondLst>
+                      <p:childTnLst>
+                        <p:par>
+                          <p:cTn id="33" fill="hold">
+                            <p:stCondLst>
+                              <p:cond delay="0"/>
+                            </p:stCondLst>
+                            <p:childTnLst>
+                              <p:par>
+                                <p:cTn id="34" presetID="2" presetClass="entr" presetSubtype="4" fill="hold" decel="100000" grpId="0" nodeType="clickEffect">
+                                  <p:stCondLst>
+                                    <p:cond delay="0"/>
+                                  </p:stCondLst>
+                                  <p:childTnLst>
+                                    <p:set>
                                       <p:cBhvr>
-                                        <p:cTn id="41" dur="420"/>
+                                        <p:cTn id="35" dur="1" fill="hold">
+                                          <p:stCondLst>
+                                            <p:cond delay="0"/>
+                                          </p:stCondLst>
+                                        </p:cTn>
                                         <p:tgtEl>
                                           <p:spTgt spid="8"/>
                                         </p:tgtEl>
-                                      </p:cBhvr>
-                                    </p:animEffect>
+                                        <p:attrNameLst>
+                                          <p:attrName>style.visibility</p:attrName>
+                                        </p:attrNameLst>
+                                      </p:cBhvr>
+                                      <p:to>
+                                        <p:strVal val="visible"/>
+                                      </p:to>
+                                    </p:set>
+                                    <p:anim calcmode="lin" valueType="num">
+                                      <p:cBhvr additive="base">
+                                        <p:cTn id="36" dur="550" fill="hold"/>
+                                        <p:tgtEl>
+                                          <p:spTgt spid="8"/>
+                                        </p:tgtEl>
+                                        <p:attrNameLst>
+                                          <p:attrName>ppt_x</p:attrName>
+                                        </p:attrNameLst>
+                                      </p:cBhvr>
+                                      <p:tavLst>
+                                        <p:tav tm="0">
+                                          <p:val>
+                                            <p:strVal val="#ppt_x"/>
+                                          </p:val>
+                                        </p:tav>
+                                        <p:tav tm="100000">
+                                          <p:val>
+                                            <p:strVal val="#ppt_x"/>
+                                          </p:val>
+                                        </p:tav>
+                                      </p:tavLst>
+                                    </p:anim>
+                                    <p:anim calcmode="lin" valueType="num">
+                                      <p:cBhvr additive="base">
+                                        <p:cTn id="37" dur="550" fill="hold"/>
+                                        <p:tgtEl>
+                                          <p:spTgt spid="8"/>
+                                        </p:tgtEl>
+                                        <p:attrNameLst>
+                                          <p:attrName>ppt_y</p:attrName>
+                                        </p:attrNameLst>
+                                      </p:cBhvr>
+                                      <p:tavLst>
+                                        <p:tav tm="0">
+                                          <p:val>
+                                            <p:strVal val="1+#ppt_h/2"/>
+                                          </p:val>
+                                        </p:tav>
+                                        <p:tav tm="100000">
+                                          <p:val>
+                                            <p:strVal val="#ppt_y"/>
+                                          </p:val>
+                                        </p:tav>
+                                      </p:tavLst>
+                                    </p:anim>
                                   </p:childTnLst>
                                 </p:cTn>
                               </p:par>
@@ -4970,8 +4344,8 @@
         </p:blipFill>
         <p:spPr>
           <a:xfrm>
-            <a:off x="426709" y="1417284"/>
-            <a:ext cx="11338276" cy="1356326"/>
+            <a:off x="426709" y="1341086"/>
+            <a:ext cx="11338276" cy="1737316"/>
           </a:xfrm>
           <a:prstGeom prst="rect">
             <a:avLst/>
@@ -4994,8 +4368,8 @@
         </p:blipFill>
         <p:spPr>
           <a:xfrm>
-            <a:off x="3855623" y="1645878"/>
-            <a:ext cx="1813514" cy="822939"/>
+            <a:off x="9799074" y="1645878"/>
+            <a:ext cx="1737316" cy="1127731"/>
           </a:xfrm>
           <a:prstGeom prst="rect">
             <a:avLst/>
@@ -5018,8 +4392,8 @@
         </p:blipFill>
         <p:spPr>
           <a:xfrm>
-            <a:off x="426709" y="2712652"/>
-            <a:ext cx="11338276" cy="1356326"/>
+            <a:off x="9799074" y="1645878"/>
+            <a:ext cx="1737316" cy="1127731"/>
           </a:xfrm>
           <a:prstGeom prst="rect">
             <a:avLst/>
@@ -5028,7 +4402,7 @@
       </p:pic>
       <p:pic>
         <p:nvPicPr>
-          <p:cNvPr id="6" name="Picture 5" descr="c11_4_0.jpg"/>
+          <p:cNvPr id="6" name="Picture 5" descr="c11_3_1.jpg"/>
           <p:cNvPicPr>
             <a:picLocks noChangeAspect="1"/>
           </p:cNvPicPr>
@@ -5042,8 +4416,8 @@
         </p:blipFill>
         <p:spPr>
           <a:xfrm>
-            <a:off x="4008019" y="2941246"/>
-            <a:ext cx="1508722" cy="822939"/>
+            <a:off x="426709" y="2865048"/>
+            <a:ext cx="11338276" cy="1737316"/>
           </a:xfrm>
           <a:prstGeom prst="rect">
             <a:avLst/>
@@ -5052,7 +4426,31 @@
       </p:pic>
       <p:pic>
         <p:nvPicPr>
-          <p:cNvPr id="7" name="Picture 6" descr="c11_5_0.jpg"/>
+          <p:cNvPr id="7" name="Picture 6" descr="c11_2_0.jpg"/>
+          <p:cNvPicPr>
+            <a:picLocks noChangeAspect="1"/>
+          </p:cNvPicPr>
+          <p:nvPr/>
+        </p:nvPicPr>
+        <p:blipFill>
+          <a:blip r:embed="rId4"/>
+          <a:stretch>
+            <a:fillRect/>
+          </a:stretch>
+        </p:blipFill>
+        <p:spPr>
+          <a:xfrm>
+            <a:off x="9799074" y="1645878"/>
+            <a:ext cx="1737316" cy="1127731"/>
+          </a:xfrm>
+          <a:prstGeom prst="rect">
+            <a:avLst/>
+          </a:prstGeom>
+        </p:spPr>
+      </p:pic>
+      <p:pic>
+        <p:nvPicPr>
+          <p:cNvPr id="8" name="Picture 7" descr="c11_4_1.jpg"/>
           <p:cNvPicPr>
             <a:picLocks noChangeAspect="1"/>
           </p:cNvPicPr>
@@ -5066,8 +4464,8 @@
         </p:blipFill>
         <p:spPr>
           <a:xfrm>
-            <a:off x="426709" y="4008019"/>
-            <a:ext cx="11338276" cy="1356326"/>
+            <a:off x="8427509" y="3017444"/>
+            <a:ext cx="3108882" cy="1356326"/>
           </a:xfrm>
           <a:prstGeom prst="rect">
             <a:avLst/>
@@ -5076,7 +4474,7 @@
       </p:pic>
       <p:pic>
         <p:nvPicPr>
-          <p:cNvPr id="8" name="Picture 7" descr="c11_6_0.jpg"/>
+          <p:cNvPr id="9" name="Picture 8" descr="c11_5_0.jpg"/>
           <p:cNvPicPr>
             <a:picLocks noChangeAspect="1"/>
           </p:cNvPicPr>
@@ -5090,8 +4488,8 @@
         </p:blipFill>
         <p:spPr>
           <a:xfrm>
-            <a:off x="2941246" y="4236614"/>
-            <a:ext cx="1508722" cy="822939"/>
+            <a:off x="426709" y="4389010"/>
+            <a:ext cx="11338276" cy="1737316"/>
           </a:xfrm>
           <a:prstGeom prst="rect">
             <a:avLst/>
@@ -5100,7 +4498,7 @@
       </p:pic>
       <p:pic>
         <p:nvPicPr>
-          <p:cNvPr id="9" name="Picture 8" descr="c11_7_0.jpg"/>
+          <p:cNvPr id="10" name="Picture 9" descr="c11_6_0.jpg"/>
           <p:cNvPicPr>
             <a:picLocks noChangeAspect="1"/>
           </p:cNvPicPr>
@@ -5114,8 +4512,8 @@
         </p:blipFill>
         <p:spPr>
           <a:xfrm>
-            <a:off x="7665528" y="45718"/>
-            <a:ext cx="4099457" cy="1661118"/>
+            <a:off x="9799074" y="4693802"/>
+            <a:ext cx="1737316" cy="1127731"/>
           </a:xfrm>
           <a:prstGeom prst="rect">
             <a:avLst/>
@@ -5124,7 +4522,7 @@
       </p:pic>
       <p:sp>
         <p:nvSpPr>
-          <p:cNvPr id="10" name="TextBox 9">
+          <p:cNvPr id="11" name="TextBox 10">
             <a:hlinkClick action="ppaction://hlinksldjump" r:id="rId10"/>
           </p:cNvPr>
           <p:cNvSpPr txBox="1"/>
@@ -5281,7 +4679,7 @@
                             </p:stCondLst>
                             <p:childTnLst>
                               <p:par>
-                                <p:cTn id="11" presetID="10" presetClass="entr" presetSubtype="0" fill="hold" grpId="0" nodeType="clickEffect">
+                                <p:cTn id="11" presetID="53" presetClass="entr" presetSubtype="16" fill="hold" grpId="0" nodeType="clickEffect">
                                   <p:stCondLst>
                                     <p:cond delay="0"/>
                                   </p:stCondLst>
@@ -5304,9 +4702,55 @@
                                         <p:strVal val="visible"/>
                                       </p:to>
                                     </p:set>
+                                    <p:anim calcmode="lin" valueType="num">
+                                      <p:cBhvr additive="base">
+                                        <p:cTn id="13" dur="420" fill="hold"/>
+                                        <p:tgtEl>
+                                          <p:spTgt spid="4"/>
+                                        </p:tgtEl>
+                                        <p:attrNameLst>
+                                          <p:attrName>ppt_w</p:attrName>
+                                        </p:attrNameLst>
+                                      </p:cBhvr>
+                                      <p:tavLst>
+                                        <p:tav tm="0">
+                                          <p:val>
+                                            <p:strVal val="0"/>
+                                          </p:val>
+                                        </p:tav>
+                                        <p:tav tm="100000">
+                                          <p:val>
+                                            <p:strVal val="#ppt_w"/>
+                                          </p:val>
+                                        </p:tav>
+                                      </p:tavLst>
+                                    </p:anim>
+                                    <p:anim calcmode="lin" valueType="num">
+                                      <p:cBhvr additive="base">
+                                        <p:cTn id="14" dur="420" fill="hold"/>
+                                        <p:tgtEl>
+                                          <p:spTgt spid="4"/>
+                                        </p:tgtEl>
+                                        <p:attrNameLst>
+                                          <p:attrName>ppt_h</p:attrName>
+                                        </p:attrNameLst>
+                                      </p:cBhvr>
+                                      <p:tavLst>
+                                        <p:tav tm="0">
+                                          <p:val>
+                                            <p:strVal val="0"/>
+                                          </p:val>
+                                        </p:tav>
+                                        <p:tav tm="100000">
+                                          <p:val>
+                                            <p:strVal val="#ppt_h"/>
+                                          </p:val>
+                                        </p:tav>
+                                      </p:tavLst>
+                                    </p:anim>
                                     <p:animEffect transition="in" filter="fade">
                                       <p:cBhvr>
-                                        <p:cTn id="13" dur="450"/>
+                                        <p:cTn id="15" dur="420"/>
                                         <p:tgtEl>
                                           <p:spTgt spid="4"/>
                                         </p:tgtEl>
@@ -5322,32 +4766,67 @@
                     </p:cTn>
                   </p:par>
                   <p:par>
-                    <p:cTn id="14" fill="hold">
+                    <p:cTn id="16" fill="hold">
                       <p:stCondLst>
                         <p:cond delay="indefinite"/>
                       </p:stCondLst>
                       <p:childTnLst>
                         <p:par>
-                          <p:cTn id="15" fill="hold">
+                          <p:cTn id="17" fill="hold">
                             <p:stCondLst>
                               <p:cond delay="0"/>
                             </p:stCondLst>
                             <p:childTnLst>
                               <p:par>
-                                <p:cTn id="16" presetID="2" presetClass="entr" presetSubtype="8" fill="hold" decel="100000" grpId="0" nodeType="clickEffect">
+                                <p:cTn id="18" presetID="10" presetClass="entr" presetSubtype="0" fill="hold" grpId="0" nodeType="clickEffect">
                                   <p:stCondLst>
                                     <p:cond delay="0"/>
                                   </p:stCondLst>
                                   <p:childTnLst>
                                     <p:set>
                                       <p:cBhvr>
-                                        <p:cTn id="17" dur="1" fill="hold">
+                                        <p:cTn id="19" dur="1" fill="hold">
                                           <p:stCondLst>
                                             <p:cond delay="0"/>
                                           </p:stCondLst>
                                         </p:cTn>
                                         <p:tgtEl>
                                           <p:spTgt spid="5"/>
+                                        </p:tgtEl>
+                                        <p:attrNameLst>
+                                          <p:attrName>style.visibility</p:attrName>
+                                        </p:attrNameLst>
+                                      </p:cBhvr>
+                                      <p:to>
+                                        <p:strVal val="visible"/>
+                                      </p:to>
+                                    </p:set>
+                                    <p:animEffect transition="in" filter="fade">
+                                      <p:cBhvr>
+                                        <p:cTn id="20" dur="450"/>
+                                        <p:tgtEl>
+                                          <p:spTgt spid="5"/>
+                                        </p:tgtEl>
+                                      </p:cBhvr>
+                                    </p:animEffect>
+                                  </p:childTnLst>
+                                </p:cTn>
+                              </p:par>
+                              <p:par>
+                                <p:cTn id="21" presetID="2" presetClass="entr" presetSubtype="8" fill="hold" decel="100000" grpId="0" nodeType="withEffect">
+                                  <p:stCondLst>
+                                    <p:cond delay="120"/>
+                                  </p:stCondLst>
+                                  <p:childTnLst>
+                                    <p:set>
+                                      <p:cBhvr>
+                                        <p:cTn id="22" dur="1" fill="hold">
+                                          <p:stCondLst>
+                                            <p:cond delay="0"/>
+                                          </p:stCondLst>
+                                        </p:cTn>
+                                        <p:tgtEl>
+                                          <p:spTgt spid="6"/>
                                         </p:tgtEl>
                                         <p:attrNameLst>
                                           <p:attrName>style.visibility</p:attrName>
@@ -5359,9 +4838,9 @@
                                     </p:set>
                                     <p:anim calcmode="lin" valueType="num">
                                       <p:cBhvr additive="base">
-                                        <p:cTn id="18" dur="550" fill="hold"/>
-                                        <p:tgtEl>
-                                          <p:spTgt spid="5"/>
+                                        <p:cTn id="23" dur="550" fill="hold"/>
+                                        <p:tgtEl>
+                                          <p:spTgt spid="6"/>
                                         </p:tgtEl>
                                         <p:attrNameLst>
                                           <p:attrName>ppt_x</p:attrName>
@@ -5382,9 +4861,9 @@
                                     </p:anim>
                                     <p:anim calcmode="lin" valueType="num">
                                       <p:cBhvr additive="base">
-                                        <p:cTn id="19" dur="550" fill="hold"/>
-                                        <p:tgtEl>
-                                          <p:spTgt spid="5"/>
+                                        <p:cTn id="24" dur="550" fill="hold"/>
+                                        <p:tgtEl>
+                                          <p:spTgt spid="6"/>
                                         </p:tgtEl>
                                         <p:attrNameLst>
                                           <p:attrName>ppt_y</p:attrName>
@@ -5403,59 +4882,6 @@
                                         </p:tav>
                                       </p:tavLst>
                                     </p:anim>
-                                  </p:childTnLst>
-                                </p:cTn>
-                              </p:par>
-                            </p:childTnLst>
-                          </p:cTn>
-                        </p:par>
-                      </p:childTnLst>
-                    </p:cTn>
-                  </p:par>
-                  <p:par>
-                    <p:cTn id="20" fill="hold">
-                      <p:stCondLst>
-                        <p:cond delay="indefinite"/>
-                      </p:stCondLst>
-                      <p:childTnLst>
-                        <p:par>
-                          <p:cTn id="21" fill="hold">
-                            <p:stCondLst>
-                              <p:cond delay="0"/>
-                            </p:stCondLst>
-                            <p:childTnLst>
-                              <p:par>
-                                <p:cTn id="22" presetID="10" presetClass="entr" presetSubtype="0" fill="hold" grpId="0" nodeType="clickEffect">
-                                  <p:stCondLst>
-                                    <p:cond delay="0"/>
-                                  </p:stCondLst>
-                                  <p:childTnLst>
-                                    <p:set>
-                                      <p:cBhvr>
-                                        <p:cTn id="23" dur="1" fill="hold">
-                                          <p:stCondLst>
-                                            <p:cond delay="0"/>
-                                          </p:stCondLst>
-                                        </p:cTn>
-                                        <p:tgtEl>
-                                          <p:spTgt spid="6"/>
-                                        </p:tgtEl>
-                                        <p:attrNameLst>
-                                          <p:attrName>style.visibility</p:attrName>
-                                        </p:attrNameLst>
-                                      </p:cBhvr>
-                                      <p:to>
-                                        <p:strVal val="visible"/>
-                                      </p:to>
-                                    </p:set>
-                                    <p:animEffect transition="in" filter="fade">
-                                      <p:cBhvr>
-                                        <p:cTn id="24" dur="450"/>
-                                        <p:tgtEl>
-                                          <p:spTgt spid="6"/>
-                                        </p:tgtEl>
-                                      </p:cBhvr>
-                                    </p:animEffect>
                                   </p:childTnLst>
                                 </p:cTn>
                               </p:par>
@@ -5478,7 +4904,7 @@
                             </p:stCondLst>
                             <p:childTnLst>
                               <p:par>
-                                <p:cTn id="27" presetID="2" presetClass="entr" presetSubtype="8" fill="hold" decel="100000" grpId="0" nodeType="clickEffect">
+                                <p:cTn id="27" presetID="10" presetClass="entr" presetSubtype="0" fill="hold" grpId="0" nodeType="clickEffect">
                                   <p:stCondLst>
                                     <p:cond delay="0"/>
                                   </p:stCondLst>
@@ -5501,34 +4927,168 @@
                                         <p:strVal val="visible"/>
                                       </p:to>
                                     </p:set>
+                                    <p:animEffect transition="in" filter="fade">
+                                      <p:cBhvr>
+                                        <p:cTn id="29" dur="450"/>
+                                        <p:tgtEl>
+                                          <p:spTgt spid="7"/>
+                                        </p:tgtEl>
+                                      </p:cBhvr>
+                                    </p:animEffect>
+                                  </p:childTnLst>
+                                </p:cTn>
+                              </p:par>
+                              <p:par>
+                                <p:cTn id="30" presetID="53" presetClass="entr" presetSubtype="16" fill="hold" grpId="0" nodeType="withEffect">
+                                  <p:stCondLst>
+                                    <p:cond delay="120"/>
+                                  </p:stCondLst>
+                                  <p:childTnLst>
+                                    <p:set>
+                                      <p:cBhvr>
+                                        <p:cTn id="31" dur="1" fill="hold">
+                                          <p:stCondLst>
+                                            <p:cond delay="0"/>
+                                          </p:stCondLst>
+                                        </p:cTn>
+                                        <p:tgtEl>
+                                          <p:spTgt spid="8"/>
+                                        </p:tgtEl>
+                                        <p:attrNameLst>
+                                          <p:attrName>style.visibility</p:attrName>
+                                        </p:attrNameLst>
+                                      </p:cBhvr>
+                                      <p:to>
+                                        <p:strVal val="visible"/>
+                                      </p:to>
+                                    </p:set>
                                     <p:anim calcmode="lin" valueType="num">
                                       <p:cBhvr additive="base">
-                                        <p:cTn id="29" dur="550" fill="hold"/>
-                                        <p:tgtEl>
-                                          <p:spTgt spid="7"/>
-                                        </p:tgtEl>
-                                        <p:attrNameLst>
-                                          <p:attrName>ppt_x</p:attrName>
+                                        <p:cTn id="32" dur="420" fill="hold"/>
+                                        <p:tgtEl>
+                                          <p:spTgt spid="8"/>
+                                        </p:tgtEl>
+                                        <p:attrNameLst>
+                                          <p:attrName>ppt_w</p:attrName>
                                         </p:attrNameLst>
                                       </p:cBhvr>
                                       <p:tavLst>
                                         <p:tav tm="0">
                                           <p:val>
-                                            <p:strVal val="0-#ppt_w/2"/>
+                                            <p:strVal val="0"/>
                                           </p:val>
                                         </p:tav>
                                         <p:tav tm="100000">
                                           <p:val>
-                                            <p:strVal val="#ppt_x"/>
+                                            <p:strVal val="#ppt_w"/>
                                           </p:val>
                                         </p:tav>
                                       </p:tavLst>
                                     </p:anim>
                                     <p:anim calcmode="lin" valueType="num">
                                       <p:cBhvr additive="base">
-                                        <p:cTn id="30" dur="550" fill="hold"/>
-                                        <p:tgtEl>
-                                          <p:spTgt spid="7"/>
+                                        <p:cTn id="33" dur="420" fill="hold"/>
+                                        <p:tgtEl>
+                                          <p:spTgt spid="8"/>
+                                        </p:tgtEl>
+                                        <p:attrNameLst>
+                                          <p:attrName>ppt_h</p:attrName>
+                                        </p:attrNameLst>
+                                      </p:cBhvr>
+                                      <p:tavLst>
+                                        <p:tav tm="0">
+                                          <p:val>
+                                            <p:strVal val="0"/>
+                                          </p:val>
+                                        </p:tav>
+                                        <p:tav tm="100000">
+                                          <p:val>
+                                            <p:strVal val="#ppt_h"/>
+                                          </p:val>
+                                        </p:tav>
+                                      </p:tavLst>
+                                    </p:anim>
+                                    <p:animEffect transition="in" filter="fade">
+                                      <p:cBhvr>
+                                        <p:cTn id="34" dur="420"/>
+                                        <p:tgtEl>
+                                          <p:spTgt spid="8"/>
+                                        </p:tgtEl>
+                                      </p:cBhvr>
+                                    </p:animEffect>
+                                  </p:childTnLst>
+                                </p:cTn>
+                              </p:par>
+                            </p:childTnLst>
+                          </p:cTn>
+                        </p:par>
+                      </p:childTnLst>
+                    </p:cTn>
+                  </p:par>
+                  <p:par>
+                    <p:cTn id="35" fill="hold">
+                      <p:stCondLst>
+                        <p:cond delay="indefinite"/>
+                      </p:stCondLst>
+                      <p:childTnLst>
+                        <p:par>
+                          <p:cTn id="36" fill="hold">
+                            <p:stCondLst>
+                              <p:cond delay="0"/>
+                            </p:stCondLst>
+                            <p:childTnLst>
+                              <p:par>
+                                <p:cTn id="37" presetID="2" presetClass="entr" presetSubtype="8" fill="hold" decel="100000" grpId="0" nodeType="clickEffect">
+                                  <p:stCondLst>
+                                    <p:cond delay="0"/>
+                                  </p:stCondLst>
+                                  <p:childTnLst>
+                                    <p:set>
+                                      <p:cBhvr>
+                                        <p:cTn id="38" dur="1" fill="hold">
+                                          <p:stCondLst>
+                                            <p:cond delay="0"/>
+                                          </p:stCondLst>
+                                        </p:cTn>
+                                        <p:tgtEl>
+                                          <p:spTgt spid="9"/>
+                                        </p:tgtEl>
+                                        <p:attrNameLst>
+                                          <p:attrName>style.visibility</p:attrName>
+                                        </p:attrNameLst>
+                                      </p:cBhvr>
+                                      <p:to>
+                                        <p:strVal val="visible"/>
+                                      </p:to>
+                                    </p:set>
+                                    <p:anim calcmode="lin" valueType="num">
+                                      <p:cBhvr additive="base">
+                                        <p:cTn id="39" dur="550" fill="hold"/>
+                                        <p:tgtEl>
+                                          <p:spTgt spid="9"/>
+                                        </p:tgtEl>
+                                        <p:attrNameLst>
+                                          <p:attrName>ppt_x</p:attrName>
+                                        </p:attrNameLst>
+                                      </p:cBhvr>
+                                      <p:tavLst>
+                                        <p:tav tm="0">
+                                          <p:val>
+                                            <p:strVal val="0-#ppt_w/2"/>
+                                          </p:val>
+                                        </p:tav>
+                                        <p:tav tm="100000">
+                                          <p:val>
+                                            <p:strVal val="#ppt_x"/>
+                                          </p:val>
+                                        </p:tav>
+                                      </p:tavLst>
+                                    </p:anim>
+                                    <p:anim calcmode="lin" valueType="num">
+                                      <p:cBhvr additive="base">
+                                        <p:cTn id="40" dur="550" fill="hold"/>
+                                        <p:tgtEl>
+                                          <p:spTgt spid="9"/>
                                         </p:tgtEl>
                                         <p:attrNameLst>
                                           <p:attrName>ppt_y</p:attrName>
@@ -5557,85 +5117,32 @@
                     </p:cTn>
                   </p:par>
                   <p:par>
-                    <p:cTn id="31" fill="hold">
+                    <p:cTn id="41" fill="hold">
                       <p:stCondLst>
                         <p:cond delay="indefinite"/>
                       </p:stCondLst>
                       <p:childTnLst>
                         <p:par>
-                          <p:cTn id="32" fill="hold">
+                          <p:cTn id="42" fill="hold">
                             <p:stCondLst>
                               <p:cond delay="0"/>
                             </p:stCondLst>
                             <p:childTnLst>
                               <p:par>
-                                <p:cTn id="33" presetID="10" presetClass="entr" presetSubtype="0" fill="hold" grpId="0" nodeType="clickEffect">
+                                <p:cTn id="43" presetID="53" presetClass="entr" presetSubtype="16" fill="hold" grpId="0" nodeType="clickEffect">
                                   <p:stCondLst>
                                     <p:cond delay="0"/>
                                   </p:stCondLst>
                                   <p:childTnLst>
                                     <p:set>
                                       <p:cBhvr>
-                                        <p:cTn id="34" dur="1" fill="hold">
+                                        <p:cTn id="44" dur="1" fill="hold">
                                           <p:stCondLst>
                                             <p:cond delay="0"/>
                                           </p:stCondLst>
                                         </p:cTn>
                                         <p:tgtEl>
-                                          <p:spTgt spid="8"/>
-                                        </p:tgtEl>
-                                        <p:attrNameLst>
-                                          <p:attrName>style.visibility</p:attrName>
-                                        </p:attrNameLst>
-                                      </p:cBhvr>
-                                      <p:to>
-                                        <p:strVal val="visible"/>
-                                      </p:to>
-                                    </p:set>
-                                    <p:animEffect transition="in" filter="fade">
-                                      <p:cBhvr>
-                                        <p:cTn id="35" dur="450"/>
-                                        <p:tgtEl>
-                                          <p:spTgt spid="8"/>
-                                        </p:tgtEl>
-                                      </p:cBhvr>
-                                    </p:animEffect>
-                                  </p:childTnLst>
-                                </p:cTn>
-                              </p:par>
-                            </p:childTnLst>
-                          </p:cTn>
-                        </p:par>
-                      </p:childTnLst>
-                    </p:cTn>
-                  </p:par>
-                  <p:par>
-                    <p:cTn id="36" fill="hold">
-                      <p:stCondLst>
-                        <p:cond delay="indefinite"/>
-                      </p:stCondLst>
-                      <p:childTnLst>
-                        <p:par>
-                          <p:cTn id="37" fill="hold">
-                            <p:stCondLst>
-                              <p:cond delay="0"/>
-                            </p:stCondLst>
-                            <p:childTnLst>
-                              <p:par>
-                                <p:cTn id="38" presetID="53" presetClass="entr" presetSubtype="16" fill="hold" grpId="0" nodeType="clickEffect">
-                                  <p:stCondLst>
-                                    <p:cond delay="0"/>
-                                  </p:stCondLst>
-                                  <p:childTnLst>
-                                    <p:set>
-                                      <p:cBhvr>
-                                        <p:cTn id="39" dur="1" fill="hold">
-                                          <p:stCondLst>
-                                            <p:cond delay="0"/>
-                                          </p:stCondLst>
-                                        </p:cTn>
-                                        <p:tgtEl>
-                                          <p:spTgt spid="9"/>
+                                          <p:spTgt spid="10"/>
                                         </p:tgtEl>
                                         <p:attrNameLst>
                                           <p:attrName>style.visibility</p:attrName>
@@ -5647,9 +5154,9 @@
                                     </p:set>
                                     <p:anim calcmode="lin" valueType="num">
                                       <p:cBhvr additive="base">
-                                        <p:cTn id="40" dur="420" fill="hold"/>
-                                        <p:tgtEl>
-                                          <p:spTgt spid="9"/>
+                                        <p:cTn id="45" dur="420" fill="hold"/>
+                                        <p:tgtEl>
+                                          <p:spTgt spid="10"/>
                                         </p:tgtEl>
                                         <p:attrNameLst>
                                           <p:attrName>ppt_w</p:attrName>
@@ -5670,9 +5177,9 @@
                                     </p:anim>
                                     <p:anim calcmode="lin" valueType="num">
                                       <p:cBhvr additive="base">
-                                        <p:cTn id="41" dur="420" fill="hold"/>
-                                        <p:tgtEl>
-                                          <p:spTgt spid="9"/>
+                                        <p:cTn id="46" dur="420" fill="hold"/>
+                                        <p:tgtEl>
+                                          <p:spTgt spid="10"/>
                                         </p:tgtEl>
                                         <p:attrNameLst>
                                           <p:attrName>ppt_h</p:attrName>
@@ -5693,9 +5200,9 @@
                                     </p:anim>
                                     <p:animEffect transition="in" filter="fade">
                                       <p:cBhvr>
-                                        <p:cTn id="42" dur="420"/>
-                                        <p:tgtEl>
-                                          <p:spTgt spid="9"/>
+                                        <p:cTn id="47" dur="420"/>
+                                        <p:tgtEl>
+                                          <p:spTgt spid="10"/>
                                         </p:tgtEl>
                                       </p:cBhvr>
                                     </p:animEffect>
@@ -5783,8 +5290,8 @@
         </p:blipFill>
         <p:spPr>
           <a:xfrm>
-            <a:off x="426709" y="2636454"/>
-            <a:ext cx="6842588" cy="1203929"/>
+            <a:off x="426709" y="1417284"/>
+            <a:ext cx="11338276" cy="1356326"/>
           </a:xfrm>
           <a:prstGeom prst="rect">
             <a:avLst/>
@@ -5793,7 +5300,7 @@
       </p:pic>
       <p:pic>
         <p:nvPicPr>
-          <p:cNvPr id="4" name="Picture 3" descr="c12_1_1.jpg"/>
+          <p:cNvPr id="4" name="Picture 3" descr="c12_2_0.jpg"/>
           <p:cNvPicPr>
             <a:picLocks noChangeAspect="1"/>
           </p:cNvPicPr>
@@ -5807,18 +5314,138 @@
         </p:blipFill>
         <p:spPr>
           <a:xfrm>
-            <a:off x="9418084" y="3550831"/>
-            <a:ext cx="1965910" cy="2499297"/>
+            <a:off x="3855623" y="1645878"/>
+            <a:ext cx="1813514" cy="822939"/>
           </a:xfrm>
           <a:prstGeom prst="rect">
             <a:avLst/>
           </a:prstGeom>
         </p:spPr>
       </p:pic>
+      <p:pic>
+        <p:nvPicPr>
+          <p:cNvPr id="5" name="Picture 4" descr="c12_3_0.jpg"/>
+          <p:cNvPicPr>
+            <a:picLocks noChangeAspect="1"/>
+          </p:cNvPicPr>
+          <p:nvPr/>
+        </p:nvPicPr>
+        <p:blipFill>
+          <a:blip r:embed="rId5"/>
+          <a:stretch>
+            <a:fillRect/>
+          </a:stretch>
+        </p:blipFill>
+        <p:spPr>
+          <a:xfrm>
+            <a:off x="426709" y="2712652"/>
+            <a:ext cx="11338276" cy="1356326"/>
+          </a:xfrm>
+          <a:prstGeom prst="rect">
+            <a:avLst/>
+          </a:prstGeom>
+        </p:spPr>
+      </p:pic>
+      <p:pic>
+        <p:nvPicPr>
+          <p:cNvPr id="6" name="Picture 5" descr="c12_4_0.jpg"/>
+          <p:cNvPicPr>
+            <a:picLocks noChangeAspect="1"/>
+          </p:cNvPicPr>
+          <p:nvPr/>
+        </p:nvPicPr>
+        <p:blipFill>
+          <a:blip r:embed="rId6"/>
+          <a:stretch>
+            <a:fillRect/>
+          </a:stretch>
+        </p:blipFill>
+        <p:spPr>
+          <a:xfrm>
+            <a:off x="2941246" y="2941246"/>
+            <a:ext cx="1508722" cy="822939"/>
+          </a:xfrm>
+          <a:prstGeom prst="rect">
+            <a:avLst/>
+          </a:prstGeom>
+        </p:spPr>
+      </p:pic>
+      <p:pic>
+        <p:nvPicPr>
+          <p:cNvPr id="7" name="Picture 6" descr="c12_5_0.jpg"/>
+          <p:cNvPicPr>
+            <a:picLocks noChangeAspect="1"/>
+          </p:cNvPicPr>
+          <p:nvPr/>
+        </p:nvPicPr>
+        <p:blipFill>
+          <a:blip r:embed="rId7"/>
+          <a:stretch>
+            <a:fillRect/>
+          </a:stretch>
+        </p:blipFill>
+        <p:spPr>
+          <a:xfrm>
+            <a:off x="426709" y="4008019"/>
+            <a:ext cx="11338276" cy="1356326"/>
+          </a:xfrm>
+          <a:prstGeom prst="rect">
+            <a:avLst/>
+          </a:prstGeom>
+        </p:spPr>
+      </p:pic>
+      <p:pic>
+        <p:nvPicPr>
+          <p:cNvPr id="8" name="Picture 7" descr="c12_6_0.jpg"/>
+          <p:cNvPicPr>
+            <a:picLocks noChangeAspect="1"/>
+          </p:cNvPicPr>
+          <p:nvPr/>
+        </p:nvPicPr>
+        <p:blipFill>
+          <a:blip r:embed="rId8"/>
+          <a:stretch>
+            <a:fillRect/>
+          </a:stretch>
+        </p:blipFill>
+        <p:spPr>
+          <a:xfrm>
+            <a:off x="2941246" y="4236614"/>
+            <a:ext cx="1508722" cy="822939"/>
+          </a:xfrm>
+          <a:prstGeom prst="rect">
+            <a:avLst/>
+          </a:prstGeom>
+        </p:spPr>
+      </p:pic>
+      <p:pic>
+        <p:nvPicPr>
+          <p:cNvPr id="9" name="Picture 8" descr="c12_7_0.jpg"/>
+          <p:cNvPicPr>
+            <a:picLocks noChangeAspect="1"/>
+          </p:cNvPicPr>
+          <p:nvPr/>
+        </p:nvPicPr>
+        <p:blipFill>
+          <a:blip r:embed="rId9"/>
+          <a:stretch>
+            <a:fillRect/>
+          </a:stretch>
+        </p:blipFill>
+        <p:spPr>
+          <a:xfrm>
+            <a:off x="7665528" y="45718"/>
+            <a:ext cx="4099457" cy="1661118"/>
+          </a:xfrm>
+          <a:prstGeom prst="rect">
+            <a:avLst/>
+          </a:prstGeom>
+        </p:spPr>
+      </p:pic>
       <p:sp>
         <p:nvSpPr>
-          <p:cNvPr id="5" name="TextBox 4">
-            <a:hlinkClick action="ppaction://hlinksldjump" r:id="rId5"/>
+          <p:cNvPr id="10" name="TextBox 9">
+            <a:hlinkClick action="ppaction://hlinksldjump" r:id="rId10"/>
           </p:cNvPr>
           <p:cNvSpPr txBox="1"/>
           <p:nvPr/>
@@ -5861,6 +5488,699 @@
   </p:clrMapOvr>
   <p:transition spd="med">
     <p:fade/>
+  </p:transition>
+  <p:timing>
+    <p:tnLst>
+      <p:par>
+        <p:cTn id="1" dur="indefinite" restart="never" nodeType="tmRoot">
+          <p:childTnLst>
+            <p:seq concurrent="1" nextAc="seek">
+              <p:cTn id="2" dur="indefinite" nodeType="mainSeq">
+                <p:childTnLst>
+                  <p:par>
+                    <p:cTn id="3" fill="hold">
+                      <p:stCondLst>
+                        <p:cond delay="indefinite"/>
+                      </p:stCondLst>
+                      <p:childTnLst>
+                        <p:par>
+                          <p:cTn id="4" fill="hold">
+                            <p:stCondLst>
+                              <p:cond delay="0"/>
+                            </p:stCondLst>
+                            <p:childTnLst>
+                              <p:par>
+                                <p:cTn id="5" presetID="2" presetClass="entr" presetSubtype="8" fill="hold" decel="100000" grpId="0" nodeType="clickEffect">
+                                  <p:stCondLst>
+                                    <p:cond delay="0"/>
+                                  </p:stCondLst>
+                                  <p:childTnLst>
+                                    <p:set>
+                                      <p:cBhvr>
+                                        <p:cTn id="6" dur="1" fill="hold">
+                                          <p:stCondLst>
+                                            <p:cond delay="0"/>
+                                          </p:stCondLst>
+                                        </p:cTn>
+                                        <p:tgtEl>
+                                          <p:spTgt spid="3"/>
+                                        </p:tgtEl>
+                                        <p:attrNameLst>
+                                          <p:attrName>style.visibility</p:attrName>
+                                        </p:attrNameLst>
+                                      </p:cBhvr>
+                                      <p:to>
+                                        <p:strVal val="visible"/>
+                                      </p:to>
+                                    </p:set>
+                                    <p:anim calcmode="lin" valueType="num">
+                                      <p:cBhvr additive="base">
+                                        <p:cTn id="7" dur="550" fill="hold"/>
+                                        <p:tgtEl>
+                                          <p:spTgt spid="3"/>
+                                        </p:tgtEl>
+                                        <p:attrNameLst>
+                                          <p:attrName>ppt_x</p:attrName>
+                                        </p:attrNameLst>
+                                      </p:cBhvr>
+                                      <p:tavLst>
+                                        <p:tav tm="0">
+                                          <p:val>
+                                            <p:strVal val="0-#ppt_w/2"/>
+                                          </p:val>
+                                        </p:tav>
+                                        <p:tav tm="100000">
+                                          <p:val>
+                                            <p:strVal val="#ppt_x"/>
+                                          </p:val>
+                                        </p:tav>
+                                      </p:tavLst>
+                                    </p:anim>
+                                    <p:anim calcmode="lin" valueType="num">
+                                      <p:cBhvr additive="base">
+                                        <p:cTn id="8" dur="550" fill="hold"/>
+                                        <p:tgtEl>
+                                          <p:spTgt spid="3"/>
+                                        </p:tgtEl>
+                                        <p:attrNameLst>
+                                          <p:attrName>ppt_y</p:attrName>
+                                        </p:attrNameLst>
+                                      </p:cBhvr>
+                                      <p:tavLst>
+                                        <p:tav tm="0">
+                                          <p:val>
+                                            <p:strVal val="#ppt_y"/>
+                                          </p:val>
+                                        </p:tav>
+                                        <p:tav tm="100000">
+                                          <p:val>
+                                            <p:strVal val="#ppt_y"/>
+                                          </p:val>
+                                        </p:tav>
+                                      </p:tavLst>
+                                    </p:anim>
+                                  </p:childTnLst>
+                                </p:cTn>
+                              </p:par>
+                            </p:childTnLst>
+                          </p:cTn>
+                        </p:par>
+                      </p:childTnLst>
+                    </p:cTn>
+                  </p:par>
+                  <p:par>
+                    <p:cTn id="9" fill="hold">
+                      <p:stCondLst>
+                        <p:cond delay="indefinite"/>
+                      </p:stCondLst>
+                      <p:childTnLst>
+                        <p:par>
+                          <p:cTn id="10" fill="hold">
+                            <p:stCondLst>
+                              <p:cond delay="0"/>
+                            </p:stCondLst>
+                            <p:childTnLst>
+                              <p:par>
+                                <p:cTn id="11" presetID="10" presetClass="entr" presetSubtype="0" fill="hold" grpId="0" nodeType="clickEffect">
+                                  <p:stCondLst>
+                                    <p:cond delay="0"/>
+                                  </p:stCondLst>
+                                  <p:childTnLst>
+                                    <p:set>
+                                      <p:cBhvr>
+                                        <p:cTn id="12" dur="1" fill="hold">
+                                          <p:stCondLst>
+                                            <p:cond delay="0"/>
+                                          </p:stCondLst>
+                                        </p:cTn>
+                                        <p:tgtEl>
+                                          <p:spTgt spid="4"/>
+                                        </p:tgtEl>
+                                        <p:attrNameLst>
+                                          <p:attrName>style.visibility</p:attrName>
+                                        </p:attrNameLst>
+                                      </p:cBhvr>
+                                      <p:to>
+                                        <p:strVal val="visible"/>
+                                      </p:to>
+                                    </p:set>
+                                    <p:animEffect transition="in" filter="fade">
+                                      <p:cBhvr>
+                                        <p:cTn id="13" dur="450"/>
+                                        <p:tgtEl>
+                                          <p:spTgt spid="4"/>
+                                        </p:tgtEl>
+                                      </p:cBhvr>
+                                    </p:animEffect>
+                                  </p:childTnLst>
+                                </p:cTn>
+                              </p:par>
+                            </p:childTnLst>
+                          </p:cTn>
+                        </p:par>
+                      </p:childTnLst>
+                    </p:cTn>
+                  </p:par>
+                  <p:par>
+                    <p:cTn id="14" fill="hold">
+                      <p:stCondLst>
+                        <p:cond delay="indefinite"/>
+                      </p:stCondLst>
+                      <p:childTnLst>
+                        <p:par>
+                          <p:cTn id="15" fill="hold">
+                            <p:stCondLst>
+                              <p:cond delay="0"/>
+                            </p:stCondLst>
+                            <p:childTnLst>
+                              <p:par>
+                                <p:cTn id="16" presetID="2" presetClass="entr" presetSubtype="8" fill="hold" decel="100000" grpId="0" nodeType="clickEffect">
+                                  <p:stCondLst>
+                                    <p:cond delay="0"/>
+                                  </p:stCondLst>
+                                  <p:childTnLst>
+                                    <p:set>
+                                      <p:cBhvr>
+                                        <p:cTn id="17" dur="1" fill="hold">
+                                          <p:stCondLst>
+                                            <p:cond delay="0"/>
+                                          </p:stCondLst>
+                                        </p:cTn>
+                                        <p:tgtEl>
+                                          <p:spTgt spid="5"/>
+                                        </p:tgtEl>
+                                        <p:attrNameLst>
+                                          <p:attrName>style.visibility</p:attrName>
+                                        </p:attrNameLst>
+                                      </p:cBhvr>
+                                      <p:to>
+                                        <p:strVal val="visible"/>
+                                      </p:to>
+                                    </p:set>
+                                    <p:anim calcmode="lin" valueType="num">
+                                      <p:cBhvr additive="base">
+                                        <p:cTn id="18" dur="550" fill="hold"/>
+                                        <p:tgtEl>
+                                          <p:spTgt spid="5"/>
+                                        </p:tgtEl>
+                                        <p:attrNameLst>
+                                          <p:attrName>ppt_x</p:attrName>
+                                        </p:attrNameLst>
+                                      </p:cBhvr>
+                                      <p:tavLst>
+                                        <p:tav tm="0">
+                                          <p:val>
+                                            <p:strVal val="0-#ppt_w/2"/>
+                                          </p:val>
+                                        </p:tav>
+                                        <p:tav tm="100000">
+                                          <p:val>
+                                            <p:strVal val="#ppt_x"/>
+                                          </p:val>
+                                        </p:tav>
+                                      </p:tavLst>
+                                    </p:anim>
+                                    <p:anim calcmode="lin" valueType="num">
+                                      <p:cBhvr additive="base">
+                                        <p:cTn id="19" dur="550" fill="hold"/>
+                                        <p:tgtEl>
+                                          <p:spTgt spid="5"/>
+                                        </p:tgtEl>
+                                        <p:attrNameLst>
+                                          <p:attrName>ppt_y</p:attrName>
+                                        </p:attrNameLst>
+                                      </p:cBhvr>
+                                      <p:tavLst>
+                                        <p:tav tm="0">
+                                          <p:val>
+                                            <p:strVal val="#ppt_y"/>
+                                          </p:val>
+                                        </p:tav>
+                                        <p:tav tm="100000">
+                                          <p:val>
+                                            <p:strVal val="#ppt_y"/>
+                                          </p:val>
+                                        </p:tav>
+                                      </p:tavLst>
+                                    </p:anim>
+                                  </p:childTnLst>
+                                </p:cTn>
+                              </p:par>
+                            </p:childTnLst>
+                          </p:cTn>
+                        </p:par>
+                      </p:childTnLst>
+                    </p:cTn>
+                  </p:par>
+                  <p:par>
+                    <p:cTn id="20" fill="hold">
+                      <p:stCondLst>
+                        <p:cond delay="indefinite"/>
+                      </p:stCondLst>
+                      <p:childTnLst>
+                        <p:par>
+                          <p:cTn id="21" fill="hold">
+                            <p:stCondLst>
+                              <p:cond delay="0"/>
+                            </p:stCondLst>
+                            <p:childTnLst>
+                              <p:par>
+                                <p:cTn id="22" presetID="10" presetClass="entr" presetSubtype="0" fill="hold" grpId="0" nodeType="clickEffect">
+                                  <p:stCondLst>
+                                    <p:cond delay="0"/>
+                                  </p:stCondLst>
+                                  <p:childTnLst>
+                                    <p:set>
+                                      <p:cBhvr>
+                                        <p:cTn id="23" dur="1" fill="hold">
+                                          <p:stCondLst>
+                                            <p:cond delay="0"/>
+                                          </p:stCondLst>
+                                        </p:cTn>
+                                        <p:tgtEl>
+                                          <p:spTgt spid="6"/>
+                                        </p:tgtEl>
+                                        <p:attrNameLst>
+                                          <p:attrName>style.visibility</p:attrName>
+                                        </p:attrNameLst>
+                                      </p:cBhvr>
+                                      <p:to>
+                                        <p:strVal val="visible"/>
+                                      </p:to>
+                                    </p:set>
+                                    <p:animEffect transition="in" filter="fade">
+                                      <p:cBhvr>
+                                        <p:cTn id="24" dur="450"/>
+                                        <p:tgtEl>
+                                          <p:spTgt spid="6"/>
+                                        </p:tgtEl>
+                                      </p:cBhvr>
+                                    </p:animEffect>
+                                  </p:childTnLst>
+                                </p:cTn>
+                              </p:par>
+                            </p:childTnLst>
+                          </p:cTn>
+                        </p:par>
+                      </p:childTnLst>
+                    </p:cTn>
+                  </p:par>
+                  <p:par>
+                    <p:cTn id="25" fill="hold">
+                      <p:stCondLst>
+                        <p:cond delay="indefinite"/>
+                      </p:stCondLst>
+                      <p:childTnLst>
+                        <p:par>
+                          <p:cTn id="26" fill="hold">
+                            <p:stCondLst>
+                              <p:cond delay="0"/>
+                            </p:stCondLst>
+                            <p:childTnLst>
+                              <p:par>
+                                <p:cTn id="27" presetID="2" presetClass="entr" presetSubtype="8" fill="hold" decel="100000" grpId="0" nodeType="clickEffect">
+                                  <p:stCondLst>
+                                    <p:cond delay="0"/>
+                                  </p:stCondLst>
+                                  <p:childTnLst>
+                                    <p:set>
+                                      <p:cBhvr>
+                                        <p:cTn id="28" dur="1" fill="hold">
+                                          <p:stCondLst>
+                                            <p:cond delay="0"/>
+                                          </p:stCondLst>
+                                        </p:cTn>
+                                        <p:tgtEl>
+                                          <p:spTgt spid="7"/>
+                                        </p:tgtEl>
+                                        <p:attrNameLst>
+                                          <p:attrName>style.visibility</p:attrName>
+                                        </p:attrNameLst>
+                                      </p:cBhvr>
+                                      <p:to>
+                                        <p:strVal val="visible"/>
+                                      </p:to>
+                                    </p:set>
+                                    <p:anim calcmode="lin" valueType="num">
+                                      <p:cBhvr additive="base">
+                                        <p:cTn id="29" dur="550" fill="hold"/>
+                                        <p:tgtEl>
+                                          <p:spTgt spid="7"/>
+                                        </p:tgtEl>
+                                        <p:attrNameLst>
+                                          <p:attrName>ppt_x</p:attrName>
+                                        </p:attrNameLst>
+                                      </p:cBhvr>
+                                      <p:tavLst>
+                                        <p:tav tm="0">
+                                          <p:val>
+                                            <p:strVal val="0-#ppt_w/2"/>
+                                          </p:val>
+                                        </p:tav>
+                                        <p:tav tm="100000">
+                                          <p:val>
+                                            <p:strVal val="#ppt_x"/>
+                                          </p:val>
+                                        </p:tav>
+                                      </p:tavLst>
+                                    </p:anim>
+                                    <p:anim calcmode="lin" valueType="num">
+                                      <p:cBhvr additive="base">
+                                        <p:cTn id="30" dur="550" fill="hold"/>
+                                        <p:tgtEl>
+                                          <p:spTgt spid="7"/>
+                                        </p:tgtEl>
+                                        <p:attrNameLst>
+                                          <p:attrName>ppt_y</p:attrName>
+                                        </p:attrNameLst>
+                                      </p:cBhvr>
+                                      <p:tavLst>
+                                        <p:tav tm="0">
+                                          <p:val>
+                                            <p:strVal val="#ppt_y"/>
+                                          </p:val>
+                                        </p:tav>
+                                        <p:tav tm="100000">
+                                          <p:val>
+                                            <p:strVal val="#ppt_y"/>
+                                          </p:val>
+                                        </p:tav>
+                                      </p:tavLst>
+                                    </p:anim>
+                                  </p:childTnLst>
+                                </p:cTn>
+                              </p:par>
+                            </p:childTnLst>
+                          </p:cTn>
+                        </p:par>
+                      </p:childTnLst>
+                    </p:cTn>
+                  </p:par>
+                  <p:par>
+                    <p:cTn id="31" fill="hold">
+                      <p:stCondLst>
+                        <p:cond delay="indefinite"/>
+                      </p:stCondLst>
+                      <p:childTnLst>
+                        <p:par>
+                          <p:cTn id="32" fill="hold">
+                            <p:stCondLst>
+                              <p:cond delay="0"/>
+                            </p:stCondLst>
+                            <p:childTnLst>
+                              <p:par>
+                                <p:cTn id="33" presetID="10" presetClass="entr" presetSubtype="0" fill="hold" grpId="0" nodeType="clickEffect">
+                                  <p:stCondLst>
+                                    <p:cond delay="0"/>
+                                  </p:stCondLst>
+                                  <p:childTnLst>
+                                    <p:set>
+                                      <p:cBhvr>
+                                        <p:cTn id="34" dur="1" fill="hold">
+                                          <p:stCondLst>
+                                            <p:cond delay="0"/>
+                                          </p:stCondLst>
+                                        </p:cTn>
+                                        <p:tgtEl>
+                                          <p:spTgt spid="8"/>
+                                        </p:tgtEl>
+                                        <p:attrNameLst>
+                                          <p:attrName>style.visibility</p:attrName>
+                                        </p:attrNameLst>
+                                      </p:cBhvr>
+                                      <p:to>
+                                        <p:strVal val="visible"/>
+                                      </p:to>
+                                    </p:set>
+                                    <p:animEffect transition="in" filter="fade">
+                                      <p:cBhvr>
+                                        <p:cTn id="35" dur="450"/>
+                                        <p:tgtEl>
+                                          <p:spTgt spid="8"/>
+                                        </p:tgtEl>
+                                      </p:cBhvr>
+                                    </p:animEffect>
+                                  </p:childTnLst>
+                                </p:cTn>
+                              </p:par>
+                            </p:childTnLst>
+                          </p:cTn>
+                        </p:par>
+                      </p:childTnLst>
+                    </p:cTn>
+                  </p:par>
+                  <p:par>
+                    <p:cTn id="36" fill="hold">
+                      <p:stCondLst>
+                        <p:cond delay="indefinite"/>
+                      </p:stCondLst>
+                      <p:childTnLst>
+                        <p:par>
+                          <p:cTn id="37" fill="hold">
+                            <p:stCondLst>
+                              <p:cond delay="0"/>
+                            </p:stCondLst>
+                            <p:childTnLst>
+                              <p:par>
+                                <p:cTn id="38" presetID="53" presetClass="entr" presetSubtype="16" fill="hold" grpId="0" nodeType="clickEffect">
+                                  <p:stCondLst>
+                                    <p:cond delay="0"/>
+                                  </p:stCondLst>
+                                  <p:childTnLst>
+                                    <p:set>
+                                      <p:cBhvr>
+                                        <p:cTn id="39" dur="1" fill="hold">
+                                          <p:stCondLst>
+                                            <p:cond delay="0"/>
+                                          </p:stCondLst>
+                                        </p:cTn>
+                                        <p:tgtEl>
+                                          <p:spTgt spid="9"/>
+                                        </p:tgtEl>
+                                        <p:attrNameLst>
+                                          <p:attrName>style.visibility</p:attrName>
+                                        </p:attrNameLst>
+                                      </p:cBhvr>
+                                      <p:to>
+                                        <p:strVal val="visible"/>
+                                      </p:to>
+                                    </p:set>
+                                    <p:anim calcmode="lin" valueType="num">
+                                      <p:cBhvr additive="base">
+                                        <p:cTn id="40" dur="420" fill="hold"/>
+                                        <p:tgtEl>
+                                          <p:spTgt spid="9"/>
+                                        </p:tgtEl>
+                                        <p:attrNameLst>
+                                          <p:attrName>ppt_w</p:attrName>
+                                        </p:attrNameLst>
+                                      </p:cBhvr>
+                                      <p:tavLst>
+                                        <p:tav tm="0">
+                                          <p:val>
+                                            <p:strVal val="0"/>
+                                          </p:val>
+                                        </p:tav>
+                                        <p:tav tm="100000">
+                                          <p:val>
+                                            <p:strVal val="#ppt_w"/>
+                                          </p:val>
+                                        </p:tav>
+                                      </p:tavLst>
+                                    </p:anim>
+                                    <p:anim calcmode="lin" valueType="num">
+                                      <p:cBhvr additive="base">
+                                        <p:cTn id="41" dur="420" fill="hold"/>
+                                        <p:tgtEl>
+                                          <p:spTgt spid="9"/>
+                                        </p:tgtEl>
+                                        <p:attrNameLst>
+                                          <p:attrName>ppt_h</p:attrName>
+                                        </p:attrNameLst>
+                                      </p:cBhvr>
+                                      <p:tavLst>
+                                        <p:tav tm="0">
+                                          <p:val>
+                                            <p:strVal val="0"/>
+                                          </p:val>
+                                        </p:tav>
+                                        <p:tav tm="100000">
+                                          <p:val>
+                                            <p:strVal val="#ppt_h"/>
+                                          </p:val>
+                                        </p:tav>
+                                      </p:tavLst>
+                                    </p:anim>
+                                    <p:animEffect transition="in" filter="fade">
+                                      <p:cBhvr>
+                                        <p:cTn id="42" dur="420"/>
+                                        <p:tgtEl>
+                                          <p:spTgt spid="9"/>
+                                        </p:tgtEl>
+                                      </p:cBhvr>
+                                    </p:animEffect>
+                                  </p:childTnLst>
+                                </p:cTn>
+                              </p:par>
+                            </p:childTnLst>
+                          </p:cTn>
+                        </p:par>
+                      </p:childTnLst>
+                    </p:cTn>
+                  </p:par>
+                </p:childTnLst>
+              </p:cTn>
+              <p:prevCondLst>
+                <p:cond evt="onPrev" delay="0">
+                  <p:tgtEl>
+                    <p:sldTgt/>
+                  </p:tgtEl>
+                </p:cond>
+              </p:prevCondLst>
+              <p:nextCondLst>
+                <p:cond evt="onNext" delay="0">
+                  <p:tgtEl>
+                    <p:sldTgt/>
+                  </p:tgtEl>
+                </p:cond>
+              </p:nextCondLst>
+            </p:seq>
+          </p:childTnLst>
+        </p:cTn>
+      </p:par>
+    </p:tnLst>
+  </p:timing>
+</p:sld>
+</file>
+
+<file path=ppt/slides/slide14.xml><?xml version="1.0" encoding="utf-8"?>
+<p:sld xmlns:a="http://schemas.openxmlformats.org/drawingml/2006/main" xmlns:p="http://schemas.openxmlformats.org/presentationml/2006/main" xmlns:r="http://schemas.openxmlformats.org/officeDocument/2006/relationships">
+  <p:cSld>
+    <p:spTree>
+      <p:nvGrpSpPr>
+        <p:cNvPr id="1" name=""/>
+        <p:cNvGrpSpPr/>
+        <p:nvPr/>
+      </p:nvGrpSpPr>
+      <p:grpSpPr/>
+      <p:pic>
+        <p:nvPicPr>
+          <p:cNvPr id="2" name="Picture 1" descr="b13.jpg"/>
+          <p:cNvPicPr>
+            <a:picLocks noChangeAspect="1"/>
+          </p:cNvPicPr>
+          <p:nvPr/>
+        </p:nvPicPr>
+        <p:blipFill>
+          <a:blip r:embed="rId2"/>
+          <a:stretch>
+            <a:fillRect/>
+          </a:stretch>
+        </p:blipFill>
+        <p:spPr>
+          <a:xfrm>
+            <a:off x="0" y="0"/>
+            <a:ext cx="12191695" cy="6857828"/>
+          </a:xfrm>
+          <a:prstGeom prst="rect">
+            <a:avLst/>
+          </a:prstGeom>
+        </p:spPr>
+      </p:pic>
+      <p:pic>
+        <p:nvPicPr>
+          <p:cNvPr id="3" name="Picture 2" descr="c13_1_0.jpg"/>
+          <p:cNvPicPr>
+            <a:picLocks noChangeAspect="1"/>
+          </p:cNvPicPr>
+          <p:nvPr/>
+        </p:nvPicPr>
+        <p:blipFill>
+          <a:blip r:embed="rId3"/>
+          <a:stretch>
+            <a:fillRect/>
+          </a:stretch>
+        </p:blipFill>
+        <p:spPr>
+          <a:xfrm>
+            <a:off x="426709" y="2636454"/>
+            <a:ext cx="6842588" cy="1203929"/>
+          </a:xfrm>
+          <a:prstGeom prst="rect">
+            <a:avLst/>
+          </a:prstGeom>
+        </p:spPr>
+      </p:pic>
+      <p:pic>
+        <p:nvPicPr>
+          <p:cNvPr id="4" name="Picture 3" descr="c13_1_1.jpg"/>
+          <p:cNvPicPr>
+            <a:picLocks noChangeAspect="1"/>
+          </p:cNvPicPr>
+          <p:nvPr/>
+        </p:nvPicPr>
+        <p:blipFill>
+          <a:blip r:embed="rId4"/>
+          <a:stretch>
+            <a:fillRect/>
+          </a:stretch>
+        </p:blipFill>
+        <p:spPr>
+          <a:xfrm>
+            <a:off x="9418084" y="3550831"/>
+            <a:ext cx="1965910" cy="2499297"/>
+          </a:xfrm>
+          <a:prstGeom prst="rect">
+            <a:avLst/>
+          </a:prstGeom>
+        </p:spPr>
+      </p:pic>
+      <p:sp>
+        <p:nvSpPr>
+          <p:cNvPr id="5" name="TextBox 4">
+            <a:hlinkClick action="ppaction://hlinksldjump" r:id="rId5"/>
+          </p:cNvPr>
+          <p:cNvSpPr txBox="1"/>
+          <p:nvPr/>
+        </p:nvSpPr>
+        <p:spPr>
+          <a:xfrm>
+            <a:off x="11048723" y="76198"/>
+            <a:ext cx="1066773" cy="304792"/>
+          </a:xfrm>
+          <a:prstGeom prst="rect">
+            <a:avLst/>
+          </a:prstGeom>
+          <a:noFill/>
+        </p:spPr>
+        <p:txBody>
+          <a:bodyPr wrap="none">
+            <a:spAutoFit/>
+          </a:bodyPr>
+          <a:lstStyle/>
+          <a:p>
+            <a:pPr algn="r"/>
+            <a:r>
+              <a:rPr sz="1200" b="0">
+                <a:solidFill>
+                  <a:srgbClr val="8A8F96"/>
+                </a:solidFill>
+                <a:latin typeface="微軟正黑體"/>
+                <a:ea typeface="微軟正黑體"/>
+                <a:cs typeface="微軟正黑體"/>
+              </a:rPr>
+              <a:t>流程 ↩</a:t>
+            </a:r>
+          </a:p>
+        </p:txBody>
+      </p:sp>
+    </p:spTree>
+  </p:cSld>
+  <p:clrMapOvr>
+    <a:masterClrMapping/>
+  </p:clrMapOvr>
+  <p:transition spd="med">
+    <p:push dir="l"/>
   </p:transition>
   <p:timing>
     <p:tnLst>
@@ -6212,7 +6532,7 @@
       <p:sp>
         <p:nvSpPr>
           <p:cNvPr id="7" name="Rectangle 6">
-            <a:hlinkClick r:id="rId7"/>
+            <a:hlinkClick action="ppaction://hlinksldjump" r:id="rId7"/>
           </p:cNvPr>
           <p:cNvSpPr/>
           <p:nvPr/>
@@ -6260,7 +6580,7 @@
       <p:sp>
         <p:nvSpPr>
           <p:cNvPr id="8" name="Rectangle 7">
-            <a:hlinkClick action="ppaction://hlinksldjump" r:id="rId8"/>
+            <a:hlinkClick r:id="rId8"/>
           </p:cNvPr>
           <p:cNvSpPr/>
           <p:nvPr/>
@@ -6308,7 +6628,7 @@
       <p:sp>
         <p:nvSpPr>
           <p:cNvPr id="9" name="Rectangle 8">
-            <a:hlinkClick r:id="rId9"/>
+            <a:hlinkClick action="ppaction://hlinksldjump" r:id="rId9"/>
           </p:cNvPr>
           <p:cNvSpPr/>
           <p:nvPr/>
@@ -6364,6 +6684,54 @@
         <p:spPr>
           <a:xfrm>
             <a:off x="655303" y="5676757"/>
+            <a:ext cx="10881087" cy="533386"/>
+          </a:xfrm>
+          <a:prstGeom prst="rect">
+            <a:avLst/>
+          </a:prstGeom>
+          <a:solidFill>
+            <a:srgbClr val="FFFFFF">
+              <a:alpha val="0"/>
+            </a:srgbClr>
+          </a:solidFill>
+          <a:ln>
+            <a:noFill/>
+          </a:ln>
+          <a:effectLst/>
+        </p:spPr>
+        <p:style>
+          <a:lnRef idx="1">
+            <a:schemeClr val="accent1"/>
+          </a:lnRef>
+          <a:fillRef idx="3">
+            <a:schemeClr val="accent1"/>
+          </a:fillRef>
+          <a:effectRef idx="2">
+            <a:schemeClr val="accent1"/>
+          </a:effectRef>
+          <a:fontRef idx="minor">
+            <a:schemeClr val="lt1"/>
+          </a:fontRef>
+        </p:style>
+        <p:txBody>
+          <a:bodyPr rtlCol="0" anchor="ctr"/>
+          <a:lstStyle/>
+          <a:p>
+            <a:pPr algn="ctr"/>
+          </a:p>
+        </p:txBody>
+      </p:sp>
+      <p:sp>
+        <p:nvSpPr>
+          <p:cNvPr id="11" name="Rectangle 10">
+            <a:hlinkClick r:id="rId11"/>
+          </p:cNvPr>
+          <p:cNvSpPr/>
+          <p:nvPr/>
+        </p:nvSpPr>
+        <p:spPr>
+          <a:xfrm>
+            <a:off x="655303" y="6286342"/>
             <a:ext cx="10881087" cy="533386"/>
           </a:xfrm>
           <a:prstGeom prst="rect">
@@ -7789,8 +8157,8 @@
         </p:blipFill>
         <p:spPr>
           <a:xfrm>
-            <a:off x="426709" y="2026869"/>
-            <a:ext cx="6385400" cy="1203929"/>
+            <a:off x="426709" y="1417284"/>
+            <a:ext cx="6385400" cy="1813514"/>
           </a:xfrm>
           <a:prstGeom prst="rect">
             <a:avLst/>
@@ -8014,7 +8382,7 @@
                             </p:stCondLst>
                             <p:childTnLst>
                               <p:par>
-                                <p:cTn id="10" presetID="2" presetClass="entr" presetSubtype="8" fill="hold" decel="100000" grpId="0" nodeType="clickEffect">
+                                <p:cTn id="10" presetID="10" presetClass="entr" presetSubtype="0" fill="hold" grpId="0" nodeType="clickEffect">
                                   <p:stCondLst>
                                     <p:cond delay="0"/>
                                   </p:stCondLst>
@@ -8037,11 +8405,64 @@
                                         <p:strVal val="visible"/>
                                       </p:to>
                                     </p:set>
+                                    <p:animEffect transition="in" filter="fade">
+                                      <p:cBhvr>
+                                        <p:cTn id="12" dur="450"/>
+                                        <p:tgtEl>
+                                          <p:spTgt spid="4"/>
+                                        </p:tgtEl>
+                                      </p:cBhvr>
+                                    </p:animEffect>
+                                  </p:childTnLst>
+                                </p:cTn>
+                              </p:par>
+                            </p:childTnLst>
+                          </p:cTn>
+                        </p:par>
+                      </p:childTnLst>
+                    </p:cTn>
+                  </p:par>
+                  <p:par>
+                    <p:cTn id="13" fill="hold">
+                      <p:stCondLst>
+                        <p:cond delay="indefinite"/>
+                      </p:stCondLst>
+                      <p:childTnLst>
+                        <p:par>
+                          <p:cTn id="14" fill="hold">
+                            <p:stCondLst>
+                              <p:cond delay="0"/>
+                            </p:stCondLst>
+                            <p:childTnLst>
+                              <p:par>
+                                <p:cTn id="15" presetID="2" presetClass="entr" presetSubtype="8" fill="hold" decel="100000" grpId="0" nodeType="clickEffect">
+                                  <p:stCondLst>
+                                    <p:cond delay="0"/>
+                                  </p:stCondLst>
+                                  <p:childTnLst>
+                                    <p:set>
+                                      <p:cBhvr>
+                                        <p:cTn id="16" dur="1" fill="hold">
+                                          <p:stCondLst>
+                                            <p:cond delay="0"/>
+                                          </p:stCondLst>
+                                        </p:cTn>
+                                        <p:tgtEl>
+                                          <p:spTgt spid="5"/>
+                                        </p:tgtEl>
+                                        <p:attrNameLst>
+                                          <p:attrName>style.visibility</p:attrName>
+                                        </p:attrNameLst>
+                                      </p:cBhvr>
+                                      <p:to>
+                                        <p:strVal val="visible"/>
+                                      </p:to>
+                                    </p:set>
                                     <p:anim calcmode="lin" valueType="num">
                                       <p:cBhvr additive="base">
-                                        <p:cTn id="12" dur="550" fill="hold"/>
-                                        <p:tgtEl>
-                                          <p:spTgt spid="4"/>
+                                        <p:cTn id="17" dur="550" fill="hold"/>
+                                        <p:tgtEl>
+                                          <p:spTgt spid="5"/>
                                         </p:tgtEl>
                                         <p:attrNameLst>
                                           <p:attrName>ppt_x</p:attrName>
@@ -8062,9 +8483,9 @@
                                     </p:anim>
                                     <p:anim calcmode="lin" valueType="num">
                                       <p:cBhvr additive="base">
-                                        <p:cTn id="13" dur="550" fill="hold"/>
-                                        <p:tgtEl>
-                                          <p:spTgt spid="4"/>
+                                        <p:cTn id="18" dur="550" fill="hold"/>
+                                        <p:tgtEl>
+                                          <p:spTgt spid="5"/>
                                         </p:tgtEl>
                                         <p:attrNameLst>
                                           <p:attrName>ppt_y</p:attrName>
@@ -8093,32 +8514,32 @@
                     </p:cTn>
                   </p:par>
                   <p:par>
-                    <p:cTn id="14" fill="hold">
+                    <p:cTn id="19" fill="hold">
                       <p:stCondLst>
                         <p:cond delay="indefinite"/>
                       </p:stCondLst>
                       <p:childTnLst>
                         <p:par>
-                          <p:cTn id="15" fill="hold">
+                          <p:cTn id="20" fill="hold">
                             <p:stCondLst>
                               <p:cond delay="0"/>
                             </p:stCondLst>
                             <p:childTnLst>
                               <p:par>
-                                <p:cTn id="16" presetID="2" presetClass="entr" presetSubtype="8" fill="hold" decel="100000" grpId="0" nodeType="clickEffect">
+                                <p:cTn id="21" presetID="2" presetClass="entr" presetSubtype="8" fill="hold" decel="100000" grpId="0" nodeType="clickEffect">
                                   <p:stCondLst>
                                     <p:cond delay="0"/>
                                   </p:stCondLst>
                                   <p:childTnLst>
                                     <p:set>
                                       <p:cBhvr>
-                                        <p:cTn id="17" dur="1" fill="hold">
+                                        <p:cTn id="22" dur="1" fill="hold">
                                           <p:stCondLst>
                                             <p:cond delay="0"/>
                                           </p:stCondLst>
                                         </p:cTn>
                                         <p:tgtEl>
-                                          <p:spTgt spid="5"/>
+                                          <p:spTgt spid="6"/>
                                         </p:tgtEl>
                                         <p:attrNameLst>
                                           <p:attrName>style.visibility</p:attrName>
@@ -8130,9 +8551,9 @@
                                     </p:set>
                                     <p:anim calcmode="lin" valueType="num">
                                       <p:cBhvr additive="base">
-                                        <p:cTn id="18" dur="550" fill="hold"/>
-                                        <p:tgtEl>
-                                          <p:spTgt spid="5"/>
+                                        <p:cTn id="23" dur="550" fill="hold"/>
+                                        <p:tgtEl>
+                                          <p:spTgt spid="6"/>
                                         </p:tgtEl>
                                         <p:attrNameLst>
                                           <p:attrName>ppt_x</p:attrName>
@@ -8153,9 +8574,9 @@
                                     </p:anim>
                                     <p:anim calcmode="lin" valueType="num">
                                       <p:cBhvr additive="base">
-                                        <p:cTn id="19" dur="550" fill="hold"/>
-                                        <p:tgtEl>
-                                          <p:spTgt spid="5"/>
+                                        <p:cTn id="24" dur="550" fill="hold"/>
+                                        <p:tgtEl>
+                                          <p:spTgt spid="6"/>
                                         </p:tgtEl>
                                         <p:attrNameLst>
                                           <p:attrName>ppt_y</p:attrName>
@@ -8184,32 +8605,32 @@
                     </p:cTn>
                   </p:par>
                   <p:par>
-                    <p:cTn id="20" fill="hold">
+                    <p:cTn id="25" fill="hold">
                       <p:stCondLst>
                         <p:cond delay="indefinite"/>
                       </p:stCondLst>
                       <p:childTnLst>
                         <p:par>
-                          <p:cTn id="21" fill="hold">
+                          <p:cTn id="26" fill="hold">
                             <p:stCondLst>
                               <p:cond delay="0"/>
                             </p:stCondLst>
                             <p:childTnLst>
                               <p:par>
-                                <p:cTn id="22" presetID="2" presetClass="entr" presetSubtype="8" fill="hold" decel="100000" grpId="0" nodeType="clickEffect">
+                                <p:cTn id="27" presetID="2" presetClass="entr" presetSubtype="8" fill="hold" decel="100000" grpId="0" nodeType="clickEffect">
                                   <p:stCondLst>
                                     <p:cond delay="0"/>
                                   </p:stCondLst>
                                   <p:childTnLst>
                                     <p:set>
                                       <p:cBhvr>
-                                        <p:cTn id="23" dur="1" fill="hold">
+                                        <p:cTn id="28" dur="1" fill="hold">
                                           <p:stCondLst>
                                             <p:cond delay="0"/>
                                           </p:stCondLst>
                                         </p:cTn>
                                         <p:tgtEl>
-                                          <p:spTgt spid="6"/>
+                                          <p:spTgt spid="7"/>
                                         </p:tgtEl>
                                         <p:attrNameLst>
                                           <p:attrName>style.visibility</p:attrName>
@@ -8221,9 +8642,9 @@
                                     </p:set>
                                     <p:anim calcmode="lin" valueType="num">
                                       <p:cBhvr additive="base">
-                                        <p:cTn id="24" dur="550" fill="hold"/>
-                                        <p:tgtEl>
-                                          <p:spTgt spid="6"/>
+                                        <p:cTn id="29" dur="550" fill="hold"/>
+                                        <p:tgtEl>
+                                          <p:spTgt spid="7"/>
                                         </p:tgtEl>
                                         <p:attrNameLst>
                                           <p:attrName>ppt_x</p:attrName>
@@ -8244,9 +8665,9 @@
                                     </p:anim>
                                     <p:anim calcmode="lin" valueType="num">
                                       <p:cBhvr additive="base">
-                                        <p:cTn id="25" dur="550" fill="hold"/>
-                                        <p:tgtEl>
-                                          <p:spTgt spid="6"/>
+                                        <p:cTn id="30" dur="550" fill="hold"/>
+                                        <p:tgtEl>
+                                          <p:spTgt spid="7"/>
                                         </p:tgtEl>
                                         <p:attrNameLst>
                                           <p:attrName>ppt_y</p:attrName>
@@ -8275,32 +8696,32 @@
                     </p:cTn>
                   </p:par>
                   <p:par>
-                    <p:cTn id="26" fill="hold">
+                    <p:cTn id="31" fill="hold">
                       <p:stCondLst>
                         <p:cond delay="indefinite"/>
                       </p:stCondLst>
                       <p:childTnLst>
                         <p:par>
-                          <p:cTn id="27" fill="hold">
+                          <p:cTn id="32" fill="hold">
                             <p:stCondLst>
                               <p:cond delay="0"/>
                             </p:stCondLst>
                             <p:childTnLst>
                               <p:par>
-                                <p:cTn id="28" presetID="2" presetClass="entr" presetSubtype="8" fill="hold" decel="100000" grpId="0" nodeType="clickEffect">
+                                <p:cTn id="33" presetID="2" presetClass="entr" presetSubtype="8" fill="hold" decel="100000" grpId="0" nodeType="clickEffect">
                                   <p:stCondLst>
                                     <p:cond delay="0"/>
                                   </p:stCondLst>
                                   <p:childTnLst>
                                     <p:set>
                                       <p:cBhvr>
-                                        <p:cTn id="29" dur="1" fill="hold">
+                                        <p:cTn id="34" dur="1" fill="hold">
                                           <p:stCondLst>
                                             <p:cond delay="0"/>
                                           </p:stCondLst>
                                         </p:cTn>
                                         <p:tgtEl>
-                                          <p:spTgt spid="7"/>
+                                          <p:spTgt spid="8"/>
                                         </p:tgtEl>
                                         <p:attrNameLst>
                                           <p:attrName>style.visibility</p:attrName>
@@ -8312,9 +8733,9 @@
                                     </p:set>
                                     <p:anim calcmode="lin" valueType="num">
                                       <p:cBhvr additive="base">
-                                        <p:cTn id="30" dur="550" fill="hold"/>
-                                        <p:tgtEl>
-                                          <p:spTgt spid="7"/>
+                                        <p:cTn id="35" dur="550" fill="hold"/>
+                                        <p:tgtEl>
+                                          <p:spTgt spid="8"/>
                                         </p:tgtEl>
                                         <p:attrNameLst>
                                           <p:attrName>ppt_x</p:attrName>
@@ -8335,98 +8756,7 @@
                                     </p:anim>
                                     <p:anim calcmode="lin" valueType="num">
                                       <p:cBhvr additive="base">
-                                        <p:cTn id="31" dur="550" fill="hold"/>
-                                        <p:tgtEl>
-                                          <p:spTgt spid="7"/>
-                                        </p:tgtEl>
-                                        <p:attrNameLst>
-                                          <p:attrName>ppt_y</p:attrName>
-                                        </p:attrNameLst>
-                                      </p:cBhvr>
-                                      <p:tavLst>
-                                        <p:tav tm="0">
-                                          <p:val>
-                                            <p:strVal val="#ppt_y"/>
-                                          </p:val>
-                                        </p:tav>
-                                        <p:tav tm="100000">
-                                          <p:val>
-                                            <p:strVal val="#ppt_y"/>
-                                          </p:val>
-                                        </p:tav>
-                                      </p:tavLst>
-                                    </p:anim>
-                                  </p:childTnLst>
-                                </p:cTn>
-                              </p:par>
-                            </p:childTnLst>
-                          </p:cTn>
-                        </p:par>
-                      </p:childTnLst>
-                    </p:cTn>
-                  </p:par>
-                  <p:par>
-                    <p:cTn id="32" fill="hold">
-                      <p:stCondLst>
-                        <p:cond delay="indefinite"/>
-                      </p:stCondLst>
-                      <p:childTnLst>
-                        <p:par>
-                          <p:cTn id="33" fill="hold">
-                            <p:stCondLst>
-                              <p:cond delay="0"/>
-                            </p:stCondLst>
-                            <p:childTnLst>
-                              <p:par>
-                                <p:cTn id="34" presetID="2" presetClass="entr" presetSubtype="8" fill="hold" decel="100000" grpId="0" nodeType="clickEffect">
-                                  <p:stCondLst>
-                                    <p:cond delay="0"/>
-                                  </p:stCondLst>
-                                  <p:childTnLst>
-                                    <p:set>
-                                      <p:cBhvr>
-                                        <p:cTn id="35" dur="1" fill="hold">
-                                          <p:stCondLst>
-                                            <p:cond delay="0"/>
-                                          </p:stCondLst>
-                                        </p:cTn>
-                                        <p:tgtEl>
-                                          <p:spTgt spid="8"/>
-                                        </p:tgtEl>
-                                        <p:attrNameLst>
-                                          <p:attrName>style.visibility</p:attrName>
-                                        </p:attrNameLst>
-                                      </p:cBhvr>
-                                      <p:to>
-                                        <p:strVal val="visible"/>
-                                      </p:to>
-                                    </p:set>
-                                    <p:anim calcmode="lin" valueType="num">
-                                      <p:cBhvr additive="base">
                                         <p:cTn id="36" dur="550" fill="hold"/>
-                                        <p:tgtEl>
-                                          <p:spTgt spid="8"/>
-                                        </p:tgtEl>
-                                        <p:attrNameLst>
-                                          <p:attrName>ppt_x</p:attrName>
-                                        </p:attrNameLst>
-                                      </p:cBhvr>
-                                      <p:tavLst>
-                                        <p:tav tm="0">
-                                          <p:val>
-                                            <p:strVal val="0-#ppt_w/2"/>
-                                          </p:val>
-                                        </p:tav>
-                                        <p:tav tm="100000">
-                                          <p:val>
-                                            <p:strVal val="#ppt_x"/>
-                                          </p:val>
-                                        </p:tav>
-                                      </p:tavLst>
-                                    </p:anim>
-                                    <p:anim calcmode="lin" valueType="num">
-                                      <p:cBhvr additive="base">
-                                        <p:cTn id="37" dur="550" fill="hold"/>
                                         <p:tgtEl>
                                           <p:spTgt spid="8"/>
                                         </p:tgtEl>
@@ -9049,8 +9379,8 @@
         </p:blipFill>
         <p:spPr>
           <a:xfrm>
-            <a:off x="1112492" y="2255463"/>
-            <a:ext cx="3413674" cy="1280127"/>
+            <a:off x="6751151" y="1645878"/>
+            <a:ext cx="1661118" cy="1508722"/>
           </a:xfrm>
           <a:prstGeom prst="rect">
             <a:avLst/>
@@ -9059,7 +9389,7 @@
       </p:pic>
       <p:pic>
         <p:nvPicPr>
-          <p:cNvPr id="4" name="Picture 3" descr="c7_1_1.jpg"/>
+          <p:cNvPr id="4" name="Picture 3" descr="c7_2_0.jpg"/>
           <p:cNvPicPr>
             <a:picLocks noChangeAspect="1"/>
           </p:cNvPicPr>
@@ -9073,8 +9403,8 @@
         </p:blipFill>
         <p:spPr>
           <a:xfrm>
-            <a:off x="426709" y="4084217"/>
-            <a:ext cx="3413674" cy="822939"/>
+            <a:off x="8656103" y="1950671"/>
+            <a:ext cx="899137" cy="1203929"/>
           </a:xfrm>
           <a:prstGeom prst="rect">
             <a:avLst/>
@@ -9083,7 +9413,7 @@
       </p:pic>
       <p:pic>
         <p:nvPicPr>
-          <p:cNvPr id="5" name="Picture 4" descr="c7_2_0.jpg"/>
+          <p:cNvPr id="5" name="Picture 4" descr="c7_3_0.jpg"/>
           <p:cNvPicPr>
             <a:picLocks noChangeAspect="1"/>
           </p:cNvPicPr>
@@ -9097,8 +9427,8 @@
         </p:blipFill>
         <p:spPr>
           <a:xfrm>
-            <a:off x="426709" y="4693802"/>
-            <a:ext cx="4328051" cy="822939"/>
+            <a:off x="10180065" y="1645878"/>
+            <a:ext cx="899137" cy="1508722"/>
           </a:xfrm>
           <a:prstGeom prst="rect">
             <a:avLst/>
@@ -9107,7 +9437,7 @@
       </p:pic>
       <p:pic>
         <p:nvPicPr>
-          <p:cNvPr id="6" name="Picture 5" descr="c7_3_0.jpg"/>
+          <p:cNvPr id="6" name="Picture 5" descr="c7_4_0.jpg"/>
           <p:cNvPicPr>
             <a:picLocks noChangeAspect="1"/>
           </p:cNvPicPr>
@@ -9121,8 +9451,8 @@
         </p:blipFill>
         <p:spPr>
           <a:xfrm>
-            <a:off x="6598754" y="2103067"/>
-            <a:ext cx="4556646" cy="3642268"/>
+            <a:off x="6446358" y="3093642"/>
+            <a:ext cx="5090032" cy="3108882"/>
           </a:xfrm>
           <a:prstGeom prst="rect">
             <a:avLst/>
@@ -9131,7 +9461,7 @@
       </p:pic>
       <p:pic>
         <p:nvPicPr>
-          <p:cNvPr id="7" name="Picture 6" descr="c7_4_0.jpg"/>
+          <p:cNvPr id="7" name="Picture 6" descr="c7_4_1.jpg"/>
           <p:cNvPicPr>
             <a:picLocks noChangeAspect="1"/>
           </p:cNvPicPr>
@@ -9145,18 +9475,42 @@
         </p:blipFill>
         <p:spPr>
           <a:xfrm>
-            <a:off x="0" y="5836773"/>
-            <a:ext cx="12191695" cy="1021054"/>
+            <a:off x="426709" y="4389010"/>
+            <a:ext cx="5090032" cy="746741"/>
           </a:xfrm>
           <a:prstGeom prst="rect">
             <a:avLst/>
           </a:prstGeom>
         </p:spPr>
       </p:pic>
+      <p:pic>
+        <p:nvPicPr>
+          <p:cNvPr id="8" name="Picture 7" descr="c7_5_0.jpg"/>
+          <p:cNvPicPr>
+            <a:picLocks noChangeAspect="1"/>
+          </p:cNvPicPr>
+          <p:nvPr/>
+        </p:nvPicPr>
+        <p:blipFill>
+          <a:blip r:embed="rId8"/>
+          <a:stretch>
+            <a:fillRect/>
+          </a:stretch>
+        </p:blipFill>
+        <p:spPr>
+          <a:xfrm>
+            <a:off x="0" y="5836773"/>
+            <a:ext cx="12191695" cy="1021054"/>
+          </a:xfrm>
+          <a:prstGeom prst="rect">
+            <a:avLst/>
+          </a:prstGeom>
+        </p:spPr>
+      </p:pic>
       <p:sp>
         <p:nvSpPr>
-          <p:cNvPr id="8" name="TextBox 7">
-            <a:hlinkClick action="ppaction://hlinksldjump" r:id="rId8"/>
+          <p:cNvPr id="9" name="TextBox 8">
+            <a:hlinkClick action="ppaction://hlinksldjump" r:id="rId9"/>
           </p:cNvPr>
           <p:cNvSpPr txBox="1"/>
           <p:nvPr/>
@@ -9221,7 +9575,7 @@
                             </p:stCondLst>
                             <p:childTnLst>
                               <p:par>
-                                <p:cTn id="5" presetID="10" presetClass="entr" presetSubtype="0" fill="hold" grpId="0" nodeType="clickEffect">
+                                <p:cTn id="5" presetID="2" presetClass="entr" presetSubtype="4" fill="hold" decel="100000" grpId="0" nodeType="clickEffect">
                                   <p:stCondLst>
                                     <p:cond delay="0"/>
                                   </p:stCondLst>
@@ -9244,99 +9598,11 @@
                                         <p:strVal val="visible"/>
                                       </p:to>
                                     </p:set>
-                                    <p:animEffect transition="in" filter="fade">
-                                      <p:cBhvr>
-                                        <p:cTn id="7" dur="450"/>
-                                        <p:tgtEl>
-                                          <p:spTgt spid="3"/>
-                                        </p:tgtEl>
-                                      </p:cBhvr>
-                                    </p:animEffect>
-                                  </p:childTnLst>
-                                </p:cTn>
-                              </p:par>
-                              <p:par>
-                                <p:cTn id="8" presetID="10" presetClass="entr" presetSubtype="0" fill="hold" grpId="0" nodeType="withEffect">
-                                  <p:stCondLst>
-                                    <p:cond delay="120"/>
-                                  </p:stCondLst>
-                                  <p:childTnLst>
-                                    <p:set>
-                                      <p:cBhvr>
-                                        <p:cTn id="9" dur="1" fill="hold">
-                                          <p:stCondLst>
-                                            <p:cond delay="0"/>
-                                          </p:stCondLst>
-                                        </p:cTn>
-                                        <p:tgtEl>
-                                          <p:spTgt spid="4"/>
-                                        </p:tgtEl>
-                                        <p:attrNameLst>
-                                          <p:attrName>style.visibility</p:attrName>
-                                        </p:attrNameLst>
-                                      </p:cBhvr>
-                                      <p:to>
-                                        <p:strVal val="visible"/>
-                                      </p:to>
-                                    </p:set>
-                                    <p:animEffect transition="in" filter="fade">
-                                      <p:cBhvr>
-                                        <p:cTn id="10" dur="450"/>
-                                        <p:tgtEl>
-                                          <p:spTgt spid="4"/>
-                                        </p:tgtEl>
-                                      </p:cBhvr>
-                                    </p:animEffect>
-                                  </p:childTnLst>
-                                </p:cTn>
-                              </p:par>
-                            </p:childTnLst>
-                          </p:cTn>
-                        </p:par>
-                      </p:childTnLst>
-                    </p:cTn>
-                  </p:par>
-                  <p:par>
-                    <p:cTn id="11" fill="hold">
-                      <p:stCondLst>
-                        <p:cond delay="indefinite"/>
-                      </p:stCondLst>
-                      <p:childTnLst>
-                        <p:par>
-                          <p:cTn id="12" fill="hold">
-                            <p:stCondLst>
-                              <p:cond delay="0"/>
-                            </p:stCondLst>
-                            <p:childTnLst>
-                              <p:par>
-                                <p:cTn id="13" presetID="2" presetClass="entr" presetSubtype="8" fill="hold" decel="100000" grpId="0" nodeType="clickEffect">
-                                  <p:stCondLst>
-                                    <p:cond delay="0"/>
-                                  </p:stCondLst>
-                                  <p:childTnLst>
-                                    <p:set>
-                                      <p:cBhvr>
-                                        <p:cTn id="14" dur="1" fill="hold">
-                                          <p:stCondLst>
-                                            <p:cond delay="0"/>
-                                          </p:stCondLst>
-                                        </p:cTn>
-                                        <p:tgtEl>
-                                          <p:spTgt spid="5"/>
-                                        </p:tgtEl>
-                                        <p:attrNameLst>
-                                          <p:attrName>style.visibility</p:attrName>
-                                        </p:attrNameLst>
-                                      </p:cBhvr>
-                                      <p:to>
-                                        <p:strVal val="visible"/>
-                                      </p:to>
-                                    </p:set>
                                     <p:anim calcmode="lin" valueType="num">
                                       <p:cBhvr additive="base">
-                                        <p:cTn id="15" dur="550" fill="hold"/>
-                                        <p:tgtEl>
-                                          <p:spTgt spid="5"/>
+                                        <p:cTn id="7" dur="550" fill="hold"/>
+                                        <p:tgtEl>
+                                          <p:spTgt spid="3"/>
                                         </p:tgtEl>
                                         <p:attrNameLst>
                                           <p:attrName>ppt_x</p:attrName>
@@ -9345,7 +9611,7 @@
                                       <p:tavLst>
                                         <p:tav tm="0">
                                           <p:val>
-                                            <p:strVal val="0-#ppt_w/2"/>
+                                            <p:strVal val="#ppt_x"/>
                                           </p:val>
                                         </p:tav>
                                         <p:tav tm="100000">
@@ -9357,9 +9623,9 @@
                                     </p:anim>
                                     <p:anim calcmode="lin" valueType="num">
                                       <p:cBhvr additive="base">
-                                        <p:cTn id="16" dur="550" fill="hold"/>
-                                        <p:tgtEl>
-                                          <p:spTgt spid="5"/>
+                                        <p:cTn id="8" dur="550" fill="hold"/>
+                                        <p:tgtEl>
+                                          <p:spTgt spid="3"/>
                                         </p:tgtEl>
                                         <p:attrNameLst>
                                           <p:attrName>ppt_y</p:attrName>
@@ -9368,7 +9634,7 @@
                                       <p:tavLst>
                                         <p:tav tm="0">
                                           <p:val>
-                                            <p:strVal val="#ppt_y"/>
+                                            <p:strVal val="1+#ppt_h/2"/>
                                           </p:val>
                                         </p:tav>
                                         <p:tav tm="100000">
@@ -9388,32 +9654,32 @@
                     </p:cTn>
                   </p:par>
                   <p:par>
-                    <p:cTn id="17" fill="hold">
+                    <p:cTn id="9" fill="hold">
                       <p:stCondLst>
                         <p:cond delay="indefinite"/>
                       </p:stCondLst>
                       <p:childTnLst>
                         <p:par>
-                          <p:cTn id="18" fill="hold">
+                          <p:cTn id="10" fill="hold">
                             <p:stCondLst>
                               <p:cond delay="0"/>
                             </p:stCondLst>
                             <p:childTnLst>
                               <p:par>
-                                <p:cTn id="19" presetID="53" presetClass="entr" presetSubtype="16" fill="hold" grpId="0" nodeType="clickEffect">
+                                <p:cTn id="11" presetID="2" presetClass="entr" presetSubtype="4" fill="hold" decel="100000" grpId="0" nodeType="clickEffect">
                                   <p:stCondLst>
                                     <p:cond delay="0"/>
                                   </p:stCondLst>
                                   <p:childTnLst>
                                     <p:set>
                                       <p:cBhvr>
-                                        <p:cTn id="20" dur="1" fill="hold">
+                                        <p:cTn id="12" dur="1" fill="hold">
                                           <p:stCondLst>
                                             <p:cond delay="0"/>
                                           </p:stCondLst>
                                         </p:cTn>
                                         <p:tgtEl>
-                                          <p:spTgt spid="6"/>
+                                          <p:spTgt spid="4"/>
                                         </p:tgtEl>
                                         <p:attrNameLst>
                                           <p:attrName>style.visibility</p:attrName>
@@ -9425,30 +9691,212 @@
                                     </p:set>
                                     <p:anim calcmode="lin" valueType="num">
                                       <p:cBhvr additive="base">
-                                        <p:cTn id="21" dur="420" fill="hold"/>
-                                        <p:tgtEl>
-                                          <p:spTgt spid="6"/>
-                                        </p:tgtEl>
-                                        <p:attrNameLst>
-                                          <p:attrName>ppt_w</p:attrName>
+                                        <p:cTn id="13" dur="550" fill="hold"/>
+                                        <p:tgtEl>
+                                          <p:spTgt spid="4"/>
+                                        </p:tgtEl>
+                                        <p:attrNameLst>
+                                          <p:attrName>ppt_x</p:attrName>
                                         </p:attrNameLst>
                                       </p:cBhvr>
                                       <p:tavLst>
                                         <p:tav tm="0">
                                           <p:val>
-                                            <p:strVal val="0"/>
+                                            <p:strVal val="#ppt_x"/>
                                           </p:val>
                                         </p:tav>
                                         <p:tav tm="100000">
                                           <p:val>
-                                            <p:strVal val="#ppt_w"/>
+                                            <p:strVal val="#ppt_x"/>
                                           </p:val>
                                         </p:tav>
                                       </p:tavLst>
                                     </p:anim>
                                     <p:anim calcmode="lin" valueType="num">
                                       <p:cBhvr additive="base">
-                                        <p:cTn id="22" dur="420" fill="hold"/>
+                                        <p:cTn id="14" dur="550" fill="hold"/>
+                                        <p:tgtEl>
+                                          <p:spTgt spid="4"/>
+                                        </p:tgtEl>
+                                        <p:attrNameLst>
+                                          <p:attrName>ppt_y</p:attrName>
+                                        </p:attrNameLst>
+                                      </p:cBhvr>
+                                      <p:tavLst>
+                                        <p:tav tm="0">
+                                          <p:val>
+                                            <p:strVal val="1+#ppt_h/2"/>
+                                          </p:val>
+                                        </p:tav>
+                                        <p:tav tm="100000">
+                                          <p:val>
+                                            <p:strVal val="#ppt_y"/>
+                                          </p:val>
+                                        </p:tav>
+                                      </p:tavLst>
+                                    </p:anim>
+                                  </p:childTnLst>
+                                </p:cTn>
+                              </p:par>
+                            </p:childTnLst>
+                          </p:cTn>
+                        </p:par>
+                      </p:childTnLst>
+                    </p:cTn>
+                  </p:par>
+                  <p:par>
+                    <p:cTn id="15" fill="hold">
+                      <p:stCondLst>
+                        <p:cond delay="indefinite"/>
+                      </p:stCondLst>
+                      <p:childTnLst>
+                        <p:par>
+                          <p:cTn id="16" fill="hold">
+                            <p:stCondLst>
+                              <p:cond delay="0"/>
+                            </p:stCondLst>
+                            <p:childTnLst>
+                              <p:par>
+                                <p:cTn id="17" presetID="2" presetClass="entr" presetSubtype="4" fill="hold" decel="100000" grpId="0" nodeType="clickEffect">
+                                  <p:stCondLst>
+                                    <p:cond delay="0"/>
+                                  </p:stCondLst>
+                                  <p:childTnLst>
+                                    <p:set>
+                                      <p:cBhvr>
+                                        <p:cTn id="18" dur="1" fill="hold">
+                                          <p:stCondLst>
+                                            <p:cond delay="0"/>
+                                          </p:stCondLst>
+                                        </p:cTn>
+                                        <p:tgtEl>
+                                          <p:spTgt spid="5"/>
+                                        </p:tgtEl>
+                                        <p:attrNameLst>
+                                          <p:attrName>style.visibility</p:attrName>
+                                        </p:attrNameLst>
+                                      </p:cBhvr>
+                                      <p:to>
+                                        <p:strVal val="visible"/>
+                                      </p:to>
+                                    </p:set>
+                                    <p:anim calcmode="lin" valueType="num">
+                                      <p:cBhvr additive="base">
+                                        <p:cTn id="19" dur="550" fill="hold"/>
+                                        <p:tgtEl>
+                                          <p:spTgt spid="5"/>
+                                        </p:tgtEl>
+                                        <p:attrNameLst>
+                                          <p:attrName>ppt_x</p:attrName>
+                                        </p:attrNameLst>
+                                      </p:cBhvr>
+                                      <p:tavLst>
+                                        <p:tav tm="0">
+                                          <p:val>
+                                            <p:strVal val="#ppt_x"/>
+                                          </p:val>
+                                        </p:tav>
+                                        <p:tav tm="100000">
+                                          <p:val>
+                                            <p:strVal val="#ppt_x"/>
+                                          </p:val>
+                                        </p:tav>
+                                      </p:tavLst>
+                                    </p:anim>
+                                    <p:anim calcmode="lin" valueType="num">
+                                      <p:cBhvr additive="base">
+                                        <p:cTn id="20" dur="550" fill="hold"/>
+                                        <p:tgtEl>
+                                          <p:spTgt spid="5"/>
+                                        </p:tgtEl>
+                                        <p:attrNameLst>
+                                          <p:attrName>ppt_y</p:attrName>
+                                        </p:attrNameLst>
+                                      </p:cBhvr>
+                                      <p:tavLst>
+                                        <p:tav tm="0">
+                                          <p:val>
+                                            <p:strVal val="1+#ppt_h/2"/>
+                                          </p:val>
+                                        </p:tav>
+                                        <p:tav tm="100000">
+                                          <p:val>
+                                            <p:strVal val="#ppt_y"/>
+                                          </p:val>
+                                        </p:tav>
+                                      </p:tavLst>
+                                    </p:anim>
+                                  </p:childTnLst>
+                                </p:cTn>
+                              </p:par>
+                            </p:childTnLst>
+                          </p:cTn>
+                        </p:par>
+                      </p:childTnLst>
+                    </p:cTn>
+                  </p:par>
+                  <p:par>
+                    <p:cTn id="21" fill="hold">
+                      <p:stCondLst>
+                        <p:cond delay="indefinite"/>
+                      </p:stCondLst>
+                      <p:childTnLst>
+                        <p:par>
+                          <p:cTn id="22" fill="hold">
+                            <p:stCondLst>
+                              <p:cond delay="0"/>
+                            </p:stCondLst>
+                            <p:childTnLst>
+                              <p:par>
+                                <p:cTn id="23" presetID="53" presetClass="entr" presetSubtype="16" fill="hold" grpId="0" nodeType="clickEffect">
+                                  <p:stCondLst>
+                                    <p:cond delay="0"/>
+                                  </p:stCondLst>
+                                  <p:childTnLst>
+                                    <p:set>
+                                      <p:cBhvr>
+                                        <p:cTn id="24" dur="1" fill="hold">
+                                          <p:stCondLst>
+                                            <p:cond delay="0"/>
+                                          </p:stCondLst>
+                                        </p:cTn>
+                                        <p:tgtEl>
+                                          <p:spTgt spid="6"/>
+                                        </p:tgtEl>
+                                        <p:attrNameLst>
+                                          <p:attrName>style.visibility</p:attrName>
+                                        </p:attrNameLst>
+                                      </p:cBhvr>
+                                      <p:to>
+                                        <p:strVal val="visible"/>
+                                      </p:to>
+                                    </p:set>
+                                    <p:anim calcmode="lin" valueType="num">
+                                      <p:cBhvr additive="base">
+                                        <p:cTn id="25" dur="420" fill="hold"/>
+                                        <p:tgtEl>
+                                          <p:spTgt spid="6"/>
+                                        </p:tgtEl>
+                                        <p:attrNameLst>
+                                          <p:attrName>ppt_w</p:attrName>
+                                        </p:attrNameLst>
+                                      </p:cBhvr>
+                                      <p:tavLst>
+                                        <p:tav tm="0">
+                                          <p:val>
+                                            <p:strVal val="0"/>
+                                          </p:val>
+                                        </p:tav>
+                                        <p:tav tm="100000">
+                                          <p:val>
+                                            <p:strVal val="#ppt_w"/>
+                                          </p:val>
+                                        </p:tav>
+                                      </p:tavLst>
+                                    </p:anim>
+                                    <p:anim calcmode="lin" valueType="num">
+                                      <p:cBhvr additive="base">
+                                        <p:cTn id="26" dur="420" fill="hold"/>
                                         <p:tgtEl>
                                           <p:spTgt spid="6"/>
                                         </p:tgtEl>
@@ -9471,9 +9919,90 @@
                                     </p:anim>
                                     <p:animEffect transition="in" filter="fade">
                                       <p:cBhvr>
-                                        <p:cTn id="23" dur="420"/>
+                                        <p:cTn id="27" dur="420"/>
                                         <p:tgtEl>
                                           <p:spTgt spid="6"/>
+                                        </p:tgtEl>
+                                      </p:cBhvr>
+                                    </p:animEffect>
+                                  </p:childTnLst>
+                                </p:cTn>
+                              </p:par>
+                              <p:par>
+                                <p:cTn id="28" presetID="53" presetClass="entr" presetSubtype="16" fill="hold" grpId="0" nodeType="withEffect">
+                                  <p:stCondLst>
+                                    <p:cond delay="120"/>
+                                  </p:stCondLst>
+                                  <p:childTnLst>
+                                    <p:set>
+                                      <p:cBhvr>
+                                        <p:cTn id="29" dur="1" fill="hold">
+                                          <p:stCondLst>
+                                            <p:cond delay="0"/>
+                                          </p:stCondLst>
+                                        </p:cTn>
+                                        <p:tgtEl>
+                                          <p:spTgt spid="7"/>
+                                        </p:tgtEl>
+                                        <p:attrNameLst>
+                                          <p:attrName>style.visibility</p:attrName>
+                                        </p:attrNameLst>
+                                      </p:cBhvr>
+                                      <p:to>
+                                        <p:strVal val="visible"/>
+                                      </p:to>
+                                    </p:set>
+                                    <p:anim calcmode="lin" valueType="num">
+                                      <p:cBhvr additive="base">
+                                        <p:cTn id="30" dur="420" fill="hold"/>
+                                        <p:tgtEl>
+                                          <p:spTgt spid="7"/>
+                                        </p:tgtEl>
+                                        <p:attrNameLst>
+                                          <p:attrName>ppt_w</p:attrName>
+                                        </p:attrNameLst>
+                                      </p:cBhvr>
+                                      <p:tavLst>
+                                        <p:tav tm="0">
+                                          <p:val>
+                                            <p:strVal val="0"/>
+                                          </p:val>
+                                        </p:tav>
+                                        <p:tav tm="100000">
+                                          <p:val>
+                                            <p:strVal val="#ppt_w"/>
+                                          </p:val>
+                                        </p:tav>
+                                      </p:tavLst>
+                                    </p:anim>
+                                    <p:anim calcmode="lin" valueType="num">
+                                      <p:cBhvr additive="base">
+                                        <p:cTn id="31" dur="420" fill="hold"/>
+                                        <p:tgtEl>
+                                          <p:spTgt spid="7"/>
+                                        </p:tgtEl>
+                                        <p:attrNameLst>
+                                          <p:attrName>ppt_h</p:attrName>
+                                        </p:attrNameLst>
+                                      </p:cBhvr>
+                                      <p:tavLst>
+                                        <p:tav tm="0">
+                                          <p:val>
+                                            <p:strVal val="0"/>
+                                          </p:val>
+                                        </p:tav>
+                                        <p:tav tm="100000">
+                                          <p:val>
+                                            <p:strVal val="#ppt_h"/>
+                                          </p:val>
+                                        </p:tav>
+                                      </p:tavLst>
+                                    </p:anim>
+                                    <p:animEffect transition="in" filter="fade">
+                                      <p:cBhvr>
+                                        <p:cTn id="32" dur="420"/>
+                                        <p:tgtEl>
+                                          <p:spTgt spid="7"/>
                                         </p:tgtEl>
                                       </p:cBhvr>
                                     </p:animEffect>
@@ -9487,32 +10016,32 @@
                     </p:cTn>
                   </p:par>
                   <p:par>
-                    <p:cTn id="24" fill="hold">
+                    <p:cTn id="33" fill="hold">
                       <p:stCondLst>
                         <p:cond delay="indefinite"/>
                       </p:stCondLst>
                       <p:childTnLst>
                         <p:par>
-                          <p:cTn id="25" fill="hold">
+                          <p:cTn id="34" fill="hold">
                             <p:stCondLst>
                               <p:cond delay="0"/>
                             </p:stCondLst>
                             <p:childTnLst>
                               <p:par>
-                                <p:cTn id="26" presetID="2" presetClass="entr" presetSubtype="4" fill="hold" decel="100000" grpId="0" nodeType="clickEffect">
+                                <p:cTn id="35" presetID="2" presetClass="entr" presetSubtype="4" fill="hold" decel="100000" grpId="0" nodeType="clickEffect">
                                   <p:stCondLst>
                                     <p:cond delay="0"/>
                                   </p:stCondLst>
                                   <p:childTnLst>
                                     <p:set>
                                       <p:cBhvr>
-                                        <p:cTn id="27" dur="1" fill="hold">
+                                        <p:cTn id="36" dur="1" fill="hold">
                                           <p:stCondLst>
                                             <p:cond delay="0"/>
                                           </p:stCondLst>
                                         </p:cTn>
                                         <p:tgtEl>
-                                          <p:spTgt spid="7"/>
+                                          <p:spTgt spid="8"/>
                                         </p:tgtEl>
                                         <p:attrNameLst>
                                           <p:attrName>style.visibility</p:attrName>
@@ -9524,9 +10053,9 @@
                                     </p:set>
                                     <p:anim calcmode="lin" valueType="num">
                                       <p:cBhvr additive="base">
-                                        <p:cTn id="28" dur="550" fill="hold"/>
-                                        <p:tgtEl>
-                                          <p:spTgt spid="7"/>
+                                        <p:cTn id="37" dur="550" fill="hold"/>
+                                        <p:tgtEl>
+                                          <p:spTgt spid="8"/>
                                         </p:tgtEl>
                                         <p:attrNameLst>
                                           <p:attrName>ppt_x</p:attrName>
@@ -9547,9 +10076,9 @@
                                     </p:anim>
                                     <p:anim calcmode="lin" valueType="num">
                                       <p:cBhvr additive="base">
-                                        <p:cTn id="29" dur="550" fill="hold"/>
-                                        <p:tgtEl>
-                                          <p:spTgt spid="7"/>
+                                        <p:cTn id="38" dur="550" fill="hold"/>
+                                        <p:tgtEl>
+                                          <p:spTgt spid="8"/>
                                         </p:tgtEl>
                                         <p:attrNameLst>
                                           <p:attrName>ppt_y</p:attrName>
@@ -9652,66 +10181,114 @@
         </p:blipFill>
         <p:spPr>
           <a:xfrm>
-            <a:off x="10180065" y="4160415"/>
-            <a:ext cx="1584920" cy="2042108"/>
+            <a:off x="3246038" y="1569680"/>
+            <a:ext cx="1737316" cy="1584920"/>
           </a:xfrm>
           <a:prstGeom prst="rect">
             <a:avLst/>
           </a:prstGeom>
         </p:spPr>
       </p:pic>
-      <p:sp>
-        <p:nvSpPr>
-          <p:cNvPr id="4" name="Rectangle 3">
-            <a:hlinkClick r:id="rId4"/>
-          </p:cNvPr>
-          <p:cNvSpPr/>
+      <p:pic>
+        <p:nvPicPr>
+          <p:cNvPr id="4" name="Picture 3" descr="c8_2_0.jpg"/>
+          <p:cNvPicPr>
+            <a:picLocks noChangeAspect="1"/>
+          </p:cNvPicPr>
           <p:nvPr/>
-        </p:nvSpPr>
-        <p:spPr>
-          <a:xfrm>
-            <a:off x="655303" y="4724281"/>
-            <a:ext cx="2523109" cy="754361"/>
+        </p:nvPicPr>
+        <p:blipFill>
+          <a:blip r:embed="rId4"/>
+          <a:stretch>
+            <a:fillRect/>
+          </a:stretch>
+        </p:blipFill>
+        <p:spPr>
+          <a:xfrm>
+            <a:off x="4998594" y="1569680"/>
+            <a:ext cx="1737316" cy="1584920"/>
           </a:xfrm>
           <a:prstGeom prst="rect">
             <a:avLst/>
           </a:prstGeom>
-          <a:solidFill>
-            <a:srgbClr val="FFFFFF">
-              <a:alpha val="0"/>
-            </a:srgbClr>
-          </a:solidFill>
-          <a:ln>
-            <a:noFill/>
-          </a:ln>
-          <a:effectLst/>
-        </p:spPr>
-        <p:style>
-          <a:lnRef idx="1">
-            <a:schemeClr val="accent1"/>
-          </a:lnRef>
-          <a:fillRef idx="3">
-            <a:schemeClr val="accent1"/>
-          </a:fillRef>
-          <a:effectRef idx="2">
-            <a:schemeClr val="accent1"/>
-          </a:effectRef>
-          <a:fontRef idx="minor">
-            <a:schemeClr val="lt1"/>
-          </a:fontRef>
-        </p:style>
-        <p:txBody>
-          <a:bodyPr rtlCol="0" anchor="ctr"/>
-          <a:lstStyle/>
-          <a:p>
-            <a:pPr algn="ctr"/>
-          </a:p>
-        </p:txBody>
-      </p:sp>
+        </p:spPr>
+      </p:pic>
+      <p:pic>
+        <p:nvPicPr>
+          <p:cNvPr id="5" name="Picture 4" descr="c8_3_0.jpg"/>
+          <p:cNvPicPr>
+            <a:picLocks noChangeAspect="1"/>
+          </p:cNvPicPr>
+          <p:nvPr/>
+        </p:nvPicPr>
+        <p:blipFill>
+          <a:blip r:embed="rId5"/>
+          <a:stretch>
+            <a:fillRect/>
+          </a:stretch>
+        </p:blipFill>
+        <p:spPr>
+          <a:xfrm>
+            <a:off x="7208339" y="1569680"/>
+            <a:ext cx="1737316" cy="1584920"/>
+          </a:xfrm>
+          <a:prstGeom prst="rect">
+            <a:avLst/>
+          </a:prstGeom>
+        </p:spPr>
+      </p:pic>
+      <p:pic>
+        <p:nvPicPr>
+          <p:cNvPr id="6" name="Picture 5" descr="c8_4_0.jpg"/>
+          <p:cNvPicPr>
+            <a:picLocks noChangeAspect="1"/>
+          </p:cNvPicPr>
+          <p:nvPr/>
+        </p:nvPicPr>
+        <p:blipFill>
+          <a:blip r:embed="rId6"/>
+          <a:stretch>
+            <a:fillRect/>
+          </a:stretch>
+        </p:blipFill>
+        <p:spPr>
+          <a:xfrm>
+            <a:off x="883897" y="4465208"/>
+            <a:ext cx="5013834" cy="899137"/>
+          </a:xfrm>
+          <a:prstGeom prst="rect">
+            <a:avLst/>
+          </a:prstGeom>
+        </p:spPr>
+      </p:pic>
+      <p:pic>
+        <p:nvPicPr>
+          <p:cNvPr id="7" name="Picture 6" descr="c8_5_0.jpg"/>
+          <p:cNvPicPr>
+            <a:picLocks noChangeAspect="1"/>
+          </p:cNvPicPr>
+          <p:nvPr/>
+        </p:nvPicPr>
+        <p:blipFill>
+          <a:blip r:embed="rId7"/>
+          <a:stretch>
+            <a:fillRect/>
+          </a:stretch>
+        </p:blipFill>
+        <p:spPr>
+          <a:xfrm>
+            <a:off x="0" y="5836773"/>
+            <a:ext cx="12191695" cy="1021054"/>
+          </a:xfrm>
+          <a:prstGeom prst="rect">
+            <a:avLst/>
+          </a:prstGeom>
+        </p:spPr>
+      </p:pic>
       <p:sp>
         <p:nvSpPr>
-          <p:cNvPr id="5" name="TextBox 4">
-            <a:hlinkClick action="ppaction://hlinksldjump" r:id="rId5"/>
+          <p:cNvPr id="8" name="TextBox 7">
+            <a:hlinkClick action="ppaction://hlinksldjump" r:id="rId8"/>
           </p:cNvPr>
           <p:cNvSpPr txBox="1"/>
           <p:nvPr/>
@@ -9776,7 +10353,7 @@
                             </p:stCondLst>
                             <p:childTnLst>
                               <p:par>
-                                <p:cTn id="5" presetID="10" presetClass="entr" presetSubtype="0" fill="hold" grpId="0" nodeType="clickEffect">
+                                <p:cTn id="5" presetID="53" presetClass="entr" presetSubtype="16" fill="hold" grpId="0" nodeType="clickEffect">
                                   <p:stCondLst>
                                     <p:cond delay="0"/>
                                   </p:stCondLst>
@@ -9799,14 +10376,440 @@
                                         <p:strVal val="visible"/>
                                       </p:to>
                                     </p:set>
+                                    <p:anim calcmode="lin" valueType="num">
+                                      <p:cBhvr additive="base">
+                                        <p:cTn id="7" dur="420" fill="hold"/>
+                                        <p:tgtEl>
+                                          <p:spTgt spid="3"/>
+                                        </p:tgtEl>
+                                        <p:attrNameLst>
+                                          <p:attrName>ppt_w</p:attrName>
+                                        </p:attrNameLst>
+                                      </p:cBhvr>
+                                      <p:tavLst>
+                                        <p:tav tm="0">
+                                          <p:val>
+                                            <p:strVal val="0"/>
+                                          </p:val>
+                                        </p:tav>
+                                        <p:tav tm="100000">
+                                          <p:val>
+                                            <p:strVal val="#ppt_w"/>
+                                          </p:val>
+                                        </p:tav>
+                                      </p:tavLst>
+                                    </p:anim>
+                                    <p:anim calcmode="lin" valueType="num">
+                                      <p:cBhvr additive="base">
+                                        <p:cTn id="8" dur="420" fill="hold"/>
+                                        <p:tgtEl>
+                                          <p:spTgt spid="3"/>
+                                        </p:tgtEl>
+                                        <p:attrNameLst>
+                                          <p:attrName>ppt_h</p:attrName>
+                                        </p:attrNameLst>
+                                      </p:cBhvr>
+                                      <p:tavLst>
+                                        <p:tav tm="0">
+                                          <p:val>
+                                            <p:strVal val="0"/>
+                                          </p:val>
+                                        </p:tav>
+                                        <p:tav tm="100000">
+                                          <p:val>
+                                            <p:strVal val="#ppt_h"/>
+                                          </p:val>
+                                        </p:tav>
+                                      </p:tavLst>
+                                    </p:anim>
                                     <p:animEffect transition="in" filter="fade">
                                       <p:cBhvr>
-                                        <p:cTn id="7" dur="450"/>
+                                        <p:cTn id="9" dur="420"/>
                                         <p:tgtEl>
                                           <p:spTgt spid="3"/>
                                         </p:tgtEl>
                                       </p:cBhvr>
                                     </p:animEffect>
+                                  </p:childTnLst>
+                                </p:cTn>
+                              </p:par>
+                            </p:childTnLst>
+                          </p:cTn>
+                        </p:par>
+                      </p:childTnLst>
+                    </p:cTn>
+                  </p:par>
+                  <p:par>
+                    <p:cTn id="10" fill="hold">
+                      <p:stCondLst>
+                        <p:cond delay="indefinite"/>
+                      </p:stCondLst>
+                      <p:childTnLst>
+                        <p:par>
+                          <p:cTn id="11" fill="hold">
+                            <p:stCondLst>
+                              <p:cond delay="0"/>
+                            </p:stCondLst>
+                            <p:childTnLst>
+                              <p:par>
+                                <p:cTn id="12" presetID="53" presetClass="entr" presetSubtype="16" fill="hold" grpId="0" nodeType="clickEffect">
+                                  <p:stCondLst>
+                                    <p:cond delay="0"/>
+                                  </p:stCondLst>
+                                  <p:childTnLst>
+                                    <p:set>
+                                      <p:cBhvr>
+                                        <p:cTn id="13" dur="1" fill="hold">
+                                          <p:stCondLst>
+                                            <p:cond delay="0"/>
+                                          </p:stCondLst>
+                                        </p:cTn>
+                                        <p:tgtEl>
+                                          <p:spTgt spid="4"/>
+                                        </p:tgtEl>
+                                        <p:attrNameLst>
+                                          <p:attrName>style.visibility</p:attrName>
+                                        </p:attrNameLst>
+                                      </p:cBhvr>
+                                      <p:to>
+                                        <p:strVal val="visible"/>
+                                      </p:to>
+                                    </p:set>
+                                    <p:anim calcmode="lin" valueType="num">
+                                      <p:cBhvr additive="base">
+                                        <p:cTn id="14" dur="420" fill="hold"/>
+                                        <p:tgtEl>
+                                          <p:spTgt spid="4"/>
+                                        </p:tgtEl>
+                                        <p:attrNameLst>
+                                          <p:attrName>ppt_w</p:attrName>
+                                        </p:attrNameLst>
+                                      </p:cBhvr>
+                                      <p:tavLst>
+                                        <p:tav tm="0">
+                                          <p:val>
+                                            <p:strVal val="0"/>
+                                          </p:val>
+                                        </p:tav>
+                                        <p:tav tm="100000">
+                                          <p:val>
+                                            <p:strVal val="#ppt_w"/>
+                                          </p:val>
+                                        </p:tav>
+                                      </p:tavLst>
+                                    </p:anim>
+                                    <p:anim calcmode="lin" valueType="num">
+                                      <p:cBhvr additive="base">
+                                        <p:cTn id="15" dur="420" fill="hold"/>
+                                        <p:tgtEl>
+                                          <p:spTgt spid="4"/>
+                                        </p:tgtEl>
+                                        <p:attrNameLst>
+                                          <p:attrName>ppt_h</p:attrName>
+                                        </p:attrNameLst>
+                                      </p:cBhvr>
+                                      <p:tavLst>
+                                        <p:tav tm="0">
+                                          <p:val>
+                                            <p:strVal val="0"/>
+                                          </p:val>
+                                        </p:tav>
+                                        <p:tav tm="100000">
+                                          <p:val>
+                                            <p:strVal val="#ppt_h"/>
+                                          </p:val>
+                                        </p:tav>
+                                      </p:tavLst>
+                                    </p:anim>
+                                    <p:animEffect transition="in" filter="fade">
+                                      <p:cBhvr>
+                                        <p:cTn id="16" dur="420"/>
+                                        <p:tgtEl>
+                                          <p:spTgt spid="4"/>
+                                        </p:tgtEl>
+                                      </p:cBhvr>
+                                    </p:animEffect>
+                                  </p:childTnLst>
+                                </p:cTn>
+                              </p:par>
+                            </p:childTnLst>
+                          </p:cTn>
+                        </p:par>
+                      </p:childTnLst>
+                    </p:cTn>
+                  </p:par>
+                  <p:par>
+                    <p:cTn id="17" fill="hold">
+                      <p:stCondLst>
+                        <p:cond delay="indefinite"/>
+                      </p:stCondLst>
+                      <p:childTnLst>
+                        <p:par>
+                          <p:cTn id="18" fill="hold">
+                            <p:stCondLst>
+                              <p:cond delay="0"/>
+                            </p:stCondLst>
+                            <p:childTnLst>
+                              <p:par>
+                                <p:cTn id="19" presetID="53" presetClass="entr" presetSubtype="16" fill="hold" grpId="0" nodeType="clickEffect">
+                                  <p:stCondLst>
+                                    <p:cond delay="0"/>
+                                  </p:stCondLst>
+                                  <p:childTnLst>
+                                    <p:set>
+                                      <p:cBhvr>
+                                        <p:cTn id="20" dur="1" fill="hold">
+                                          <p:stCondLst>
+                                            <p:cond delay="0"/>
+                                          </p:stCondLst>
+                                        </p:cTn>
+                                        <p:tgtEl>
+                                          <p:spTgt spid="5"/>
+                                        </p:tgtEl>
+                                        <p:attrNameLst>
+                                          <p:attrName>style.visibility</p:attrName>
+                                        </p:attrNameLst>
+                                      </p:cBhvr>
+                                      <p:to>
+                                        <p:strVal val="visible"/>
+                                      </p:to>
+                                    </p:set>
+                                    <p:anim calcmode="lin" valueType="num">
+                                      <p:cBhvr additive="base">
+                                        <p:cTn id="21" dur="420" fill="hold"/>
+                                        <p:tgtEl>
+                                          <p:spTgt spid="5"/>
+                                        </p:tgtEl>
+                                        <p:attrNameLst>
+                                          <p:attrName>ppt_w</p:attrName>
+                                        </p:attrNameLst>
+                                      </p:cBhvr>
+                                      <p:tavLst>
+                                        <p:tav tm="0">
+                                          <p:val>
+                                            <p:strVal val="0"/>
+                                          </p:val>
+                                        </p:tav>
+                                        <p:tav tm="100000">
+                                          <p:val>
+                                            <p:strVal val="#ppt_w"/>
+                                          </p:val>
+                                        </p:tav>
+                                      </p:tavLst>
+                                    </p:anim>
+                                    <p:anim calcmode="lin" valueType="num">
+                                      <p:cBhvr additive="base">
+                                        <p:cTn id="22" dur="420" fill="hold"/>
+                                        <p:tgtEl>
+                                          <p:spTgt spid="5"/>
+                                        </p:tgtEl>
+                                        <p:attrNameLst>
+                                          <p:attrName>ppt_h</p:attrName>
+                                        </p:attrNameLst>
+                                      </p:cBhvr>
+                                      <p:tavLst>
+                                        <p:tav tm="0">
+                                          <p:val>
+                                            <p:strVal val="0"/>
+                                          </p:val>
+                                        </p:tav>
+                                        <p:tav tm="100000">
+                                          <p:val>
+                                            <p:strVal val="#ppt_h"/>
+                                          </p:val>
+                                        </p:tav>
+                                      </p:tavLst>
+                                    </p:anim>
+                                    <p:animEffect transition="in" filter="fade">
+                                      <p:cBhvr>
+                                        <p:cTn id="23" dur="420"/>
+                                        <p:tgtEl>
+                                          <p:spTgt spid="5"/>
+                                        </p:tgtEl>
+                                      </p:cBhvr>
+                                    </p:animEffect>
+                                  </p:childTnLst>
+                                </p:cTn>
+                              </p:par>
+                            </p:childTnLst>
+                          </p:cTn>
+                        </p:par>
+                      </p:childTnLst>
+                    </p:cTn>
+                  </p:par>
+                  <p:par>
+                    <p:cTn id="24" fill="hold">
+                      <p:stCondLst>
+                        <p:cond delay="indefinite"/>
+                      </p:stCondLst>
+                      <p:childTnLst>
+                        <p:par>
+                          <p:cTn id="25" fill="hold">
+                            <p:stCondLst>
+                              <p:cond delay="0"/>
+                            </p:stCondLst>
+                            <p:childTnLst>
+                              <p:par>
+                                <p:cTn id="26" presetID="2" presetClass="entr" presetSubtype="4" fill="hold" decel="100000" grpId="0" nodeType="clickEffect">
+                                  <p:stCondLst>
+                                    <p:cond delay="0"/>
+                                  </p:stCondLst>
+                                  <p:childTnLst>
+                                    <p:set>
+                                      <p:cBhvr>
+                                        <p:cTn id="27" dur="1" fill="hold">
+                                          <p:stCondLst>
+                                            <p:cond delay="0"/>
+                                          </p:stCondLst>
+                                        </p:cTn>
+                                        <p:tgtEl>
+                                          <p:spTgt spid="6"/>
+                                        </p:tgtEl>
+                                        <p:attrNameLst>
+                                          <p:attrName>style.visibility</p:attrName>
+                                        </p:attrNameLst>
+                                      </p:cBhvr>
+                                      <p:to>
+                                        <p:strVal val="visible"/>
+                                      </p:to>
+                                    </p:set>
+                                    <p:anim calcmode="lin" valueType="num">
+                                      <p:cBhvr additive="base">
+                                        <p:cTn id="28" dur="550" fill="hold"/>
+                                        <p:tgtEl>
+                                          <p:spTgt spid="6"/>
+                                        </p:tgtEl>
+                                        <p:attrNameLst>
+                                          <p:attrName>ppt_x</p:attrName>
+                                        </p:attrNameLst>
+                                      </p:cBhvr>
+                                      <p:tavLst>
+                                        <p:tav tm="0">
+                                          <p:val>
+                                            <p:strVal val="#ppt_x"/>
+                                          </p:val>
+                                        </p:tav>
+                                        <p:tav tm="100000">
+                                          <p:val>
+                                            <p:strVal val="#ppt_x"/>
+                                          </p:val>
+                                        </p:tav>
+                                      </p:tavLst>
+                                    </p:anim>
+                                    <p:anim calcmode="lin" valueType="num">
+                                      <p:cBhvr additive="base">
+                                        <p:cTn id="29" dur="550" fill="hold"/>
+                                        <p:tgtEl>
+                                          <p:spTgt spid="6"/>
+                                        </p:tgtEl>
+                                        <p:attrNameLst>
+                                          <p:attrName>ppt_y</p:attrName>
+                                        </p:attrNameLst>
+                                      </p:cBhvr>
+                                      <p:tavLst>
+                                        <p:tav tm="0">
+                                          <p:val>
+                                            <p:strVal val="1+#ppt_h/2"/>
+                                          </p:val>
+                                        </p:tav>
+                                        <p:tav tm="100000">
+                                          <p:val>
+                                            <p:strVal val="#ppt_y"/>
+                                          </p:val>
+                                        </p:tav>
+                                      </p:tavLst>
+                                    </p:anim>
+                                  </p:childTnLst>
+                                </p:cTn>
+                              </p:par>
+                            </p:childTnLst>
+                          </p:cTn>
+                        </p:par>
+                      </p:childTnLst>
+                    </p:cTn>
+                  </p:par>
+                  <p:par>
+                    <p:cTn id="30" fill="hold">
+                      <p:stCondLst>
+                        <p:cond delay="indefinite"/>
+                      </p:stCondLst>
+                      <p:childTnLst>
+                        <p:par>
+                          <p:cTn id="31" fill="hold">
+                            <p:stCondLst>
+                              <p:cond delay="0"/>
+                            </p:stCondLst>
+                            <p:childTnLst>
+                              <p:par>
+                                <p:cTn id="32" presetID="2" presetClass="entr" presetSubtype="4" fill="hold" decel="100000" grpId="0" nodeType="clickEffect">
+                                  <p:stCondLst>
+                                    <p:cond delay="0"/>
+                                  </p:stCondLst>
+                                  <p:childTnLst>
+                                    <p:set>
+                                      <p:cBhvr>
+                                        <p:cTn id="33" dur="1" fill="hold">
+                                          <p:stCondLst>
+                                            <p:cond delay="0"/>
+                                          </p:stCondLst>
+                                        </p:cTn>
+                                        <p:tgtEl>
+                                          <p:spTgt spid="7"/>
+                                        </p:tgtEl>
+                                        <p:attrNameLst>
+                                          <p:attrName>style.visibility</p:attrName>
+                                        </p:attrNameLst>
+                                      </p:cBhvr>
+                                      <p:to>
+                                        <p:strVal val="visible"/>
+                                      </p:to>
+                                    </p:set>
+                                    <p:anim calcmode="lin" valueType="num">
+                                      <p:cBhvr additive="base">
+                                        <p:cTn id="34" dur="550" fill="hold"/>
+                                        <p:tgtEl>
+                                          <p:spTgt spid="7"/>
+                                        </p:tgtEl>
+                                        <p:attrNameLst>
+                                          <p:attrName>ppt_x</p:attrName>
+                                        </p:attrNameLst>
+                                      </p:cBhvr>
+                                      <p:tavLst>
+                                        <p:tav tm="0">
+                                          <p:val>
+                                            <p:strVal val="#ppt_x"/>
+                                          </p:val>
+                                        </p:tav>
+                                        <p:tav tm="100000">
+                                          <p:val>
+                                            <p:strVal val="#ppt_x"/>
+                                          </p:val>
+                                        </p:tav>
+                                      </p:tavLst>
+                                    </p:anim>
+                                    <p:anim calcmode="lin" valueType="num">
+                                      <p:cBhvr additive="base">
+                                        <p:cTn id="35" dur="550" fill="hold"/>
+                                        <p:tgtEl>
+                                          <p:spTgt spid="7"/>
+                                        </p:tgtEl>
+                                        <p:attrNameLst>
+                                          <p:attrName>ppt_y</p:attrName>
+                                        </p:attrNameLst>
+                                      </p:cBhvr>
+                                      <p:tavLst>
+                                        <p:tav tm="0">
+                                          <p:val>
+                                            <p:strVal val="1+#ppt_h/2"/>
+                                          </p:val>
+                                        </p:tav>
+                                        <p:tav tm="100000">
+                                          <p:val>
+                                            <p:strVal val="#ppt_y"/>
+                                          </p:val>
+                                        </p:tav>
+                                      </p:tavLst>
+                                    </p:anim>
                                   </p:childTnLst>
                                 </p:cTn>
                               </p:par>

--- a/temp/files/T2-temp.pptx
+++ b/temp/files/T2-temp.pptx
@@ -4512,8 +4512,8 @@
         </p:blipFill>
         <p:spPr>
           <a:xfrm>
-            <a:off x="9799074" y="4693802"/>
-            <a:ext cx="1737316" cy="1127731"/>
+            <a:off x="10180065" y="4693802"/>
+            <a:ext cx="1356326" cy="1127731"/>
           </a:xfrm>
           <a:prstGeom prst="rect">
             <a:avLst/>
@@ -10229,8 +10229,8 @@
         </p:blipFill>
         <p:spPr>
           <a:xfrm>
-            <a:off x="7208339" y="1569680"/>
-            <a:ext cx="1737316" cy="1584920"/>
+            <a:off x="7055943" y="1569680"/>
+            <a:ext cx="2042108" cy="1584920"/>
           </a:xfrm>
           <a:prstGeom prst="rect">
             <a:avLst/>

--- a/temp/files/T2-temp.pptx
+++ b/temp/files/T2-temp.pptx
@@ -19,6 +19,7 @@
     <p:sldId id="267" r:id="rId18"/>
     <p:sldId id="268" r:id="rId19"/>
     <p:sldId id="269" r:id="rId20"/>
+    <p:sldId id="270" r:id="rId21"/>
   </p:sldIdLst>
   <p:sldSz cx="12191695" cy="6858000" type="screen4x3"/>
   <p:notesSz cx="6858000" cy="9144000"/>
@@ -3339,66 +3340,114 @@
         </p:blipFill>
         <p:spPr>
           <a:xfrm>
-            <a:off x="10180065" y="4160415"/>
-            <a:ext cx="1584920" cy="2042108"/>
+            <a:off x="3246038" y="1569680"/>
+            <a:ext cx="1737316" cy="1584920"/>
           </a:xfrm>
           <a:prstGeom prst="rect">
             <a:avLst/>
           </a:prstGeom>
         </p:spPr>
       </p:pic>
-      <p:sp>
-        <p:nvSpPr>
-          <p:cNvPr id="4" name="Rectangle 3">
-            <a:hlinkClick r:id="rId4"/>
-          </p:cNvPr>
-          <p:cNvSpPr/>
+      <p:pic>
+        <p:nvPicPr>
+          <p:cNvPr id="4" name="Picture 3" descr="c9_2_0.jpg"/>
+          <p:cNvPicPr>
+            <a:picLocks noChangeAspect="1"/>
+          </p:cNvPicPr>
           <p:nvPr/>
-        </p:nvSpPr>
-        <p:spPr>
-          <a:xfrm>
-            <a:off x="655303" y="4724281"/>
-            <a:ext cx="2523109" cy="754361"/>
+        </p:nvPicPr>
+        <p:blipFill>
+          <a:blip r:embed="rId4"/>
+          <a:stretch>
+            <a:fillRect/>
+          </a:stretch>
+        </p:blipFill>
+        <p:spPr>
+          <a:xfrm>
+            <a:off x="4998594" y="1569680"/>
+            <a:ext cx="1737316" cy="1584920"/>
           </a:xfrm>
           <a:prstGeom prst="rect">
             <a:avLst/>
           </a:prstGeom>
-          <a:solidFill>
-            <a:srgbClr val="FFFFFF">
-              <a:alpha val="0"/>
-            </a:srgbClr>
-          </a:solidFill>
-          <a:ln>
-            <a:noFill/>
-          </a:ln>
-          <a:effectLst/>
-        </p:spPr>
-        <p:style>
-          <a:lnRef idx="1">
-            <a:schemeClr val="accent1"/>
-          </a:lnRef>
-          <a:fillRef idx="3">
-            <a:schemeClr val="accent1"/>
-          </a:fillRef>
-          <a:effectRef idx="2">
-            <a:schemeClr val="accent1"/>
-          </a:effectRef>
-          <a:fontRef idx="minor">
-            <a:schemeClr val="lt1"/>
-          </a:fontRef>
-        </p:style>
-        <p:txBody>
-          <a:bodyPr rtlCol="0" anchor="ctr"/>
-          <a:lstStyle/>
-          <a:p>
-            <a:pPr algn="ctr"/>
-          </a:p>
-        </p:txBody>
-      </p:sp>
+        </p:spPr>
+      </p:pic>
+      <p:pic>
+        <p:nvPicPr>
+          <p:cNvPr id="5" name="Picture 4" descr="c9_3_0.jpg"/>
+          <p:cNvPicPr>
+            <a:picLocks noChangeAspect="1"/>
+          </p:cNvPicPr>
+          <p:nvPr/>
+        </p:nvPicPr>
+        <p:blipFill>
+          <a:blip r:embed="rId5"/>
+          <a:stretch>
+            <a:fillRect/>
+          </a:stretch>
+        </p:blipFill>
+        <p:spPr>
+          <a:xfrm>
+            <a:off x="7055943" y="1569680"/>
+            <a:ext cx="2042108" cy="1584920"/>
+          </a:xfrm>
+          <a:prstGeom prst="rect">
+            <a:avLst/>
+          </a:prstGeom>
+        </p:spPr>
+      </p:pic>
+      <p:pic>
+        <p:nvPicPr>
+          <p:cNvPr id="6" name="Picture 5" descr="c9_4_0.jpg"/>
+          <p:cNvPicPr>
+            <a:picLocks noChangeAspect="1"/>
+          </p:cNvPicPr>
+          <p:nvPr/>
+        </p:nvPicPr>
+        <p:blipFill>
+          <a:blip r:embed="rId6"/>
+          <a:stretch>
+            <a:fillRect/>
+          </a:stretch>
+        </p:blipFill>
+        <p:spPr>
+          <a:xfrm>
+            <a:off x="883897" y="4465208"/>
+            <a:ext cx="5013834" cy="899137"/>
+          </a:xfrm>
+          <a:prstGeom prst="rect">
+            <a:avLst/>
+          </a:prstGeom>
+        </p:spPr>
+      </p:pic>
+      <p:pic>
+        <p:nvPicPr>
+          <p:cNvPr id="7" name="Picture 6" descr="c9_5_0.jpg"/>
+          <p:cNvPicPr>
+            <a:picLocks noChangeAspect="1"/>
+          </p:cNvPicPr>
+          <p:nvPr/>
+        </p:nvPicPr>
+        <p:blipFill>
+          <a:blip r:embed="rId7"/>
+          <a:stretch>
+            <a:fillRect/>
+          </a:stretch>
+        </p:blipFill>
+        <p:spPr>
+          <a:xfrm>
+            <a:off x="0" y="5836773"/>
+            <a:ext cx="12191695" cy="1021054"/>
+          </a:xfrm>
+          <a:prstGeom prst="rect">
+            <a:avLst/>
+          </a:prstGeom>
+        </p:spPr>
+      </p:pic>
       <p:sp>
         <p:nvSpPr>
-          <p:cNvPr id="5" name="TextBox 4">
-            <a:hlinkClick action="ppaction://hlinksldjump" r:id="rId5"/>
+          <p:cNvPr id="8" name="TextBox 7">
+            <a:hlinkClick action="ppaction://hlinksldjump" r:id="rId8"/>
           </p:cNvPr>
           <p:cNvSpPr txBox="1"/>
           <p:nvPr/>
@@ -3463,7 +3512,7 @@
                             </p:stCondLst>
                             <p:childTnLst>
                               <p:par>
-                                <p:cTn id="5" presetID="10" presetClass="entr" presetSubtype="0" fill="hold" grpId="0" nodeType="clickEffect">
+                                <p:cTn id="5" presetID="53" presetClass="entr" presetSubtype="16" fill="hold" grpId="0" nodeType="clickEffect">
                                   <p:stCondLst>
                                     <p:cond delay="0"/>
                                   </p:stCondLst>
@@ -3486,14 +3535,440 @@
                                         <p:strVal val="visible"/>
                                       </p:to>
                                     </p:set>
+                                    <p:anim calcmode="lin" valueType="num">
+                                      <p:cBhvr additive="base">
+                                        <p:cTn id="7" dur="420" fill="hold"/>
+                                        <p:tgtEl>
+                                          <p:spTgt spid="3"/>
+                                        </p:tgtEl>
+                                        <p:attrNameLst>
+                                          <p:attrName>ppt_w</p:attrName>
+                                        </p:attrNameLst>
+                                      </p:cBhvr>
+                                      <p:tavLst>
+                                        <p:tav tm="0">
+                                          <p:val>
+                                            <p:strVal val="0"/>
+                                          </p:val>
+                                        </p:tav>
+                                        <p:tav tm="100000">
+                                          <p:val>
+                                            <p:strVal val="#ppt_w"/>
+                                          </p:val>
+                                        </p:tav>
+                                      </p:tavLst>
+                                    </p:anim>
+                                    <p:anim calcmode="lin" valueType="num">
+                                      <p:cBhvr additive="base">
+                                        <p:cTn id="8" dur="420" fill="hold"/>
+                                        <p:tgtEl>
+                                          <p:spTgt spid="3"/>
+                                        </p:tgtEl>
+                                        <p:attrNameLst>
+                                          <p:attrName>ppt_h</p:attrName>
+                                        </p:attrNameLst>
+                                      </p:cBhvr>
+                                      <p:tavLst>
+                                        <p:tav tm="0">
+                                          <p:val>
+                                            <p:strVal val="0"/>
+                                          </p:val>
+                                        </p:tav>
+                                        <p:tav tm="100000">
+                                          <p:val>
+                                            <p:strVal val="#ppt_h"/>
+                                          </p:val>
+                                        </p:tav>
+                                      </p:tavLst>
+                                    </p:anim>
                                     <p:animEffect transition="in" filter="fade">
                                       <p:cBhvr>
-                                        <p:cTn id="7" dur="450"/>
+                                        <p:cTn id="9" dur="420"/>
                                         <p:tgtEl>
                                           <p:spTgt spid="3"/>
                                         </p:tgtEl>
                                       </p:cBhvr>
                                     </p:animEffect>
+                                  </p:childTnLst>
+                                </p:cTn>
+                              </p:par>
+                            </p:childTnLst>
+                          </p:cTn>
+                        </p:par>
+                      </p:childTnLst>
+                    </p:cTn>
+                  </p:par>
+                  <p:par>
+                    <p:cTn id="10" fill="hold">
+                      <p:stCondLst>
+                        <p:cond delay="indefinite"/>
+                      </p:stCondLst>
+                      <p:childTnLst>
+                        <p:par>
+                          <p:cTn id="11" fill="hold">
+                            <p:stCondLst>
+                              <p:cond delay="0"/>
+                            </p:stCondLst>
+                            <p:childTnLst>
+                              <p:par>
+                                <p:cTn id="12" presetID="53" presetClass="entr" presetSubtype="16" fill="hold" grpId="0" nodeType="clickEffect">
+                                  <p:stCondLst>
+                                    <p:cond delay="0"/>
+                                  </p:stCondLst>
+                                  <p:childTnLst>
+                                    <p:set>
+                                      <p:cBhvr>
+                                        <p:cTn id="13" dur="1" fill="hold">
+                                          <p:stCondLst>
+                                            <p:cond delay="0"/>
+                                          </p:stCondLst>
+                                        </p:cTn>
+                                        <p:tgtEl>
+                                          <p:spTgt spid="4"/>
+                                        </p:tgtEl>
+                                        <p:attrNameLst>
+                                          <p:attrName>style.visibility</p:attrName>
+                                        </p:attrNameLst>
+                                      </p:cBhvr>
+                                      <p:to>
+                                        <p:strVal val="visible"/>
+                                      </p:to>
+                                    </p:set>
+                                    <p:anim calcmode="lin" valueType="num">
+                                      <p:cBhvr additive="base">
+                                        <p:cTn id="14" dur="420" fill="hold"/>
+                                        <p:tgtEl>
+                                          <p:spTgt spid="4"/>
+                                        </p:tgtEl>
+                                        <p:attrNameLst>
+                                          <p:attrName>ppt_w</p:attrName>
+                                        </p:attrNameLst>
+                                      </p:cBhvr>
+                                      <p:tavLst>
+                                        <p:tav tm="0">
+                                          <p:val>
+                                            <p:strVal val="0"/>
+                                          </p:val>
+                                        </p:tav>
+                                        <p:tav tm="100000">
+                                          <p:val>
+                                            <p:strVal val="#ppt_w"/>
+                                          </p:val>
+                                        </p:tav>
+                                      </p:tavLst>
+                                    </p:anim>
+                                    <p:anim calcmode="lin" valueType="num">
+                                      <p:cBhvr additive="base">
+                                        <p:cTn id="15" dur="420" fill="hold"/>
+                                        <p:tgtEl>
+                                          <p:spTgt spid="4"/>
+                                        </p:tgtEl>
+                                        <p:attrNameLst>
+                                          <p:attrName>ppt_h</p:attrName>
+                                        </p:attrNameLst>
+                                      </p:cBhvr>
+                                      <p:tavLst>
+                                        <p:tav tm="0">
+                                          <p:val>
+                                            <p:strVal val="0"/>
+                                          </p:val>
+                                        </p:tav>
+                                        <p:tav tm="100000">
+                                          <p:val>
+                                            <p:strVal val="#ppt_h"/>
+                                          </p:val>
+                                        </p:tav>
+                                      </p:tavLst>
+                                    </p:anim>
+                                    <p:animEffect transition="in" filter="fade">
+                                      <p:cBhvr>
+                                        <p:cTn id="16" dur="420"/>
+                                        <p:tgtEl>
+                                          <p:spTgt spid="4"/>
+                                        </p:tgtEl>
+                                      </p:cBhvr>
+                                    </p:animEffect>
+                                  </p:childTnLst>
+                                </p:cTn>
+                              </p:par>
+                            </p:childTnLst>
+                          </p:cTn>
+                        </p:par>
+                      </p:childTnLst>
+                    </p:cTn>
+                  </p:par>
+                  <p:par>
+                    <p:cTn id="17" fill="hold">
+                      <p:stCondLst>
+                        <p:cond delay="indefinite"/>
+                      </p:stCondLst>
+                      <p:childTnLst>
+                        <p:par>
+                          <p:cTn id="18" fill="hold">
+                            <p:stCondLst>
+                              <p:cond delay="0"/>
+                            </p:stCondLst>
+                            <p:childTnLst>
+                              <p:par>
+                                <p:cTn id="19" presetID="53" presetClass="entr" presetSubtype="16" fill="hold" grpId="0" nodeType="clickEffect">
+                                  <p:stCondLst>
+                                    <p:cond delay="0"/>
+                                  </p:stCondLst>
+                                  <p:childTnLst>
+                                    <p:set>
+                                      <p:cBhvr>
+                                        <p:cTn id="20" dur="1" fill="hold">
+                                          <p:stCondLst>
+                                            <p:cond delay="0"/>
+                                          </p:stCondLst>
+                                        </p:cTn>
+                                        <p:tgtEl>
+                                          <p:spTgt spid="5"/>
+                                        </p:tgtEl>
+                                        <p:attrNameLst>
+                                          <p:attrName>style.visibility</p:attrName>
+                                        </p:attrNameLst>
+                                      </p:cBhvr>
+                                      <p:to>
+                                        <p:strVal val="visible"/>
+                                      </p:to>
+                                    </p:set>
+                                    <p:anim calcmode="lin" valueType="num">
+                                      <p:cBhvr additive="base">
+                                        <p:cTn id="21" dur="420" fill="hold"/>
+                                        <p:tgtEl>
+                                          <p:spTgt spid="5"/>
+                                        </p:tgtEl>
+                                        <p:attrNameLst>
+                                          <p:attrName>ppt_w</p:attrName>
+                                        </p:attrNameLst>
+                                      </p:cBhvr>
+                                      <p:tavLst>
+                                        <p:tav tm="0">
+                                          <p:val>
+                                            <p:strVal val="0"/>
+                                          </p:val>
+                                        </p:tav>
+                                        <p:tav tm="100000">
+                                          <p:val>
+                                            <p:strVal val="#ppt_w"/>
+                                          </p:val>
+                                        </p:tav>
+                                      </p:tavLst>
+                                    </p:anim>
+                                    <p:anim calcmode="lin" valueType="num">
+                                      <p:cBhvr additive="base">
+                                        <p:cTn id="22" dur="420" fill="hold"/>
+                                        <p:tgtEl>
+                                          <p:spTgt spid="5"/>
+                                        </p:tgtEl>
+                                        <p:attrNameLst>
+                                          <p:attrName>ppt_h</p:attrName>
+                                        </p:attrNameLst>
+                                      </p:cBhvr>
+                                      <p:tavLst>
+                                        <p:tav tm="0">
+                                          <p:val>
+                                            <p:strVal val="0"/>
+                                          </p:val>
+                                        </p:tav>
+                                        <p:tav tm="100000">
+                                          <p:val>
+                                            <p:strVal val="#ppt_h"/>
+                                          </p:val>
+                                        </p:tav>
+                                      </p:tavLst>
+                                    </p:anim>
+                                    <p:animEffect transition="in" filter="fade">
+                                      <p:cBhvr>
+                                        <p:cTn id="23" dur="420"/>
+                                        <p:tgtEl>
+                                          <p:spTgt spid="5"/>
+                                        </p:tgtEl>
+                                      </p:cBhvr>
+                                    </p:animEffect>
+                                  </p:childTnLst>
+                                </p:cTn>
+                              </p:par>
+                            </p:childTnLst>
+                          </p:cTn>
+                        </p:par>
+                      </p:childTnLst>
+                    </p:cTn>
+                  </p:par>
+                  <p:par>
+                    <p:cTn id="24" fill="hold">
+                      <p:stCondLst>
+                        <p:cond delay="indefinite"/>
+                      </p:stCondLst>
+                      <p:childTnLst>
+                        <p:par>
+                          <p:cTn id="25" fill="hold">
+                            <p:stCondLst>
+                              <p:cond delay="0"/>
+                            </p:stCondLst>
+                            <p:childTnLst>
+                              <p:par>
+                                <p:cTn id="26" presetID="2" presetClass="entr" presetSubtype="4" fill="hold" decel="100000" grpId="0" nodeType="clickEffect">
+                                  <p:stCondLst>
+                                    <p:cond delay="0"/>
+                                  </p:stCondLst>
+                                  <p:childTnLst>
+                                    <p:set>
+                                      <p:cBhvr>
+                                        <p:cTn id="27" dur="1" fill="hold">
+                                          <p:stCondLst>
+                                            <p:cond delay="0"/>
+                                          </p:stCondLst>
+                                        </p:cTn>
+                                        <p:tgtEl>
+                                          <p:spTgt spid="6"/>
+                                        </p:tgtEl>
+                                        <p:attrNameLst>
+                                          <p:attrName>style.visibility</p:attrName>
+                                        </p:attrNameLst>
+                                      </p:cBhvr>
+                                      <p:to>
+                                        <p:strVal val="visible"/>
+                                      </p:to>
+                                    </p:set>
+                                    <p:anim calcmode="lin" valueType="num">
+                                      <p:cBhvr additive="base">
+                                        <p:cTn id="28" dur="550" fill="hold"/>
+                                        <p:tgtEl>
+                                          <p:spTgt spid="6"/>
+                                        </p:tgtEl>
+                                        <p:attrNameLst>
+                                          <p:attrName>ppt_x</p:attrName>
+                                        </p:attrNameLst>
+                                      </p:cBhvr>
+                                      <p:tavLst>
+                                        <p:tav tm="0">
+                                          <p:val>
+                                            <p:strVal val="#ppt_x"/>
+                                          </p:val>
+                                        </p:tav>
+                                        <p:tav tm="100000">
+                                          <p:val>
+                                            <p:strVal val="#ppt_x"/>
+                                          </p:val>
+                                        </p:tav>
+                                      </p:tavLst>
+                                    </p:anim>
+                                    <p:anim calcmode="lin" valueType="num">
+                                      <p:cBhvr additive="base">
+                                        <p:cTn id="29" dur="550" fill="hold"/>
+                                        <p:tgtEl>
+                                          <p:spTgt spid="6"/>
+                                        </p:tgtEl>
+                                        <p:attrNameLst>
+                                          <p:attrName>ppt_y</p:attrName>
+                                        </p:attrNameLst>
+                                      </p:cBhvr>
+                                      <p:tavLst>
+                                        <p:tav tm="0">
+                                          <p:val>
+                                            <p:strVal val="1+#ppt_h/2"/>
+                                          </p:val>
+                                        </p:tav>
+                                        <p:tav tm="100000">
+                                          <p:val>
+                                            <p:strVal val="#ppt_y"/>
+                                          </p:val>
+                                        </p:tav>
+                                      </p:tavLst>
+                                    </p:anim>
+                                  </p:childTnLst>
+                                </p:cTn>
+                              </p:par>
+                            </p:childTnLst>
+                          </p:cTn>
+                        </p:par>
+                      </p:childTnLst>
+                    </p:cTn>
+                  </p:par>
+                  <p:par>
+                    <p:cTn id="30" fill="hold">
+                      <p:stCondLst>
+                        <p:cond delay="indefinite"/>
+                      </p:stCondLst>
+                      <p:childTnLst>
+                        <p:par>
+                          <p:cTn id="31" fill="hold">
+                            <p:stCondLst>
+                              <p:cond delay="0"/>
+                            </p:stCondLst>
+                            <p:childTnLst>
+                              <p:par>
+                                <p:cTn id="32" presetID="2" presetClass="entr" presetSubtype="4" fill="hold" decel="100000" grpId="0" nodeType="clickEffect">
+                                  <p:stCondLst>
+                                    <p:cond delay="0"/>
+                                  </p:stCondLst>
+                                  <p:childTnLst>
+                                    <p:set>
+                                      <p:cBhvr>
+                                        <p:cTn id="33" dur="1" fill="hold">
+                                          <p:stCondLst>
+                                            <p:cond delay="0"/>
+                                          </p:stCondLst>
+                                        </p:cTn>
+                                        <p:tgtEl>
+                                          <p:spTgt spid="7"/>
+                                        </p:tgtEl>
+                                        <p:attrNameLst>
+                                          <p:attrName>style.visibility</p:attrName>
+                                        </p:attrNameLst>
+                                      </p:cBhvr>
+                                      <p:to>
+                                        <p:strVal val="visible"/>
+                                      </p:to>
+                                    </p:set>
+                                    <p:anim calcmode="lin" valueType="num">
+                                      <p:cBhvr additive="base">
+                                        <p:cTn id="34" dur="550" fill="hold"/>
+                                        <p:tgtEl>
+                                          <p:spTgt spid="7"/>
+                                        </p:tgtEl>
+                                        <p:attrNameLst>
+                                          <p:attrName>ppt_x</p:attrName>
+                                        </p:attrNameLst>
+                                      </p:cBhvr>
+                                      <p:tavLst>
+                                        <p:tav tm="0">
+                                          <p:val>
+                                            <p:strVal val="#ppt_x"/>
+                                          </p:val>
+                                        </p:tav>
+                                        <p:tav tm="100000">
+                                          <p:val>
+                                            <p:strVal val="#ppt_x"/>
+                                          </p:val>
+                                        </p:tav>
+                                      </p:tavLst>
+                                    </p:anim>
+                                    <p:anim calcmode="lin" valueType="num">
+                                      <p:cBhvr additive="base">
+                                        <p:cTn id="35" dur="550" fill="hold"/>
+                                        <p:tgtEl>
+                                          <p:spTgt spid="7"/>
+                                        </p:tgtEl>
+                                        <p:attrNameLst>
+                                          <p:attrName>ppt_y</p:attrName>
+                                        </p:attrNameLst>
+                                      </p:cBhvr>
+                                      <p:tavLst>
+                                        <p:tav tm="0">
+                                          <p:val>
+                                            <p:strVal val="1+#ppt_h/2"/>
+                                          </p:val>
+                                        </p:tav>
+                                        <p:tav tm="100000">
+                                          <p:val>
+                                            <p:strVal val="#ppt_y"/>
+                                          </p:val>
+                                        </p:tav>
+                                      </p:tavLst>
+                                    </p:anim>
                                   </p:childTnLst>
                                 </p:cTn>
                               </p:par>
@@ -3578,138 +4053,66 @@
         </p:blipFill>
         <p:spPr>
           <a:xfrm>
-            <a:off x="426709" y="1341086"/>
-            <a:ext cx="6233004" cy="1203929"/>
+            <a:off x="10180065" y="4160415"/>
+            <a:ext cx="1584920" cy="2042108"/>
           </a:xfrm>
           <a:prstGeom prst="rect">
             <a:avLst/>
           </a:prstGeom>
         </p:spPr>
       </p:pic>
-      <p:pic>
-        <p:nvPicPr>
-          <p:cNvPr id="4" name="Picture 3" descr="c10_2_0.jpg"/>
-          <p:cNvPicPr>
-            <a:picLocks noChangeAspect="1"/>
-          </p:cNvPicPr>
+      <p:sp>
+        <p:nvSpPr>
+          <p:cNvPr id="4" name="Rectangle 3">
+            <a:hlinkClick r:id="rId4"/>
+          </p:cNvPr>
+          <p:cNvSpPr/>
           <p:nvPr/>
-        </p:nvPicPr>
-        <p:blipFill>
-          <a:blip r:embed="rId4"/>
-          <a:stretch>
-            <a:fillRect/>
-          </a:stretch>
-        </p:blipFill>
-        <p:spPr>
-          <a:xfrm>
-            <a:off x="426709" y="1569680"/>
-            <a:ext cx="6233004" cy="1889712"/>
+        </p:nvSpPr>
+        <p:spPr>
+          <a:xfrm>
+            <a:off x="655303" y="4724281"/>
+            <a:ext cx="2523109" cy="754361"/>
           </a:xfrm>
           <a:prstGeom prst="rect">
             <a:avLst/>
           </a:prstGeom>
-        </p:spPr>
-      </p:pic>
-      <p:pic>
-        <p:nvPicPr>
-          <p:cNvPr id="5" name="Picture 4" descr="c10_3_0.jpg"/>
-          <p:cNvPicPr>
-            <a:picLocks noChangeAspect="1"/>
-          </p:cNvPicPr>
-          <p:nvPr/>
-        </p:nvPicPr>
-        <p:blipFill>
-          <a:blip r:embed="rId5"/>
-          <a:stretch>
-            <a:fillRect/>
-          </a:stretch>
-        </p:blipFill>
-        <p:spPr>
-          <a:xfrm>
-            <a:off x="426709" y="3169840"/>
-            <a:ext cx="6233004" cy="1203929"/>
-          </a:xfrm>
-          <a:prstGeom prst="rect">
-            <a:avLst/>
-          </a:prstGeom>
-        </p:spPr>
-      </p:pic>
-      <p:pic>
-        <p:nvPicPr>
-          <p:cNvPr id="6" name="Picture 5" descr="c10_4_0.jpg"/>
-          <p:cNvPicPr>
-            <a:picLocks noChangeAspect="1"/>
-          </p:cNvPicPr>
-          <p:nvPr/>
-        </p:nvPicPr>
-        <p:blipFill>
-          <a:blip r:embed="rId6"/>
-          <a:stretch>
-            <a:fillRect/>
-          </a:stretch>
-        </p:blipFill>
-        <p:spPr>
-          <a:xfrm>
-            <a:off x="426709" y="4084217"/>
-            <a:ext cx="6233004" cy="1203929"/>
-          </a:xfrm>
-          <a:prstGeom prst="rect">
-            <a:avLst/>
-          </a:prstGeom>
-        </p:spPr>
-      </p:pic>
-      <p:pic>
-        <p:nvPicPr>
-          <p:cNvPr id="7" name="Picture 6" descr="c10_5_0.jpg"/>
-          <p:cNvPicPr>
-            <a:picLocks noChangeAspect="1"/>
-          </p:cNvPicPr>
-          <p:nvPr/>
-        </p:nvPicPr>
-        <p:blipFill>
-          <a:blip r:embed="rId7"/>
-          <a:stretch>
-            <a:fillRect/>
-          </a:stretch>
-        </p:blipFill>
-        <p:spPr>
-          <a:xfrm>
-            <a:off x="426709" y="4998594"/>
-            <a:ext cx="6233004" cy="1203929"/>
-          </a:xfrm>
-          <a:prstGeom prst="rect">
-            <a:avLst/>
-          </a:prstGeom>
-        </p:spPr>
-      </p:pic>
-      <p:pic>
-        <p:nvPicPr>
-          <p:cNvPr id="8" name="Picture 7" descr="c10_6_0.jpg"/>
-          <p:cNvPicPr>
-            <a:picLocks noChangeAspect="1"/>
-          </p:cNvPicPr>
-          <p:nvPr/>
-        </p:nvPicPr>
-        <p:blipFill>
-          <a:blip r:embed="rId8"/>
-          <a:stretch>
-            <a:fillRect/>
-          </a:stretch>
-        </p:blipFill>
-        <p:spPr>
-          <a:xfrm>
-            <a:off x="0" y="5836773"/>
-            <a:ext cx="12191695" cy="1021054"/>
-          </a:xfrm>
-          <a:prstGeom prst="rect">
-            <a:avLst/>
-          </a:prstGeom>
-        </p:spPr>
-      </p:pic>
+          <a:solidFill>
+            <a:srgbClr val="FFFFFF">
+              <a:alpha val="0"/>
+            </a:srgbClr>
+          </a:solidFill>
+          <a:ln>
+            <a:noFill/>
+          </a:ln>
+          <a:effectLst/>
+        </p:spPr>
+        <p:style>
+          <a:lnRef idx="1">
+            <a:schemeClr val="accent1"/>
+          </a:lnRef>
+          <a:fillRef idx="3">
+            <a:schemeClr val="accent1"/>
+          </a:fillRef>
+          <a:effectRef idx="2">
+            <a:schemeClr val="accent1"/>
+          </a:effectRef>
+          <a:fontRef idx="minor">
+            <a:schemeClr val="lt1"/>
+          </a:fontRef>
+        </p:style>
+        <p:txBody>
+          <a:bodyPr rtlCol="0" anchor="ctr"/>
+          <a:lstStyle/>
+          <a:p>
+            <a:pPr algn="ctr"/>
+          </a:p>
+        </p:txBody>
+      </p:sp>
       <p:sp>
         <p:nvSpPr>
-          <p:cNvPr id="9" name="TextBox 8">
-            <a:hlinkClick action="ppaction://hlinksldjump" r:id="rId9"/>
+          <p:cNvPr id="5" name="TextBox 4">
+            <a:hlinkClick action="ppaction://hlinksldjump" r:id="rId5"/>
           </p:cNvPr>
           <p:cNvSpPr txBox="1"/>
           <p:nvPr/>
@@ -3774,7 +4177,7 @@
                             </p:stCondLst>
                             <p:childTnLst>
                               <p:par>
-                                <p:cTn id="5" presetID="2" presetClass="entr" presetSubtype="8" fill="hold" decel="100000" grpId="0" nodeType="clickEffect">
+                                <p:cTn id="5" presetID="10" presetClass="entr" presetSubtype="0" fill="hold" grpId="0" nodeType="clickEffect">
                                   <p:stCondLst>
                                     <p:cond delay="0"/>
                                   </p:stCondLst>
@@ -3797,469 +4200,14 @@
                                         <p:strVal val="visible"/>
                                       </p:to>
                                     </p:set>
-                                    <p:anim calcmode="lin" valueType="num">
-                                      <p:cBhvr additive="base">
-                                        <p:cTn id="7" dur="550" fill="hold"/>
-                                        <p:tgtEl>
-                                          <p:spTgt spid="3"/>
-                                        </p:tgtEl>
-                                        <p:attrNameLst>
-                                          <p:attrName>ppt_x</p:attrName>
-                                        </p:attrNameLst>
-                                      </p:cBhvr>
-                                      <p:tavLst>
-                                        <p:tav tm="0">
-                                          <p:val>
-                                            <p:strVal val="0-#ppt_w/2"/>
-                                          </p:val>
-                                        </p:tav>
-                                        <p:tav tm="100000">
-                                          <p:val>
-                                            <p:strVal val="#ppt_x"/>
-                                          </p:val>
-                                        </p:tav>
-                                      </p:tavLst>
-                                    </p:anim>
-                                    <p:anim calcmode="lin" valueType="num">
-                                      <p:cBhvr additive="base">
-                                        <p:cTn id="8" dur="550" fill="hold"/>
-                                        <p:tgtEl>
-                                          <p:spTgt spid="3"/>
-                                        </p:tgtEl>
-                                        <p:attrNameLst>
-                                          <p:attrName>ppt_y</p:attrName>
-                                        </p:attrNameLst>
-                                      </p:cBhvr>
-                                      <p:tavLst>
-                                        <p:tav tm="0">
-                                          <p:val>
-                                            <p:strVal val="#ppt_y"/>
-                                          </p:val>
-                                        </p:tav>
-                                        <p:tav tm="100000">
-                                          <p:val>
-                                            <p:strVal val="#ppt_y"/>
-                                          </p:val>
-                                        </p:tav>
-                                      </p:tavLst>
-                                    </p:anim>
-                                  </p:childTnLst>
-                                </p:cTn>
-                              </p:par>
-                            </p:childTnLst>
-                          </p:cTn>
-                        </p:par>
-                      </p:childTnLst>
-                    </p:cTn>
-                  </p:par>
-                  <p:par>
-                    <p:cTn id="9" fill="hold">
-                      <p:stCondLst>
-                        <p:cond delay="indefinite"/>
-                      </p:stCondLst>
-                      <p:childTnLst>
-                        <p:par>
-                          <p:cTn id="10" fill="hold">
-                            <p:stCondLst>
-                              <p:cond delay="0"/>
-                            </p:stCondLst>
-                            <p:childTnLst>
-                              <p:par>
-                                <p:cTn id="11" presetID="10" presetClass="entr" presetSubtype="0" fill="hold" grpId="0" nodeType="clickEffect">
-                                  <p:stCondLst>
-                                    <p:cond delay="0"/>
-                                  </p:stCondLst>
-                                  <p:childTnLst>
-                                    <p:set>
-                                      <p:cBhvr>
-                                        <p:cTn id="12" dur="1" fill="hold">
-                                          <p:stCondLst>
-                                            <p:cond delay="0"/>
-                                          </p:stCondLst>
-                                        </p:cTn>
-                                        <p:tgtEl>
-                                          <p:spTgt spid="4"/>
-                                        </p:tgtEl>
-                                        <p:attrNameLst>
-                                          <p:attrName>style.visibility</p:attrName>
-                                        </p:attrNameLst>
-                                      </p:cBhvr>
-                                      <p:to>
-                                        <p:strVal val="visible"/>
-                                      </p:to>
-                                    </p:set>
                                     <p:animEffect transition="in" filter="fade">
                                       <p:cBhvr>
-                                        <p:cTn id="13" dur="450"/>
-                                        <p:tgtEl>
-                                          <p:spTgt spid="4"/>
+                                        <p:cTn id="7" dur="450"/>
+                                        <p:tgtEl>
+                                          <p:spTgt spid="3"/>
                                         </p:tgtEl>
                                       </p:cBhvr>
                                     </p:animEffect>
-                                  </p:childTnLst>
-                                </p:cTn>
-                              </p:par>
-                            </p:childTnLst>
-                          </p:cTn>
-                        </p:par>
-                      </p:childTnLst>
-                    </p:cTn>
-                  </p:par>
-                  <p:par>
-                    <p:cTn id="14" fill="hold">
-                      <p:stCondLst>
-                        <p:cond delay="indefinite"/>
-                      </p:stCondLst>
-                      <p:childTnLst>
-                        <p:par>
-                          <p:cTn id="15" fill="hold">
-                            <p:stCondLst>
-                              <p:cond delay="0"/>
-                            </p:stCondLst>
-                            <p:childTnLst>
-                              <p:par>
-                                <p:cTn id="16" presetID="2" presetClass="entr" presetSubtype="8" fill="hold" decel="100000" grpId="0" nodeType="clickEffect">
-                                  <p:stCondLst>
-                                    <p:cond delay="0"/>
-                                  </p:stCondLst>
-                                  <p:childTnLst>
-                                    <p:set>
-                                      <p:cBhvr>
-                                        <p:cTn id="17" dur="1" fill="hold">
-                                          <p:stCondLst>
-                                            <p:cond delay="0"/>
-                                          </p:stCondLst>
-                                        </p:cTn>
-                                        <p:tgtEl>
-                                          <p:spTgt spid="5"/>
-                                        </p:tgtEl>
-                                        <p:attrNameLst>
-                                          <p:attrName>style.visibility</p:attrName>
-                                        </p:attrNameLst>
-                                      </p:cBhvr>
-                                      <p:to>
-                                        <p:strVal val="visible"/>
-                                      </p:to>
-                                    </p:set>
-                                    <p:anim calcmode="lin" valueType="num">
-                                      <p:cBhvr additive="base">
-                                        <p:cTn id="18" dur="550" fill="hold"/>
-                                        <p:tgtEl>
-                                          <p:spTgt spid="5"/>
-                                        </p:tgtEl>
-                                        <p:attrNameLst>
-                                          <p:attrName>ppt_x</p:attrName>
-                                        </p:attrNameLst>
-                                      </p:cBhvr>
-                                      <p:tavLst>
-                                        <p:tav tm="0">
-                                          <p:val>
-                                            <p:strVal val="0-#ppt_w/2"/>
-                                          </p:val>
-                                        </p:tav>
-                                        <p:tav tm="100000">
-                                          <p:val>
-                                            <p:strVal val="#ppt_x"/>
-                                          </p:val>
-                                        </p:tav>
-                                      </p:tavLst>
-                                    </p:anim>
-                                    <p:anim calcmode="lin" valueType="num">
-                                      <p:cBhvr additive="base">
-                                        <p:cTn id="19" dur="550" fill="hold"/>
-                                        <p:tgtEl>
-                                          <p:spTgt spid="5"/>
-                                        </p:tgtEl>
-                                        <p:attrNameLst>
-                                          <p:attrName>ppt_y</p:attrName>
-                                        </p:attrNameLst>
-                                      </p:cBhvr>
-                                      <p:tavLst>
-                                        <p:tav tm="0">
-                                          <p:val>
-                                            <p:strVal val="#ppt_y"/>
-                                          </p:val>
-                                        </p:tav>
-                                        <p:tav tm="100000">
-                                          <p:val>
-                                            <p:strVal val="#ppt_y"/>
-                                          </p:val>
-                                        </p:tav>
-                                      </p:tavLst>
-                                    </p:anim>
-                                  </p:childTnLst>
-                                </p:cTn>
-                              </p:par>
-                            </p:childTnLst>
-                          </p:cTn>
-                        </p:par>
-                      </p:childTnLst>
-                    </p:cTn>
-                  </p:par>
-                  <p:par>
-                    <p:cTn id="20" fill="hold">
-                      <p:stCondLst>
-                        <p:cond delay="indefinite"/>
-                      </p:stCondLst>
-                      <p:childTnLst>
-                        <p:par>
-                          <p:cTn id="21" fill="hold">
-                            <p:stCondLst>
-                              <p:cond delay="0"/>
-                            </p:stCondLst>
-                            <p:childTnLst>
-                              <p:par>
-                                <p:cTn id="22" presetID="2" presetClass="entr" presetSubtype="8" fill="hold" decel="100000" grpId="0" nodeType="clickEffect">
-                                  <p:stCondLst>
-                                    <p:cond delay="0"/>
-                                  </p:stCondLst>
-                                  <p:childTnLst>
-                                    <p:set>
-                                      <p:cBhvr>
-                                        <p:cTn id="23" dur="1" fill="hold">
-                                          <p:stCondLst>
-                                            <p:cond delay="0"/>
-                                          </p:stCondLst>
-                                        </p:cTn>
-                                        <p:tgtEl>
-                                          <p:spTgt spid="6"/>
-                                        </p:tgtEl>
-                                        <p:attrNameLst>
-                                          <p:attrName>style.visibility</p:attrName>
-                                        </p:attrNameLst>
-                                      </p:cBhvr>
-                                      <p:to>
-                                        <p:strVal val="visible"/>
-                                      </p:to>
-                                    </p:set>
-                                    <p:anim calcmode="lin" valueType="num">
-                                      <p:cBhvr additive="base">
-                                        <p:cTn id="24" dur="550" fill="hold"/>
-                                        <p:tgtEl>
-                                          <p:spTgt spid="6"/>
-                                        </p:tgtEl>
-                                        <p:attrNameLst>
-                                          <p:attrName>ppt_x</p:attrName>
-                                        </p:attrNameLst>
-                                      </p:cBhvr>
-                                      <p:tavLst>
-                                        <p:tav tm="0">
-                                          <p:val>
-                                            <p:strVal val="0-#ppt_w/2"/>
-                                          </p:val>
-                                        </p:tav>
-                                        <p:tav tm="100000">
-                                          <p:val>
-                                            <p:strVal val="#ppt_x"/>
-                                          </p:val>
-                                        </p:tav>
-                                      </p:tavLst>
-                                    </p:anim>
-                                    <p:anim calcmode="lin" valueType="num">
-                                      <p:cBhvr additive="base">
-                                        <p:cTn id="25" dur="550" fill="hold"/>
-                                        <p:tgtEl>
-                                          <p:spTgt spid="6"/>
-                                        </p:tgtEl>
-                                        <p:attrNameLst>
-                                          <p:attrName>ppt_y</p:attrName>
-                                        </p:attrNameLst>
-                                      </p:cBhvr>
-                                      <p:tavLst>
-                                        <p:tav tm="0">
-                                          <p:val>
-                                            <p:strVal val="#ppt_y"/>
-                                          </p:val>
-                                        </p:tav>
-                                        <p:tav tm="100000">
-                                          <p:val>
-                                            <p:strVal val="#ppt_y"/>
-                                          </p:val>
-                                        </p:tav>
-                                      </p:tavLst>
-                                    </p:anim>
-                                  </p:childTnLst>
-                                </p:cTn>
-                              </p:par>
-                            </p:childTnLst>
-                          </p:cTn>
-                        </p:par>
-                      </p:childTnLst>
-                    </p:cTn>
-                  </p:par>
-                  <p:par>
-                    <p:cTn id="26" fill="hold">
-                      <p:stCondLst>
-                        <p:cond delay="indefinite"/>
-                      </p:stCondLst>
-                      <p:childTnLst>
-                        <p:par>
-                          <p:cTn id="27" fill="hold">
-                            <p:stCondLst>
-                              <p:cond delay="0"/>
-                            </p:stCondLst>
-                            <p:childTnLst>
-                              <p:par>
-                                <p:cTn id="28" presetID="2" presetClass="entr" presetSubtype="8" fill="hold" decel="100000" grpId="0" nodeType="clickEffect">
-                                  <p:stCondLst>
-                                    <p:cond delay="0"/>
-                                  </p:stCondLst>
-                                  <p:childTnLst>
-                                    <p:set>
-                                      <p:cBhvr>
-                                        <p:cTn id="29" dur="1" fill="hold">
-                                          <p:stCondLst>
-                                            <p:cond delay="0"/>
-                                          </p:stCondLst>
-                                        </p:cTn>
-                                        <p:tgtEl>
-                                          <p:spTgt spid="7"/>
-                                        </p:tgtEl>
-                                        <p:attrNameLst>
-                                          <p:attrName>style.visibility</p:attrName>
-                                        </p:attrNameLst>
-                                      </p:cBhvr>
-                                      <p:to>
-                                        <p:strVal val="visible"/>
-                                      </p:to>
-                                    </p:set>
-                                    <p:anim calcmode="lin" valueType="num">
-                                      <p:cBhvr additive="base">
-                                        <p:cTn id="30" dur="550" fill="hold"/>
-                                        <p:tgtEl>
-                                          <p:spTgt spid="7"/>
-                                        </p:tgtEl>
-                                        <p:attrNameLst>
-                                          <p:attrName>ppt_x</p:attrName>
-                                        </p:attrNameLst>
-                                      </p:cBhvr>
-                                      <p:tavLst>
-                                        <p:tav tm="0">
-                                          <p:val>
-                                            <p:strVal val="0-#ppt_w/2"/>
-                                          </p:val>
-                                        </p:tav>
-                                        <p:tav tm="100000">
-                                          <p:val>
-                                            <p:strVal val="#ppt_x"/>
-                                          </p:val>
-                                        </p:tav>
-                                      </p:tavLst>
-                                    </p:anim>
-                                    <p:anim calcmode="lin" valueType="num">
-                                      <p:cBhvr additive="base">
-                                        <p:cTn id="31" dur="550" fill="hold"/>
-                                        <p:tgtEl>
-                                          <p:spTgt spid="7"/>
-                                        </p:tgtEl>
-                                        <p:attrNameLst>
-                                          <p:attrName>ppt_y</p:attrName>
-                                        </p:attrNameLst>
-                                      </p:cBhvr>
-                                      <p:tavLst>
-                                        <p:tav tm="0">
-                                          <p:val>
-                                            <p:strVal val="#ppt_y"/>
-                                          </p:val>
-                                        </p:tav>
-                                        <p:tav tm="100000">
-                                          <p:val>
-                                            <p:strVal val="#ppt_y"/>
-                                          </p:val>
-                                        </p:tav>
-                                      </p:tavLst>
-                                    </p:anim>
-                                  </p:childTnLst>
-                                </p:cTn>
-                              </p:par>
-                            </p:childTnLst>
-                          </p:cTn>
-                        </p:par>
-                      </p:childTnLst>
-                    </p:cTn>
-                  </p:par>
-                  <p:par>
-                    <p:cTn id="32" fill="hold">
-                      <p:stCondLst>
-                        <p:cond delay="indefinite"/>
-                      </p:stCondLst>
-                      <p:childTnLst>
-                        <p:par>
-                          <p:cTn id="33" fill="hold">
-                            <p:stCondLst>
-                              <p:cond delay="0"/>
-                            </p:stCondLst>
-                            <p:childTnLst>
-                              <p:par>
-                                <p:cTn id="34" presetID="2" presetClass="entr" presetSubtype="4" fill="hold" decel="100000" grpId="0" nodeType="clickEffect">
-                                  <p:stCondLst>
-                                    <p:cond delay="0"/>
-                                  </p:stCondLst>
-                                  <p:childTnLst>
-                                    <p:set>
-                                      <p:cBhvr>
-                                        <p:cTn id="35" dur="1" fill="hold">
-                                          <p:stCondLst>
-                                            <p:cond delay="0"/>
-                                          </p:stCondLst>
-                                        </p:cTn>
-                                        <p:tgtEl>
-                                          <p:spTgt spid="8"/>
-                                        </p:tgtEl>
-                                        <p:attrNameLst>
-                                          <p:attrName>style.visibility</p:attrName>
-                                        </p:attrNameLst>
-                                      </p:cBhvr>
-                                      <p:to>
-                                        <p:strVal val="visible"/>
-                                      </p:to>
-                                    </p:set>
-                                    <p:anim calcmode="lin" valueType="num">
-                                      <p:cBhvr additive="base">
-                                        <p:cTn id="36" dur="550" fill="hold"/>
-                                        <p:tgtEl>
-                                          <p:spTgt spid="8"/>
-                                        </p:tgtEl>
-                                        <p:attrNameLst>
-                                          <p:attrName>ppt_x</p:attrName>
-                                        </p:attrNameLst>
-                                      </p:cBhvr>
-                                      <p:tavLst>
-                                        <p:tav tm="0">
-                                          <p:val>
-                                            <p:strVal val="#ppt_x"/>
-                                          </p:val>
-                                        </p:tav>
-                                        <p:tav tm="100000">
-                                          <p:val>
-                                            <p:strVal val="#ppt_x"/>
-                                          </p:val>
-                                        </p:tav>
-                                      </p:tavLst>
-                                    </p:anim>
-                                    <p:anim calcmode="lin" valueType="num">
-                                      <p:cBhvr additive="base">
-                                        <p:cTn id="37" dur="550" fill="hold"/>
-                                        <p:tgtEl>
-                                          <p:spTgt spid="8"/>
-                                        </p:tgtEl>
-                                        <p:attrNameLst>
-                                          <p:attrName>ppt_y</p:attrName>
-                                        </p:attrNameLst>
-                                      </p:cBhvr>
-                                      <p:tavLst>
-                                        <p:tav tm="0">
-                                          <p:val>
-                                            <p:strVal val="1+#ppt_h/2"/>
-                                          </p:val>
-                                        </p:tav>
-                                        <p:tav tm="100000">
-                                          <p:val>
-                                            <p:strVal val="#ppt_y"/>
-                                          </p:val>
-                                        </p:tav>
-                                      </p:tavLst>
-                                    </p:anim>
                                   </p:childTnLst>
                                 </p:cTn>
                               </p:par>
@@ -4345,7 +4293,7 @@
         <p:spPr>
           <a:xfrm>
             <a:off x="426709" y="1341086"/>
-            <a:ext cx="11338276" cy="1737316"/>
+            <a:ext cx="6233004" cy="1203929"/>
           </a:xfrm>
           <a:prstGeom prst="rect">
             <a:avLst/>
@@ -4368,8 +4316,8 @@
         </p:blipFill>
         <p:spPr>
           <a:xfrm>
-            <a:off x="9799074" y="1645878"/>
-            <a:ext cx="1737316" cy="1127731"/>
+            <a:off x="426709" y="1569680"/>
+            <a:ext cx="6233004" cy="1889712"/>
           </a:xfrm>
           <a:prstGeom prst="rect">
             <a:avLst/>
@@ -4392,8 +4340,8 @@
         </p:blipFill>
         <p:spPr>
           <a:xfrm>
-            <a:off x="9799074" y="1645878"/>
-            <a:ext cx="1737316" cy="1127731"/>
+            <a:off x="426709" y="3169840"/>
+            <a:ext cx="6233004" cy="1203929"/>
           </a:xfrm>
           <a:prstGeom prst="rect">
             <a:avLst/>
@@ -4402,7 +4350,7 @@
       </p:pic>
       <p:pic>
         <p:nvPicPr>
-          <p:cNvPr id="6" name="Picture 5" descr="c11_3_1.jpg"/>
+          <p:cNvPr id="6" name="Picture 5" descr="c11_4_0.jpg"/>
           <p:cNvPicPr>
             <a:picLocks noChangeAspect="1"/>
           </p:cNvPicPr>
@@ -4416,8 +4364,8 @@
         </p:blipFill>
         <p:spPr>
           <a:xfrm>
-            <a:off x="426709" y="2865048"/>
-            <a:ext cx="11338276" cy="1737316"/>
+            <a:off x="426709" y="4084217"/>
+            <a:ext cx="6233004" cy="1203929"/>
           </a:xfrm>
           <a:prstGeom prst="rect">
             <a:avLst/>
@@ -4426,31 +4374,7 @@
       </p:pic>
       <p:pic>
         <p:nvPicPr>
-          <p:cNvPr id="7" name="Picture 6" descr="c11_2_0.jpg"/>
-          <p:cNvPicPr>
-            <a:picLocks noChangeAspect="1"/>
-          </p:cNvPicPr>
-          <p:nvPr/>
-        </p:nvPicPr>
-        <p:blipFill>
-          <a:blip r:embed="rId4"/>
-          <a:stretch>
-            <a:fillRect/>
-          </a:stretch>
-        </p:blipFill>
-        <p:spPr>
-          <a:xfrm>
-            <a:off x="9799074" y="1645878"/>
-            <a:ext cx="1737316" cy="1127731"/>
-          </a:xfrm>
-          <a:prstGeom prst="rect">
-            <a:avLst/>
-          </a:prstGeom>
-        </p:spPr>
-      </p:pic>
-      <p:pic>
-        <p:nvPicPr>
-          <p:cNvPr id="8" name="Picture 7" descr="c11_4_1.jpg"/>
+          <p:cNvPr id="7" name="Picture 6" descr="c11_5_0.jpg"/>
           <p:cNvPicPr>
             <a:picLocks noChangeAspect="1"/>
           </p:cNvPicPr>
@@ -4464,8 +4388,8 @@
         </p:blipFill>
         <p:spPr>
           <a:xfrm>
-            <a:off x="8427509" y="3017444"/>
-            <a:ext cx="3108882" cy="1356326"/>
+            <a:off x="426709" y="4998594"/>
+            <a:ext cx="6233004" cy="1203929"/>
           </a:xfrm>
           <a:prstGeom prst="rect">
             <a:avLst/>
@@ -4474,7 +4398,7 @@
       </p:pic>
       <p:pic>
         <p:nvPicPr>
-          <p:cNvPr id="9" name="Picture 8" descr="c11_5_0.jpg"/>
+          <p:cNvPr id="8" name="Picture 7" descr="c11_6_0.jpg"/>
           <p:cNvPicPr>
             <a:picLocks noChangeAspect="1"/>
           </p:cNvPicPr>
@@ -4488,42 +4412,18 @@
         </p:blipFill>
         <p:spPr>
           <a:xfrm>
-            <a:off x="426709" y="4389010"/>
-            <a:ext cx="11338276" cy="1737316"/>
+            <a:off x="0" y="5836773"/>
+            <a:ext cx="12191695" cy="1021054"/>
           </a:xfrm>
           <a:prstGeom prst="rect">
             <a:avLst/>
           </a:prstGeom>
         </p:spPr>
       </p:pic>
-      <p:pic>
-        <p:nvPicPr>
-          <p:cNvPr id="10" name="Picture 9" descr="c11_6_0.jpg"/>
-          <p:cNvPicPr>
-            <a:picLocks noChangeAspect="1"/>
-          </p:cNvPicPr>
-          <p:nvPr/>
-        </p:nvPicPr>
-        <p:blipFill>
-          <a:blip r:embed="rId9"/>
-          <a:stretch>
-            <a:fillRect/>
-          </a:stretch>
-        </p:blipFill>
-        <p:spPr>
-          <a:xfrm>
-            <a:off x="10180065" y="4693802"/>
-            <a:ext cx="1356326" cy="1127731"/>
-          </a:xfrm>
-          <a:prstGeom prst="rect">
-            <a:avLst/>
-          </a:prstGeom>
-        </p:spPr>
-      </p:pic>
       <p:sp>
         <p:nvSpPr>
-          <p:cNvPr id="11" name="TextBox 10">
-            <a:hlinkClick action="ppaction://hlinksldjump" r:id="rId10"/>
+          <p:cNvPr id="9" name="TextBox 8">
+            <a:hlinkClick action="ppaction://hlinksldjump" r:id="rId9"/>
           </p:cNvPr>
           <p:cNvSpPr txBox="1"/>
           <p:nvPr/>
@@ -4679,7 +4579,7 @@
                             </p:stCondLst>
                             <p:childTnLst>
                               <p:par>
-                                <p:cTn id="11" presetID="53" presetClass="entr" presetSubtype="16" fill="hold" grpId="0" nodeType="clickEffect">
+                                <p:cTn id="11" presetID="10" presetClass="entr" presetSubtype="0" fill="hold" grpId="0" nodeType="clickEffect">
                                   <p:stCondLst>
                                     <p:cond delay="0"/>
                                   </p:stCondLst>
@@ -4702,55 +4602,9 @@
                                         <p:strVal val="visible"/>
                                       </p:to>
                                     </p:set>
-                                    <p:anim calcmode="lin" valueType="num">
-                                      <p:cBhvr additive="base">
-                                        <p:cTn id="13" dur="420" fill="hold"/>
-                                        <p:tgtEl>
-                                          <p:spTgt spid="4"/>
-                                        </p:tgtEl>
-                                        <p:attrNameLst>
-                                          <p:attrName>ppt_w</p:attrName>
-                                        </p:attrNameLst>
-                                      </p:cBhvr>
-                                      <p:tavLst>
-                                        <p:tav tm="0">
-                                          <p:val>
-                                            <p:strVal val="0"/>
-                                          </p:val>
-                                        </p:tav>
-                                        <p:tav tm="100000">
-                                          <p:val>
-                                            <p:strVal val="#ppt_w"/>
-                                          </p:val>
-                                        </p:tav>
-                                      </p:tavLst>
-                                    </p:anim>
-                                    <p:anim calcmode="lin" valueType="num">
-                                      <p:cBhvr additive="base">
-                                        <p:cTn id="14" dur="420" fill="hold"/>
-                                        <p:tgtEl>
-                                          <p:spTgt spid="4"/>
-                                        </p:tgtEl>
-                                        <p:attrNameLst>
-                                          <p:attrName>ppt_h</p:attrName>
-                                        </p:attrNameLst>
-                                      </p:cBhvr>
-                                      <p:tavLst>
-                                        <p:tav tm="0">
-                                          <p:val>
-                                            <p:strVal val="0"/>
-                                          </p:val>
-                                        </p:tav>
-                                        <p:tav tm="100000">
-                                          <p:val>
-                                            <p:strVal val="#ppt_h"/>
-                                          </p:val>
-                                        </p:tav>
-                                      </p:tavLst>
-                                    </p:anim>
                                     <p:animEffect transition="in" filter="fade">
                                       <p:cBhvr>
-                                        <p:cTn id="15" dur="420"/>
+                                        <p:cTn id="13" dur="450"/>
                                         <p:tgtEl>
                                           <p:spTgt spid="4"/>
                                         </p:tgtEl>
@@ -4766,67 +4620,32 @@
                     </p:cTn>
                   </p:par>
                   <p:par>
-                    <p:cTn id="16" fill="hold">
+                    <p:cTn id="14" fill="hold">
                       <p:stCondLst>
                         <p:cond delay="indefinite"/>
                       </p:stCondLst>
                       <p:childTnLst>
                         <p:par>
-                          <p:cTn id="17" fill="hold">
+                          <p:cTn id="15" fill="hold">
                             <p:stCondLst>
                               <p:cond delay="0"/>
                             </p:stCondLst>
                             <p:childTnLst>
                               <p:par>
-                                <p:cTn id="18" presetID="10" presetClass="entr" presetSubtype="0" fill="hold" grpId="0" nodeType="clickEffect">
+                                <p:cTn id="16" presetID="2" presetClass="entr" presetSubtype="8" fill="hold" decel="100000" grpId="0" nodeType="clickEffect">
                                   <p:stCondLst>
                                     <p:cond delay="0"/>
                                   </p:stCondLst>
                                   <p:childTnLst>
                                     <p:set>
                                       <p:cBhvr>
-                                        <p:cTn id="19" dur="1" fill="hold">
+                                        <p:cTn id="17" dur="1" fill="hold">
                                           <p:stCondLst>
                                             <p:cond delay="0"/>
                                           </p:stCondLst>
                                         </p:cTn>
                                         <p:tgtEl>
                                           <p:spTgt spid="5"/>
-                                        </p:tgtEl>
-                                        <p:attrNameLst>
-                                          <p:attrName>style.visibility</p:attrName>
-                                        </p:attrNameLst>
-                                      </p:cBhvr>
-                                      <p:to>
-                                        <p:strVal val="visible"/>
-                                      </p:to>
-                                    </p:set>
-                                    <p:animEffect transition="in" filter="fade">
-                                      <p:cBhvr>
-                                        <p:cTn id="20" dur="450"/>
-                                        <p:tgtEl>
-                                          <p:spTgt spid="5"/>
-                                        </p:tgtEl>
-                                      </p:cBhvr>
-                                    </p:animEffect>
-                                  </p:childTnLst>
-                                </p:cTn>
-                              </p:par>
-                              <p:par>
-                                <p:cTn id="21" presetID="2" presetClass="entr" presetSubtype="8" fill="hold" decel="100000" grpId="0" nodeType="withEffect">
-                                  <p:stCondLst>
-                                    <p:cond delay="120"/>
-                                  </p:stCondLst>
-                                  <p:childTnLst>
-                                    <p:set>
-                                      <p:cBhvr>
-                                        <p:cTn id="22" dur="1" fill="hold">
-                                          <p:stCondLst>
-                                            <p:cond delay="0"/>
-                                          </p:stCondLst>
-                                        </p:cTn>
-                                        <p:tgtEl>
-                                          <p:spTgt spid="6"/>
                                         </p:tgtEl>
                                         <p:attrNameLst>
                                           <p:attrName>style.visibility</p:attrName>
@@ -4838,9 +4657,9 @@
                                     </p:set>
                                     <p:anim calcmode="lin" valueType="num">
                                       <p:cBhvr additive="base">
-                                        <p:cTn id="23" dur="550" fill="hold"/>
-                                        <p:tgtEl>
-                                          <p:spTgt spid="6"/>
+                                        <p:cTn id="18" dur="550" fill="hold"/>
+                                        <p:tgtEl>
+                                          <p:spTgt spid="5"/>
                                         </p:tgtEl>
                                         <p:attrNameLst>
                                           <p:attrName>ppt_x</p:attrName>
@@ -4861,9 +4680,9 @@
                                     </p:anim>
                                     <p:anim calcmode="lin" valueType="num">
                                       <p:cBhvr additive="base">
-                                        <p:cTn id="24" dur="550" fill="hold"/>
-                                        <p:tgtEl>
-                                          <p:spTgt spid="6"/>
+                                        <p:cTn id="19" dur="550" fill="hold"/>
+                                        <p:tgtEl>
+                                          <p:spTgt spid="5"/>
                                         </p:tgtEl>
                                         <p:attrNameLst>
                                           <p:attrName>ppt_y</p:attrName>
@@ -4892,67 +4711,32 @@
                     </p:cTn>
                   </p:par>
                   <p:par>
-                    <p:cTn id="25" fill="hold">
+                    <p:cTn id="20" fill="hold">
                       <p:stCondLst>
                         <p:cond delay="indefinite"/>
                       </p:stCondLst>
                       <p:childTnLst>
                         <p:par>
-                          <p:cTn id="26" fill="hold">
+                          <p:cTn id="21" fill="hold">
                             <p:stCondLst>
                               <p:cond delay="0"/>
                             </p:stCondLst>
                             <p:childTnLst>
                               <p:par>
-                                <p:cTn id="27" presetID="10" presetClass="entr" presetSubtype="0" fill="hold" grpId="0" nodeType="clickEffect">
+                                <p:cTn id="22" presetID="2" presetClass="entr" presetSubtype="8" fill="hold" decel="100000" grpId="0" nodeType="clickEffect">
                                   <p:stCondLst>
                                     <p:cond delay="0"/>
                                   </p:stCondLst>
                                   <p:childTnLst>
                                     <p:set>
                                       <p:cBhvr>
-                                        <p:cTn id="28" dur="1" fill="hold">
+                                        <p:cTn id="23" dur="1" fill="hold">
                                           <p:stCondLst>
                                             <p:cond delay="0"/>
                                           </p:stCondLst>
                                         </p:cTn>
                                         <p:tgtEl>
-                                          <p:spTgt spid="7"/>
-                                        </p:tgtEl>
-                                        <p:attrNameLst>
-                                          <p:attrName>style.visibility</p:attrName>
-                                        </p:attrNameLst>
-                                      </p:cBhvr>
-                                      <p:to>
-                                        <p:strVal val="visible"/>
-                                      </p:to>
-                                    </p:set>
-                                    <p:animEffect transition="in" filter="fade">
-                                      <p:cBhvr>
-                                        <p:cTn id="29" dur="450"/>
-                                        <p:tgtEl>
-                                          <p:spTgt spid="7"/>
-                                        </p:tgtEl>
-                                      </p:cBhvr>
-                                    </p:animEffect>
-                                  </p:childTnLst>
-                                </p:cTn>
-                              </p:par>
-                              <p:par>
-                                <p:cTn id="30" presetID="53" presetClass="entr" presetSubtype="16" fill="hold" grpId="0" nodeType="withEffect">
-                                  <p:stCondLst>
-                                    <p:cond delay="120"/>
-                                  </p:stCondLst>
-                                  <p:childTnLst>
-                                    <p:set>
-                                      <p:cBhvr>
-                                        <p:cTn id="31" dur="1" fill="hold">
-                                          <p:stCondLst>
-                                            <p:cond delay="0"/>
-                                          </p:stCondLst>
-                                        </p:cTn>
-                                        <p:tgtEl>
-                                          <p:spTgt spid="8"/>
+                                          <p:spTgt spid="6"/>
                                         </p:tgtEl>
                                         <p:attrNameLst>
                                           <p:attrName>style.visibility</p:attrName>
@@ -4964,131 +4748,32 @@
                                     </p:set>
                                     <p:anim calcmode="lin" valueType="num">
                                       <p:cBhvr additive="base">
-                                        <p:cTn id="32" dur="420" fill="hold"/>
-                                        <p:tgtEl>
-                                          <p:spTgt spid="8"/>
-                                        </p:tgtEl>
-                                        <p:attrNameLst>
-                                          <p:attrName>ppt_w</p:attrName>
+                                        <p:cTn id="24" dur="550" fill="hold"/>
+                                        <p:tgtEl>
+                                          <p:spTgt spid="6"/>
+                                        </p:tgtEl>
+                                        <p:attrNameLst>
+                                          <p:attrName>ppt_x</p:attrName>
                                         </p:attrNameLst>
                                       </p:cBhvr>
                                       <p:tavLst>
                                         <p:tav tm="0">
                                           <p:val>
-                                            <p:strVal val="0"/>
+                                            <p:strVal val="0-#ppt_w/2"/>
                                           </p:val>
                                         </p:tav>
                                         <p:tav tm="100000">
                                           <p:val>
-                                            <p:strVal val="#ppt_w"/>
+                                            <p:strVal val="#ppt_x"/>
                                           </p:val>
                                         </p:tav>
                                       </p:tavLst>
                                     </p:anim>
                                     <p:anim calcmode="lin" valueType="num">
                                       <p:cBhvr additive="base">
-                                        <p:cTn id="33" dur="420" fill="hold"/>
-                                        <p:tgtEl>
-                                          <p:spTgt spid="8"/>
-                                        </p:tgtEl>
-                                        <p:attrNameLst>
-                                          <p:attrName>ppt_h</p:attrName>
-                                        </p:attrNameLst>
-                                      </p:cBhvr>
-                                      <p:tavLst>
-                                        <p:tav tm="0">
-                                          <p:val>
-                                            <p:strVal val="0"/>
-                                          </p:val>
-                                        </p:tav>
-                                        <p:tav tm="100000">
-                                          <p:val>
-                                            <p:strVal val="#ppt_h"/>
-                                          </p:val>
-                                        </p:tav>
-                                      </p:tavLst>
-                                    </p:anim>
-                                    <p:animEffect transition="in" filter="fade">
-                                      <p:cBhvr>
-                                        <p:cTn id="34" dur="420"/>
-                                        <p:tgtEl>
-                                          <p:spTgt spid="8"/>
-                                        </p:tgtEl>
-                                      </p:cBhvr>
-                                    </p:animEffect>
-                                  </p:childTnLst>
-                                </p:cTn>
-                              </p:par>
-                            </p:childTnLst>
-                          </p:cTn>
-                        </p:par>
-                      </p:childTnLst>
-                    </p:cTn>
-                  </p:par>
-                  <p:par>
-                    <p:cTn id="35" fill="hold">
-                      <p:stCondLst>
-                        <p:cond delay="indefinite"/>
-                      </p:stCondLst>
-                      <p:childTnLst>
-                        <p:par>
-                          <p:cTn id="36" fill="hold">
-                            <p:stCondLst>
-                              <p:cond delay="0"/>
-                            </p:stCondLst>
-                            <p:childTnLst>
-                              <p:par>
-                                <p:cTn id="37" presetID="2" presetClass="entr" presetSubtype="8" fill="hold" decel="100000" grpId="0" nodeType="clickEffect">
-                                  <p:stCondLst>
-                                    <p:cond delay="0"/>
-                                  </p:stCondLst>
-                                  <p:childTnLst>
-                                    <p:set>
-                                      <p:cBhvr>
-                                        <p:cTn id="38" dur="1" fill="hold">
-                                          <p:stCondLst>
-                                            <p:cond delay="0"/>
-                                          </p:stCondLst>
-                                        </p:cTn>
-                                        <p:tgtEl>
-                                          <p:spTgt spid="9"/>
-                                        </p:tgtEl>
-                                        <p:attrNameLst>
-                                          <p:attrName>style.visibility</p:attrName>
-                                        </p:attrNameLst>
-                                      </p:cBhvr>
-                                      <p:to>
-                                        <p:strVal val="visible"/>
-                                      </p:to>
-                                    </p:set>
-                                    <p:anim calcmode="lin" valueType="num">
-                                      <p:cBhvr additive="base">
-                                        <p:cTn id="39" dur="550" fill="hold"/>
-                                        <p:tgtEl>
-                                          <p:spTgt spid="9"/>
-                                        </p:tgtEl>
-                                        <p:attrNameLst>
-                                          <p:attrName>ppt_x</p:attrName>
-                                        </p:attrNameLst>
-                                      </p:cBhvr>
-                                      <p:tavLst>
-                                        <p:tav tm="0">
-                                          <p:val>
-                                            <p:strVal val="0-#ppt_w/2"/>
-                                          </p:val>
-                                        </p:tav>
-                                        <p:tav tm="100000">
-                                          <p:val>
-                                            <p:strVal val="#ppt_x"/>
-                                          </p:val>
-                                        </p:tav>
-                                      </p:tavLst>
-                                    </p:anim>
-                                    <p:anim calcmode="lin" valueType="num">
-                                      <p:cBhvr additive="base">
-                                        <p:cTn id="40" dur="550" fill="hold"/>
-                                        <p:tgtEl>
-                                          <p:spTgt spid="9"/>
+                                        <p:cTn id="25" dur="550" fill="hold"/>
+                                        <p:tgtEl>
+                                          <p:spTgt spid="6"/>
                                         </p:tgtEl>
                                         <p:attrNameLst>
                                           <p:attrName>ppt_y</p:attrName>
@@ -5117,32 +4802,32 @@
                     </p:cTn>
                   </p:par>
                   <p:par>
-                    <p:cTn id="41" fill="hold">
+                    <p:cTn id="26" fill="hold">
                       <p:stCondLst>
                         <p:cond delay="indefinite"/>
                       </p:stCondLst>
                       <p:childTnLst>
                         <p:par>
-                          <p:cTn id="42" fill="hold">
+                          <p:cTn id="27" fill="hold">
                             <p:stCondLst>
                               <p:cond delay="0"/>
                             </p:stCondLst>
                             <p:childTnLst>
                               <p:par>
-                                <p:cTn id="43" presetID="53" presetClass="entr" presetSubtype="16" fill="hold" grpId="0" nodeType="clickEffect">
+                                <p:cTn id="28" presetID="2" presetClass="entr" presetSubtype="8" fill="hold" decel="100000" grpId="0" nodeType="clickEffect">
                                   <p:stCondLst>
                                     <p:cond delay="0"/>
                                   </p:stCondLst>
                                   <p:childTnLst>
                                     <p:set>
                                       <p:cBhvr>
-                                        <p:cTn id="44" dur="1" fill="hold">
+                                        <p:cTn id="29" dur="1" fill="hold">
                                           <p:stCondLst>
                                             <p:cond delay="0"/>
                                           </p:stCondLst>
                                         </p:cTn>
                                         <p:tgtEl>
-                                          <p:spTgt spid="10"/>
+                                          <p:spTgt spid="7"/>
                                         </p:tgtEl>
                                         <p:attrNameLst>
                                           <p:attrName>style.visibility</p:attrName>
@@ -5154,58 +4839,141 @@
                                     </p:set>
                                     <p:anim calcmode="lin" valueType="num">
                                       <p:cBhvr additive="base">
-                                        <p:cTn id="45" dur="420" fill="hold"/>
-                                        <p:tgtEl>
-                                          <p:spTgt spid="10"/>
-                                        </p:tgtEl>
-                                        <p:attrNameLst>
-                                          <p:attrName>ppt_w</p:attrName>
+                                        <p:cTn id="30" dur="550" fill="hold"/>
+                                        <p:tgtEl>
+                                          <p:spTgt spid="7"/>
+                                        </p:tgtEl>
+                                        <p:attrNameLst>
+                                          <p:attrName>ppt_x</p:attrName>
                                         </p:attrNameLst>
                                       </p:cBhvr>
                                       <p:tavLst>
                                         <p:tav tm="0">
                                           <p:val>
-                                            <p:strVal val="0"/>
+                                            <p:strVal val="0-#ppt_w/2"/>
                                           </p:val>
                                         </p:tav>
                                         <p:tav tm="100000">
                                           <p:val>
-                                            <p:strVal val="#ppt_w"/>
+                                            <p:strVal val="#ppt_x"/>
                                           </p:val>
                                         </p:tav>
                                       </p:tavLst>
                                     </p:anim>
                                     <p:anim calcmode="lin" valueType="num">
                                       <p:cBhvr additive="base">
-                                        <p:cTn id="46" dur="420" fill="hold"/>
-                                        <p:tgtEl>
-                                          <p:spTgt spid="10"/>
-                                        </p:tgtEl>
-                                        <p:attrNameLst>
-                                          <p:attrName>ppt_h</p:attrName>
+                                        <p:cTn id="31" dur="550" fill="hold"/>
+                                        <p:tgtEl>
+                                          <p:spTgt spid="7"/>
+                                        </p:tgtEl>
+                                        <p:attrNameLst>
+                                          <p:attrName>ppt_y</p:attrName>
                                         </p:attrNameLst>
                                       </p:cBhvr>
                                       <p:tavLst>
                                         <p:tav tm="0">
                                           <p:val>
-                                            <p:strVal val="0"/>
+                                            <p:strVal val="#ppt_y"/>
                                           </p:val>
                                         </p:tav>
                                         <p:tav tm="100000">
                                           <p:val>
-                                            <p:strVal val="#ppt_h"/>
+                                            <p:strVal val="#ppt_y"/>
                                           </p:val>
                                         </p:tav>
                                       </p:tavLst>
                                     </p:anim>
-                                    <p:animEffect transition="in" filter="fade">
+                                  </p:childTnLst>
+                                </p:cTn>
+                              </p:par>
+                            </p:childTnLst>
+                          </p:cTn>
+                        </p:par>
+                      </p:childTnLst>
+                    </p:cTn>
+                  </p:par>
+                  <p:par>
+                    <p:cTn id="32" fill="hold">
+                      <p:stCondLst>
+                        <p:cond delay="indefinite"/>
+                      </p:stCondLst>
+                      <p:childTnLst>
+                        <p:par>
+                          <p:cTn id="33" fill="hold">
+                            <p:stCondLst>
+                              <p:cond delay="0"/>
+                            </p:stCondLst>
+                            <p:childTnLst>
+                              <p:par>
+                                <p:cTn id="34" presetID="2" presetClass="entr" presetSubtype="4" fill="hold" decel="100000" grpId="0" nodeType="clickEffect">
+                                  <p:stCondLst>
+                                    <p:cond delay="0"/>
+                                  </p:stCondLst>
+                                  <p:childTnLst>
+                                    <p:set>
                                       <p:cBhvr>
-                                        <p:cTn id="47" dur="420"/>
-                                        <p:tgtEl>
-                                          <p:spTgt spid="10"/>
-                                        </p:tgtEl>
-                                      </p:cBhvr>
-                                    </p:animEffect>
+                                        <p:cTn id="35" dur="1" fill="hold">
+                                          <p:stCondLst>
+                                            <p:cond delay="0"/>
+                                          </p:stCondLst>
+                                        </p:cTn>
+                                        <p:tgtEl>
+                                          <p:spTgt spid="8"/>
+                                        </p:tgtEl>
+                                        <p:attrNameLst>
+                                          <p:attrName>style.visibility</p:attrName>
+                                        </p:attrNameLst>
+                                      </p:cBhvr>
+                                      <p:to>
+                                        <p:strVal val="visible"/>
+                                      </p:to>
+                                    </p:set>
+                                    <p:anim calcmode="lin" valueType="num">
+                                      <p:cBhvr additive="base">
+                                        <p:cTn id="36" dur="550" fill="hold"/>
+                                        <p:tgtEl>
+                                          <p:spTgt spid="8"/>
+                                        </p:tgtEl>
+                                        <p:attrNameLst>
+                                          <p:attrName>ppt_x</p:attrName>
+                                        </p:attrNameLst>
+                                      </p:cBhvr>
+                                      <p:tavLst>
+                                        <p:tav tm="0">
+                                          <p:val>
+                                            <p:strVal val="#ppt_x"/>
+                                          </p:val>
+                                        </p:tav>
+                                        <p:tav tm="100000">
+                                          <p:val>
+                                            <p:strVal val="#ppt_x"/>
+                                          </p:val>
+                                        </p:tav>
+                                      </p:tavLst>
+                                    </p:anim>
+                                    <p:anim calcmode="lin" valueType="num">
+                                      <p:cBhvr additive="base">
+                                        <p:cTn id="37" dur="550" fill="hold"/>
+                                        <p:tgtEl>
+                                          <p:spTgt spid="8"/>
+                                        </p:tgtEl>
+                                        <p:attrNameLst>
+                                          <p:attrName>ppt_y</p:attrName>
+                                        </p:attrNameLst>
+                                      </p:cBhvr>
+                                      <p:tavLst>
+                                        <p:tav tm="0">
+                                          <p:val>
+                                            <p:strVal val="1+#ppt_h/2"/>
+                                          </p:val>
+                                        </p:tav>
+                                        <p:tav tm="100000">
+                                          <p:val>
+                                            <p:strVal val="#ppt_y"/>
+                                          </p:val>
+                                        </p:tav>
+                                      </p:tavLst>
+                                    </p:anim>
                                   </p:childTnLst>
                                 </p:cTn>
                               </p:par>
@@ -5290,8 +5058,8 @@
         </p:blipFill>
         <p:spPr>
           <a:xfrm>
-            <a:off x="426709" y="1417284"/>
-            <a:ext cx="11338276" cy="1356326"/>
+            <a:off x="426709" y="1341086"/>
+            <a:ext cx="11338276" cy="1737316"/>
           </a:xfrm>
           <a:prstGeom prst="rect">
             <a:avLst/>
@@ -5314,8 +5082,8 @@
         </p:blipFill>
         <p:spPr>
           <a:xfrm>
-            <a:off x="3855623" y="1645878"/>
-            <a:ext cx="1813514" cy="822939"/>
+            <a:off x="9799074" y="1645878"/>
+            <a:ext cx="1737316" cy="1127731"/>
           </a:xfrm>
           <a:prstGeom prst="rect">
             <a:avLst/>
@@ -5338,8 +5106,8 @@
         </p:blipFill>
         <p:spPr>
           <a:xfrm>
-            <a:off x="426709" y="2712652"/>
-            <a:ext cx="11338276" cy="1356326"/>
+            <a:off x="9799074" y="1645878"/>
+            <a:ext cx="1737316" cy="1127731"/>
           </a:xfrm>
           <a:prstGeom prst="rect">
             <a:avLst/>
@@ -5348,7 +5116,7 @@
       </p:pic>
       <p:pic>
         <p:nvPicPr>
-          <p:cNvPr id="6" name="Picture 5" descr="c12_4_0.jpg"/>
+          <p:cNvPr id="6" name="Picture 5" descr="c12_3_1.jpg"/>
           <p:cNvPicPr>
             <a:picLocks noChangeAspect="1"/>
           </p:cNvPicPr>
@@ -5362,8 +5130,8 @@
         </p:blipFill>
         <p:spPr>
           <a:xfrm>
-            <a:off x="2941246" y="2941246"/>
-            <a:ext cx="1508722" cy="822939"/>
+            <a:off x="426709" y="2865048"/>
+            <a:ext cx="11338276" cy="1737316"/>
           </a:xfrm>
           <a:prstGeom prst="rect">
             <a:avLst/>
@@ -5372,7 +5140,31 @@
       </p:pic>
       <p:pic>
         <p:nvPicPr>
-          <p:cNvPr id="7" name="Picture 6" descr="c12_5_0.jpg"/>
+          <p:cNvPr id="7" name="Picture 6" descr="c12_2_0.jpg"/>
+          <p:cNvPicPr>
+            <a:picLocks noChangeAspect="1"/>
+          </p:cNvPicPr>
+          <p:nvPr/>
+        </p:nvPicPr>
+        <p:blipFill>
+          <a:blip r:embed="rId4"/>
+          <a:stretch>
+            <a:fillRect/>
+          </a:stretch>
+        </p:blipFill>
+        <p:spPr>
+          <a:xfrm>
+            <a:off x="9799074" y="1645878"/>
+            <a:ext cx="1737316" cy="1127731"/>
+          </a:xfrm>
+          <a:prstGeom prst="rect">
+            <a:avLst/>
+          </a:prstGeom>
+        </p:spPr>
+      </p:pic>
+      <p:pic>
+        <p:nvPicPr>
+          <p:cNvPr id="8" name="Picture 7" descr="c12_4_1.jpg"/>
           <p:cNvPicPr>
             <a:picLocks noChangeAspect="1"/>
           </p:cNvPicPr>
@@ -5386,8 +5178,8 @@
         </p:blipFill>
         <p:spPr>
           <a:xfrm>
-            <a:off x="426709" y="4008019"/>
-            <a:ext cx="11338276" cy="1356326"/>
+            <a:off x="8427509" y="3017444"/>
+            <a:ext cx="3108882" cy="1356326"/>
           </a:xfrm>
           <a:prstGeom prst="rect">
             <a:avLst/>
@@ -5396,7 +5188,7 @@
       </p:pic>
       <p:pic>
         <p:nvPicPr>
-          <p:cNvPr id="8" name="Picture 7" descr="c12_6_0.jpg"/>
+          <p:cNvPr id="9" name="Picture 8" descr="c12_5_0.jpg"/>
           <p:cNvPicPr>
             <a:picLocks noChangeAspect="1"/>
           </p:cNvPicPr>
@@ -5410,8 +5202,8 @@
         </p:blipFill>
         <p:spPr>
           <a:xfrm>
-            <a:off x="2941246" y="4236614"/>
-            <a:ext cx="1508722" cy="822939"/>
+            <a:off x="426709" y="4389010"/>
+            <a:ext cx="11338276" cy="1737316"/>
           </a:xfrm>
           <a:prstGeom prst="rect">
             <a:avLst/>
@@ -5420,7 +5212,7 @@
       </p:pic>
       <p:pic>
         <p:nvPicPr>
-          <p:cNvPr id="9" name="Picture 8" descr="c12_7_0.jpg"/>
+          <p:cNvPr id="10" name="Picture 9" descr="c12_6_0.jpg"/>
           <p:cNvPicPr>
             <a:picLocks noChangeAspect="1"/>
           </p:cNvPicPr>
@@ -5434,8 +5226,8 @@
         </p:blipFill>
         <p:spPr>
           <a:xfrm>
-            <a:off x="7665528" y="45718"/>
-            <a:ext cx="4099457" cy="1661118"/>
+            <a:off x="10180065" y="4693802"/>
+            <a:ext cx="1356326" cy="1127731"/>
           </a:xfrm>
           <a:prstGeom prst="rect">
             <a:avLst/>
@@ -5444,7 +5236,7 @@
       </p:pic>
       <p:sp>
         <p:nvSpPr>
-          <p:cNvPr id="10" name="TextBox 9">
+          <p:cNvPr id="11" name="TextBox 10">
             <a:hlinkClick action="ppaction://hlinksldjump" r:id="rId10"/>
           </p:cNvPr>
           <p:cNvSpPr txBox="1"/>
@@ -5601,7 +5393,7 @@
                             </p:stCondLst>
                             <p:childTnLst>
                               <p:par>
-                                <p:cTn id="11" presetID="10" presetClass="entr" presetSubtype="0" fill="hold" grpId="0" nodeType="clickEffect">
+                                <p:cTn id="11" presetID="53" presetClass="entr" presetSubtype="16" fill="hold" grpId="0" nodeType="clickEffect">
                                   <p:stCondLst>
                                     <p:cond delay="0"/>
                                   </p:stCondLst>
@@ -5624,9 +5416,55 @@
                                         <p:strVal val="visible"/>
                                       </p:to>
                                     </p:set>
+                                    <p:anim calcmode="lin" valueType="num">
+                                      <p:cBhvr additive="base">
+                                        <p:cTn id="13" dur="420" fill="hold"/>
+                                        <p:tgtEl>
+                                          <p:spTgt spid="4"/>
+                                        </p:tgtEl>
+                                        <p:attrNameLst>
+                                          <p:attrName>ppt_w</p:attrName>
+                                        </p:attrNameLst>
+                                      </p:cBhvr>
+                                      <p:tavLst>
+                                        <p:tav tm="0">
+                                          <p:val>
+                                            <p:strVal val="0"/>
+                                          </p:val>
+                                        </p:tav>
+                                        <p:tav tm="100000">
+                                          <p:val>
+                                            <p:strVal val="#ppt_w"/>
+                                          </p:val>
+                                        </p:tav>
+                                      </p:tavLst>
+                                    </p:anim>
+                                    <p:anim calcmode="lin" valueType="num">
+                                      <p:cBhvr additive="base">
+                                        <p:cTn id="14" dur="420" fill="hold"/>
+                                        <p:tgtEl>
+                                          <p:spTgt spid="4"/>
+                                        </p:tgtEl>
+                                        <p:attrNameLst>
+                                          <p:attrName>ppt_h</p:attrName>
+                                        </p:attrNameLst>
+                                      </p:cBhvr>
+                                      <p:tavLst>
+                                        <p:tav tm="0">
+                                          <p:val>
+                                            <p:strVal val="0"/>
+                                          </p:val>
+                                        </p:tav>
+                                        <p:tav tm="100000">
+                                          <p:val>
+                                            <p:strVal val="#ppt_h"/>
+                                          </p:val>
+                                        </p:tav>
+                                      </p:tavLst>
+                                    </p:anim>
                                     <p:animEffect transition="in" filter="fade">
                                       <p:cBhvr>
-                                        <p:cTn id="13" dur="450"/>
+                                        <p:cTn id="15" dur="420"/>
                                         <p:tgtEl>
                                           <p:spTgt spid="4"/>
                                         </p:tgtEl>
@@ -5642,32 +5480,67 @@
                     </p:cTn>
                   </p:par>
                   <p:par>
-                    <p:cTn id="14" fill="hold">
+                    <p:cTn id="16" fill="hold">
                       <p:stCondLst>
                         <p:cond delay="indefinite"/>
                       </p:stCondLst>
                       <p:childTnLst>
                         <p:par>
-                          <p:cTn id="15" fill="hold">
+                          <p:cTn id="17" fill="hold">
                             <p:stCondLst>
                               <p:cond delay="0"/>
                             </p:stCondLst>
                             <p:childTnLst>
                               <p:par>
-                                <p:cTn id="16" presetID="2" presetClass="entr" presetSubtype="8" fill="hold" decel="100000" grpId="0" nodeType="clickEffect">
+                                <p:cTn id="18" presetID="10" presetClass="entr" presetSubtype="0" fill="hold" grpId="0" nodeType="clickEffect">
                                   <p:stCondLst>
                                     <p:cond delay="0"/>
                                   </p:stCondLst>
                                   <p:childTnLst>
                                     <p:set>
                                       <p:cBhvr>
-                                        <p:cTn id="17" dur="1" fill="hold">
+                                        <p:cTn id="19" dur="1" fill="hold">
                                           <p:stCondLst>
                                             <p:cond delay="0"/>
                                           </p:stCondLst>
                                         </p:cTn>
                                         <p:tgtEl>
                                           <p:spTgt spid="5"/>
+                                        </p:tgtEl>
+                                        <p:attrNameLst>
+                                          <p:attrName>style.visibility</p:attrName>
+                                        </p:attrNameLst>
+                                      </p:cBhvr>
+                                      <p:to>
+                                        <p:strVal val="visible"/>
+                                      </p:to>
+                                    </p:set>
+                                    <p:animEffect transition="in" filter="fade">
+                                      <p:cBhvr>
+                                        <p:cTn id="20" dur="450"/>
+                                        <p:tgtEl>
+                                          <p:spTgt spid="5"/>
+                                        </p:tgtEl>
+                                      </p:cBhvr>
+                                    </p:animEffect>
+                                  </p:childTnLst>
+                                </p:cTn>
+                              </p:par>
+                              <p:par>
+                                <p:cTn id="21" presetID="2" presetClass="entr" presetSubtype="8" fill="hold" decel="100000" grpId="0" nodeType="withEffect">
+                                  <p:stCondLst>
+                                    <p:cond delay="120"/>
+                                  </p:stCondLst>
+                                  <p:childTnLst>
+                                    <p:set>
+                                      <p:cBhvr>
+                                        <p:cTn id="22" dur="1" fill="hold">
+                                          <p:stCondLst>
+                                            <p:cond delay="0"/>
+                                          </p:stCondLst>
+                                        </p:cTn>
+                                        <p:tgtEl>
+                                          <p:spTgt spid="6"/>
                                         </p:tgtEl>
                                         <p:attrNameLst>
                                           <p:attrName>style.visibility</p:attrName>
@@ -5679,9 +5552,9 @@
                                     </p:set>
                                     <p:anim calcmode="lin" valueType="num">
                                       <p:cBhvr additive="base">
-                                        <p:cTn id="18" dur="550" fill="hold"/>
-                                        <p:tgtEl>
-                                          <p:spTgt spid="5"/>
+                                        <p:cTn id="23" dur="550" fill="hold"/>
+                                        <p:tgtEl>
+                                          <p:spTgt spid="6"/>
                                         </p:tgtEl>
                                         <p:attrNameLst>
                                           <p:attrName>ppt_x</p:attrName>
@@ -5702,9 +5575,9 @@
                                     </p:anim>
                                     <p:anim calcmode="lin" valueType="num">
                                       <p:cBhvr additive="base">
-                                        <p:cTn id="19" dur="550" fill="hold"/>
-                                        <p:tgtEl>
-                                          <p:spTgt spid="5"/>
+                                        <p:cTn id="24" dur="550" fill="hold"/>
+                                        <p:tgtEl>
+                                          <p:spTgt spid="6"/>
                                         </p:tgtEl>
                                         <p:attrNameLst>
                                           <p:attrName>ppt_y</p:attrName>
@@ -5723,59 +5596,6 @@
                                         </p:tav>
                                       </p:tavLst>
                                     </p:anim>
-                                  </p:childTnLst>
-                                </p:cTn>
-                              </p:par>
-                            </p:childTnLst>
-                          </p:cTn>
-                        </p:par>
-                      </p:childTnLst>
-                    </p:cTn>
-                  </p:par>
-                  <p:par>
-                    <p:cTn id="20" fill="hold">
-                      <p:stCondLst>
-                        <p:cond delay="indefinite"/>
-                      </p:stCondLst>
-                      <p:childTnLst>
-                        <p:par>
-                          <p:cTn id="21" fill="hold">
-                            <p:stCondLst>
-                              <p:cond delay="0"/>
-                            </p:stCondLst>
-                            <p:childTnLst>
-                              <p:par>
-                                <p:cTn id="22" presetID="10" presetClass="entr" presetSubtype="0" fill="hold" grpId="0" nodeType="clickEffect">
-                                  <p:stCondLst>
-                                    <p:cond delay="0"/>
-                                  </p:stCondLst>
-                                  <p:childTnLst>
-                                    <p:set>
-                                      <p:cBhvr>
-                                        <p:cTn id="23" dur="1" fill="hold">
-                                          <p:stCondLst>
-                                            <p:cond delay="0"/>
-                                          </p:stCondLst>
-                                        </p:cTn>
-                                        <p:tgtEl>
-                                          <p:spTgt spid="6"/>
-                                        </p:tgtEl>
-                                        <p:attrNameLst>
-                                          <p:attrName>style.visibility</p:attrName>
-                                        </p:attrNameLst>
-                                      </p:cBhvr>
-                                      <p:to>
-                                        <p:strVal val="visible"/>
-                                      </p:to>
-                                    </p:set>
-                                    <p:animEffect transition="in" filter="fade">
-                                      <p:cBhvr>
-                                        <p:cTn id="24" dur="450"/>
-                                        <p:tgtEl>
-                                          <p:spTgt spid="6"/>
-                                        </p:tgtEl>
-                                      </p:cBhvr>
-                                    </p:animEffect>
                                   </p:childTnLst>
                                 </p:cTn>
                               </p:par>
@@ -5798,7 +5618,7 @@
                             </p:stCondLst>
                             <p:childTnLst>
                               <p:par>
-                                <p:cTn id="27" presetID="2" presetClass="entr" presetSubtype="8" fill="hold" decel="100000" grpId="0" nodeType="clickEffect">
+                                <p:cTn id="27" presetID="10" presetClass="entr" presetSubtype="0" fill="hold" grpId="0" nodeType="clickEffect">
                                   <p:stCondLst>
                                     <p:cond delay="0"/>
                                   </p:stCondLst>
@@ -5821,34 +5641,168 @@
                                         <p:strVal val="visible"/>
                                       </p:to>
                                     </p:set>
+                                    <p:animEffect transition="in" filter="fade">
+                                      <p:cBhvr>
+                                        <p:cTn id="29" dur="450"/>
+                                        <p:tgtEl>
+                                          <p:spTgt spid="7"/>
+                                        </p:tgtEl>
+                                      </p:cBhvr>
+                                    </p:animEffect>
+                                  </p:childTnLst>
+                                </p:cTn>
+                              </p:par>
+                              <p:par>
+                                <p:cTn id="30" presetID="53" presetClass="entr" presetSubtype="16" fill="hold" grpId="0" nodeType="withEffect">
+                                  <p:stCondLst>
+                                    <p:cond delay="120"/>
+                                  </p:stCondLst>
+                                  <p:childTnLst>
+                                    <p:set>
+                                      <p:cBhvr>
+                                        <p:cTn id="31" dur="1" fill="hold">
+                                          <p:stCondLst>
+                                            <p:cond delay="0"/>
+                                          </p:stCondLst>
+                                        </p:cTn>
+                                        <p:tgtEl>
+                                          <p:spTgt spid="8"/>
+                                        </p:tgtEl>
+                                        <p:attrNameLst>
+                                          <p:attrName>style.visibility</p:attrName>
+                                        </p:attrNameLst>
+                                      </p:cBhvr>
+                                      <p:to>
+                                        <p:strVal val="visible"/>
+                                      </p:to>
+                                    </p:set>
                                     <p:anim calcmode="lin" valueType="num">
                                       <p:cBhvr additive="base">
-                                        <p:cTn id="29" dur="550" fill="hold"/>
-                                        <p:tgtEl>
-                                          <p:spTgt spid="7"/>
-                                        </p:tgtEl>
-                                        <p:attrNameLst>
-                                          <p:attrName>ppt_x</p:attrName>
+                                        <p:cTn id="32" dur="420" fill="hold"/>
+                                        <p:tgtEl>
+                                          <p:spTgt spid="8"/>
+                                        </p:tgtEl>
+                                        <p:attrNameLst>
+                                          <p:attrName>ppt_w</p:attrName>
                                         </p:attrNameLst>
                                       </p:cBhvr>
                                       <p:tavLst>
                                         <p:tav tm="0">
                                           <p:val>
-                                            <p:strVal val="0-#ppt_w/2"/>
+                                            <p:strVal val="0"/>
                                           </p:val>
                                         </p:tav>
                                         <p:tav tm="100000">
                                           <p:val>
-                                            <p:strVal val="#ppt_x"/>
+                                            <p:strVal val="#ppt_w"/>
                                           </p:val>
                                         </p:tav>
                                       </p:tavLst>
                                     </p:anim>
                                     <p:anim calcmode="lin" valueType="num">
                                       <p:cBhvr additive="base">
-                                        <p:cTn id="30" dur="550" fill="hold"/>
-                                        <p:tgtEl>
-                                          <p:spTgt spid="7"/>
+                                        <p:cTn id="33" dur="420" fill="hold"/>
+                                        <p:tgtEl>
+                                          <p:spTgt spid="8"/>
+                                        </p:tgtEl>
+                                        <p:attrNameLst>
+                                          <p:attrName>ppt_h</p:attrName>
+                                        </p:attrNameLst>
+                                      </p:cBhvr>
+                                      <p:tavLst>
+                                        <p:tav tm="0">
+                                          <p:val>
+                                            <p:strVal val="0"/>
+                                          </p:val>
+                                        </p:tav>
+                                        <p:tav tm="100000">
+                                          <p:val>
+                                            <p:strVal val="#ppt_h"/>
+                                          </p:val>
+                                        </p:tav>
+                                      </p:tavLst>
+                                    </p:anim>
+                                    <p:animEffect transition="in" filter="fade">
+                                      <p:cBhvr>
+                                        <p:cTn id="34" dur="420"/>
+                                        <p:tgtEl>
+                                          <p:spTgt spid="8"/>
+                                        </p:tgtEl>
+                                      </p:cBhvr>
+                                    </p:animEffect>
+                                  </p:childTnLst>
+                                </p:cTn>
+                              </p:par>
+                            </p:childTnLst>
+                          </p:cTn>
+                        </p:par>
+                      </p:childTnLst>
+                    </p:cTn>
+                  </p:par>
+                  <p:par>
+                    <p:cTn id="35" fill="hold">
+                      <p:stCondLst>
+                        <p:cond delay="indefinite"/>
+                      </p:stCondLst>
+                      <p:childTnLst>
+                        <p:par>
+                          <p:cTn id="36" fill="hold">
+                            <p:stCondLst>
+                              <p:cond delay="0"/>
+                            </p:stCondLst>
+                            <p:childTnLst>
+                              <p:par>
+                                <p:cTn id="37" presetID="2" presetClass="entr" presetSubtype="8" fill="hold" decel="100000" grpId="0" nodeType="clickEffect">
+                                  <p:stCondLst>
+                                    <p:cond delay="0"/>
+                                  </p:stCondLst>
+                                  <p:childTnLst>
+                                    <p:set>
+                                      <p:cBhvr>
+                                        <p:cTn id="38" dur="1" fill="hold">
+                                          <p:stCondLst>
+                                            <p:cond delay="0"/>
+                                          </p:stCondLst>
+                                        </p:cTn>
+                                        <p:tgtEl>
+                                          <p:spTgt spid="9"/>
+                                        </p:tgtEl>
+                                        <p:attrNameLst>
+                                          <p:attrName>style.visibility</p:attrName>
+                                        </p:attrNameLst>
+                                      </p:cBhvr>
+                                      <p:to>
+                                        <p:strVal val="visible"/>
+                                      </p:to>
+                                    </p:set>
+                                    <p:anim calcmode="lin" valueType="num">
+                                      <p:cBhvr additive="base">
+                                        <p:cTn id="39" dur="550" fill="hold"/>
+                                        <p:tgtEl>
+                                          <p:spTgt spid="9"/>
+                                        </p:tgtEl>
+                                        <p:attrNameLst>
+                                          <p:attrName>ppt_x</p:attrName>
+                                        </p:attrNameLst>
+                                      </p:cBhvr>
+                                      <p:tavLst>
+                                        <p:tav tm="0">
+                                          <p:val>
+                                            <p:strVal val="0-#ppt_w/2"/>
+                                          </p:val>
+                                        </p:tav>
+                                        <p:tav tm="100000">
+                                          <p:val>
+                                            <p:strVal val="#ppt_x"/>
+                                          </p:val>
+                                        </p:tav>
+                                      </p:tavLst>
+                                    </p:anim>
+                                    <p:anim calcmode="lin" valueType="num">
+                                      <p:cBhvr additive="base">
+                                        <p:cTn id="40" dur="550" fill="hold"/>
+                                        <p:tgtEl>
+                                          <p:spTgt spid="9"/>
                                         </p:tgtEl>
                                         <p:attrNameLst>
                                           <p:attrName>ppt_y</p:attrName>
@@ -5877,85 +5831,32 @@
                     </p:cTn>
                   </p:par>
                   <p:par>
-                    <p:cTn id="31" fill="hold">
+                    <p:cTn id="41" fill="hold">
                       <p:stCondLst>
                         <p:cond delay="indefinite"/>
                       </p:stCondLst>
                       <p:childTnLst>
                         <p:par>
-                          <p:cTn id="32" fill="hold">
+                          <p:cTn id="42" fill="hold">
                             <p:stCondLst>
                               <p:cond delay="0"/>
                             </p:stCondLst>
                             <p:childTnLst>
                               <p:par>
-                                <p:cTn id="33" presetID="10" presetClass="entr" presetSubtype="0" fill="hold" grpId="0" nodeType="clickEffect">
+                                <p:cTn id="43" presetID="53" presetClass="entr" presetSubtype="16" fill="hold" grpId="0" nodeType="clickEffect">
                                   <p:stCondLst>
                                     <p:cond delay="0"/>
                                   </p:stCondLst>
                                   <p:childTnLst>
                                     <p:set>
                                       <p:cBhvr>
-                                        <p:cTn id="34" dur="1" fill="hold">
+                                        <p:cTn id="44" dur="1" fill="hold">
                                           <p:stCondLst>
                                             <p:cond delay="0"/>
                                           </p:stCondLst>
                                         </p:cTn>
                                         <p:tgtEl>
-                                          <p:spTgt spid="8"/>
-                                        </p:tgtEl>
-                                        <p:attrNameLst>
-                                          <p:attrName>style.visibility</p:attrName>
-                                        </p:attrNameLst>
-                                      </p:cBhvr>
-                                      <p:to>
-                                        <p:strVal val="visible"/>
-                                      </p:to>
-                                    </p:set>
-                                    <p:animEffect transition="in" filter="fade">
-                                      <p:cBhvr>
-                                        <p:cTn id="35" dur="450"/>
-                                        <p:tgtEl>
-                                          <p:spTgt spid="8"/>
-                                        </p:tgtEl>
-                                      </p:cBhvr>
-                                    </p:animEffect>
-                                  </p:childTnLst>
-                                </p:cTn>
-                              </p:par>
-                            </p:childTnLst>
-                          </p:cTn>
-                        </p:par>
-                      </p:childTnLst>
-                    </p:cTn>
-                  </p:par>
-                  <p:par>
-                    <p:cTn id="36" fill="hold">
-                      <p:stCondLst>
-                        <p:cond delay="indefinite"/>
-                      </p:stCondLst>
-                      <p:childTnLst>
-                        <p:par>
-                          <p:cTn id="37" fill="hold">
-                            <p:stCondLst>
-                              <p:cond delay="0"/>
-                            </p:stCondLst>
-                            <p:childTnLst>
-                              <p:par>
-                                <p:cTn id="38" presetID="53" presetClass="entr" presetSubtype="16" fill="hold" grpId="0" nodeType="clickEffect">
-                                  <p:stCondLst>
-                                    <p:cond delay="0"/>
-                                  </p:stCondLst>
-                                  <p:childTnLst>
-                                    <p:set>
-                                      <p:cBhvr>
-                                        <p:cTn id="39" dur="1" fill="hold">
-                                          <p:stCondLst>
-                                            <p:cond delay="0"/>
-                                          </p:stCondLst>
-                                        </p:cTn>
-                                        <p:tgtEl>
-                                          <p:spTgt spid="9"/>
+                                          <p:spTgt spid="10"/>
                                         </p:tgtEl>
                                         <p:attrNameLst>
                                           <p:attrName>style.visibility</p:attrName>
@@ -5967,9 +5868,9 @@
                                     </p:set>
                                     <p:anim calcmode="lin" valueType="num">
                                       <p:cBhvr additive="base">
-                                        <p:cTn id="40" dur="420" fill="hold"/>
-                                        <p:tgtEl>
-                                          <p:spTgt spid="9"/>
+                                        <p:cTn id="45" dur="420" fill="hold"/>
+                                        <p:tgtEl>
+                                          <p:spTgt spid="10"/>
                                         </p:tgtEl>
                                         <p:attrNameLst>
                                           <p:attrName>ppt_w</p:attrName>
@@ -5990,9 +5891,9 @@
                                     </p:anim>
                                     <p:anim calcmode="lin" valueType="num">
                                       <p:cBhvr additive="base">
-                                        <p:cTn id="41" dur="420" fill="hold"/>
-                                        <p:tgtEl>
-                                          <p:spTgt spid="9"/>
+                                        <p:cTn id="46" dur="420" fill="hold"/>
+                                        <p:tgtEl>
+                                          <p:spTgt spid="10"/>
                                         </p:tgtEl>
                                         <p:attrNameLst>
                                           <p:attrName>ppt_h</p:attrName>
@@ -6013,9 +5914,9 @@
                                     </p:anim>
                                     <p:animEffect transition="in" filter="fade">
                                       <p:cBhvr>
-                                        <p:cTn id="42" dur="420"/>
-                                        <p:tgtEl>
-                                          <p:spTgt spid="9"/>
+                                        <p:cTn id="47" dur="420"/>
+                                        <p:tgtEl>
+                                          <p:spTgt spid="10"/>
                                         </p:tgtEl>
                                       </p:cBhvr>
                                     </p:animEffect>
@@ -6103,8 +6004,8 @@
         </p:blipFill>
         <p:spPr>
           <a:xfrm>
-            <a:off x="426709" y="2636454"/>
-            <a:ext cx="6842588" cy="1203929"/>
+            <a:off x="426709" y="1417284"/>
+            <a:ext cx="11338276" cy="1356326"/>
           </a:xfrm>
           <a:prstGeom prst="rect">
             <a:avLst/>
@@ -6113,7 +6014,7 @@
       </p:pic>
       <p:pic>
         <p:nvPicPr>
-          <p:cNvPr id="4" name="Picture 3" descr="c13_1_1.jpg"/>
+          <p:cNvPr id="4" name="Picture 3" descr="c13_2_0.jpg"/>
           <p:cNvPicPr>
             <a:picLocks noChangeAspect="1"/>
           </p:cNvPicPr>
@@ -6127,18 +6028,138 @@
         </p:blipFill>
         <p:spPr>
           <a:xfrm>
-            <a:off x="9418084" y="3550831"/>
-            <a:ext cx="1965910" cy="2499297"/>
+            <a:off x="3855623" y="1645878"/>
+            <a:ext cx="1813514" cy="822939"/>
           </a:xfrm>
           <a:prstGeom prst="rect">
             <a:avLst/>
           </a:prstGeom>
         </p:spPr>
       </p:pic>
+      <p:pic>
+        <p:nvPicPr>
+          <p:cNvPr id="5" name="Picture 4" descr="c13_3_0.jpg"/>
+          <p:cNvPicPr>
+            <a:picLocks noChangeAspect="1"/>
+          </p:cNvPicPr>
+          <p:nvPr/>
+        </p:nvPicPr>
+        <p:blipFill>
+          <a:blip r:embed="rId5"/>
+          <a:stretch>
+            <a:fillRect/>
+          </a:stretch>
+        </p:blipFill>
+        <p:spPr>
+          <a:xfrm>
+            <a:off x="426709" y="2712652"/>
+            <a:ext cx="11338276" cy="1356326"/>
+          </a:xfrm>
+          <a:prstGeom prst="rect">
+            <a:avLst/>
+          </a:prstGeom>
+        </p:spPr>
+      </p:pic>
+      <p:pic>
+        <p:nvPicPr>
+          <p:cNvPr id="6" name="Picture 5" descr="c13_4_0.jpg"/>
+          <p:cNvPicPr>
+            <a:picLocks noChangeAspect="1"/>
+          </p:cNvPicPr>
+          <p:nvPr/>
+        </p:nvPicPr>
+        <p:blipFill>
+          <a:blip r:embed="rId6"/>
+          <a:stretch>
+            <a:fillRect/>
+          </a:stretch>
+        </p:blipFill>
+        <p:spPr>
+          <a:xfrm>
+            <a:off x="2941246" y="2941246"/>
+            <a:ext cx="1508722" cy="822939"/>
+          </a:xfrm>
+          <a:prstGeom prst="rect">
+            <a:avLst/>
+          </a:prstGeom>
+        </p:spPr>
+      </p:pic>
+      <p:pic>
+        <p:nvPicPr>
+          <p:cNvPr id="7" name="Picture 6" descr="c13_5_0.jpg"/>
+          <p:cNvPicPr>
+            <a:picLocks noChangeAspect="1"/>
+          </p:cNvPicPr>
+          <p:nvPr/>
+        </p:nvPicPr>
+        <p:blipFill>
+          <a:blip r:embed="rId7"/>
+          <a:stretch>
+            <a:fillRect/>
+          </a:stretch>
+        </p:blipFill>
+        <p:spPr>
+          <a:xfrm>
+            <a:off x="426709" y="4008019"/>
+            <a:ext cx="11338276" cy="1356326"/>
+          </a:xfrm>
+          <a:prstGeom prst="rect">
+            <a:avLst/>
+          </a:prstGeom>
+        </p:spPr>
+      </p:pic>
+      <p:pic>
+        <p:nvPicPr>
+          <p:cNvPr id="8" name="Picture 7" descr="c13_6_0.jpg"/>
+          <p:cNvPicPr>
+            <a:picLocks noChangeAspect="1"/>
+          </p:cNvPicPr>
+          <p:nvPr/>
+        </p:nvPicPr>
+        <p:blipFill>
+          <a:blip r:embed="rId8"/>
+          <a:stretch>
+            <a:fillRect/>
+          </a:stretch>
+        </p:blipFill>
+        <p:spPr>
+          <a:xfrm>
+            <a:off x="2941246" y="4236614"/>
+            <a:ext cx="1508722" cy="822939"/>
+          </a:xfrm>
+          <a:prstGeom prst="rect">
+            <a:avLst/>
+          </a:prstGeom>
+        </p:spPr>
+      </p:pic>
+      <p:pic>
+        <p:nvPicPr>
+          <p:cNvPr id="9" name="Picture 8" descr="c13_7_0.jpg"/>
+          <p:cNvPicPr>
+            <a:picLocks noChangeAspect="1"/>
+          </p:cNvPicPr>
+          <p:nvPr/>
+        </p:nvPicPr>
+        <p:blipFill>
+          <a:blip r:embed="rId9"/>
+          <a:stretch>
+            <a:fillRect/>
+          </a:stretch>
+        </p:blipFill>
+        <p:spPr>
+          <a:xfrm>
+            <a:off x="7665528" y="45718"/>
+            <a:ext cx="4099457" cy="1661118"/>
+          </a:xfrm>
+          <a:prstGeom prst="rect">
+            <a:avLst/>
+          </a:prstGeom>
+        </p:spPr>
+      </p:pic>
       <p:sp>
         <p:nvSpPr>
-          <p:cNvPr id="5" name="TextBox 4">
-            <a:hlinkClick action="ppaction://hlinksldjump" r:id="rId5"/>
+          <p:cNvPr id="10" name="TextBox 9">
+            <a:hlinkClick action="ppaction://hlinksldjump" r:id="rId10"/>
           </p:cNvPr>
           <p:cNvSpPr txBox="1"/>
           <p:nvPr/>
@@ -6181,6 +6202,699 @@
   </p:clrMapOvr>
   <p:transition spd="med">
     <p:push dir="l"/>
+  </p:transition>
+  <p:timing>
+    <p:tnLst>
+      <p:par>
+        <p:cTn id="1" dur="indefinite" restart="never" nodeType="tmRoot">
+          <p:childTnLst>
+            <p:seq concurrent="1" nextAc="seek">
+              <p:cTn id="2" dur="indefinite" nodeType="mainSeq">
+                <p:childTnLst>
+                  <p:par>
+                    <p:cTn id="3" fill="hold">
+                      <p:stCondLst>
+                        <p:cond delay="indefinite"/>
+                      </p:stCondLst>
+                      <p:childTnLst>
+                        <p:par>
+                          <p:cTn id="4" fill="hold">
+                            <p:stCondLst>
+                              <p:cond delay="0"/>
+                            </p:stCondLst>
+                            <p:childTnLst>
+                              <p:par>
+                                <p:cTn id="5" presetID="2" presetClass="entr" presetSubtype="8" fill="hold" decel="100000" grpId="0" nodeType="clickEffect">
+                                  <p:stCondLst>
+                                    <p:cond delay="0"/>
+                                  </p:stCondLst>
+                                  <p:childTnLst>
+                                    <p:set>
+                                      <p:cBhvr>
+                                        <p:cTn id="6" dur="1" fill="hold">
+                                          <p:stCondLst>
+                                            <p:cond delay="0"/>
+                                          </p:stCondLst>
+                                        </p:cTn>
+                                        <p:tgtEl>
+                                          <p:spTgt spid="3"/>
+                                        </p:tgtEl>
+                                        <p:attrNameLst>
+                                          <p:attrName>style.visibility</p:attrName>
+                                        </p:attrNameLst>
+                                      </p:cBhvr>
+                                      <p:to>
+                                        <p:strVal val="visible"/>
+                                      </p:to>
+                                    </p:set>
+                                    <p:anim calcmode="lin" valueType="num">
+                                      <p:cBhvr additive="base">
+                                        <p:cTn id="7" dur="550" fill="hold"/>
+                                        <p:tgtEl>
+                                          <p:spTgt spid="3"/>
+                                        </p:tgtEl>
+                                        <p:attrNameLst>
+                                          <p:attrName>ppt_x</p:attrName>
+                                        </p:attrNameLst>
+                                      </p:cBhvr>
+                                      <p:tavLst>
+                                        <p:tav tm="0">
+                                          <p:val>
+                                            <p:strVal val="0-#ppt_w/2"/>
+                                          </p:val>
+                                        </p:tav>
+                                        <p:tav tm="100000">
+                                          <p:val>
+                                            <p:strVal val="#ppt_x"/>
+                                          </p:val>
+                                        </p:tav>
+                                      </p:tavLst>
+                                    </p:anim>
+                                    <p:anim calcmode="lin" valueType="num">
+                                      <p:cBhvr additive="base">
+                                        <p:cTn id="8" dur="550" fill="hold"/>
+                                        <p:tgtEl>
+                                          <p:spTgt spid="3"/>
+                                        </p:tgtEl>
+                                        <p:attrNameLst>
+                                          <p:attrName>ppt_y</p:attrName>
+                                        </p:attrNameLst>
+                                      </p:cBhvr>
+                                      <p:tavLst>
+                                        <p:tav tm="0">
+                                          <p:val>
+                                            <p:strVal val="#ppt_y"/>
+                                          </p:val>
+                                        </p:tav>
+                                        <p:tav tm="100000">
+                                          <p:val>
+                                            <p:strVal val="#ppt_y"/>
+                                          </p:val>
+                                        </p:tav>
+                                      </p:tavLst>
+                                    </p:anim>
+                                  </p:childTnLst>
+                                </p:cTn>
+                              </p:par>
+                            </p:childTnLst>
+                          </p:cTn>
+                        </p:par>
+                      </p:childTnLst>
+                    </p:cTn>
+                  </p:par>
+                  <p:par>
+                    <p:cTn id="9" fill="hold">
+                      <p:stCondLst>
+                        <p:cond delay="indefinite"/>
+                      </p:stCondLst>
+                      <p:childTnLst>
+                        <p:par>
+                          <p:cTn id="10" fill="hold">
+                            <p:stCondLst>
+                              <p:cond delay="0"/>
+                            </p:stCondLst>
+                            <p:childTnLst>
+                              <p:par>
+                                <p:cTn id="11" presetID="10" presetClass="entr" presetSubtype="0" fill="hold" grpId="0" nodeType="clickEffect">
+                                  <p:stCondLst>
+                                    <p:cond delay="0"/>
+                                  </p:stCondLst>
+                                  <p:childTnLst>
+                                    <p:set>
+                                      <p:cBhvr>
+                                        <p:cTn id="12" dur="1" fill="hold">
+                                          <p:stCondLst>
+                                            <p:cond delay="0"/>
+                                          </p:stCondLst>
+                                        </p:cTn>
+                                        <p:tgtEl>
+                                          <p:spTgt spid="4"/>
+                                        </p:tgtEl>
+                                        <p:attrNameLst>
+                                          <p:attrName>style.visibility</p:attrName>
+                                        </p:attrNameLst>
+                                      </p:cBhvr>
+                                      <p:to>
+                                        <p:strVal val="visible"/>
+                                      </p:to>
+                                    </p:set>
+                                    <p:animEffect transition="in" filter="fade">
+                                      <p:cBhvr>
+                                        <p:cTn id="13" dur="450"/>
+                                        <p:tgtEl>
+                                          <p:spTgt spid="4"/>
+                                        </p:tgtEl>
+                                      </p:cBhvr>
+                                    </p:animEffect>
+                                  </p:childTnLst>
+                                </p:cTn>
+                              </p:par>
+                            </p:childTnLst>
+                          </p:cTn>
+                        </p:par>
+                      </p:childTnLst>
+                    </p:cTn>
+                  </p:par>
+                  <p:par>
+                    <p:cTn id="14" fill="hold">
+                      <p:stCondLst>
+                        <p:cond delay="indefinite"/>
+                      </p:stCondLst>
+                      <p:childTnLst>
+                        <p:par>
+                          <p:cTn id="15" fill="hold">
+                            <p:stCondLst>
+                              <p:cond delay="0"/>
+                            </p:stCondLst>
+                            <p:childTnLst>
+                              <p:par>
+                                <p:cTn id="16" presetID="2" presetClass="entr" presetSubtype="8" fill="hold" decel="100000" grpId="0" nodeType="clickEffect">
+                                  <p:stCondLst>
+                                    <p:cond delay="0"/>
+                                  </p:stCondLst>
+                                  <p:childTnLst>
+                                    <p:set>
+                                      <p:cBhvr>
+                                        <p:cTn id="17" dur="1" fill="hold">
+                                          <p:stCondLst>
+                                            <p:cond delay="0"/>
+                                          </p:stCondLst>
+                                        </p:cTn>
+                                        <p:tgtEl>
+                                          <p:spTgt spid="5"/>
+                                        </p:tgtEl>
+                                        <p:attrNameLst>
+                                          <p:attrName>style.visibility</p:attrName>
+                                        </p:attrNameLst>
+                                      </p:cBhvr>
+                                      <p:to>
+                                        <p:strVal val="visible"/>
+                                      </p:to>
+                                    </p:set>
+                                    <p:anim calcmode="lin" valueType="num">
+                                      <p:cBhvr additive="base">
+                                        <p:cTn id="18" dur="550" fill="hold"/>
+                                        <p:tgtEl>
+                                          <p:spTgt spid="5"/>
+                                        </p:tgtEl>
+                                        <p:attrNameLst>
+                                          <p:attrName>ppt_x</p:attrName>
+                                        </p:attrNameLst>
+                                      </p:cBhvr>
+                                      <p:tavLst>
+                                        <p:tav tm="0">
+                                          <p:val>
+                                            <p:strVal val="0-#ppt_w/2"/>
+                                          </p:val>
+                                        </p:tav>
+                                        <p:tav tm="100000">
+                                          <p:val>
+                                            <p:strVal val="#ppt_x"/>
+                                          </p:val>
+                                        </p:tav>
+                                      </p:tavLst>
+                                    </p:anim>
+                                    <p:anim calcmode="lin" valueType="num">
+                                      <p:cBhvr additive="base">
+                                        <p:cTn id="19" dur="550" fill="hold"/>
+                                        <p:tgtEl>
+                                          <p:spTgt spid="5"/>
+                                        </p:tgtEl>
+                                        <p:attrNameLst>
+                                          <p:attrName>ppt_y</p:attrName>
+                                        </p:attrNameLst>
+                                      </p:cBhvr>
+                                      <p:tavLst>
+                                        <p:tav tm="0">
+                                          <p:val>
+                                            <p:strVal val="#ppt_y"/>
+                                          </p:val>
+                                        </p:tav>
+                                        <p:tav tm="100000">
+                                          <p:val>
+                                            <p:strVal val="#ppt_y"/>
+                                          </p:val>
+                                        </p:tav>
+                                      </p:tavLst>
+                                    </p:anim>
+                                  </p:childTnLst>
+                                </p:cTn>
+                              </p:par>
+                            </p:childTnLst>
+                          </p:cTn>
+                        </p:par>
+                      </p:childTnLst>
+                    </p:cTn>
+                  </p:par>
+                  <p:par>
+                    <p:cTn id="20" fill="hold">
+                      <p:stCondLst>
+                        <p:cond delay="indefinite"/>
+                      </p:stCondLst>
+                      <p:childTnLst>
+                        <p:par>
+                          <p:cTn id="21" fill="hold">
+                            <p:stCondLst>
+                              <p:cond delay="0"/>
+                            </p:stCondLst>
+                            <p:childTnLst>
+                              <p:par>
+                                <p:cTn id="22" presetID="10" presetClass="entr" presetSubtype="0" fill="hold" grpId="0" nodeType="clickEffect">
+                                  <p:stCondLst>
+                                    <p:cond delay="0"/>
+                                  </p:stCondLst>
+                                  <p:childTnLst>
+                                    <p:set>
+                                      <p:cBhvr>
+                                        <p:cTn id="23" dur="1" fill="hold">
+                                          <p:stCondLst>
+                                            <p:cond delay="0"/>
+                                          </p:stCondLst>
+                                        </p:cTn>
+                                        <p:tgtEl>
+                                          <p:spTgt spid="6"/>
+                                        </p:tgtEl>
+                                        <p:attrNameLst>
+                                          <p:attrName>style.visibility</p:attrName>
+                                        </p:attrNameLst>
+                                      </p:cBhvr>
+                                      <p:to>
+                                        <p:strVal val="visible"/>
+                                      </p:to>
+                                    </p:set>
+                                    <p:animEffect transition="in" filter="fade">
+                                      <p:cBhvr>
+                                        <p:cTn id="24" dur="450"/>
+                                        <p:tgtEl>
+                                          <p:spTgt spid="6"/>
+                                        </p:tgtEl>
+                                      </p:cBhvr>
+                                    </p:animEffect>
+                                  </p:childTnLst>
+                                </p:cTn>
+                              </p:par>
+                            </p:childTnLst>
+                          </p:cTn>
+                        </p:par>
+                      </p:childTnLst>
+                    </p:cTn>
+                  </p:par>
+                  <p:par>
+                    <p:cTn id="25" fill="hold">
+                      <p:stCondLst>
+                        <p:cond delay="indefinite"/>
+                      </p:stCondLst>
+                      <p:childTnLst>
+                        <p:par>
+                          <p:cTn id="26" fill="hold">
+                            <p:stCondLst>
+                              <p:cond delay="0"/>
+                            </p:stCondLst>
+                            <p:childTnLst>
+                              <p:par>
+                                <p:cTn id="27" presetID="2" presetClass="entr" presetSubtype="8" fill="hold" decel="100000" grpId="0" nodeType="clickEffect">
+                                  <p:stCondLst>
+                                    <p:cond delay="0"/>
+                                  </p:stCondLst>
+                                  <p:childTnLst>
+                                    <p:set>
+                                      <p:cBhvr>
+                                        <p:cTn id="28" dur="1" fill="hold">
+                                          <p:stCondLst>
+                                            <p:cond delay="0"/>
+                                          </p:stCondLst>
+                                        </p:cTn>
+                                        <p:tgtEl>
+                                          <p:spTgt spid="7"/>
+                                        </p:tgtEl>
+                                        <p:attrNameLst>
+                                          <p:attrName>style.visibility</p:attrName>
+                                        </p:attrNameLst>
+                                      </p:cBhvr>
+                                      <p:to>
+                                        <p:strVal val="visible"/>
+                                      </p:to>
+                                    </p:set>
+                                    <p:anim calcmode="lin" valueType="num">
+                                      <p:cBhvr additive="base">
+                                        <p:cTn id="29" dur="550" fill="hold"/>
+                                        <p:tgtEl>
+                                          <p:spTgt spid="7"/>
+                                        </p:tgtEl>
+                                        <p:attrNameLst>
+                                          <p:attrName>ppt_x</p:attrName>
+                                        </p:attrNameLst>
+                                      </p:cBhvr>
+                                      <p:tavLst>
+                                        <p:tav tm="0">
+                                          <p:val>
+                                            <p:strVal val="0-#ppt_w/2"/>
+                                          </p:val>
+                                        </p:tav>
+                                        <p:tav tm="100000">
+                                          <p:val>
+                                            <p:strVal val="#ppt_x"/>
+                                          </p:val>
+                                        </p:tav>
+                                      </p:tavLst>
+                                    </p:anim>
+                                    <p:anim calcmode="lin" valueType="num">
+                                      <p:cBhvr additive="base">
+                                        <p:cTn id="30" dur="550" fill="hold"/>
+                                        <p:tgtEl>
+                                          <p:spTgt spid="7"/>
+                                        </p:tgtEl>
+                                        <p:attrNameLst>
+                                          <p:attrName>ppt_y</p:attrName>
+                                        </p:attrNameLst>
+                                      </p:cBhvr>
+                                      <p:tavLst>
+                                        <p:tav tm="0">
+                                          <p:val>
+                                            <p:strVal val="#ppt_y"/>
+                                          </p:val>
+                                        </p:tav>
+                                        <p:tav tm="100000">
+                                          <p:val>
+                                            <p:strVal val="#ppt_y"/>
+                                          </p:val>
+                                        </p:tav>
+                                      </p:tavLst>
+                                    </p:anim>
+                                  </p:childTnLst>
+                                </p:cTn>
+                              </p:par>
+                            </p:childTnLst>
+                          </p:cTn>
+                        </p:par>
+                      </p:childTnLst>
+                    </p:cTn>
+                  </p:par>
+                  <p:par>
+                    <p:cTn id="31" fill="hold">
+                      <p:stCondLst>
+                        <p:cond delay="indefinite"/>
+                      </p:stCondLst>
+                      <p:childTnLst>
+                        <p:par>
+                          <p:cTn id="32" fill="hold">
+                            <p:stCondLst>
+                              <p:cond delay="0"/>
+                            </p:stCondLst>
+                            <p:childTnLst>
+                              <p:par>
+                                <p:cTn id="33" presetID="10" presetClass="entr" presetSubtype="0" fill="hold" grpId="0" nodeType="clickEffect">
+                                  <p:stCondLst>
+                                    <p:cond delay="0"/>
+                                  </p:stCondLst>
+                                  <p:childTnLst>
+                                    <p:set>
+                                      <p:cBhvr>
+                                        <p:cTn id="34" dur="1" fill="hold">
+                                          <p:stCondLst>
+                                            <p:cond delay="0"/>
+                                          </p:stCondLst>
+                                        </p:cTn>
+                                        <p:tgtEl>
+                                          <p:spTgt spid="8"/>
+                                        </p:tgtEl>
+                                        <p:attrNameLst>
+                                          <p:attrName>style.visibility</p:attrName>
+                                        </p:attrNameLst>
+                                      </p:cBhvr>
+                                      <p:to>
+                                        <p:strVal val="visible"/>
+                                      </p:to>
+                                    </p:set>
+                                    <p:animEffect transition="in" filter="fade">
+                                      <p:cBhvr>
+                                        <p:cTn id="35" dur="450"/>
+                                        <p:tgtEl>
+                                          <p:spTgt spid="8"/>
+                                        </p:tgtEl>
+                                      </p:cBhvr>
+                                    </p:animEffect>
+                                  </p:childTnLst>
+                                </p:cTn>
+                              </p:par>
+                            </p:childTnLst>
+                          </p:cTn>
+                        </p:par>
+                      </p:childTnLst>
+                    </p:cTn>
+                  </p:par>
+                  <p:par>
+                    <p:cTn id="36" fill="hold">
+                      <p:stCondLst>
+                        <p:cond delay="indefinite"/>
+                      </p:stCondLst>
+                      <p:childTnLst>
+                        <p:par>
+                          <p:cTn id="37" fill="hold">
+                            <p:stCondLst>
+                              <p:cond delay="0"/>
+                            </p:stCondLst>
+                            <p:childTnLst>
+                              <p:par>
+                                <p:cTn id="38" presetID="53" presetClass="entr" presetSubtype="16" fill="hold" grpId="0" nodeType="clickEffect">
+                                  <p:stCondLst>
+                                    <p:cond delay="0"/>
+                                  </p:stCondLst>
+                                  <p:childTnLst>
+                                    <p:set>
+                                      <p:cBhvr>
+                                        <p:cTn id="39" dur="1" fill="hold">
+                                          <p:stCondLst>
+                                            <p:cond delay="0"/>
+                                          </p:stCondLst>
+                                        </p:cTn>
+                                        <p:tgtEl>
+                                          <p:spTgt spid="9"/>
+                                        </p:tgtEl>
+                                        <p:attrNameLst>
+                                          <p:attrName>style.visibility</p:attrName>
+                                        </p:attrNameLst>
+                                      </p:cBhvr>
+                                      <p:to>
+                                        <p:strVal val="visible"/>
+                                      </p:to>
+                                    </p:set>
+                                    <p:anim calcmode="lin" valueType="num">
+                                      <p:cBhvr additive="base">
+                                        <p:cTn id="40" dur="420" fill="hold"/>
+                                        <p:tgtEl>
+                                          <p:spTgt spid="9"/>
+                                        </p:tgtEl>
+                                        <p:attrNameLst>
+                                          <p:attrName>ppt_w</p:attrName>
+                                        </p:attrNameLst>
+                                      </p:cBhvr>
+                                      <p:tavLst>
+                                        <p:tav tm="0">
+                                          <p:val>
+                                            <p:strVal val="0"/>
+                                          </p:val>
+                                        </p:tav>
+                                        <p:tav tm="100000">
+                                          <p:val>
+                                            <p:strVal val="#ppt_w"/>
+                                          </p:val>
+                                        </p:tav>
+                                      </p:tavLst>
+                                    </p:anim>
+                                    <p:anim calcmode="lin" valueType="num">
+                                      <p:cBhvr additive="base">
+                                        <p:cTn id="41" dur="420" fill="hold"/>
+                                        <p:tgtEl>
+                                          <p:spTgt spid="9"/>
+                                        </p:tgtEl>
+                                        <p:attrNameLst>
+                                          <p:attrName>ppt_h</p:attrName>
+                                        </p:attrNameLst>
+                                      </p:cBhvr>
+                                      <p:tavLst>
+                                        <p:tav tm="0">
+                                          <p:val>
+                                            <p:strVal val="0"/>
+                                          </p:val>
+                                        </p:tav>
+                                        <p:tav tm="100000">
+                                          <p:val>
+                                            <p:strVal val="#ppt_h"/>
+                                          </p:val>
+                                        </p:tav>
+                                      </p:tavLst>
+                                    </p:anim>
+                                    <p:animEffect transition="in" filter="fade">
+                                      <p:cBhvr>
+                                        <p:cTn id="42" dur="420"/>
+                                        <p:tgtEl>
+                                          <p:spTgt spid="9"/>
+                                        </p:tgtEl>
+                                      </p:cBhvr>
+                                    </p:animEffect>
+                                  </p:childTnLst>
+                                </p:cTn>
+                              </p:par>
+                            </p:childTnLst>
+                          </p:cTn>
+                        </p:par>
+                      </p:childTnLst>
+                    </p:cTn>
+                  </p:par>
+                </p:childTnLst>
+              </p:cTn>
+              <p:prevCondLst>
+                <p:cond evt="onPrev" delay="0">
+                  <p:tgtEl>
+                    <p:sldTgt/>
+                  </p:tgtEl>
+                </p:cond>
+              </p:prevCondLst>
+              <p:nextCondLst>
+                <p:cond evt="onNext" delay="0">
+                  <p:tgtEl>
+                    <p:sldTgt/>
+                  </p:tgtEl>
+                </p:cond>
+              </p:nextCondLst>
+            </p:seq>
+          </p:childTnLst>
+        </p:cTn>
+      </p:par>
+    </p:tnLst>
+  </p:timing>
+</p:sld>
+</file>
+
+<file path=ppt/slides/slide15.xml><?xml version="1.0" encoding="utf-8"?>
+<p:sld xmlns:a="http://schemas.openxmlformats.org/drawingml/2006/main" xmlns:p="http://schemas.openxmlformats.org/presentationml/2006/main" xmlns:r="http://schemas.openxmlformats.org/officeDocument/2006/relationships">
+  <p:cSld>
+    <p:spTree>
+      <p:nvGrpSpPr>
+        <p:cNvPr id="1" name=""/>
+        <p:cNvGrpSpPr/>
+        <p:nvPr/>
+      </p:nvGrpSpPr>
+      <p:grpSpPr/>
+      <p:pic>
+        <p:nvPicPr>
+          <p:cNvPr id="2" name="Picture 1" descr="b14.jpg"/>
+          <p:cNvPicPr>
+            <a:picLocks noChangeAspect="1"/>
+          </p:cNvPicPr>
+          <p:nvPr/>
+        </p:nvPicPr>
+        <p:blipFill>
+          <a:blip r:embed="rId2"/>
+          <a:stretch>
+            <a:fillRect/>
+          </a:stretch>
+        </p:blipFill>
+        <p:spPr>
+          <a:xfrm>
+            <a:off x="0" y="0"/>
+            <a:ext cx="12191695" cy="6857828"/>
+          </a:xfrm>
+          <a:prstGeom prst="rect">
+            <a:avLst/>
+          </a:prstGeom>
+        </p:spPr>
+      </p:pic>
+      <p:pic>
+        <p:nvPicPr>
+          <p:cNvPr id="3" name="Picture 2" descr="c14_1_0.jpg"/>
+          <p:cNvPicPr>
+            <a:picLocks noChangeAspect="1"/>
+          </p:cNvPicPr>
+          <p:nvPr/>
+        </p:nvPicPr>
+        <p:blipFill>
+          <a:blip r:embed="rId3"/>
+          <a:stretch>
+            <a:fillRect/>
+          </a:stretch>
+        </p:blipFill>
+        <p:spPr>
+          <a:xfrm>
+            <a:off x="426709" y="2636454"/>
+            <a:ext cx="6842588" cy="1203929"/>
+          </a:xfrm>
+          <a:prstGeom prst="rect">
+            <a:avLst/>
+          </a:prstGeom>
+        </p:spPr>
+      </p:pic>
+      <p:pic>
+        <p:nvPicPr>
+          <p:cNvPr id="4" name="Picture 3" descr="c14_1_1.jpg"/>
+          <p:cNvPicPr>
+            <a:picLocks noChangeAspect="1"/>
+          </p:cNvPicPr>
+          <p:nvPr/>
+        </p:nvPicPr>
+        <p:blipFill>
+          <a:blip r:embed="rId4"/>
+          <a:stretch>
+            <a:fillRect/>
+          </a:stretch>
+        </p:blipFill>
+        <p:spPr>
+          <a:xfrm>
+            <a:off x="9418084" y="3550831"/>
+            <a:ext cx="1965910" cy="2499297"/>
+          </a:xfrm>
+          <a:prstGeom prst="rect">
+            <a:avLst/>
+          </a:prstGeom>
+        </p:spPr>
+      </p:pic>
+      <p:sp>
+        <p:nvSpPr>
+          <p:cNvPr id="5" name="TextBox 4">
+            <a:hlinkClick action="ppaction://hlinksldjump" r:id="rId5"/>
+          </p:cNvPr>
+          <p:cNvSpPr txBox="1"/>
+          <p:nvPr/>
+        </p:nvSpPr>
+        <p:spPr>
+          <a:xfrm>
+            <a:off x="11048723" y="76198"/>
+            <a:ext cx="1066773" cy="304792"/>
+          </a:xfrm>
+          <a:prstGeom prst="rect">
+            <a:avLst/>
+          </a:prstGeom>
+          <a:noFill/>
+        </p:spPr>
+        <p:txBody>
+          <a:bodyPr wrap="none">
+            <a:spAutoFit/>
+          </a:bodyPr>
+          <a:lstStyle/>
+          <a:p>
+            <a:pPr algn="r"/>
+            <a:r>
+              <a:rPr sz="1200" b="0">
+                <a:solidFill>
+                  <a:srgbClr val="8A8F96"/>
+                </a:solidFill>
+                <a:latin typeface="微軟正黑體"/>
+                <a:ea typeface="微軟正黑體"/>
+                <a:cs typeface="微軟正黑體"/>
+              </a:rPr>
+              <a:t>流程 ↩</a:t>
+            </a:r>
+          </a:p>
+        </p:txBody>
+      </p:sp>
+    </p:spTree>
+  </p:cSld>
+  <p:clrMapOvr>
+    <a:masterClrMapping/>
+  </p:clrMapOvr>
+  <p:transition spd="med">
+    <p:cover dir="l"/>
   </p:transition>
   <p:timing>
     <p:tnLst>
@@ -6347,8 +7061,8 @@
         </p:nvSpPr>
         <p:spPr>
           <a:xfrm>
-            <a:off x="655303" y="1409664"/>
-            <a:ext cx="10881087" cy="533386"/>
+            <a:off x="655303" y="1280127"/>
+            <a:ext cx="10881087" cy="426709"/>
           </a:xfrm>
           <a:prstGeom prst="rect">
             <a:avLst/>
@@ -6395,8 +7109,8 @@
         </p:nvSpPr>
         <p:spPr>
           <a:xfrm>
-            <a:off x="655303" y="2019249"/>
-            <a:ext cx="10881087" cy="533386"/>
+            <a:off x="655303" y="1760175"/>
+            <a:ext cx="10881087" cy="426709"/>
           </a:xfrm>
           <a:prstGeom prst="rect">
             <a:avLst/>
@@ -6443,8 +7157,8 @@
         </p:nvSpPr>
         <p:spPr>
           <a:xfrm>
-            <a:off x="655303" y="2628834"/>
-            <a:ext cx="10881087" cy="533386"/>
+            <a:off x="655303" y="2240223"/>
+            <a:ext cx="10881087" cy="426709"/>
           </a:xfrm>
           <a:prstGeom prst="rect">
             <a:avLst/>
@@ -6491,8 +7205,8 @@
         </p:nvSpPr>
         <p:spPr>
           <a:xfrm>
-            <a:off x="655303" y="3238418"/>
-            <a:ext cx="10881087" cy="533386"/>
+            <a:off x="655303" y="2720271"/>
+            <a:ext cx="10881087" cy="426709"/>
           </a:xfrm>
           <a:prstGeom prst="rect">
             <a:avLst/>
@@ -6539,8 +7253,8 @@
         </p:nvSpPr>
         <p:spPr>
           <a:xfrm>
-            <a:off x="655303" y="3848003"/>
-            <a:ext cx="10881087" cy="533386"/>
+            <a:off x="655303" y="3200319"/>
+            <a:ext cx="10881087" cy="426709"/>
           </a:xfrm>
           <a:prstGeom prst="rect">
             <a:avLst/>
@@ -6580,15 +7294,15 @@
       <p:sp>
         <p:nvSpPr>
           <p:cNvPr id="8" name="Rectangle 7">
-            <a:hlinkClick r:id="rId8"/>
+            <a:hlinkClick action="ppaction://hlinksldjump" r:id="rId8"/>
           </p:cNvPr>
           <p:cNvSpPr/>
           <p:nvPr/>
         </p:nvSpPr>
         <p:spPr>
           <a:xfrm>
-            <a:off x="655303" y="4457588"/>
-            <a:ext cx="10881087" cy="533386"/>
+            <a:off x="655303" y="3680367"/>
+            <a:ext cx="10881087" cy="426709"/>
           </a:xfrm>
           <a:prstGeom prst="rect">
             <a:avLst/>
@@ -6628,15 +7342,15 @@
       <p:sp>
         <p:nvSpPr>
           <p:cNvPr id="9" name="Rectangle 8">
-            <a:hlinkClick action="ppaction://hlinksldjump" r:id="rId9"/>
+            <a:hlinkClick r:id="rId9"/>
           </p:cNvPr>
           <p:cNvSpPr/>
           <p:nvPr/>
         </p:nvSpPr>
         <p:spPr>
           <a:xfrm>
-            <a:off x="655303" y="5067173"/>
-            <a:ext cx="10881087" cy="533386"/>
+            <a:off x="655303" y="4160415"/>
+            <a:ext cx="10881087" cy="426709"/>
           </a:xfrm>
           <a:prstGeom prst="rect">
             <a:avLst/>
@@ -6676,15 +7390,15 @@
       <p:sp>
         <p:nvSpPr>
           <p:cNvPr id="10" name="Rectangle 9">
-            <a:hlinkClick r:id="rId10"/>
+            <a:hlinkClick action="ppaction://hlinksldjump" r:id="rId10"/>
           </p:cNvPr>
           <p:cNvSpPr/>
           <p:nvPr/>
         </p:nvSpPr>
         <p:spPr>
           <a:xfrm>
-            <a:off x="655303" y="5676757"/>
-            <a:ext cx="10881087" cy="533386"/>
+            <a:off x="655303" y="4640463"/>
+            <a:ext cx="10881087" cy="426709"/>
           </a:xfrm>
           <a:prstGeom prst="rect">
             <a:avLst/>
@@ -6731,8 +7445,56 @@
         </p:nvSpPr>
         <p:spPr>
           <a:xfrm>
-            <a:off x="655303" y="6286342"/>
-            <a:ext cx="10881087" cy="533386"/>
+            <a:off x="655303" y="5120511"/>
+            <a:ext cx="10881087" cy="426709"/>
+          </a:xfrm>
+          <a:prstGeom prst="rect">
+            <a:avLst/>
+          </a:prstGeom>
+          <a:solidFill>
+            <a:srgbClr val="FFFFFF">
+              <a:alpha val="0"/>
+            </a:srgbClr>
+          </a:solidFill>
+          <a:ln>
+            <a:noFill/>
+          </a:ln>
+          <a:effectLst/>
+        </p:spPr>
+        <p:style>
+          <a:lnRef idx="1">
+            <a:schemeClr val="accent1"/>
+          </a:lnRef>
+          <a:fillRef idx="3">
+            <a:schemeClr val="accent1"/>
+          </a:fillRef>
+          <a:effectRef idx="2">
+            <a:schemeClr val="accent1"/>
+          </a:effectRef>
+          <a:fontRef idx="minor">
+            <a:schemeClr val="lt1"/>
+          </a:fontRef>
+        </p:style>
+        <p:txBody>
+          <a:bodyPr rtlCol="0" anchor="ctr"/>
+          <a:lstStyle/>
+          <a:p>
+            <a:pPr algn="ctr"/>
+          </a:p>
+        </p:txBody>
+      </p:sp>
+      <p:sp>
+        <p:nvSpPr>
+          <p:cNvPr id="12" name="Rectangle 11">
+            <a:hlinkClick r:id="rId12"/>
+          </p:cNvPr>
+          <p:cNvSpPr/>
+          <p:nvPr/>
+        </p:nvSpPr>
+        <p:spPr>
+          <a:xfrm>
+            <a:off x="655303" y="5600559"/>
+            <a:ext cx="10881087" cy="426709"/>
           </a:xfrm>
           <a:prstGeom prst="rect">
             <a:avLst/>
@@ -8861,90 +9623,66 @@
         </p:blipFill>
         <p:spPr>
           <a:xfrm>
-            <a:off x="426709" y="2103067"/>
-            <a:ext cx="7680767" cy="2804089"/>
+            <a:off x="10180065" y="4160415"/>
+            <a:ext cx="1584920" cy="2042108"/>
           </a:xfrm>
           <a:prstGeom prst="rect">
             <a:avLst/>
           </a:prstGeom>
         </p:spPr>
       </p:pic>
-      <p:pic>
-        <p:nvPicPr>
-          <p:cNvPr id="4" name="Picture 3" descr="c6_2_0.jpg"/>
-          <p:cNvPicPr>
-            <a:picLocks noChangeAspect="1"/>
-          </p:cNvPicPr>
+      <p:sp>
+        <p:nvSpPr>
+          <p:cNvPr id="4" name="Rectangle 3">
+            <a:hlinkClick r:id="rId4"/>
+          </p:cNvPr>
+          <p:cNvSpPr/>
           <p:nvPr/>
-        </p:nvPicPr>
-        <p:blipFill>
-          <a:blip r:embed="rId4"/>
-          <a:stretch>
-            <a:fillRect/>
-          </a:stretch>
-        </p:blipFill>
-        <p:spPr>
-          <a:xfrm>
-            <a:off x="8122716" y="1798275"/>
-            <a:ext cx="4068978" cy="2118307"/>
+        </p:nvSpPr>
+        <p:spPr>
+          <a:xfrm>
+            <a:off x="655303" y="4724281"/>
+            <a:ext cx="2150572" cy="754361"/>
           </a:xfrm>
           <a:prstGeom prst="rect">
             <a:avLst/>
           </a:prstGeom>
-        </p:spPr>
-      </p:pic>
-      <p:pic>
-        <p:nvPicPr>
-          <p:cNvPr id="5" name="Picture 4" descr="c6_2_1.jpg"/>
-          <p:cNvPicPr>
-            <a:picLocks noChangeAspect="1"/>
-          </p:cNvPicPr>
-          <p:nvPr/>
-        </p:nvPicPr>
-        <p:blipFill>
-          <a:blip r:embed="rId5"/>
-          <a:stretch>
-            <a:fillRect/>
-          </a:stretch>
-        </p:blipFill>
-        <p:spPr>
-          <a:xfrm>
-            <a:off x="350511" y="2026869"/>
-            <a:ext cx="7756965" cy="2270703"/>
-          </a:xfrm>
-          <a:prstGeom prst="rect">
-            <a:avLst/>
-          </a:prstGeom>
-        </p:spPr>
-      </p:pic>
-      <p:pic>
-        <p:nvPicPr>
-          <p:cNvPr id="6" name="Picture 5" descr="c6_3_0.jpg"/>
-          <p:cNvPicPr>
-            <a:picLocks noChangeAspect="1"/>
-          </p:cNvPicPr>
-          <p:nvPr/>
-        </p:nvPicPr>
-        <p:blipFill>
-          <a:blip r:embed="rId6"/>
-          <a:stretch>
-            <a:fillRect/>
-          </a:stretch>
-        </p:blipFill>
-        <p:spPr>
-          <a:xfrm>
-            <a:off x="0" y="5836773"/>
-            <a:ext cx="12191695" cy="1021054"/>
-          </a:xfrm>
-          <a:prstGeom prst="rect">
-            <a:avLst/>
-          </a:prstGeom>
-        </p:spPr>
-      </p:pic>
+          <a:solidFill>
+            <a:srgbClr val="FFFFFF">
+              <a:alpha val="0"/>
+            </a:srgbClr>
+          </a:solidFill>
+          <a:ln>
+            <a:noFill/>
+          </a:ln>
+          <a:effectLst/>
+        </p:spPr>
+        <p:style>
+          <a:lnRef idx="1">
+            <a:schemeClr val="accent1"/>
+          </a:lnRef>
+          <a:fillRef idx="3">
+            <a:schemeClr val="accent1"/>
+          </a:fillRef>
+          <a:effectRef idx="2">
+            <a:schemeClr val="accent1"/>
+          </a:effectRef>
+          <a:fontRef idx="minor">
+            <a:schemeClr val="lt1"/>
+          </a:fontRef>
+        </p:style>
+        <p:txBody>
+          <a:bodyPr rtlCol="0" anchor="ctr"/>
+          <a:lstStyle/>
+          <a:p>
+            <a:pPr algn="ctr"/>
+          </a:p>
+        </p:txBody>
+      </p:sp>
       <p:sp>
         <p:nvSpPr>
-          <p:cNvPr id="7" name="TextBox 6">
-            <a:hlinkClick action="ppaction://hlinksldjump" r:id="rId7"/>
+          <p:cNvPr id="5" name="TextBox 4">
+            <a:hlinkClick action="ppaction://hlinksldjump" r:id="rId5"/>
           </p:cNvPr>
           <p:cNvSpPr txBox="1"/>
           <p:nvPr/>
@@ -9009,7 +9747,7 @@
                             </p:stCondLst>
                             <p:childTnLst>
                               <p:par>
-                                <p:cTn id="5" presetID="2" presetClass="entr" presetSubtype="4" fill="hold" decel="100000" grpId="0" nodeType="clickEffect">
+                                <p:cTn id="5" presetID="10" presetClass="entr" presetSubtype="0" fill="hold" grpId="0" nodeType="clickEffect">
                                   <p:stCondLst>
                                     <p:cond delay="0"/>
                                   </p:stCondLst>
@@ -9032,269 +9770,14 @@
                                         <p:strVal val="visible"/>
                                       </p:to>
                                     </p:set>
-                                    <p:anim calcmode="lin" valueType="num">
-                                      <p:cBhvr additive="base">
-                                        <p:cTn id="7" dur="550" fill="hold"/>
-                                        <p:tgtEl>
-                                          <p:spTgt spid="3"/>
-                                        </p:tgtEl>
-                                        <p:attrNameLst>
-                                          <p:attrName>ppt_x</p:attrName>
-                                        </p:attrNameLst>
-                                      </p:cBhvr>
-                                      <p:tavLst>
-                                        <p:tav tm="0">
-                                          <p:val>
-                                            <p:strVal val="#ppt_x"/>
-                                          </p:val>
-                                        </p:tav>
-                                        <p:tav tm="100000">
-                                          <p:val>
-                                            <p:strVal val="#ppt_x"/>
-                                          </p:val>
-                                        </p:tav>
-                                      </p:tavLst>
-                                    </p:anim>
-                                    <p:anim calcmode="lin" valueType="num">
-                                      <p:cBhvr additive="base">
-                                        <p:cTn id="8" dur="550" fill="hold"/>
-                                        <p:tgtEl>
-                                          <p:spTgt spid="3"/>
-                                        </p:tgtEl>
-                                        <p:attrNameLst>
-                                          <p:attrName>ppt_y</p:attrName>
-                                        </p:attrNameLst>
-                                      </p:cBhvr>
-                                      <p:tavLst>
-                                        <p:tav tm="0">
-                                          <p:val>
-                                            <p:strVal val="1+#ppt_h/2"/>
-                                          </p:val>
-                                        </p:tav>
-                                        <p:tav tm="100000">
-                                          <p:val>
-                                            <p:strVal val="#ppt_y"/>
-                                          </p:val>
-                                        </p:tav>
-                                      </p:tavLst>
-                                    </p:anim>
-                                  </p:childTnLst>
-                                </p:cTn>
-                              </p:par>
-                            </p:childTnLst>
-                          </p:cTn>
-                        </p:par>
-                      </p:childTnLst>
-                    </p:cTn>
-                  </p:par>
-                  <p:par>
-                    <p:cTn id="9" fill="hold">
-                      <p:stCondLst>
-                        <p:cond delay="indefinite"/>
-                      </p:stCondLst>
-                      <p:childTnLst>
-                        <p:par>
-                          <p:cTn id="10" fill="hold">
-                            <p:stCondLst>
-                              <p:cond delay="0"/>
-                            </p:stCondLst>
-                            <p:childTnLst>
-                              <p:par>
-                                <p:cTn id="11" presetID="2" presetClass="entr" presetSubtype="2" fill="hold" decel="100000" grpId="0" nodeType="clickEffect">
-                                  <p:stCondLst>
-                                    <p:cond delay="0"/>
-                                  </p:stCondLst>
-                                  <p:childTnLst>
-                                    <p:set>
-                                      <p:cBhvr>
-                                        <p:cTn id="12" dur="1" fill="hold">
-                                          <p:stCondLst>
-                                            <p:cond delay="0"/>
-                                          </p:stCondLst>
-                                        </p:cTn>
-                                        <p:tgtEl>
-                                          <p:spTgt spid="4"/>
-                                        </p:tgtEl>
-                                        <p:attrNameLst>
-                                          <p:attrName>style.visibility</p:attrName>
-                                        </p:attrNameLst>
-                                      </p:cBhvr>
-                                      <p:to>
-                                        <p:strVal val="visible"/>
-                                      </p:to>
-                                    </p:set>
-                                    <p:anim calcmode="lin" valueType="num">
-                                      <p:cBhvr additive="base">
-                                        <p:cTn id="13" dur="550" fill="hold"/>
-                                        <p:tgtEl>
-                                          <p:spTgt spid="4"/>
-                                        </p:tgtEl>
-                                        <p:attrNameLst>
-                                          <p:attrName>ppt_x</p:attrName>
-                                        </p:attrNameLst>
-                                      </p:cBhvr>
-                                      <p:tavLst>
-                                        <p:tav tm="0">
-                                          <p:val>
-                                            <p:strVal val="1+#ppt_w/2"/>
-                                          </p:val>
-                                        </p:tav>
-                                        <p:tav tm="100000">
-                                          <p:val>
-                                            <p:strVal val="#ppt_x"/>
-                                          </p:val>
-                                        </p:tav>
-                                      </p:tavLst>
-                                    </p:anim>
-                                    <p:anim calcmode="lin" valueType="num">
-                                      <p:cBhvr additive="base">
-                                        <p:cTn id="14" dur="550" fill="hold"/>
-                                        <p:tgtEl>
-                                          <p:spTgt spid="4"/>
-                                        </p:tgtEl>
-                                        <p:attrNameLst>
-                                          <p:attrName>ppt_y</p:attrName>
-                                        </p:attrNameLst>
-                                      </p:cBhvr>
-                                      <p:tavLst>
-                                        <p:tav tm="0">
-                                          <p:val>
-                                            <p:strVal val="#ppt_y"/>
-                                          </p:val>
-                                        </p:tav>
-                                        <p:tav tm="100000">
-                                          <p:val>
-                                            <p:strVal val="#ppt_y"/>
-                                          </p:val>
-                                        </p:tav>
-                                      </p:tavLst>
-                                    </p:anim>
-                                  </p:childTnLst>
-                                </p:cTn>
-                              </p:par>
-                              <p:par>
-                                <p:cTn id="15" presetID="10" presetClass="entr" presetSubtype="0" fill="hold" grpId="0" nodeType="withEffect">
-                                  <p:stCondLst>
-                                    <p:cond delay="120"/>
-                                  </p:stCondLst>
-                                  <p:childTnLst>
-                                    <p:set>
-                                      <p:cBhvr>
-                                        <p:cTn id="16" dur="1" fill="hold">
-                                          <p:stCondLst>
-                                            <p:cond delay="0"/>
-                                          </p:stCondLst>
-                                        </p:cTn>
-                                        <p:tgtEl>
-                                          <p:spTgt spid="5"/>
-                                        </p:tgtEl>
-                                        <p:attrNameLst>
-                                          <p:attrName>style.visibility</p:attrName>
-                                        </p:attrNameLst>
-                                      </p:cBhvr>
-                                      <p:to>
-                                        <p:strVal val="visible"/>
-                                      </p:to>
-                                    </p:set>
                                     <p:animEffect transition="in" filter="fade">
                                       <p:cBhvr>
-                                        <p:cTn id="17" dur="450"/>
-                                        <p:tgtEl>
-                                          <p:spTgt spid="5"/>
+                                        <p:cTn id="7" dur="450"/>
+                                        <p:tgtEl>
+                                          <p:spTgt spid="3"/>
                                         </p:tgtEl>
                                       </p:cBhvr>
                                     </p:animEffect>
-                                  </p:childTnLst>
-                                </p:cTn>
-                              </p:par>
-                            </p:childTnLst>
-                          </p:cTn>
-                        </p:par>
-                      </p:childTnLst>
-                    </p:cTn>
-                  </p:par>
-                  <p:par>
-                    <p:cTn id="18" fill="hold">
-                      <p:stCondLst>
-                        <p:cond delay="indefinite"/>
-                      </p:stCondLst>
-                      <p:childTnLst>
-                        <p:par>
-                          <p:cTn id="19" fill="hold">
-                            <p:stCondLst>
-                              <p:cond delay="0"/>
-                            </p:stCondLst>
-                            <p:childTnLst>
-                              <p:par>
-                                <p:cTn id="20" presetID="2" presetClass="entr" presetSubtype="4" fill="hold" decel="100000" grpId="0" nodeType="clickEffect">
-                                  <p:stCondLst>
-                                    <p:cond delay="0"/>
-                                  </p:stCondLst>
-                                  <p:childTnLst>
-                                    <p:set>
-                                      <p:cBhvr>
-                                        <p:cTn id="21" dur="1" fill="hold">
-                                          <p:stCondLst>
-                                            <p:cond delay="0"/>
-                                          </p:stCondLst>
-                                        </p:cTn>
-                                        <p:tgtEl>
-                                          <p:spTgt spid="6"/>
-                                        </p:tgtEl>
-                                        <p:attrNameLst>
-                                          <p:attrName>style.visibility</p:attrName>
-                                        </p:attrNameLst>
-                                      </p:cBhvr>
-                                      <p:to>
-                                        <p:strVal val="visible"/>
-                                      </p:to>
-                                    </p:set>
-                                    <p:anim calcmode="lin" valueType="num">
-                                      <p:cBhvr additive="base">
-                                        <p:cTn id="22" dur="550" fill="hold"/>
-                                        <p:tgtEl>
-                                          <p:spTgt spid="6"/>
-                                        </p:tgtEl>
-                                        <p:attrNameLst>
-                                          <p:attrName>ppt_x</p:attrName>
-                                        </p:attrNameLst>
-                                      </p:cBhvr>
-                                      <p:tavLst>
-                                        <p:tav tm="0">
-                                          <p:val>
-                                            <p:strVal val="#ppt_x"/>
-                                          </p:val>
-                                        </p:tav>
-                                        <p:tav tm="100000">
-                                          <p:val>
-                                            <p:strVal val="#ppt_x"/>
-                                          </p:val>
-                                        </p:tav>
-                                      </p:tavLst>
-                                    </p:anim>
-                                    <p:anim calcmode="lin" valueType="num">
-                                      <p:cBhvr additive="base">
-                                        <p:cTn id="23" dur="550" fill="hold"/>
-                                        <p:tgtEl>
-                                          <p:spTgt spid="6"/>
-                                        </p:tgtEl>
-                                        <p:attrNameLst>
-                                          <p:attrName>ppt_y</p:attrName>
-                                        </p:attrNameLst>
-                                      </p:cBhvr>
-                                      <p:tavLst>
-                                        <p:tav tm="0">
-                                          <p:val>
-                                            <p:strVal val="1+#ppt_h/2"/>
-                                          </p:val>
-                                        </p:tav>
-                                        <p:tav tm="100000">
-                                          <p:val>
-                                            <p:strVal val="#ppt_y"/>
-                                          </p:val>
-                                        </p:tav>
-                                      </p:tavLst>
-                                    </p:anim>
                                   </p:childTnLst>
                                 </p:cTn>
                               </p:par>
@@ -9379,8 +9862,8 @@
         </p:blipFill>
         <p:spPr>
           <a:xfrm>
-            <a:off x="6751151" y="1645878"/>
-            <a:ext cx="1661118" cy="1508722"/>
+            <a:off x="426709" y="2103067"/>
+            <a:ext cx="7680767" cy="2804089"/>
           </a:xfrm>
           <a:prstGeom prst="rect">
             <a:avLst/>
@@ -9403,8 +9886,8 @@
         </p:blipFill>
         <p:spPr>
           <a:xfrm>
-            <a:off x="8656103" y="1950671"/>
-            <a:ext cx="899137" cy="1203929"/>
+            <a:off x="8122716" y="1798275"/>
+            <a:ext cx="4068978" cy="2118307"/>
           </a:xfrm>
           <a:prstGeom prst="rect">
             <a:avLst/>
@@ -9413,7 +9896,7 @@
       </p:pic>
       <p:pic>
         <p:nvPicPr>
-          <p:cNvPr id="5" name="Picture 4" descr="c7_3_0.jpg"/>
+          <p:cNvPr id="5" name="Picture 4" descr="c7_2_1.jpg"/>
           <p:cNvPicPr>
             <a:picLocks noChangeAspect="1"/>
           </p:cNvPicPr>
@@ -9427,8 +9910,8 @@
         </p:blipFill>
         <p:spPr>
           <a:xfrm>
-            <a:off x="10180065" y="1645878"/>
-            <a:ext cx="899137" cy="1508722"/>
+            <a:off x="350511" y="2026869"/>
+            <a:ext cx="7756965" cy="2270703"/>
           </a:xfrm>
           <a:prstGeom prst="rect">
             <a:avLst/>
@@ -9437,7 +9920,7 @@
       </p:pic>
       <p:pic>
         <p:nvPicPr>
-          <p:cNvPr id="6" name="Picture 5" descr="c7_4_0.jpg"/>
+          <p:cNvPr id="6" name="Picture 5" descr="c7_3_0.jpg"/>
           <p:cNvPicPr>
             <a:picLocks noChangeAspect="1"/>
           </p:cNvPicPr>
@@ -9451,66 +9934,18 @@
         </p:blipFill>
         <p:spPr>
           <a:xfrm>
-            <a:off x="6446358" y="3093642"/>
-            <a:ext cx="5090032" cy="3108882"/>
+            <a:off x="0" y="5836773"/>
+            <a:ext cx="12191695" cy="1021054"/>
           </a:xfrm>
           <a:prstGeom prst="rect">
             <a:avLst/>
           </a:prstGeom>
         </p:spPr>
       </p:pic>
-      <p:pic>
-        <p:nvPicPr>
-          <p:cNvPr id="7" name="Picture 6" descr="c7_4_1.jpg"/>
-          <p:cNvPicPr>
-            <a:picLocks noChangeAspect="1"/>
-          </p:cNvPicPr>
-          <p:nvPr/>
-        </p:nvPicPr>
-        <p:blipFill>
-          <a:blip r:embed="rId7"/>
-          <a:stretch>
-            <a:fillRect/>
-          </a:stretch>
-        </p:blipFill>
-        <p:spPr>
-          <a:xfrm>
-            <a:off x="426709" y="4389010"/>
-            <a:ext cx="5090032" cy="746741"/>
-          </a:xfrm>
-          <a:prstGeom prst="rect">
-            <a:avLst/>
-          </a:prstGeom>
-        </p:spPr>
-      </p:pic>
-      <p:pic>
-        <p:nvPicPr>
-          <p:cNvPr id="8" name="Picture 7" descr="c7_5_0.jpg"/>
-          <p:cNvPicPr>
-            <a:picLocks noChangeAspect="1"/>
-          </p:cNvPicPr>
-          <p:nvPr/>
-        </p:nvPicPr>
-        <p:blipFill>
-          <a:blip r:embed="rId8"/>
-          <a:stretch>
-            <a:fillRect/>
-          </a:stretch>
-        </p:blipFill>
-        <p:spPr>
-          <a:xfrm>
-            <a:off x="0" y="5836773"/>
-            <a:ext cx="12191695" cy="1021054"/>
-          </a:xfrm>
-          <a:prstGeom prst="rect">
-            <a:avLst/>
-          </a:prstGeom>
-        </p:spPr>
-      </p:pic>
       <p:sp>
         <p:nvSpPr>
-          <p:cNvPr id="9" name="TextBox 8">
-            <a:hlinkClick action="ppaction://hlinksldjump" r:id="rId9"/>
+          <p:cNvPr id="7" name="TextBox 6">
+            <a:hlinkClick action="ppaction://hlinksldjump" r:id="rId7"/>
           </p:cNvPr>
           <p:cNvSpPr txBox="1"/>
           <p:nvPr/>
@@ -9666,7 +10101,7 @@
                             </p:stCondLst>
                             <p:childTnLst>
                               <p:par>
-                                <p:cTn id="11" presetID="2" presetClass="entr" presetSubtype="4" fill="hold" decel="100000" grpId="0" nodeType="clickEffect">
+                                <p:cTn id="11" presetID="2" presetClass="entr" presetSubtype="2" fill="hold" decel="100000" grpId="0" nodeType="clickEffect">
                                   <p:stCondLst>
                                     <p:cond delay="0"/>
                                   </p:stCondLst>
@@ -9702,7 +10137,7 @@
                                       <p:tavLst>
                                         <p:tav tm="0">
                                           <p:val>
-                                            <p:strVal val="#ppt_x"/>
+                                            <p:strVal val="1+#ppt_w/2"/>
                                           </p:val>
                                         </p:tav>
                                         <p:tav tm="100000">
@@ -9725,7 +10160,7 @@
                                       <p:tavLst>
                                         <p:tav tm="0">
                                           <p:val>
-                                            <p:strVal val="1+#ppt_h/2"/>
+                                            <p:strVal val="#ppt_y"/>
                                           </p:val>
                                         </p:tav>
                                         <p:tav tm="100000">
@@ -9738,211 +10173,21 @@
                                   </p:childTnLst>
                                 </p:cTn>
                               </p:par>
-                            </p:childTnLst>
-                          </p:cTn>
-                        </p:par>
-                      </p:childTnLst>
-                    </p:cTn>
-                  </p:par>
-                  <p:par>
-                    <p:cTn id="15" fill="hold">
-                      <p:stCondLst>
-                        <p:cond delay="indefinite"/>
-                      </p:stCondLst>
-                      <p:childTnLst>
-                        <p:par>
-                          <p:cTn id="16" fill="hold">
-                            <p:stCondLst>
-                              <p:cond delay="0"/>
-                            </p:stCondLst>
-                            <p:childTnLst>
                               <p:par>
-                                <p:cTn id="17" presetID="2" presetClass="entr" presetSubtype="4" fill="hold" decel="100000" grpId="0" nodeType="clickEffect">
-                                  <p:stCondLst>
-                                    <p:cond delay="0"/>
-                                  </p:stCondLst>
-                                  <p:childTnLst>
-                                    <p:set>
-                                      <p:cBhvr>
-                                        <p:cTn id="18" dur="1" fill="hold">
-                                          <p:stCondLst>
-                                            <p:cond delay="0"/>
-                                          </p:stCondLst>
-                                        </p:cTn>
-                                        <p:tgtEl>
-                                          <p:spTgt spid="5"/>
-                                        </p:tgtEl>
-                                        <p:attrNameLst>
-                                          <p:attrName>style.visibility</p:attrName>
-                                        </p:attrNameLst>
-                                      </p:cBhvr>
-                                      <p:to>
-                                        <p:strVal val="visible"/>
-                                      </p:to>
-                                    </p:set>
-                                    <p:anim calcmode="lin" valueType="num">
-                                      <p:cBhvr additive="base">
-                                        <p:cTn id="19" dur="550" fill="hold"/>
-                                        <p:tgtEl>
-                                          <p:spTgt spid="5"/>
-                                        </p:tgtEl>
-                                        <p:attrNameLst>
-                                          <p:attrName>ppt_x</p:attrName>
-                                        </p:attrNameLst>
-                                      </p:cBhvr>
-                                      <p:tavLst>
-                                        <p:tav tm="0">
-                                          <p:val>
-                                            <p:strVal val="#ppt_x"/>
-                                          </p:val>
-                                        </p:tav>
-                                        <p:tav tm="100000">
-                                          <p:val>
-                                            <p:strVal val="#ppt_x"/>
-                                          </p:val>
-                                        </p:tav>
-                                      </p:tavLst>
-                                    </p:anim>
-                                    <p:anim calcmode="lin" valueType="num">
-                                      <p:cBhvr additive="base">
-                                        <p:cTn id="20" dur="550" fill="hold"/>
-                                        <p:tgtEl>
-                                          <p:spTgt spid="5"/>
-                                        </p:tgtEl>
-                                        <p:attrNameLst>
-                                          <p:attrName>ppt_y</p:attrName>
-                                        </p:attrNameLst>
-                                      </p:cBhvr>
-                                      <p:tavLst>
-                                        <p:tav tm="0">
-                                          <p:val>
-                                            <p:strVal val="1+#ppt_h/2"/>
-                                          </p:val>
-                                        </p:tav>
-                                        <p:tav tm="100000">
-                                          <p:val>
-                                            <p:strVal val="#ppt_y"/>
-                                          </p:val>
-                                        </p:tav>
-                                      </p:tavLst>
-                                    </p:anim>
-                                  </p:childTnLst>
-                                </p:cTn>
-                              </p:par>
-                            </p:childTnLst>
-                          </p:cTn>
-                        </p:par>
-                      </p:childTnLst>
-                    </p:cTn>
-                  </p:par>
-                  <p:par>
-                    <p:cTn id="21" fill="hold">
-                      <p:stCondLst>
-                        <p:cond delay="indefinite"/>
-                      </p:stCondLst>
-                      <p:childTnLst>
-                        <p:par>
-                          <p:cTn id="22" fill="hold">
-                            <p:stCondLst>
-                              <p:cond delay="0"/>
-                            </p:stCondLst>
-                            <p:childTnLst>
-                              <p:par>
-                                <p:cTn id="23" presetID="53" presetClass="entr" presetSubtype="16" fill="hold" grpId="0" nodeType="clickEffect">
-                                  <p:stCondLst>
-                                    <p:cond delay="0"/>
-                                  </p:stCondLst>
-                                  <p:childTnLst>
-                                    <p:set>
-                                      <p:cBhvr>
-                                        <p:cTn id="24" dur="1" fill="hold">
-                                          <p:stCondLst>
-                                            <p:cond delay="0"/>
-                                          </p:stCondLst>
-                                        </p:cTn>
-                                        <p:tgtEl>
-                                          <p:spTgt spid="6"/>
-                                        </p:tgtEl>
-                                        <p:attrNameLst>
-                                          <p:attrName>style.visibility</p:attrName>
-                                        </p:attrNameLst>
-                                      </p:cBhvr>
-                                      <p:to>
-                                        <p:strVal val="visible"/>
-                                      </p:to>
-                                    </p:set>
-                                    <p:anim calcmode="lin" valueType="num">
-                                      <p:cBhvr additive="base">
-                                        <p:cTn id="25" dur="420" fill="hold"/>
-                                        <p:tgtEl>
-                                          <p:spTgt spid="6"/>
-                                        </p:tgtEl>
-                                        <p:attrNameLst>
-                                          <p:attrName>ppt_w</p:attrName>
-                                        </p:attrNameLst>
-                                      </p:cBhvr>
-                                      <p:tavLst>
-                                        <p:tav tm="0">
-                                          <p:val>
-                                            <p:strVal val="0"/>
-                                          </p:val>
-                                        </p:tav>
-                                        <p:tav tm="100000">
-                                          <p:val>
-                                            <p:strVal val="#ppt_w"/>
-                                          </p:val>
-                                        </p:tav>
-                                      </p:tavLst>
-                                    </p:anim>
-                                    <p:anim calcmode="lin" valueType="num">
-                                      <p:cBhvr additive="base">
-                                        <p:cTn id="26" dur="420" fill="hold"/>
-                                        <p:tgtEl>
-                                          <p:spTgt spid="6"/>
-                                        </p:tgtEl>
-                                        <p:attrNameLst>
-                                          <p:attrName>ppt_h</p:attrName>
-                                        </p:attrNameLst>
-                                      </p:cBhvr>
-                                      <p:tavLst>
-                                        <p:tav tm="0">
-                                          <p:val>
-                                            <p:strVal val="0"/>
-                                          </p:val>
-                                        </p:tav>
-                                        <p:tav tm="100000">
-                                          <p:val>
-                                            <p:strVal val="#ppt_h"/>
-                                          </p:val>
-                                        </p:tav>
-                                      </p:tavLst>
-                                    </p:anim>
-                                    <p:animEffect transition="in" filter="fade">
-                                      <p:cBhvr>
-                                        <p:cTn id="27" dur="420"/>
-                                        <p:tgtEl>
-                                          <p:spTgt spid="6"/>
-                                        </p:tgtEl>
-                                      </p:cBhvr>
-                                    </p:animEffect>
-                                  </p:childTnLst>
-                                </p:cTn>
-                              </p:par>
-                              <p:par>
-                                <p:cTn id="28" presetID="53" presetClass="entr" presetSubtype="16" fill="hold" grpId="0" nodeType="withEffect">
+                                <p:cTn id="15" presetID="10" presetClass="entr" presetSubtype="0" fill="hold" grpId="0" nodeType="withEffect">
                                   <p:stCondLst>
                                     <p:cond delay="120"/>
                                   </p:stCondLst>
                                   <p:childTnLst>
                                     <p:set>
                                       <p:cBhvr>
-                                        <p:cTn id="29" dur="1" fill="hold">
+                                        <p:cTn id="16" dur="1" fill="hold">
                                           <p:stCondLst>
                                             <p:cond delay="0"/>
                                           </p:stCondLst>
                                         </p:cTn>
                                         <p:tgtEl>
-                                          <p:spTgt spid="7"/>
+                                          <p:spTgt spid="5"/>
                                         </p:tgtEl>
                                         <p:attrNameLst>
                                           <p:attrName>style.visibility</p:attrName>
@@ -9952,57 +10197,11 @@
                                         <p:strVal val="visible"/>
                                       </p:to>
                                     </p:set>
-                                    <p:anim calcmode="lin" valueType="num">
-                                      <p:cBhvr additive="base">
-                                        <p:cTn id="30" dur="420" fill="hold"/>
-                                        <p:tgtEl>
-                                          <p:spTgt spid="7"/>
-                                        </p:tgtEl>
-                                        <p:attrNameLst>
-                                          <p:attrName>ppt_w</p:attrName>
-                                        </p:attrNameLst>
-                                      </p:cBhvr>
-                                      <p:tavLst>
-                                        <p:tav tm="0">
-                                          <p:val>
-                                            <p:strVal val="0"/>
-                                          </p:val>
-                                        </p:tav>
-                                        <p:tav tm="100000">
-                                          <p:val>
-                                            <p:strVal val="#ppt_w"/>
-                                          </p:val>
-                                        </p:tav>
-                                      </p:tavLst>
-                                    </p:anim>
-                                    <p:anim calcmode="lin" valueType="num">
-                                      <p:cBhvr additive="base">
-                                        <p:cTn id="31" dur="420" fill="hold"/>
-                                        <p:tgtEl>
-                                          <p:spTgt spid="7"/>
-                                        </p:tgtEl>
-                                        <p:attrNameLst>
-                                          <p:attrName>ppt_h</p:attrName>
-                                        </p:attrNameLst>
-                                      </p:cBhvr>
-                                      <p:tavLst>
-                                        <p:tav tm="0">
-                                          <p:val>
-                                            <p:strVal val="0"/>
-                                          </p:val>
-                                        </p:tav>
-                                        <p:tav tm="100000">
-                                          <p:val>
-                                            <p:strVal val="#ppt_h"/>
-                                          </p:val>
-                                        </p:tav>
-                                      </p:tavLst>
-                                    </p:anim>
                                     <p:animEffect transition="in" filter="fade">
                                       <p:cBhvr>
-                                        <p:cTn id="32" dur="420"/>
-                                        <p:tgtEl>
-                                          <p:spTgt spid="7"/>
+                                        <p:cTn id="17" dur="450"/>
+                                        <p:tgtEl>
+                                          <p:spTgt spid="5"/>
                                         </p:tgtEl>
                                       </p:cBhvr>
                                     </p:animEffect>
@@ -10016,32 +10215,32 @@
                     </p:cTn>
                   </p:par>
                   <p:par>
-                    <p:cTn id="33" fill="hold">
+                    <p:cTn id="18" fill="hold">
                       <p:stCondLst>
                         <p:cond delay="indefinite"/>
                       </p:stCondLst>
                       <p:childTnLst>
                         <p:par>
-                          <p:cTn id="34" fill="hold">
+                          <p:cTn id="19" fill="hold">
                             <p:stCondLst>
                               <p:cond delay="0"/>
                             </p:stCondLst>
                             <p:childTnLst>
                               <p:par>
-                                <p:cTn id="35" presetID="2" presetClass="entr" presetSubtype="4" fill="hold" decel="100000" grpId="0" nodeType="clickEffect">
+                                <p:cTn id="20" presetID="2" presetClass="entr" presetSubtype="4" fill="hold" decel="100000" grpId="0" nodeType="clickEffect">
                                   <p:stCondLst>
                                     <p:cond delay="0"/>
                                   </p:stCondLst>
                                   <p:childTnLst>
                                     <p:set>
                                       <p:cBhvr>
-                                        <p:cTn id="36" dur="1" fill="hold">
+                                        <p:cTn id="21" dur="1" fill="hold">
                                           <p:stCondLst>
                                             <p:cond delay="0"/>
                                           </p:stCondLst>
                                         </p:cTn>
                                         <p:tgtEl>
-                                          <p:spTgt spid="8"/>
+                                          <p:spTgt spid="6"/>
                                         </p:tgtEl>
                                         <p:attrNameLst>
                                           <p:attrName>style.visibility</p:attrName>
@@ -10053,9 +10252,9 @@
                                     </p:set>
                                     <p:anim calcmode="lin" valueType="num">
                                       <p:cBhvr additive="base">
-                                        <p:cTn id="37" dur="550" fill="hold"/>
-                                        <p:tgtEl>
-                                          <p:spTgt spid="8"/>
+                                        <p:cTn id="22" dur="550" fill="hold"/>
+                                        <p:tgtEl>
+                                          <p:spTgt spid="6"/>
                                         </p:tgtEl>
                                         <p:attrNameLst>
                                           <p:attrName>ppt_x</p:attrName>
@@ -10076,9 +10275,9 @@
                                     </p:anim>
                                     <p:anim calcmode="lin" valueType="num">
                                       <p:cBhvr additive="base">
-                                        <p:cTn id="38" dur="550" fill="hold"/>
-                                        <p:tgtEl>
-                                          <p:spTgt spid="8"/>
+                                        <p:cTn id="23" dur="550" fill="hold"/>
+                                        <p:tgtEl>
+                                          <p:spTgt spid="6"/>
                                         </p:tgtEl>
                                         <p:attrNameLst>
                                           <p:attrName>ppt_y</p:attrName>
@@ -10181,8 +10380,8 @@
         </p:blipFill>
         <p:spPr>
           <a:xfrm>
-            <a:off x="3246038" y="1569680"/>
-            <a:ext cx="1737316" cy="1584920"/>
+            <a:off x="6751151" y="1645878"/>
+            <a:ext cx="1661118" cy="1508722"/>
           </a:xfrm>
           <a:prstGeom prst="rect">
             <a:avLst/>
@@ -10205,8 +10404,8 @@
         </p:blipFill>
         <p:spPr>
           <a:xfrm>
-            <a:off x="4998594" y="1569680"/>
-            <a:ext cx="1737316" cy="1584920"/>
+            <a:off x="8656103" y="1950671"/>
+            <a:ext cx="899137" cy="1203929"/>
           </a:xfrm>
           <a:prstGeom prst="rect">
             <a:avLst/>
@@ -10229,8 +10428,8 @@
         </p:blipFill>
         <p:spPr>
           <a:xfrm>
-            <a:off x="7055943" y="1569680"/>
-            <a:ext cx="2042108" cy="1584920"/>
+            <a:off x="10180065" y="1645878"/>
+            <a:ext cx="899137" cy="1508722"/>
           </a:xfrm>
           <a:prstGeom prst="rect">
             <a:avLst/>
@@ -10253,8 +10452,8 @@
         </p:blipFill>
         <p:spPr>
           <a:xfrm>
-            <a:off x="883897" y="4465208"/>
-            <a:ext cx="5013834" cy="899137"/>
+            <a:off x="6446358" y="3093642"/>
+            <a:ext cx="5090032" cy="3108882"/>
           </a:xfrm>
           <a:prstGeom prst="rect">
             <a:avLst/>
@@ -10263,7 +10462,7 @@
       </p:pic>
       <p:pic>
         <p:nvPicPr>
-          <p:cNvPr id="7" name="Picture 6" descr="c8_5_0.jpg"/>
+          <p:cNvPr id="7" name="Picture 6" descr="c8_4_1.jpg"/>
           <p:cNvPicPr>
             <a:picLocks noChangeAspect="1"/>
           </p:cNvPicPr>
@@ -10277,18 +10476,42 @@
         </p:blipFill>
         <p:spPr>
           <a:xfrm>
-            <a:off x="0" y="5836773"/>
-            <a:ext cx="12191695" cy="1021054"/>
+            <a:off x="426709" y="4389010"/>
+            <a:ext cx="5090032" cy="746741"/>
           </a:xfrm>
           <a:prstGeom prst="rect">
             <a:avLst/>
           </a:prstGeom>
         </p:spPr>
       </p:pic>
+      <p:pic>
+        <p:nvPicPr>
+          <p:cNvPr id="8" name="Picture 7" descr="c8_5_0.jpg"/>
+          <p:cNvPicPr>
+            <a:picLocks noChangeAspect="1"/>
+          </p:cNvPicPr>
+          <p:nvPr/>
+        </p:nvPicPr>
+        <p:blipFill>
+          <a:blip r:embed="rId8"/>
+          <a:stretch>
+            <a:fillRect/>
+          </a:stretch>
+        </p:blipFill>
+        <p:spPr>
+          <a:xfrm>
+            <a:off x="0" y="5836773"/>
+            <a:ext cx="12191695" cy="1021054"/>
+          </a:xfrm>
+          <a:prstGeom prst="rect">
+            <a:avLst/>
+          </a:prstGeom>
+        </p:spPr>
+      </p:pic>
       <p:sp>
         <p:nvSpPr>
-          <p:cNvPr id="8" name="TextBox 7">
-            <a:hlinkClick action="ppaction://hlinksldjump" r:id="rId8"/>
+          <p:cNvPr id="9" name="TextBox 8">
+            <a:hlinkClick action="ppaction://hlinksldjump" r:id="rId9"/>
           </p:cNvPr>
           <p:cNvSpPr txBox="1"/>
           <p:nvPr/>
@@ -10353,7 +10576,7 @@
                             </p:stCondLst>
                             <p:childTnLst>
                               <p:par>
-                                <p:cTn id="5" presetID="53" presetClass="entr" presetSubtype="16" fill="hold" grpId="0" nodeType="clickEffect">
+                                <p:cTn id="5" presetID="2" presetClass="entr" presetSubtype="4" fill="hold" decel="100000" grpId="0" nodeType="clickEffect">
                                   <p:stCondLst>
                                     <p:cond delay="0"/>
                                   </p:stCondLst>
@@ -10378,329 +10601,32 @@
                                     </p:set>
                                     <p:anim calcmode="lin" valueType="num">
                                       <p:cBhvr additive="base">
-                                        <p:cTn id="7" dur="420" fill="hold"/>
+                                        <p:cTn id="7" dur="550" fill="hold"/>
                                         <p:tgtEl>
                                           <p:spTgt spid="3"/>
                                         </p:tgtEl>
                                         <p:attrNameLst>
-                                          <p:attrName>ppt_w</p:attrName>
+                                          <p:attrName>ppt_x</p:attrName>
                                         </p:attrNameLst>
                                       </p:cBhvr>
                                       <p:tavLst>
                                         <p:tav tm="0">
                                           <p:val>
-                                            <p:strVal val="0"/>
+                                            <p:strVal val="#ppt_x"/>
                                           </p:val>
                                         </p:tav>
                                         <p:tav tm="100000">
                                           <p:val>
-                                            <p:strVal val="#ppt_w"/>
+                                            <p:strVal val="#ppt_x"/>
                                           </p:val>
                                         </p:tav>
                                       </p:tavLst>
                                     </p:anim>
                                     <p:anim calcmode="lin" valueType="num">
                                       <p:cBhvr additive="base">
-                                        <p:cTn id="8" dur="420" fill="hold"/>
+                                        <p:cTn id="8" dur="550" fill="hold"/>
                                         <p:tgtEl>
                                           <p:spTgt spid="3"/>
-                                        </p:tgtEl>
-                                        <p:attrNameLst>
-                                          <p:attrName>ppt_h</p:attrName>
-                                        </p:attrNameLst>
-                                      </p:cBhvr>
-                                      <p:tavLst>
-                                        <p:tav tm="0">
-                                          <p:val>
-                                            <p:strVal val="0"/>
-                                          </p:val>
-                                        </p:tav>
-                                        <p:tav tm="100000">
-                                          <p:val>
-                                            <p:strVal val="#ppt_h"/>
-                                          </p:val>
-                                        </p:tav>
-                                      </p:tavLst>
-                                    </p:anim>
-                                    <p:animEffect transition="in" filter="fade">
-                                      <p:cBhvr>
-                                        <p:cTn id="9" dur="420"/>
-                                        <p:tgtEl>
-                                          <p:spTgt spid="3"/>
-                                        </p:tgtEl>
-                                      </p:cBhvr>
-                                    </p:animEffect>
-                                  </p:childTnLst>
-                                </p:cTn>
-                              </p:par>
-                            </p:childTnLst>
-                          </p:cTn>
-                        </p:par>
-                      </p:childTnLst>
-                    </p:cTn>
-                  </p:par>
-                  <p:par>
-                    <p:cTn id="10" fill="hold">
-                      <p:stCondLst>
-                        <p:cond delay="indefinite"/>
-                      </p:stCondLst>
-                      <p:childTnLst>
-                        <p:par>
-                          <p:cTn id="11" fill="hold">
-                            <p:stCondLst>
-                              <p:cond delay="0"/>
-                            </p:stCondLst>
-                            <p:childTnLst>
-                              <p:par>
-                                <p:cTn id="12" presetID="53" presetClass="entr" presetSubtype="16" fill="hold" grpId="0" nodeType="clickEffect">
-                                  <p:stCondLst>
-                                    <p:cond delay="0"/>
-                                  </p:stCondLst>
-                                  <p:childTnLst>
-                                    <p:set>
-                                      <p:cBhvr>
-                                        <p:cTn id="13" dur="1" fill="hold">
-                                          <p:stCondLst>
-                                            <p:cond delay="0"/>
-                                          </p:stCondLst>
-                                        </p:cTn>
-                                        <p:tgtEl>
-                                          <p:spTgt spid="4"/>
-                                        </p:tgtEl>
-                                        <p:attrNameLst>
-                                          <p:attrName>style.visibility</p:attrName>
-                                        </p:attrNameLst>
-                                      </p:cBhvr>
-                                      <p:to>
-                                        <p:strVal val="visible"/>
-                                      </p:to>
-                                    </p:set>
-                                    <p:anim calcmode="lin" valueType="num">
-                                      <p:cBhvr additive="base">
-                                        <p:cTn id="14" dur="420" fill="hold"/>
-                                        <p:tgtEl>
-                                          <p:spTgt spid="4"/>
-                                        </p:tgtEl>
-                                        <p:attrNameLst>
-                                          <p:attrName>ppt_w</p:attrName>
-                                        </p:attrNameLst>
-                                      </p:cBhvr>
-                                      <p:tavLst>
-                                        <p:tav tm="0">
-                                          <p:val>
-                                            <p:strVal val="0"/>
-                                          </p:val>
-                                        </p:tav>
-                                        <p:tav tm="100000">
-                                          <p:val>
-                                            <p:strVal val="#ppt_w"/>
-                                          </p:val>
-                                        </p:tav>
-                                      </p:tavLst>
-                                    </p:anim>
-                                    <p:anim calcmode="lin" valueType="num">
-                                      <p:cBhvr additive="base">
-                                        <p:cTn id="15" dur="420" fill="hold"/>
-                                        <p:tgtEl>
-                                          <p:spTgt spid="4"/>
-                                        </p:tgtEl>
-                                        <p:attrNameLst>
-                                          <p:attrName>ppt_h</p:attrName>
-                                        </p:attrNameLst>
-                                      </p:cBhvr>
-                                      <p:tavLst>
-                                        <p:tav tm="0">
-                                          <p:val>
-                                            <p:strVal val="0"/>
-                                          </p:val>
-                                        </p:tav>
-                                        <p:tav tm="100000">
-                                          <p:val>
-                                            <p:strVal val="#ppt_h"/>
-                                          </p:val>
-                                        </p:tav>
-                                      </p:tavLst>
-                                    </p:anim>
-                                    <p:animEffect transition="in" filter="fade">
-                                      <p:cBhvr>
-                                        <p:cTn id="16" dur="420"/>
-                                        <p:tgtEl>
-                                          <p:spTgt spid="4"/>
-                                        </p:tgtEl>
-                                      </p:cBhvr>
-                                    </p:animEffect>
-                                  </p:childTnLst>
-                                </p:cTn>
-                              </p:par>
-                            </p:childTnLst>
-                          </p:cTn>
-                        </p:par>
-                      </p:childTnLst>
-                    </p:cTn>
-                  </p:par>
-                  <p:par>
-                    <p:cTn id="17" fill="hold">
-                      <p:stCondLst>
-                        <p:cond delay="indefinite"/>
-                      </p:stCondLst>
-                      <p:childTnLst>
-                        <p:par>
-                          <p:cTn id="18" fill="hold">
-                            <p:stCondLst>
-                              <p:cond delay="0"/>
-                            </p:stCondLst>
-                            <p:childTnLst>
-                              <p:par>
-                                <p:cTn id="19" presetID="53" presetClass="entr" presetSubtype="16" fill="hold" grpId="0" nodeType="clickEffect">
-                                  <p:stCondLst>
-                                    <p:cond delay="0"/>
-                                  </p:stCondLst>
-                                  <p:childTnLst>
-                                    <p:set>
-                                      <p:cBhvr>
-                                        <p:cTn id="20" dur="1" fill="hold">
-                                          <p:stCondLst>
-                                            <p:cond delay="0"/>
-                                          </p:stCondLst>
-                                        </p:cTn>
-                                        <p:tgtEl>
-                                          <p:spTgt spid="5"/>
-                                        </p:tgtEl>
-                                        <p:attrNameLst>
-                                          <p:attrName>style.visibility</p:attrName>
-                                        </p:attrNameLst>
-                                      </p:cBhvr>
-                                      <p:to>
-                                        <p:strVal val="visible"/>
-                                      </p:to>
-                                    </p:set>
-                                    <p:anim calcmode="lin" valueType="num">
-                                      <p:cBhvr additive="base">
-                                        <p:cTn id="21" dur="420" fill="hold"/>
-                                        <p:tgtEl>
-                                          <p:spTgt spid="5"/>
-                                        </p:tgtEl>
-                                        <p:attrNameLst>
-                                          <p:attrName>ppt_w</p:attrName>
-                                        </p:attrNameLst>
-                                      </p:cBhvr>
-                                      <p:tavLst>
-                                        <p:tav tm="0">
-                                          <p:val>
-                                            <p:strVal val="0"/>
-                                          </p:val>
-                                        </p:tav>
-                                        <p:tav tm="100000">
-                                          <p:val>
-                                            <p:strVal val="#ppt_w"/>
-                                          </p:val>
-                                        </p:tav>
-                                      </p:tavLst>
-                                    </p:anim>
-                                    <p:anim calcmode="lin" valueType="num">
-                                      <p:cBhvr additive="base">
-                                        <p:cTn id="22" dur="420" fill="hold"/>
-                                        <p:tgtEl>
-                                          <p:spTgt spid="5"/>
-                                        </p:tgtEl>
-                                        <p:attrNameLst>
-                                          <p:attrName>ppt_h</p:attrName>
-                                        </p:attrNameLst>
-                                      </p:cBhvr>
-                                      <p:tavLst>
-                                        <p:tav tm="0">
-                                          <p:val>
-                                            <p:strVal val="0"/>
-                                          </p:val>
-                                        </p:tav>
-                                        <p:tav tm="100000">
-                                          <p:val>
-                                            <p:strVal val="#ppt_h"/>
-                                          </p:val>
-                                        </p:tav>
-                                      </p:tavLst>
-                                    </p:anim>
-                                    <p:animEffect transition="in" filter="fade">
-                                      <p:cBhvr>
-                                        <p:cTn id="23" dur="420"/>
-                                        <p:tgtEl>
-                                          <p:spTgt spid="5"/>
-                                        </p:tgtEl>
-                                      </p:cBhvr>
-                                    </p:animEffect>
-                                  </p:childTnLst>
-                                </p:cTn>
-                              </p:par>
-                            </p:childTnLst>
-                          </p:cTn>
-                        </p:par>
-                      </p:childTnLst>
-                    </p:cTn>
-                  </p:par>
-                  <p:par>
-                    <p:cTn id="24" fill="hold">
-                      <p:stCondLst>
-                        <p:cond delay="indefinite"/>
-                      </p:stCondLst>
-                      <p:childTnLst>
-                        <p:par>
-                          <p:cTn id="25" fill="hold">
-                            <p:stCondLst>
-                              <p:cond delay="0"/>
-                            </p:stCondLst>
-                            <p:childTnLst>
-                              <p:par>
-                                <p:cTn id="26" presetID="2" presetClass="entr" presetSubtype="4" fill="hold" decel="100000" grpId="0" nodeType="clickEffect">
-                                  <p:stCondLst>
-                                    <p:cond delay="0"/>
-                                  </p:stCondLst>
-                                  <p:childTnLst>
-                                    <p:set>
-                                      <p:cBhvr>
-                                        <p:cTn id="27" dur="1" fill="hold">
-                                          <p:stCondLst>
-                                            <p:cond delay="0"/>
-                                          </p:stCondLst>
-                                        </p:cTn>
-                                        <p:tgtEl>
-                                          <p:spTgt spid="6"/>
-                                        </p:tgtEl>
-                                        <p:attrNameLst>
-                                          <p:attrName>style.visibility</p:attrName>
-                                        </p:attrNameLst>
-                                      </p:cBhvr>
-                                      <p:to>
-                                        <p:strVal val="visible"/>
-                                      </p:to>
-                                    </p:set>
-                                    <p:anim calcmode="lin" valueType="num">
-                                      <p:cBhvr additive="base">
-                                        <p:cTn id="28" dur="550" fill="hold"/>
-                                        <p:tgtEl>
-                                          <p:spTgt spid="6"/>
-                                        </p:tgtEl>
-                                        <p:attrNameLst>
-                                          <p:attrName>ppt_x</p:attrName>
-                                        </p:attrNameLst>
-                                      </p:cBhvr>
-                                      <p:tavLst>
-                                        <p:tav tm="0">
-                                          <p:val>
-                                            <p:strVal val="#ppt_x"/>
-                                          </p:val>
-                                        </p:tav>
-                                        <p:tav tm="100000">
-                                          <p:val>
-                                            <p:strVal val="#ppt_x"/>
-                                          </p:val>
-                                        </p:tav>
-                                      </p:tavLst>
-                                    </p:anim>
-                                    <p:anim calcmode="lin" valueType="num">
-                                      <p:cBhvr additive="base">
-                                        <p:cTn id="29" dur="550" fill="hold"/>
-                                        <p:tgtEl>
-                                          <p:spTgt spid="6"/>
                                         </p:tgtEl>
                                         <p:attrNameLst>
                                           <p:attrName>ppt_y</p:attrName>
@@ -10729,32 +10655,32 @@
                     </p:cTn>
                   </p:par>
                   <p:par>
-                    <p:cTn id="30" fill="hold">
+                    <p:cTn id="9" fill="hold">
                       <p:stCondLst>
                         <p:cond delay="indefinite"/>
                       </p:stCondLst>
                       <p:childTnLst>
                         <p:par>
-                          <p:cTn id="31" fill="hold">
+                          <p:cTn id="10" fill="hold">
                             <p:stCondLst>
                               <p:cond delay="0"/>
                             </p:stCondLst>
                             <p:childTnLst>
                               <p:par>
-                                <p:cTn id="32" presetID="2" presetClass="entr" presetSubtype="4" fill="hold" decel="100000" grpId="0" nodeType="clickEffect">
+                                <p:cTn id="11" presetID="2" presetClass="entr" presetSubtype="4" fill="hold" decel="100000" grpId="0" nodeType="clickEffect">
                                   <p:stCondLst>
                                     <p:cond delay="0"/>
                                   </p:stCondLst>
                                   <p:childTnLst>
                                     <p:set>
                                       <p:cBhvr>
-                                        <p:cTn id="33" dur="1" fill="hold">
+                                        <p:cTn id="12" dur="1" fill="hold">
                                           <p:stCondLst>
                                             <p:cond delay="0"/>
                                           </p:stCondLst>
                                         </p:cTn>
                                         <p:tgtEl>
-                                          <p:spTgt spid="7"/>
+                                          <p:spTgt spid="4"/>
                                         </p:tgtEl>
                                         <p:attrNameLst>
                                           <p:attrName>style.visibility</p:attrName>
@@ -10766,9 +10692,9 @@
                                     </p:set>
                                     <p:anim calcmode="lin" valueType="num">
                                       <p:cBhvr additive="base">
-                                        <p:cTn id="34" dur="550" fill="hold"/>
-                                        <p:tgtEl>
-                                          <p:spTgt spid="7"/>
+                                        <p:cTn id="13" dur="550" fill="hold"/>
+                                        <p:tgtEl>
+                                          <p:spTgt spid="4"/>
                                         </p:tgtEl>
                                         <p:attrNameLst>
                                           <p:attrName>ppt_x</p:attrName>
@@ -10789,9 +10715,371 @@
                                     </p:anim>
                                     <p:anim calcmode="lin" valueType="num">
                                       <p:cBhvr additive="base">
-                                        <p:cTn id="35" dur="550" fill="hold"/>
+                                        <p:cTn id="14" dur="550" fill="hold"/>
+                                        <p:tgtEl>
+                                          <p:spTgt spid="4"/>
+                                        </p:tgtEl>
+                                        <p:attrNameLst>
+                                          <p:attrName>ppt_y</p:attrName>
+                                        </p:attrNameLst>
+                                      </p:cBhvr>
+                                      <p:tavLst>
+                                        <p:tav tm="0">
+                                          <p:val>
+                                            <p:strVal val="1+#ppt_h/2"/>
+                                          </p:val>
+                                        </p:tav>
+                                        <p:tav tm="100000">
+                                          <p:val>
+                                            <p:strVal val="#ppt_y"/>
+                                          </p:val>
+                                        </p:tav>
+                                      </p:tavLst>
+                                    </p:anim>
+                                  </p:childTnLst>
+                                </p:cTn>
+                              </p:par>
+                            </p:childTnLst>
+                          </p:cTn>
+                        </p:par>
+                      </p:childTnLst>
+                    </p:cTn>
+                  </p:par>
+                  <p:par>
+                    <p:cTn id="15" fill="hold">
+                      <p:stCondLst>
+                        <p:cond delay="indefinite"/>
+                      </p:stCondLst>
+                      <p:childTnLst>
+                        <p:par>
+                          <p:cTn id="16" fill="hold">
+                            <p:stCondLst>
+                              <p:cond delay="0"/>
+                            </p:stCondLst>
+                            <p:childTnLst>
+                              <p:par>
+                                <p:cTn id="17" presetID="2" presetClass="entr" presetSubtype="4" fill="hold" decel="100000" grpId="0" nodeType="clickEffect">
+                                  <p:stCondLst>
+                                    <p:cond delay="0"/>
+                                  </p:stCondLst>
+                                  <p:childTnLst>
+                                    <p:set>
+                                      <p:cBhvr>
+                                        <p:cTn id="18" dur="1" fill="hold">
+                                          <p:stCondLst>
+                                            <p:cond delay="0"/>
+                                          </p:stCondLst>
+                                        </p:cTn>
+                                        <p:tgtEl>
+                                          <p:spTgt spid="5"/>
+                                        </p:tgtEl>
+                                        <p:attrNameLst>
+                                          <p:attrName>style.visibility</p:attrName>
+                                        </p:attrNameLst>
+                                      </p:cBhvr>
+                                      <p:to>
+                                        <p:strVal val="visible"/>
+                                      </p:to>
+                                    </p:set>
+                                    <p:anim calcmode="lin" valueType="num">
+                                      <p:cBhvr additive="base">
+                                        <p:cTn id="19" dur="550" fill="hold"/>
+                                        <p:tgtEl>
+                                          <p:spTgt spid="5"/>
+                                        </p:tgtEl>
+                                        <p:attrNameLst>
+                                          <p:attrName>ppt_x</p:attrName>
+                                        </p:attrNameLst>
+                                      </p:cBhvr>
+                                      <p:tavLst>
+                                        <p:tav tm="0">
+                                          <p:val>
+                                            <p:strVal val="#ppt_x"/>
+                                          </p:val>
+                                        </p:tav>
+                                        <p:tav tm="100000">
+                                          <p:val>
+                                            <p:strVal val="#ppt_x"/>
+                                          </p:val>
+                                        </p:tav>
+                                      </p:tavLst>
+                                    </p:anim>
+                                    <p:anim calcmode="lin" valueType="num">
+                                      <p:cBhvr additive="base">
+                                        <p:cTn id="20" dur="550" fill="hold"/>
+                                        <p:tgtEl>
+                                          <p:spTgt spid="5"/>
+                                        </p:tgtEl>
+                                        <p:attrNameLst>
+                                          <p:attrName>ppt_y</p:attrName>
+                                        </p:attrNameLst>
+                                      </p:cBhvr>
+                                      <p:tavLst>
+                                        <p:tav tm="0">
+                                          <p:val>
+                                            <p:strVal val="1+#ppt_h/2"/>
+                                          </p:val>
+                                        </p:tav>
+                                        <p:tav tm="100000">
+                                          <p:val>
+                                            <p:strVal val="#ppt_y"/>
+                                          </p:val>
+                                        </p:tav>
+                                      </p:tavLst>
+                                    </p:anim>
+                                  </p:childTnLst>
+                                </p:cTn>
+                              </p:par>
+                            </p:childTnLst>
+                          </p:cTn>
+                        </p:par>
+                      </p:childTnLst>
+                    </p:cTn>
+                  </p:par>
+                  <p:par>
+                    <p:cTn id="21" fill="hold">
+                      <p:stCondLst>
+                        <p:cond delay="indefinite"/>
+                      </p:stCondLst>
+                      <p:childTnLst>
+                        <p:par>
+                          <p:cTn id="22" fill="hold">
+                            <p:stCondLst>
+                              <p:cond delay="0"/>
+                            </p:stCondLst>
+                            <p:childTnLst>
+                              <p:par>
+                                <p:cTn id="23" presetID="53" presetClass="entr" presetSubtype="16" fill="hold" grpId="0" nodeType="clickEffect">
+                                  <p:stCondLst>
+                                    <p:cond delay="0"/>
+                                  </p:stCondLst>
+                                  <p:childTnLst>
+                                    <p:set>
+                                      <p:cBhvr>
+                                        <p:cTn id="24" dur="1" fill="hold">
+                                          <p:stCondLst>
+                                            <p:cond delay="0"/>
+                                          </p:stCondLst>
+                                        </p:cTn>
+                                        <p:tgtEl>
+                                          <p:spTgt spid="6"/>
+                                        </p:tgtEl>
+                                        <p:attrNameLst>
+                                          <p:attrName>style.visibility</p:attrName>
+                                        </p:attrNameLst>
+                                      </p:cBhvr>
+                                      <p:to>
+                                        <p:strVal val="visible"/>
+                                      </p:to>
+                                    </p:set>
+                                    <p:anim calcmode="lin" valueType="num">
+                                      <p:cBhvr additive="base">
+                                        <p:cTn id="25" dur="420" fill="hold"/>
+                                        <p:tgtEl>
+                                          <p:spTgt spid="6"/>
+                                        </p:tgtEl>
+                                        <p:attrNameLst>
+                                          <p:attrName>ppt_w</p:attrName>
+                                        </p:attrNameLst>
+                                      </p:cBhvr>
+                                      <p:tavLst>
+                                        <p:tav tm="0">
+                                          <p:val>
+                                            <p:strVal val="0"/>
+                                          </p:val>
+                                        </p:tav>
+                                        <p:tav tm="100000">
+                                          <p:val>
+                                            <p:strVal val="#ppt_w"/>
+                                          </p:val>
+                                        </p:tav>
+                                      </p:tavLst>
+                                    </p:anim>
+                                    <p:anim calcmode="lin" valueType="num">
+                                      <p:cBhvr additive="base">
+                                        <p:cTn id="26" dur="420" fill="hold"/>
+                                        <p:tgtEl>
+                                          <p:spTgt spid="6"/>
+                                        </p:tgtEl>
+                                        <p:attrNameLst>
+                                          <p:attrName>ppt_h</p:attrName>
+                                        </p:attrNameLst>
+                                      </p:cBhvr>
+                                      <p:tavLst>
+                                        <p:tav tm="0">
+                                          <p:val>
+                                            <p:strVal val="0"/>
+                                          </p:val>
+                                        </p:tav>
+                                        <p:tav tm="100000">
+                                          <p:val>
+                                            <p:strVal val="#ppt_h"/>
+                                          </p:val>
+                                        </p:tav>
+                                      </p:tavLst>
+                                    </p:anim>
+                                    <p:animEffect transition="in" filter="fade">
+                                      <p:cBhvr>
+                                        <p:cTn id="27" dur="420"/>
+                                        <p:tgtEl>
+                                          <p:spTgt spid="6"/>
+                                        </p:tgtEl>
+                                      </p:cBhvr>
+                                    </p:animEffect>
+                                  </p:childTnLst>
+                                </p:cTn>
+                              </p:par>
+                              <p:par>
+                                <p:cTn id="28" presetID="53" presetClass="entr" presetSubtype="16" fill="hold" grpId="0" nodeType="withEffect">
+                                  <p:stCondLst>
+                                    <p:cond delay="120"/>
+                                  </p:stCondLst>
+                                  <p:childTnLst>
+                                    <p:set>
+                                      <p:cBhvr>
+                                        <p:cTn id="29" dur="1" fill="hold">
+                                          <p:stCondLst>
+                                            <p:cond delay="0"/>
+                                          </p:stCondLst>
+                                        </p:cTn>
                                         <p:tgtEl>
                                           <p:spTgt spid="7"/>
+                                        </p:tgtEl>
+                                        <p:attrNameLst>
+                                          <p:attrName>style.visibility</p:attrName>
+                                        </p:attrNameLst>
+                                      </p:cBhvr>
+                                      <p:to>
+                                        <p:strVal val="visible"/>
+                                      </p:to>
+                                    </p:set>
+                                    <p:anim calcmode="lin" valueType="num">
+                                      <p:cBhvr additive="base">
+                                        <p:cTn id="30" dur="420" fill="hold"/>
+                                        <p:tgtEl>
+                                          <p:spTgt spid="7"/>
+                                        </p:tgtEl>
+                                        <p:attrNameLst>
+                                          <p:attrName>ppt_w</p:attrName>
+                                        </p:attrNameLst>
+                                      </p:cBhvr>
+                                      <p:tavLst>
+                                        <p:tav tm="0">
+                                          <p:val>
+                                            <p:strVal val="0"/>
+                                          </p:val>
+                                        </p:tav>
+                                        <p:tav tm="100000">
+                                          <p:val>
+                                            <p:strVal val="#ppt_w"/>
+                                          </p:val>
+                                        </p:tav>
+                                      </p:tavLst>
+                                    </p:anim>
+                                    <p:anim calcmode="lin" valueType="num">
+                                      <p:cBhvr additive="base">
+                                        <p:cTn id="31" dur="420" fill="hold"/>
+                                        <p:tgtEl>
+                                          <p:spTgt spid="7"/>
+                                        </p:tgtEl>
+                                        <p:attrNameLst>
+                                          <p:attrName>ppt_h</p:attrName>
+                                        </p:attrNameLst>
+                                      </p:cBhvr>
+                                      <p:tavLst>
+                                        <p:tav tm="0">
+                                          <p:val>
+                                            <p:strVal val="0"/>
+                                          </p:val>
+                                        </p:tav>
+                                        <p:tav tm="100000">
+                                          <p:val>
+                                            <p:strVal val="#ppt_h"/>
+                                          </p:val>
+                                        </p:tav>
+                                      </p:tavLst>
+                                    </p:anim>
+                                    <p:animEffect transition="in" filter="fade">
+                                      <p:cBhvr>
+                                        <p:cTn id="32" dur="420"/>
+                                        <p:tgtEl>
+                                          <p:spTgt spid="7"/>
+                                        </p:tgtEl>
+                                      </p:cBhvr>
+                                    </p:animEffect>
+                                  </p:childTnLst>
+                                </p:cTn>
+                              </p:par>
+                            </p:childTnLst>
+                          </p:cTn>
+                        </p:par>
+                      </p:childTnLst>
+                    </p:cTn>
+                  </p:par>
+                  <p:par>
+                    <p:cTn id="33" fill="hold">
+                      <p:stCondLst>
+                        <p:cond delay="indefinite"/>
+                      </p:stCondLst>
+                      <p:childTnLst>
+                        <p:par>
+                          <p:cTn id="34" fill="hold">
+                            <p:stCondLst>
+                              <p:cond delay="0"/>
+                            </p:stCondLst>
+                            <p:childTnLst>
+                              <p:par>
+                                <p:cTn id="35" presetID="2" presetClass="entr" presetSubtype="4" fill="hold" decel="100000" grpId="0" nodeType="clickEffect">
+                                  <p:stCondLst>
+                                    <p:cond delay="0"/>
+                                  </p:stCondLst>
+                                  <p:childTnLst>
+                                    <p:set>
+                                      <p:cBhvr>
+                                        <p:cTn id="36" dur="1" fill="hold">
+                                          <p:stCondLst>
+                                            <p:cond delay="0"/>
+                                          </p:stCondLst>
+                                        </p:cTn>
+                                        <p:tgtEl>
+                                          <p:spTgt spid="8"/>
+                                        </p:tgtEl>
+                                        <p:attrNameLst>
+                                          <p:attrName>style.visibility</p:attrName>
+                                        </p:attrNameLst>
+                                      </p:cBhvr>
+                                      <p:to>
+                                        <p:strVal val="visible"/>
+                                      </p:to>
+                                    </p:set>
+                                    <p:anim calcmode="lin" valueType="num">
+                                      <p:cBhvr additive="base">
+                                        <p:cTn id="37" dur="550" fill="hold"/>
+                                        <p:tgtEl>
+                                          <p:spTgt spid="8"/>
+                                        </p:tgtEl>
+                                        <p:attrNameLst>
+                                          <p:attrName>ppt_x</p:attrName>
+                                        </p:attrNameLst>
+                                      </p:cBhvr>
+                                      <p:tavLst>
+                                        <p:tav tm="0">
+                                          <p:val>
+                                            <p:strVal val="#ppt_x"/>
+                                          </p:val>
+                                        </p:tav>
+                                        <p:tav tm="100000">
+                                          <p:val>
+                                            <p:strVal val="#ppt_x"/>
+                                          </p:val>
+                                        </p:tav>
+                                      </p:tavLst>
+                                    </p:anim>
+                                    <p:anim calcmode="lin" valueType="num">
+                                      <p:cBhvr additive="base">
+                                        <p:cTn id="38" dur="550" fill="hold"/>
+                                        <p:tgtEl>
+                                          <p:spTgt spid="8"/>
                                         </p:tgtEl>
                                         <p:attrNameLst>
                                           <p:attrName>ppt_y</p:attrName>

--- a/temp/files/T2-temp.pptx
+++ b/temp/files/T2-temp.pptx
@@ -20,6 +20,7 @@
     <p:sldId id="268" r:id="rId19"/>
     <p:sldId id="269" r:id="rId20"/>
     <p:sldId id="270" r:id="rId21"/>
+    <p:sldId id="271" r:id="rId22"/>
   </p:sldIdLst>
   <p:sldSz cx="12191695" cy="6858000" type="screen4x3"/>
   <p:notesSz cx="6858000" cy="9144000"/>
@@ -6004,8 +6005,8 @@
         </p:blipFill>
         <p:spPr>
           <a:xfrm>
-            <a:off x="426709" y="1417284"/>
-            <a:ext cx="11338276" cy="1356326"/>
+            <a:off x="350511" y="1112492"/>
+            <a:ext cx="4099457" cy="4251853"/>
           </a:xfrm>
           <a:prstGeom prst="rect">
             <a:avLst/>
@@ -6028,8 +6029,8 @@
         </p:blipFill>
         <p:spPr>
           <a:xfrm>
-            <a:off x="3855623" y="1645878"/>
-            <a:ext cx="1813514" cy="822939"/>
+            <a:off x="4084217" y="1188690"/>
+            <a:ext cx="4023259" cy="4175655"/>
           </a:xfrm>
           <a:prstGeom prst="rect">
             <a:avLst/>
@@ -6052,8 +6053,8 @@
         </p:blipFill>
         <p:spPr>
           <a:xfrm>
-            <a:off x="426709" y="2712652"/>
-            <a:ext cx="11338276" cy="1356326"/>
+            <a:off x="7817924" y="1188690"/>
+            <a:ext cx="4023259" cy="4099457"/>
           </a:xfrm>
           <a:prstGeom prst="rect">
             <a:avLst/>
@@ -6076,90 +6077,18 @@
         </p:blipFill>
         <p:spPr>
           <a:xfrm>
-            <a:off x="2941246" y="2941246"/>
-            <a:ext cx="1508722" cy="822939"/>
+            <a:off x="0" y="5836773"/>
+            <a:ext cx="12191695" cy="1021054"/>
           </a:xfrm>
           <a:prstGeom prst="rect">
             <a:avLst/>
           </a:prstGeom>
         </p:spPr>
       </p:pic>
-      <p:pic>
-        <p:nvPicPr>
-          <p:cNvPr id="7" name="Picture 6" descr="c13_5_0.jpg"/>
-          <p:cNvPicPr>
-            <a:picLocks noChangeAspect="1"/>
-          </p:cNvPicPr>
-          <p:nvPr/>
-        </p:nvPicPr>
-        <p:blipFill>
-          <a:blip r:embed="rId7"/>
-          <a:stretch>
-            <a:fillRect/>
-          </a:stretch>
-        </p:blipFill>
-        <p:spPr>
-          <a:xfrm>
-            <a:off x="426709" y="4008019"/>
-            <a:ext cx="11338276" cy="1356326"/>
-          </a:xfrm>
-          <a:prstGeom prst="rect">
-            <a:avLst/>
-          </a:prstGeom>
-        </p:spPr>
-      </p:pic>
-      <p:pic>
-        <p:nvPicPr>
-          <p:cNvPr id="8" name="Picture 7" descr="c13_6_0.jpg"/>
-          <p:cNvPicPr>
-            <a:picLocks noChangeAspect="1"/>
-          </p:cNvPicPr>
-          <p:nvPr/>
-        </p:nvPicPr>
-        <p:blipFill>
-          <a:blip r:embed="rId8"/>
-          <a:stretch>
-            <a:fillRect/>
-          </a:stretch>
-        </p:blipFill>
-        <p:spPr>
-          <a:xfrm>
-            <a:off x="2941246" y="4236614"/>
-            <a:ext cx="1508722" cy="822939"/>
-          </a:xfrm>
-          <a:prstGeom prst="rect">
-            <a:avLst/>
-          </a:prstGeom>
-        </p:spPr>
-      </p:pic>
-      <p:pic>
-        <p:nvPicPr>
-          <p:cNvPr id="9" name="Picture 8" descr="c13_7_0.jpg"/>
-          <p:cNvPicPr>
-            <a:picLocks noChangeAspect="1"/>
-          </p:cNvPicPr>
-          <p:nvPr/>
-        </p:nvPicPr>
-        <p:blipFill>
-          <a:blip r:embed="rId9"/>
-          <a:stretch>
-            <a:fillRect/>
-          </a:stretch>
-        </p:blipFill>
-        <p:spPr>
-          <a:xfrm>
-            <a:off x="7665528" y="45718"/>
-            <a:ext cx="4099457" cy="1661118"/>
-          </a:xfrm>
-          <a:prstGeom prst="rect">
-            <a:avLst/>
-          </a:prstGeom>
-        </p:spPr>
-      </p:pic>
       <p:sp>
         <p:nvSpPr>
-          <p:cNvPr id="10" name="TextBox 9">
-            <a:hlinkClick action="ppaction://hlinksldjump" r:id="rId10"/>
+          <p:cNvPr id="7" name="TextBox 6">
+            <a:hlinkClick action="ppaction://hlinksldjump" r:id="rId7"/>
           </p:cNvPr>
           <p:cNvSpPr txBox="1"/>
           <p:nvPr/>
@@ -6224,7 +6153,7 @@
                             </p:stCondLst>
                             <p:childTnLst>
                               <p:par>
-                                <p:cTn id="5" presetID="2" presetClass="entr" presetSubtype="8" fill="hold" decel="100000" grpId="0" nodeType="clickEffect">
+                                <p:cTn id="5" presetID="10" presetClass="entr" presetSubtype="0" fill="hold" grpId="0" nodeType="clickEffect">
                                   <p:stCondLst>
                                     <p:cond delay="0"/>
                                   </p:stCondLst>
@@ -6247,52 +6176,14 @@
                                         <p:strVal val="visible"/>
                                       </p:to>
                                     </p:set>
-                                    <p:anim calcmode="lin" valueType="num">
-                                      <p:cBhvr additive="base">
-                                        <p:cTn id="7" dur="550" fill="hold"/>
+                                    <p:animEffect transition="in" filter="fade">
+                                      <p:cBhvr>
+                                        <p:cTn id="7" dur="450"/>
                                         <p:tgtEl>
                                           <p:spTgt spid="3"/>
                                         </p:tgtEl>
-                                        <p:attrNameLst>
-                                          <p:attrName>ppt_x</p:attrName>
-                                        </p:attrNameLst>
-                                      </p:cBhvr>
-                                      <p:tavLst>
-                                        <p:tav tm="0">
-                                          <p:val>
-                                            <p:strVal val="0-#ppt_w/2"/>
-                                          </p:val>
-                                        </p:tav>
-                                        <p:tav tm="100000">
-                                          <p:val>
-                                            <p:strVal val="#ppt_x"/>
-                                          </p:val>
-                                        </p:tav>
-                                      </p:tavLst>
-                                    </p:anim>
-                                    <p:anim calcmode="lin" valueType="num">
-                                      <p:cBhvr additive="base">
-                                        <p:cTn id="8" dur="550" fill="hold"/>
-                                        <p:tgtEl>
-                                          <p:spTgt spid="3"/>
-                                        </p:tgtEl>
-                                        <p:attrNameLst>
-                                          <p:attrName>ppt_y</p:attrName>
-                                        </p:attrNameLst>
-                                      </p:cBhvr>
-                                      <p:tavLst>
-                                        <p:tav tm="0">
-                                          <p:val>
-                                            <p:strVal val="#ppt_y"/>
-                                          </p:val>
-                                        </p:tav>
-                                        <p:tav tm="100000">
-                                          <p:val>
-                                            <p:strVal val="#ppt_y"/>
-                                          </p:val>
-                                        </p:tav>
-                                      </p:tavLst>
-                                    </p:anim>
+                                      </p:cBhvr>
+                                    </p:animEffect>
                                   </p:childTnLst>
                                 </p:cTn>
                               </p:par>
@@ -6303,26 +6194,26 @@
                     </p:cTn>
                   </p:par>
                   <p:par>
-                    <p:cTn id="9" fill="hold">
+                    <p:cTn id="8" fill="hold">
                       <p:stCondLst>
                         <p:cond delay="indefinite"/>
                       </p:stCondLst>
                       <p:childTnLst>
                         <p:par>
-                          <p:cTn id="10" fill="hold">
+                          <p:cTn id="9" fill="hold">
                             <p:stCondLst>
                               <p:cond delay="0"/>
                             </p:stCondLst>
                             <p:childTnLst>
                               <p:par>
-                                <p:cTn id="11" presetID="10" presetClass="entr" presetSubtype="0" fill="hold" grpId="0" nodeType="clickEffect">
+                                <p:cTn id="10" presetID="2" presetClass="entr" presetSubtype="4" fill="hold" decel="100000" grpId="0" nodeType="clickEffect">
                                   <p:stCondLst>
                                     <p:cond delay="0"/>
                                   </p:stCondLst>
                                   <p:childTnLst>
                                     <p:set>
                                       <p:cBhvr>
-                                        <p:cTn id="12" dur="1" fill="hold">
+                                        <p:cTn id="11" dur="1" fill="hold">
                                           <p:stCondLst>
                                             <p:cond delay="0"/>
                                           </p:stCondLst>
@@ -6338,14 +6229,52 @@
                                         <p:strVal val="visible"/>
                                       </p:to>
                                     </p:set>
-                                    <p:animEffect transition="in" filter="fade">
-                                      <p:cBhvr>
-                                        <p:cTn id="13" dur="450"/>
+                                    <p:anim calcmode="lin" valueType="num">
+                                      <p:cBhvr additive="base">
+                                        <p:cTn id="12" dur="550" fill="hold"/>
                                         <p:tgtEl>
                                           <p:spTgt spid="4"/>
                                         </p:tgtEl>
-                                      </p:cBhvr>
-                                    </p:animEffect>
+                                        <p:attrNameLst>
+                                          <p:attrName>ppt_x</p:attrName>
+                                        </p:attrNameLst>
+                                      </p:cBhvr>
+                                      <p:tavLst>
+                                        <p:tav tm="0">
+                                          <p:val>
+                                            <p:strVal val="#ppt_x"/>
+                                          </p:val>
+                                        </p:tav>
+                                        <p:tav tm="100000">
+                                          <p:val>
+                                            <p:strVal val="#ppt_x"/>
+                                          </p:val>
+                                        </p:tav>
+                                      </p:tavLst>
+                                    </p:anim>
+                                    <p:anim calcmode="lin" valueType="num">
+                                      <p:cBhvr additive="base">
+                                        <p:cTn id="13" dur="550" fill="hold"/>
+                                        <p:tgtEl>
+                                          <p:spTgt spid="4"/>
+                                        </p:tgtEl>
+                                        <p:attrNameLst>
+                                          <p:attrName>ppt_y</p:attrName>
+                                        </p:attrNameLst>
+                                      </p:cBhvr>
+                                      <p:tavLst>
+                                        <p:tav tm="0">
+                                          <p:val>
+                                            <p:strVal val="1+#ppt_h/2"/>
+                                          </p:val>
+                                        </p:tav>
+                                        <p:tav tm="100000">
+                                          <p:val>
+                                            <p:strVal val="#ppt_y"/>
+                                          </p:val>
+                                        </p:tav>
+                                      </p:tavLst>
+                                    </p:anim>
                                   </p:childTnLst>
                                 </p:cTn>
                               </p:par>
@@ -6368,7 +6297,7 @@
                             </p:stCondLst>
                             <p:childTnLst>
                               <p:par>
-                                <p:cTn id="16" presetID="2" presetClass="entr" presetSubtype="8" fill="hold" decel="100000" grpId="0" nodeType="clickEffect">
+                                <p:cTn id="16" presetID="2" presetClass="entr" presetSubtype="4" fill="hold" decel="100000" grpId="0" nodeType="clickEffect">
                                   <p:stCondLst>
                                     <p:cond delay="0"/>
                                   </p:stCondLst>
@@ -6404,7 +6333,7 @@
                                       <p:tavLst>
                                         <p:tav tm="0">
                                           <p:val>
-                                            <p:strVal val="0-#ppt_w/2"/>
+                                            <p:strVal val="#ppt_x"/>
                                           </p:val>
                                         </p:tav>
                                         <p:tav tm="100000">
@@ -6427,7 +6356,7 @@
                                       <p:tavLst>
                                         <p:tav tm="0">
                                           <p:val>
-                                            <p:strVal val="#ppt_y"/>
+                                            <p:strVal val="1+#ppt_h/2"/>
                                           </p:val>
                                         </p:tav>
                                         <p:tav tm="100000">
@@ -6459,7 +6388,7 @@
                             </p:stCondLst>
                             <p:childTnLst>
                               <p:par>
-                                <p:cTn id="22" presetID="10" presetClass="entr" presetSubtype="0" fill="hold" grpId="0" nodeType="clickEffect">
+                                <p:cTn id="22" presetID="2" presetClass="entr" presetSubtype="4" fill="hold" decel="100000" grpId="0" nodeType="clickEffect">
                                   <p:stCondLst>
                                     <p:cond delay="0"/>
                                   </p:stCondLst>
@@ -6482,64 +6411,11 @@
                                         <p:strVal val="visible"/>
                                       </p:to>
                                     </p:set>
-                                    <p:animEffect transition="in" filter="fade">
-                                      <p:cBhvr>
-                                        <p:cTn id="24" dur="450"/>
-                                        <p:tgtEl>
-                                          <p:spTgt spid="6"/>
-                                        </p:tgtEl>
-                                      </p:cBhvr>
-                                    </p:animEffect>
-                                  </p:childTnLst>
-                                </p:cTn>
-                              </p:par>
-                            </p:childTnLst>
-                          </p:cTn>
-                        </p:par>
-                      </p:childTnLst>
-                    </p:cTn>
-                  </p:par>
-                  <p:par>
-                    <p:cTn id="25" fill="hold">
-                      <p:stCondLst>
-                        <p:cond delay="indefinite"/>
-                      </p:stCondLst>
-                      <p:childTnLst>
-                        <p:par>
-                          <p:cTn id="26" fill="hold">
-                            <p:stCondLst>
-                              <p:cond delay="0"/>
-                            </p:stCondLst>
-                            <p:childTnLst>
-                              <p:par>
-                                <p:cTn id="27" presetID="2" presetClass="entr" presetSubtype="8" fill="hold" decel="100000" grpId="0" nodeType="clickEffect">
-                                  <p:stCondLst>
-                                    <p:cond delay="0"/>
-                                  </p:stCondLst>
-                                  <p:childTnLst>
-                                    <p:set>
-                                      <p:cBhvr>
-                                        <p:cTn id="28" dur="1" fill="hold">
-                                          <p:stCondLst>
-                                            <p:cond delay="0"/>
-                                          </p:stCondLst>
-                                        </p:cTn>
-                                        <p:tgtEl>
-                                          <p:spTgt spid="7"/>
-                                        </p:tgtEl>
-                                        <p:attrNameLst>
-                                          <p:attrName>style.visibility</p:attrName>
-                                        </p:attrNameLst>
-                                      </p:cBhvr>
-                                      <p:to>
-                                        <p:strVal val="visible"/>
-                                      </p:to>
-                                    </p:set>
                                     <p:anim calcmode="lin" valueType="num">
                                       <p:cBhvr additive="base">
-                                        <p:cTn id="29" dur="550" fill="hold"/>
-                                        <p:tgtEl>
-                                          <p:spTgt spid="7"/>
+                                        <p:cTn id="24" dur="550" fill="hold"/>
+                                        <p:tgtEl>
+                                          <p:spTgt spid="6"/>
                                         </p:tgtEl>
                                         <p:attrNameLst>
                                           <p:attrName>ppt_x</p:attrName>
@@ -6548,7 +6424,7 @@
                                       <p:tavLst>
                                         <p:tav tm="0">
                                           <p:val>
-                                            <p:strVal val="0-#ppt_w/2"/>
+                                            <p:strVal val="#ppt_x"/>
                                           </p:val>
                                         </p:tav>
                                         <p:tav tm="100000">
@@ -6560,9 +6436,9 @@
                                     </p:anim>
                                     <p:anim calcmode="lin" valueType="num">
                                       <p:cBhvr additive="base">
-                                        <p:cTn id="30" dur="550" fill="hold"/>
-                                        <p:tgtEl>
-                                          <p:spTgt spid="7"/>
+                                        <p:cTn id="25" dur="550" fill="hold"/>
+                                        <p:tgtEl>
+                                          <p:spTgt spid="6"/>
                                         </p:tgtEl>
                                         <p:attrNameLst>
                                           <p:attrName>ppt_y</p:attrName>
@@ -6571,7 +6447,7 @@
                                       <p:tavLst>
                                         <p:tav tm="0">
                                           <p:val>
-                                            <p:strVal val="#ppt_y"/>
+                                            <p:strVal val="1+#ppt_h/2"/>
                                           </p:val>
                                         </p:tav>
                                         <p:tav tm="100000">
@@ -6581,158 +6457,6 @@
                                         </p:tav>
                                       </p:tavLst>
                                     </p:anim>
-                                  </p:childTnLst>
-                                </p:cTn>
-                              </p:par>
-                            </p:childTnLst>
-                          </p:cTn>
-                        </p:par>
-                      </p:childTnLst>
-                    </p:cTn>
-                  </p:par>
-                  <p:par>
-                    <p:cTn id="31" fill="hold">
-                      <p:stCondLst>
-                        <p:cond delay="indefinite"/>
-                      </p:stCondLst>
-                      <p:childTnLst>
-                        <p:par>
-                          <p:cTn id="32" fill="hold">
-                            <p:stCondLst>
-                              <p:cond delay="0"/>
-                            </p:stCondLst>
-                            <p:childTnLst>
-                              <p:par>
-                                <p:cTn id="33" presetID="10" presetClass="entr" presetSubtype="0" fill="hold" grpId="0" nodeType="clickEffect">
-                                  <p:stCondLst>
-                                    <p:cond delay="0"/>
-                                  </p:stCondLst>
-                                  <p:childTnLst>
-                                    <p:set>
-                                      <p:cBhvr>
-                                        <p:cTn id="34" dur="1" fill="hold">
-                                          <p:stCondLst>
-                                            <p:cond delay="0"/>
-                                          </p:stCondLst>
-                                        </p:cTn>
-                                        <p:tgtEl>
-                                          <p:spTgt spid="8"/>
-                                        </p:tgtEl>
-                                        <p:attrNameLst>
-                                          <p:attrName>style.visibility</p:attrName>
-                                        </p:attrNameLst>
-                                      </p:cBhvr>
-                                      <p:to>
-                                        <p:strVal val="visible"/>
-                                      </p:to>
-                                    </p:set>
-                                    <p:animEffect transition="in" filter="fade">
-                                      <p:cBhvr>
-                                        <p:cTn id="35" dur="450"/>
-                                        <p:tgtEl>
-                                          <p:spTgt spid="8"/>
-                                        </p:tgtEl>
-                                      </p:cBhvr>
-                                    </p:animEffect>
-                                  </p:childTnLst>
-                                </p:cTn>
-                              </p:par>
-                            </p:childTnLst>
-                          </p:cTn>
-                        </p:par>
-                      </p:childTnLst>
-                    </p:cTn>
-                  </p:par>
-                  <p:par>
-                    <p:cTn id="36" fill="hold">
-                      <p:stCondLst>
-                        <p:cond delay="indefinite"/>
-                      </p:stCondLst>
-                      <p:childTnLst>
-                        <p:par>
-                          <p:cTn id="37" fill="hold">
-                            <p:stCondLst>
-                              <p:cond delay="0"/>
-                            </p:stCondLst>
-                            <p:childTnLst>
-                              <p:par>
-                                <p:cTn id="38" presetID="53" presetClass="entr" presetSubtype="16" fill="hold" grpId="0" nodeType="clickEffect">
-                                  <p:stCondLst>
-                                    <p:cond delay="0"/>
-                                  </p:stCondLst>
-                                  <p:childTnLst>
-                                    <p:set>
-                                      <p:cBhvr>
-                                        <p:cTn id="39" dur="1" fill="hold">
-                                          <p:stCondLst>
-                                            <p:cond delay="0"/>
-                                          </p:stCondLst>
-                                        </p:cTn>
-                                        <p:tgtEl>
-                                          <p:spTgt spid="9"/>
-                                        </p:tgtEl>
-                                        <p:attrNameLst>
-                                          <p:attrName>style.visibility</p:attrName>
-                                        </p:attrNameLst>
-                                      </p:cBhvr>
-                                      <p:to>
-                                        <p:strVal val="visible"/>
-                                      </p:to>
-                                    </p:set>
-                                    <p:anim calcmode="lin" valueType="num">
-                                      <p:cBhvr additive="base">
-                                        <p:cTn id="40" dur="420" fill="hold"/>
-                                        <p:tgtEl>
-                                          <p:spTgt spid="9"/>
-                                        </p:tgtEl>
-                                        <p:attrNameLst>
-                                          <p:attrName>ppt_w</p:attrName>
-                                        </p:attrNameLst>
-                                      </p:cBhvr>
-                                      <p:tavLst>
-                                        <p:tav tm="0">
-                                          <p:val>
-                                            <p:strVal val="0"/>
-                                          </p:val>
-                                        </p:tav>
-                                        <p:tav tm="100000">
-                                          <p:val>
-                                            <p:strVal val="#ppt_w"/>
-                                          </p:val>
-                                        </p:tav>
-                                      </p:tavLst>
-                                    </p:anim>
-                                    <p:anim calcmode="lin" valueType="num">
-                                      <p:cBhvr additive="base">
-                                        <p:cTn id="41" dur="420" fill="hold"/>
-                                        <p:tgtEl>
-                                          <p:spTgt spid="9"/>
-                                        </p:tgtEl>
-                                        <p:attrNameLst>
-                                          <p:attrName>ppt_h</p:attrName>
-                                        </p:attrNameLst>
-                                      </p:cBhvr>
-                                      <p:tavLst>
-                                        <p:tav tm="0">
-                                          <p:val>
-                                            <p:strVal val="0"/>
-                                          </p:val>
-                                        </p:tav>
-                                        <p:tav tm="100000">
-                                          <p:val>
-                                            <p:strVal val="#ppt_h"/>
-                                          </p:val>
-                                        </p:tav>
-                                      </p:tavLst>
-                                    </p:anim>
-                                    <p:animEffect transition="in" filter="fade">
-                                      <p:cBhvr>
-                                        <p:cTn id="42" dur="420"/>
-                                        <p:tgtEl>
-                                          <p:spTgt spid="9"/>
-                                        </p:tgtEl>
-                                      </p:cBhvr>
-                                    </p:animEffect>
                                   </p:childTnLst>
                                 </p:cTn>
                               </p:par>
@@ -6817,8 +6541,8 @@
         </p:blipFill>
         <p:spPr>
           <a:xfrm>
-            <a:off x="426709" y="2636454"/>
-            <a:ext cx="6842588" cy="1203929"/>
+            <a:off x="426709" y="1417284"/>
+            <a:ext cx="11338276" cy="1356326"/>
           </a:xfrm>
           <a:prstGeom prst="rect">
             <a:avLst/>
@@ -6827,7 +6551,7 @@
       </p:pic>
       <p:pic>
         <p:nvPicPr>
-          <p:cNvPr id="4" name="Picture 3" descr="c14_1_1.jpg"/>
+          <p:cNvPr id="4" name="Picture 3" descr="c14_2_0.jpg"/>
           <p:cNvPicPr>
             <a:picLocks noChangeAspect="1"/>
           </p:cNvPicPr>
@@ -6841,18 +6565,138 @@
         </p:blipFill>
         <p:spPr>
           <a:xfrm>
-            <a:off x="9418084" y="3550831"/>
-            <a:ext cx="1965910" cy="2499297"/>
+            <a:off x="3855623" y="1645878"/>
+            <a:ext cx="1813514" cy="822939"/>
           </a:xfrm>
           <a:prstGeom prst="rect">
             <a:avLst/>
           </a:prstGeom>
         </p:spPr>
       </p:pic>
+      <p:pic>
+        <p:nvPicPr>
+          <p:cNvPr id="5" name="Picture 4" descr="c14_3_0.jpg"/>
+          <p:cNvPicPr>
+            <a:picLocks noChangeAspect="1"/>
+          </p:cNvPicPr>
+          <p:nvPr/>
+        </p:nvPicPr>
+        <p:blipFill>
+          <a:blip r:embed="rId5"/>
+          <a:stretch>
+            <a:fillRect/>
+          </a:stretch>
+        </p:blipFill>
+        <p:spPr>
+          <a:xfrm>
+            <a:off x="426709" y="2712652"/>
+            <a:ext cx="11338276" cy="1356326"/>
+          </a:xfrm>
+          <a:prstGeom prst="rect">
+            <a:avLst/>
+          </a:prstGeom>
+        </p:spPr>
+      </p:pic>
+      <p:pic>
+        <p:nvPicPr>
+          <p:cNvPr id="6" name="Picture 5" descr="c14_4_0.jpg"/>
+          <p:cNvPicPr>
+            <a:picLocks noChangeAspect="1"/>
+          </p:cNvPicPr>
+          <p:nvPr/>
+        </p:nvPicPr>
+        <p:blipFill>
+          <a:blip r:embed="rId6"/>
+          <a:stretch>
+            <a:fillRect/>
+          </a:stretch>
+        </p:blipFill>
+        <p:spPr>
+          <a:xfrm>
+            <a:off x="2941246" y="2941246"/>
+            <a:ext cx="1508722" cy="822939"/>
+          </a:xfrm>
+          <a:prstGeom prst="rect">
+            <a:avLst/>
+          </a:prstGeom>
+        </p:spPr>
+      </p:pic>
+      <p:pic>
+        <p:nvPicPr>
+          <p:cNvPr id="7" name="Picture 6" descr="c14_5_0.jpg"/>
+          <p:cNvPicPr>
+            <a:picLocks noChangeAspect="1"/>
+          </p:cNvPicPr>
+          <p:nvPr/>
+        </p:nvPicPr>
+        <p:blipFill>
+          <a:blip r:embed="rId7"/>
+          <a:stretch>
+            <a:fillRect/>
+          </a:stretch>
+        </p:blipFill>
+        <p:spPr>
+          <a:xfrm>
+            <a:off x="426709" y="4008019"/>
+            <a:ext cx="11338276" cy="1356326"/>
+          </a:xfrm>
+          <a:prstGeom prst="rect">
+            <a:avLst/>
+          </a:prstGeom>
+        </p:spPr>
+      </p:pic>
+      <p:pic>
+        <p:nvPicPr>
+          <p:cNvPr id="8" name="Picture 7" descr="c14_6_0.jpg"/>
+          <p:cNvPicPr>
+            <a:picLocks noChangeAspect="1"/>
+          </p:cNvPicPr>
+          <p:nvPr/>
+        </p:nvPicPr>
+        <p:blipFill>
+          <a:blip r:embed="rId8"/>
+          <a:stretch>
+            <a:fillRect/>
+          </a:stretch>
+        </p:blipFill>
+        <p:spPr>
+          <a:xfrm>
+            <a:off x="2941246" y="4236614"/>
+            <a:ext cx="1508722" cy="822939"/>
+          </a:xfrm>
+          <a:prstGeom prst="rect">
+            <a:avLst/>
+          </a:prstGeom>
+        </p:spPr>
+      </p:pic>
+      <p:pic>
+        <p:nvPicPr>
+          <p:cNvPr id="9" name="Picture 8" descr="c14_7_0.jpg"/>
+          <p:cNvPicPr>
+            <a:picLocks noChangeAspect="1"/>
+          </p:cNvPicPr>
+          <p:nvPr/>
+        </p:nvPicPr>
+        <p:blipFill>
+          <a:blip r:embed="rId9"/>
+          <a:stretch>
+            <a:fillRect/>
+          </a:stretch>
+        </p:blipFill>
+        <p:spPr>
+          <a:xfrm>
+            <a:off x="7665528" y="45718"/>
+            <a:ext cx="4099457" cy="1661118"/>
+          </a:xfrm>
+          <a:prstGeom prst="rect">
+            <a:avLst/>
+          </a:prstGeom>
+        </p:spPr>
+      </p:pic>
       <p:sp>
         <p:nvSpPr>
-          <p:cNvPr id="5" name="TextBox 4">
-            <a:hlinkClick action="ppaction://hlinksldjump" r:id="rId5"/>
+          <p:cNvPr id="10" name="TextBox 9">
+            <a:hlinkClick action="ppaction://hlinksldjump" r:id="rId10"/>
           </p:cNvPr>
           <p:cNvSpPr txBox="1"/>
           <p:nvPr/>
@@ -6895,6 +6739,699 @@
   </p:clrMapOvr>
   <p:transition spd="med">
     <p:cover dir="l"/>
+  </p:transition>
+  <p:timing>
+    <p:tnLst>
+      <p:par>
+        <p:cTn id="1" dur="indefinite" restart="never" nodeType="tmRoot">
+          <p:childTnLst>
+            <p:seq concurrent="1" nextAc="seek">
+              <p:cTn id="2" dur="indefinite" nodeType="mainSeq">
+                <p:childTnLst>
+                  <p:par>
+                    <p:cTn id="3" fill="hold">
+                      <p:stCondLst>
+                        <p:cond delay="indefinite"/>
+                      </p:stCondLst>
+                      <p:childTnLst>
+                        <p:par>
+                          <p:cTn id="4" fill="hold">
+                            <p:stCondLst>
+                              <p:cond delay="0"/>
+                            </p:stCondLst>
+                            <p:childTnLst>
+                              <p:par>
+                                <p:cTn id="5" presetID="2" presetClass="entr" presetSubtype="8" fill="hold" decel="100000" grpId="0" nodeType="clickEffect">
+                                  <p:stCondLst>
+                                    <p:cond delay="0"/>
+                                  </p:stCondLst>
+                                  <p:childTnLst>
+                                    <p:set>
+                                      <p:cBhvr>
+                                        <p:cTn id="6" dur="1" fill="hold">
+                                          <p:stCondLst>
+                                            <p:cond delay="0"/>
+                                          </p:stCondLst>
+                                        </p:cTn>
+                                        <p:tgtEl>
+                                          <p:spTgt spid="3"/>
+                                        </p:tgtEl>
+                                        <p:attrNameLst>
+                                          <p:attrName>style.visibility</p:attrName>
+                                        </p:attrNameLst>
+                                      </p:cBhvr>
+                                      <p:to>
+                                        <p:strVal val="visible"/>
+                                      </p:to>
+                                    </p:set>
+                                    <p:anim calcmode="lin" valueType="num">
+                                      <p:cBhvr additive="base">
+                                        <p:cTn id="7" dur="550" fill="hold"/>
+                                        <p:tgtEl>
+                                          <p:spTgt spid="3"/>
+                                        </p:tgtEl>
+                                        <p:attrNameLst>
+                                          <p:attrName>ppt_x</p:attrName>
+                                        </p:attrNameLst>
+                                      </p:cBhvr>
+                                      <p:tavLst>
+                                        <p:tav tm="0">
+                                          <p:val>
+                                            <p:strVal val="0-#ppt_w/2"/>
+                                          </p:val>
+                                        </p:tav>
+                                        <p:tav tm="100000">
+                                          <p:val>
+                                            <p:strVal val="#ppt_x"/>
+                                          </p:val>
+                                        </p:tav>
+                                      </p:tavLst>
+                                    </p:anim>
+                                    <p:anim calcmode="lin" valueType="num">
+                                      <p:cBhvr additive="base">
+                                        <p:cTn id="8" dur="550" fill="hold"/>
+                                        <p:tgtEl>
+                                          <p:spTgt spid="3"/>
+                                        </p:tgtEl>
+                                        <p:attrNameLst>
+                                          <p:attrName>ppt_y</p:attrName>
+                                        </p:attrNameLst>
+                                      </p:cBhvr>
+                                      <p:tavLst>
+                                        <p:tav tm="0">
+                                          <p:val>
+                                            <p:strVal val="#ppt_y"/>
+                                          </p:val>
+                                        </p:tav>
+                                        <p:tav tm="100000">
+                                          <p:val>
+                                            <p:strVal val="#ppt_y"/>
+                                          </p:val>
+                                        </p:tav>
+                                      </p:tavLst>
+                                    </p:anim>
+                                  </p:childTnLst>
+                                </p:cTn>
+                              </p:par>
+                            </p:childTnLst>
+                          </p:cTn>
+                        </p:par>
+                      </p:childTnLst>
+                    </p:cTn>
+                  </p:par>
+                  <p:par>
+                    <p:cTn id="9" fill="hold">
+                      <p:stCondLst>
+                        <p:cond delay="indefinite"/>
+                      </p:stCondLst>
+                      <p:childTnLst>
+                        <p:par>
+                          <p:cTn id="10" fill="hold">
+                            <p:stCondLst>
+                              <p:cond delay="0"/>
+                            </p:stCondLst>
+                            <p:childTnLst>
+                              <p:par>
+                                <p:cTn id="11" presetID="10" presetClass="entr" presetSubtype="0" fill="hold" grpId="0" nodeType="clickEffect">
+                                  <p:stCondLst>
+                                    <p:cond delay="0"/>
+                                  </p:stCondLst>
+                                  <p:childTnLst>
+                                    <p:set>
+                                      <p:cBhvr>
+                                        <p:cTn id="12" dur="1" fill="hold">
+                                          <p:stCondLst>
+                                            <p:cond delay="0"/>
+                                          </p:stCondLst>
+                                        </p:cTn>
+                                        <p:tgtEl>
+                                          <p:spTgt spid="4"/>
+                                        </p:tgtEl>
+                                        <p:attrNameLst>
+                                          <p:attrName>style.visibility</p:attrName>
+                                        </p:attrNameLst>
+                                      </p:cBhvr>
+                                      <p:to>
+                                        <p:strVal val="visible"/>
+                                      </p:to>
+                                    </p:set>
+                                    <p:animEffect transition="in" filter="fade">
+                                      <p:cBhvr>
+                                        <p:cTn id="13" dur="450"/>
+                                        <p:tgtEl>
+                                          <p:spTgt spid="4"/>
+                                        </p:tgtEl>
+                                      </p:cBhvr>
+                                    </p:animEffect>
+                                  </p:childTnLst>
+                                </p:cTn>
+                              </p:par>
+                            </p:childTnLst>
+                          </p:cTn>
+                        </p:par>
+                      </p:childTnLst>
+                    </p:cTn>
+                  </p:par>
+                  <p:par>
+                    <p:cTn id="14" fill="hold">
+                      <p:stCondLst>
+                        <p:cond delay="indefinite"/>
+                      </p:stCondLst>
+                      <p:childTnLst>
+                        <p:par>
+                          <p:cTn id="15" fill="hold">
+                            <p:stCondLst>
+                              <p:cond delay="0"/>
+                            </p:stCondLst>
+                            <p:childTnLst>
+                              <p:par>
+                                <p:cTn id="16" presetID="2" presetClass="entr" presetSubtype="8" fill="hold" decel="100000" grpId="0" nodeType="clickEffect">
+                                  <p:stCondLst>
+                                    <p:cond delay="0"/>
+                                  </p:stCondLst>
+                                  <p:childTnLst>
+                                    <p:set>
+                                      <p:cBhvr>
+                                        <p:cTn id="17" dur="1" fill="hold">
+                                          <p:stCondLst>
+                                            <p:cond delay="0"/>
+                                          </p:stCondLst>
+                                        </p:cTn>
+                                        <p:tgtEl>
+                                          <p:spTgt spid="5"/>
+                                        </p:tgtEl>
+                                        <p:attrNameLst>
+                                          <p:attrName>style.visibility</p:attrName>
+                                        </p:attrNameLst>
+                                      </p:cBhvr>
+                                      <p:to>
+                                        <p:strVal val="visible"/>
+                                      </p:to>
+                                    </p:set>
+                                    <p:anim calcmode="lin" valueType="num">
+                                      <p:cBhvr additive="base">
+                                        <p:cTn id="18" dur="550" fill="hold"/>
+                                        <p:tgtEl>
+                                          <p:spTgt spid="5"/>
+                                        </p:tgtEl>
+                                        <p:attrNameLst>
+                                          <p:attrName>ppt_x</p:attrName>
+                                        </p:attrNameLst>
+                                      </p:cBhvr>
+                                      <p:tavLst>
+                                        <p:tav tm="0">
+                                          <p:val>
+                                            <p:strVal val="0-#ppt_w/2"/>
+                                          </p:val>
+                                        </p:tav>
+                                        <p:tav tm="100000">
+                                          <p:val>
+                                            <p:strVal val="#ppt_x"/>
+                                          </p:val>
+                                        </p:tav>
+                                      </p:tavLst>
+                                    </p:anim>
+                                    <p:anim calcmode="lin" valueType="num">
+                                      <p:cBhvr additive="base">
+                                        <p:cTn id="19" dur="550" fill="hold"/>
+                                        <p:tgtEl>
+                                          <p:spTgt spid="5"/>
+                                        </p:tgtEl>
+                                        <p:attrNameLst>
+                                          <p:attrName>ppt_y</p:attrName>
+                                        </p:attrNameLst>
+                                      </p:cBhvr>
+                                      <p:tavLst>
+                                        <p:tav tm="0">
+                                          <p:val>
+                                            <p:strVal val="#ppt_y"/>
+                                          </p:val>
+                                        </p:tav>
+                                        <p:tav tm="100000">
+                                          <p:val>
+                                            <p:strVal val="#ppt_y"/>
+                                          </p:val>
+                                        </p:tav>
+                                      </p:tavLst>
+                                    </p:anim>
+                                  </p:childTnLst>
+                                </p:cTn>
+                              </p:par>
+                            </p:childTnLst>
+                          </p:cTn>
+                        </p:par>
+                      </p:childTnLst>
+                    </p:cTn>
+                  </p:par>
+                  <p:par>
+                    <p:cTn id="20" fill="hold">
+                      <p:stCondLst>
+                        <p:cond delay="indefinite"/>
+                      </p:stCondLst>
+                      <p:childTnLst>
+                        <p:par>
+                          <p:cTn id="21" fill="hold">
+                            <p:stCondLst>
+                              <p:cond delay="0"/>
+                            </p:stCondLst>
+                            <p:childTnLst>
+                              <p:par>
+                                <p:cTn id="22" presetID="10" presetClass="entr" presetSubtype="0" fill="hold" grpId="0" nodeType="clickEffect">
+                                  <p:stCondLst>
+                                    <p:cond delay="0"/>
+                                  </p:stCondLst>
+                                  <p:childTnLst>
+                                    <p:set>
+                                      <p:cBhvr>
+                                        <p:cTn id="23" dur="1" fill="hold">
+                                          <p:stCondLst>
+                                            <p:cond delay="0"/>
+                                          </p:stCondLst>
+                                        </p:cTn>
+                                        <p:tgtEl>
+                                          <p:spTgt spid="6"/>
+                                        </p:tgtEl>
+                                        <p:attrNameLst>
+                                          <p:attrName>style.visibility</p:attrName>
+                                        </p:attrNameLst>
+                                      </p:cBhvr>
+                                      <p:to>
+                                        <p:strVal val="visible"/>
+                                      </p:to>
+                                    </p:set>
+                                    <p:animEffect transition="in" filter="fade">
+                                      <p:cBhvr>
+                                        <p:cTn id="24" dur="450"/>
+                                        <p:tgtEl>
+                                          <p:spTgt spid="6"/>
+                                        </p:tgtEl>
+                                      </p:cBhvr>
+                                    </p:animEffect>
+                                  </p:childTnLst>
+                                </p:cTn>
+                              </p:par>
+                            </p:childTnLst>
+                          </p:cTn>
+                        </p:par>
+                      </p:childTnLst>
+                    </p:cTn>
+                  </p:par>
+                  <p:par>
+                    <p:cTn id="25" fill="hold">
+                      <p:stCondLst>
+                        <p:cond delay="indefinite"/>
+                      </p:stCondLst>
+                      <p:childTnLst>
+                        <p:par>
+                          <p:cTn id="26" fill="hold">
+                            <p:stCondLst>
+                              <p:cond delay="0"/>
+                            </p:stCondLst>
+                            <p:childTnLst>
+                              <p:par>
+                                <p:cTn id="27" presetID="2" presetClass="entr" presetSubtype="8" fill="hold" decel="100000" grpId="0" nodeType="clickEffect">
+                                  <p:stCondLst>
+                                    <p:cond delay="0"/>
+                                  </p:stCondLst>
+                                  <p:childTnLst>
+                                    <p:set>
+                                      <p:cBhvr>
+                                        <p:cTn id="28" dur="1" fill="hold">
+                                          <p:stCondLst>
+                                            <p:cond delay="0"/>
+                                          </p:stCondLst>
+                                        </p:cTn>
+                                        <p:tgtEl>
+                                          <p:spTgt spid="7"/>
+                                        </p:tgtEl>
+                                        <p:attrNameLst>
+                                          <p:attrName>style.visibility</p:attrName>
+                                        </p:attrNameLst>
+                                      </p:cBhvr>
+                                      <p:to>
+                                        <p:strVal val="visible"/>
+                                      </p:to>
+                                    </p:set>
+                                    <p:anim calcmode="lin" valueType="num">
+                                      <p:cBhvr additive="base">
+                                        <p:cTn id="29" dur="550" fill="hold"/>
+                                        <p:tgtEl>
+                                          <p:spTgt spid="7"/>
+                                        </p:tgtEl>
+                                        <p:attrNameLst>
+                                          <p:attrName>ppt_x</p:attrName>
+                                        </p:attrNameLst>
+                                      </p:cBhvr>
+                                      <p:tavLst>
+                                        <p:tav tm="0">
+                                          <p:val>
+                                            <p:strVal val="0-#ppt_w/2"/>
+                                          </p:val>
+                                        </p:tav>
+                                        <p:tav tm="100000">
+                                          <p:val>
+                                            <p:strVal val="#ppt_x"/>
+                                          </p:val>
+                                        </p:tav>
+                                      </p:tavLst>
+                                    </p:anim>
+                                    <p:anim calcmode="lin" valueType="num">
+                                      <p:cBhvr additive="base">
+                                        <p:cTn id="30" dur="550" fill="hold"/>
+                                        <p:tgtEl>
+                                          <p:spTgt spid="7"/>
+                                        </p:tgtEl>
+                                        <p:attrNameLst>
+                                          <p:attrName>ppt_y</p:attrName>
+                                        </p:attrNameLst>
+                                      </p:cBhvr>
+                                      <p:tavLst>
+                                        <p:tav tm="0">
+                                          <p:val>
+                                            <p:strVal val="#ppt_y"/>
+                                          </p:val>
+                                        </p:tav>
+                                        <p:tav tm="100000">
+                                          <p:val>
+                                            <p:strVal val="#ppt_y"/>
+                                          </p:val>
+                                        </p:tav>
+                                      </p:tavLst>
+                                    </p:anim>
+                                  </p:childTnLst>
+                                </p:cTn>
+                              </p:par>
+                            </p:childTnLst>
+                          </p:cTn>
+                        </p:par>
+                      </p:childTnLst>
+                    </p:cTn>
+                  </p:par>
+                  <p:par>
+                    <p:cTn id="31" fill="hold">
+                      <p:stCondLst>
+                        <p:cond delay="indefinite"/>
+                      </p:stCondLst>
+                      <p:childTnLst>
+                        <p:par>
+                          <p:cTn id="32" fill="hold">
+                            <p:stCondLst>
+                              <p:cond delay="0"/>
+                            </p:stCondLst>
+                            <p:childTnLst>
+                              <p:par>
+                                <p:cTn id="33" presetID="10" presetClass="entr" presetSubtype="0" fill="hold" grpId="0" nodeType="clickEffect">
+                                  <p:stCondLst>
+                                    <p:cond delay="0"/>
+                                  </p:stCondLst>
+                                  <p:childTnLst>
+                                    <p:set>
+                                      <p:cBhvr>
+                                        <p:cTn id="34" dur="1" fill="hold">
+                                          <p:stCondLst>
+                                            <p:cond delay="0"/>
+                                          </p:stCondLst>
+                                        </p:cTn>
+                                        <p:tgtEl>
+                                          <p:spTgt spid="8"/>
+                                        </p:tgtEl>
+                                        <p:attrNameLst>
+                                          <p:attrName>style.visibility</p:attrName>
+                                        </p:attrNameLst>
+                                      </p:cBhvr>
+                                      <p:to>
+                                        <p:strVal val="visible"/>
+                                      </p:to>
+                                    </p:set>
+                                    <p:animEffect transition="in" filter="fade">
+                                      <p:cBhvr>
+                                        <p:cTn id="35" dur="450"/>
+                                        <p:tgtEl>
+                                          <p:spTgt spid="8"/>
+                                        </p:tgtEl>
+                                      </p:cBhvr>
+                                    </p:animEffect>
+                                  </p:childTnLst>
+                                </p:cTn>
+                              </p:par>
+                            </p:childTnLst>
+                          </p:cTn>
+                        </p:par>
+                      </p:childTnLst>
+                    </p:cTn>
+                  </p:par>
+                  <p:par>
+                    <p:cTn id="36" fill="hold">
+                      <p:stCondLst>
+                        <p:cond delay="indefinite"/>
+                      </p:stCondLst>
+                      <p:childTnLst>
+                        <p:par>
+                          <p:cTn id="37" fill="hold">
+                            <p:stCondLst>
+                              <p:cond delay="0"/>
+                            </p:stCondLst>
+                            <p:childTnLst>
+                              <p:par>
+                                <p:cTn id="38" presetID="53" presetClass="entr" presetSubtype="16" fill="hold" grpId="0" nodeType="clickEffect">
+                                  <p:stCondLst>
+                                    <p:cond delay="0"/>
+                                  </p:stCondLst>
+                                  <p:childTnLst>
+                                    <p:set>
+                                      <p:cBhvr>
+                                        <p:cTn id="39" dur="1" fill="hold">
+                                          <p:stCondLst>
+                                            <p:cond delay="0"/>
+                                          </p:stCondLst>
+                                        </p:cTn>
+                                        <p:tgtEl>
+                                          <p:spTgt spid="9"/>
+                                        </p:tgtEl>
+                                        <p:attrNameLst>
+                                          <p:attrName>style.visibility</p:attrName>
+                                        </p:attrNameLst>
+                                      </p:cBhvr>
+                                      <p:to>
+                                        <p:strVal val="visible"/>
+                                      </p:to>
+                                    </p:set>
+                                    <p:anim calcmode="lin" valueType="num">
+                                      <p:cBhvr additive="base">
+                                        <p:cTn id="40" dur="420" fill="hold"/>
+                                        <p:tgtEl>
+                                          <p:spTgt spid="9"/>
+                                        </p:tgtEl>
+                                        <p:attrNameLst>
+                                          <p:attrName>ppt_w</p:attrName>
+                                        </p:attrNameLst>
+                                      </p:cBhvr>
+                                      <p:tavLst>
+                                        <p:tav tm="0">
+                                          <p:val>
+                                            <p:strVal val="0"/>
+                                          </p:val>
+                                        </p:tav>
+                                        <p:tav tm="100000">
+                                          <p:val>
+                                            <p:strVal val="#ppt_w"/>
+                                          </p:val>
+                                        </p:tav>
+                                      </p:tavLst>
+                                    </p:anim>
+                                    <p:anim calcmode="lin" valueType="num">
+                                      <p:cBhvr additive="base">
+                                        <p:cTn id="41" dur="420" fill="hold"/>
+                                        <p:tgtEl>
+                                          <p:spTgt spid="9"/>
+                                        </p:tgtEl>
+                                        <p:attrNameLst>
+                                          <p:attrName>ppt_h</p:attrName>
+                                        </p:attrNameLst>
+                                      </p:cBhvr>
+                                      <p:tavLst>
+                                        <p:tav tm="0">
+                                          <p:val>
+                                            <p:strVal val="0"/>
+                                          </p:val>
+                                        </p:tav>
+                                        <p:tav tm="100000">
+                                          <p:val>
+                                            <p:strVal val="#ppt_h"/>
+                                          </p:val>
+                                        </p:tav>
+                                      </p:tavLst>
+                                    </p:anim>
+                                    <p:animEffect transition="in" filter="fade">
+                                      <p:cBhvr>
+                                        <p:cTn id="42" dur="420"/>
+                                        <p:tgtEl>
+                                          <p:spTgt spid="9"/>
+                                        </p:tgtEl>
+                                      </p:cBhvr>
+                                    </p:animEffect>
+                                  </p:childTnLst>
+                                </p:cTn>
+                              </p:par>
+                            </p:childTnLst>
+                          </p:cTn>
+                        </p:par>
+                      </p:childTnLst>
+                    </p:cTn>
+                  </p:par>
+                </p:childTnLst>
+              </p:cTn>
+              <p:prevCondLst>
+                <p:cond evt="onPrev" delay="0">
+                  <p:tgtEl>
+                    <p:sldTgt/>
+                  </p:tgtEl>
+                </p:cond>
+              </p:prevCondLst>
+              <p:nextCondLst>
+                <p:cond evt="onNext" delay="0">
+                  <p:tgtEl>
+                    <p:sldTgt/>
+                  </p:tgtEl>
+                </p:cond>
+              </p:nextCondLst>
+            </p:seq>
+          </p:childTnLst>
+        </p:cTn>
+      </p:par>
+    </p:tnLst>
+  </p:timing>
+</p:sld>
+</file>
+
+<file path=ppt/slides/slide16.xml><?xml version="1.0" encoding="utf-8"?>
+<p:sld xmlns:a="http://schemas.openxmlformats.org/drawingml/2006/main" xmlns:p="http://schemas.openxmlformats.org/presentationml/2006/main" xmlns:r="http://schemas.openxmlformats.org/officeDocument/2006/relationships">
+  <p:cSld>
+    <p:spTree>
+      <p:nvGrpSpPr>
+        <p:cNvPr id="1" name=""/>
+        <p:cNvGrpSpPr/>
+        <p:nvPr/>
+      </p:nvGrpSpPr>
+      <p:grpSpPr/>
+      <p:pic>
+        <p:nvPicPr>
+          <p:cNvPr id="2" name="Picture 1" descr="b15.jpg"/>
+          <p:cNvPicPr>
+            <a:picLocks noChangeAspect="1"/>
+          </p:cNvPicPr>
+          <p:nvPr/>
+        </p:nvPicPr>
+        <p:blipFill>
+          <a:blip r:embed="rId2"/>
+          <a:stretch>
+            <a:fillRect/>
+          </a:stretch>
+        </p:blipFill>
+        <p:spPr>
+          <a:xfrm>
+            <a:off x="0" y="0"/>
+            <a:ext cx="12191695" cy="6857828"/>
+          </a:xfrm>
+          <a:prstGeom prst="rect">
+            <a:avLst/>
+          </a:prstGeom>
+        </p:spPr>
+      </p:pic>
+      <p:pic>
+        <p:nvPicPr>
+          <p:cNvPr id="3" name="Picture 2" descr="c15_1_0.jpg"/>
+          <p:cNvPicPr>
+            <a:picLocks noChangeAspect="1"/>
+          </p:cNvPicPr>
+          <p:nvPr/>
+        </p:nvPicPr>
+        <p:blipFill>
+          <a:blip r:embed="rId3"/>
+          <a:stretch>
+            <a:fillRect/>
+          </a:stretch>
+        </p:blipFill>
+        <p:spPr>
+          <a:xfrm>
+            <a:off x="426709" y="2636454"/>
+            <a:ext cx="6842588" cy="1203929"/>
+          </a:xfrm>
+          <a:prstGeom prst="rect">
+            <a:avLst/>
+          </a:prstGeom>
+        </p:spPr>
+      </p:pic>
+      <p:pic>
+        <p:nvPicPr>
+          <p:cNvPr id="4" name="Picture 3" descr="c15_1_1.jpg"/>
+          <p:cNvPicPr>
+            <a:picLocks noChangeAspect="1"/>
+          </p:cNvPicPr>
+          <p:nvPr/>
+        </p:nvPicPr>
+        <p:blipFill>
+          <a:blip r:embed="rId4"/>
+          <a:stretch>
+            <a:fillRect/>
+          </a:stretch>
+        </p:blipFill>
+        <p:spPr>
+          <a:xfrm>
+            <a:off x="9418084" y="3550831"/>
+            <a:ext cx="1965910" cy="2499297"/>
+          </a:xfrm>
+          <a:prstGeom prst="rect">
+            <a:avLst/>
+          </a:prstGeom>
+        </p:spPr>
+      </p:pic>
+      <p:sp>
+        <p:nvSpPr>
+          <p:cNvPr id="5" name="TextBox 4">
+            <a:hlinkClick action="ppaction://hlinksldjump" r:id="rId5"/>
+          </p:cNvPr>
+          <p:cNvSpPr txBox="1"/>
+          <p:nvPr/>
+        </p:nvSpPr>
+        <p:spPr>
+          <a:xfrm>
+            <a:off x="11048723" y="76198"/>
+            <a:ext cx="1066773" cy="304792"/>
+          </a:xfrm>
+          <a:prstGeom prst="rect">
+            <a:avLst/>
+          </a:prstGeom>
+          <a:noFill/>
+        </p:spPr>
+        <p:txBody>
+          <a:bodyPr wrap="none">
+            <a:spAutoFit/>
+          </a:bodyPr>
+          <a:lstStyle/>
+          <a:p>
+            <a:pPr algn="r"/>
+            <a:r>
+              <a:rPr sz="1200" b="0">
+                <a:solidFill>
+                  <a:srgbClr val="8A8F96"/>
+                </a:solidFill>
+                <a:latin typeface="微軟正黑體"/>
+                <a:ea typeface="微軟正黑體"/>
+                <a:cs typeface="微軟正黑體"/>
+              </a:rPr>
+              <a:t>流程 ↩</a:t>
+            </a:r>
+          </a:p>
+        </p:txBody>
+      </p:sp>
+    </p:spTree>
+  </p:cSld>
+  <p:clrMapOvr>
+    <a:masterClrMapping/>
+  </p:clrMapOvr>
+  <p:transition spd="med">
+    <p:fade/>
   </p:transition>
   <p:timing>
     <p:tnLst>
